--- a/genetic.pptx
+++ b/genetic.pptx
@@ -6,6 +6,8 @@
   </p:sldMasterIdLst>
   <p:sldIdLst>
     <p:sldId id="257" r:id="rId2"/>
+    <p:sldId id="258" r:id="rId3"/>
+    <p:sldId id="259" r:id="rId4"/>
   </p:sldIdLst>
   <p:sldSz cx="12192000" cy="6858000"/>
   <p:notesSz cx="6858000" cy="9144000"/>
@@ -104,6 +106,22 @@
       </a:defRPr>
     </a:lvl9pPr>
   </p:defaultTextStyle>
+  <p:extLst>
+    <p:ext uri="{EFAFB233-063F-42B5-8137-9DF3F51BA10A}">
+      <p15:sldGuideLst xmlns:p15="http://schemas.microsoft.com/office/powerpoint/2012/main">
+        <p15:guide id="1" orient="horz" pos="3912" userDrawn="1">
+          <p15:clr>
+            <a:srgbClr val="A4A3A4"/>
+          </p15:clr>
+        </p15:guide>
+        <p15:guide id="2" pos="3840" userDrawn="1">
+          <p15:clr>
+            <a:srgbClr val="A4A3A4"/>
+          </p15:clr>
+        </p15:guide>
+      </p15:sldGuideLst>
+    </p:ext>
+  </p:extLst>
 </p:presentation>
 </file>
 
@@ -3335,8 +3353,8 @@
         </p:nvSpPr>
         <p:spPr>
           <a:xfrm>
-            <a:off x="1171544" y="858828"/>
-            <a:ext cx="4036978" cy="400110"/>
+            <a:off x="626813" y="544992"/>
+            <a:ext cx="4036978" cy="646331"/>
           </a:xfrm>
           <a:prstGeom prst="rect">
             <a:avLst/>
@@ -3352,19 +3370,4624 @@
           </a:bodyPr>
           <a:lstStyle/>
           <a:p>
+            <a:r>
+              <a:rPr lang="es-MX" sz="3600" b="1" dirty="0" err="1">
+                <a:latin typeface="Cause ExtraBold" pitchFamily="2" charset="0"/>
+                <a:ea typeface="Google Sans" pitchFamily="2" charset="0"/>
+                <a:cs typeface="Google Sans" pitchFamily="2" charset="0"/>
+              </a:rPr>
+              <a:t>Initial</a:t>
+            </a:r>
+            <a:r>
+              <a:rPr lang="es-MX" sz="3600" b="1" dirty="0">
+                <a:latin typeface="Cause ExtraBold" pitchFamily="2" charset="0"/>
+                <a:ea typeface="Google Sans" pitchFamily="2" charset="0"/>
+                <a:cs typeface="Google Sans" pitchFamily="2" charset="0"/>
+              </a:rPr>
+              <a:t> </a:t>
+            </a:r>
+            <a:r>
+              <a:rPr lang="es-MX" sz="3600" b="1" dirty="0" err="1">
+                <a:latin typeface="Cause ExtraBold" pitchFamily="2" charset="0"/>
+                <a:ea typeface="Google Sans" pitchFamily="2" charset="0"/>
+                <a:cs typeface="Google Sans" pitchFamily="2" charset="0"/>
+              </a:rPr>
+              <a:t>Population</a:t>
+            </a:r>
+            <a:endParaRPr lang="es-MX" sz="3600" b="1" dirty="0">
+              <a:latin typeface="Cause ExtraBold" pitchFamily="2" charset="0"/>
+              <a:ea typeface="Google Sans" pitchFamily="2" charset="0"/>
+              <a:cs typeface="Google Sans" pitchFamily="2" charset="0"/>
+            </a:endParaRPr>
+          </a:p>
+        </p:txBody>
+      </p:sp>
+      <p:sp>
+        <p:nvSpPr>
+          <p:cNvPr id="12" name="CuadroTexto 11">
+            <a:extLst>
+              <a:ext uri="{FF2B5EF4-FFF2-40B4-BE49-F238E27FC236}">
+                <a16:creationId xmlns:a16="http://schemas.microsoft.com/office/drawing/2014/main" id="{132FA3AD-DDE7-76A1-39D4-51B52AE959EE}"/>
+              </a:ext>
+            </a:extLst>
+          </p:cNvPr>
+          <p:cNvSpPr txBox="1"/>
+          <p:nvPr/>
+        </p:nvSpPr>
+        <p:spPr>
+          <a:xfrm>
+            <a:off x="611244" y="4104355"/>
+            <a:ext cx="2467768" cy="323165"/>
+          </a:xfrm>
+          <a:prstGeom prst="rect">
+            <a:avLst/>
+          </a:prstGeom>
+          <a:noFill/>
+          <a:ln w="38100">
+            <a:noFill/>
+          </a:ln>
+        </p:spPr>
+        <p:txBody>
+          <a:bodyPr wrap="square" rtlCol="0">
+            <a:spAutoFit/>
+          </a:bodyPr>
+          <a:lstStyle/>
+          <a:p>
+            <a:r>
+              <a:rPr lang="es-MX" sz="1500" b="1" dirty="0" err="1">
+                <a:solidFill>
+                  <a:schemeClr val="tx1">
+                    <a:lumMod val="95000"/>
+                    <a:lumOff val="5000"/>
+                  </a:schemeClr>
+                </a:solidFill>
+                <a:latin typeface="Google Sans" pitchFamily="2" charset="0"/>
+                <a:ea typeface="Google Sans" pitchFamily="2" charset="0"/>
+                <a:cs typeface="Google Sans" pitchFamily="2" charset="0"/>
+              </a:rPr>
+              <a:t>Length</a:t>
+            </a:r>
+            <a:r>
+              <a:rPr lang="es-MX" sz="1500" b="1" dirty="0">
+                <a:solidFill>
+                  <a:schemeClr val="tx1">
+                    <a:lumMod val="95000"/>
+                    <a:lumOff val="5000"/>
+                  </a:schemeClr>
+                </a:solidFill>
+                <a:latin typeface="Google Sans" pitchFamily="2" charset="0"/>
+                <a:ea typeface="Google Sans" pitchFamily="2" charset="0"/>
+                <a:cs typeface="Google Sans" pitchFamily="2" charset="0"/>
+              </a:rPr>
+              <a:t> </a:t>
+            </a:r>
+            <a:r>
+              <a:rPr lang="es-MX" sz="1500" b="1" dirty="0" err="1">
+                <a:solidFill>
+                  <a:schemeClr val="tx1">
+                    <a:lumMod val="95000"/>
+                    <a:lumOff val="5000"/>
+                  </a:schemeClr>
+                </a:solidFill>
+                <a:latin typeface="Google Sans" pitchFamily="2" charset="0"/>
+                <a:ea typeface="Google Sans" pitchFamily="2" charset="0"/>
+                <a:cs typeface="Google Sans" pitchFamily="2" charset="0"/>
+              </a:rPr>
+              <a:t>Sequence</a:t>
+            </a:r>
+            <a:r>
+              <a:rPr lang="es-MX" sz="1500" b="1" dirty="0">
+                <a:solidFill>
+                  <a:schemeClr val="tx1">
+                    <a:lumMod val="95000"/>
+                    <a:lumOff val="5000"/>
+                  </a:schemeClr>
+                </a:solidFill>
+                <a:latin typeface="Google Sans" pitchFamily="2" charset="0"/>
+                <a:ea typeface="Google Sans" pitchFamily="2" charset="0"/>
+                <a:cs typeface="Google Sans" pitchFamily="2" charset="0"/>
+              </a:rPr>
+              <a:t> = 5</a:t>
+            </a:r>
+          </a:p>
+        </p:txBody>
+      </p:sp>
+      <p:sp>
+        <p:nvSpPr>
+          <p:cNvPr id="98" name="CuadroTexto 97">
+            <a:extLst>
+              <a:ext uri="{FF2B5EF4-FFF2-40B4-BE49-F238E27FC236}">
+                <a16:creationId xmlns:a16="http://schemas.microsoft.com/office/drawing/2014/main" id="{9F9CB1D6-8240-E08A-60B4-6BC74D8D422E}"/>
+              </a:ext>
+            </a:extLst>
+          </p:cNvPr>
+          <p:cNvSpPr txBox="1"/>
+          <p:nvPr/>
+        </p:nvSpPr>
+        <p:spPr>
+          <a:xfrm>
+            <a:off x="611244" y="4457168"/>
+            <a:ext cx="2467768" cy="323165"/>
+          </a:xfrm>
+          <a:prstGeom prst="rect">
+            <a:avLst/>
+          </a:prstGeom>
+          <a:noFill/>
+          <a:ln w="38100">
+            <a:noFill/>
+          </a:ln>
+        </p:spPr>
+        <p:txBody>
+          <a:bodyPr wrap="square" rtlCol="0">
+            <a:spAutoFit/>
+          </a:bodyPr>
+          <a:lstStyle/>
+          <a:p>
+            <a:r>
+              <a:rPr lang="es-MX" sz="1500" b="1" dirty="0" err="1">
+                <a:solidFill>
+                  <a:schemeClr val="tx1">
+                    <a:lumMod val="95000"/>
+                    <a:lumOff val="5000"/>
+                  </a:schemeClr>
+                </a:solidFill>
+                <a:latin typeface="Google Sans" pitchFamily="2" charset="0"/>
+                <a:ea typeface="Google Sans" pitchFamily="2" charset="0"/>
+                <a:cs typeface="Google Sans" pitchFamily="2" charset="0"/>
+              </a:rPr>
+              <a:t>Population</a:t>
+            </a:r>
+            <a:r>
+              <a:rPr lang="es-MX" sz="1500" b="1" dirty="0">
+                <a:solidFill>
+                  <a:schemeClr val="tx1">
+                    <a:lumMod val="95000"/>
+                    <a:lumOff val="5000"/>
+                  </a:schemeClr>
+                </a:solidFill>
+                <a:latin typeface="Google Sans" pitchFamily="2" charset="0"/>
+                <a:ea typeface="Google Sans" pitchFamily="2" charset="0"/>
+                <a:cs typeface="Google Sans" pitchFamily="2" charset="0"/>
+              </a:rPr>
+              <a:t> Size = 40</a:t>
+            </a:r>
+          </a:p>
+        </p:txBody>
+      </p:sp>
+      <p:grpSp>
+        <p:nvGrpSpPr>
+          <p:cNvPr id="145" name="Grupo 144">
+            <a:extLst>
+              <a:ext uri="{FF2B5EF4-FFF2-40B4-BE49-F238E27FC236}">
+                <a16:creationId xmlns:a16="http://schemas.microsoft.com/office/drawing/2014/main" id="{CD0AFA4C-9D93-86A5-E1A7-AF22F00C6782}"/>
+              </a:ext>
+            </a:extLst>
+          </p:cNvPr>
+          <p:cNvGrpSpPr/>
+          <p:nvPr/>
+        </p:nvGrpSpPr>
+        <p:grpSpPr>
+          <a:xfrm>
+            <a:off x="2249141" y="1802517"/>
+            <a:ext cx="9326324" cy="1228749"/>
+            <a:chOff x="1307309" y="1976253"/>
+            <a:chExt cx="9326324" cy="1228749"/>
+          </a:xfrm>
+        </p:grpSpPr>
+        <p:sp>
+          <p:nvSpPr>
+            <p:cNvPr id="101" name="CuadroTexto 100">
+              <a:extLst>
+                <a:ext uri="{FF2B5EF4-FFF2-40B4-BE49-F238E27FC236}">
+                  <a16:creationId xmlns:a16="http://schemas.microsoft.com/office/drawing/2014/main" id="{453A10CB-5A23-4478-B228-4BC5068BB4DB}"/>
+                </a:ext>
+              </a:extLst>
+            </p:cNvPr>
+            <p:cNvSpPr txBox="1"/>
+            <p:nvPr/>
+          </p:nvSpPr>
+          <p:spPr>
+            <a:xfrm>
+              <a:off x="1307309" y="1976253"/>
+              <a:ext cx="9326324" cy="584775"/>
+            </a:xfrm>
+            <a:prstGeom prst="rect">
+              <a:avLst/>
+            </a:prstGeom>
+            <a:noFill/>
+          </p:spPr>
+          <p:txBody>
+            <a:bodyPr wrap="square" rtlCol="0">
+              <a:spAutoFit/>
+            </a:bodyPr>
+            <a:lstStyle/>
+            <a:p>
+              <a:r>
+                <a:rPr lang="es-MX" sz="3200" b="1" dirty="0">
+                  <a:solidFill>
+                    <a:schemeClr val="accent6">
+                      <a:lumMod val="50000"/>
+                    </a:schemeClr>
+                  </a:solidFill>
+                </a:rPr>
+                <a:t>A   R   N  D  C Q  E  G  H   I    L   K  M  F   P  S   T  W  Y  V </a:t>
+              </a:r>
+            </a:p>
+          </p:txBody>
+        </p:sp>
+        <p:grpSp>
+          <p:nvGrpSpPr>
+            <p:cNvPr id="114" name="Grupo 113">
+              <a:extLst>
+                <a:ext uri="{FF2B5EF4-FFF2-40B4-BE49-F238E27FC236}">
+                  <a16:creationId xmlns:a16="http://schemas.microsoft.com/office/drawing/2014/main" id="{ECA46723-8547-42FA-CD70-4FDB3E8F1751}"/>
+                </a:ext>
+              </a:extLst>
+            </p:cNvPr>
+            <p:cNvGrpSpPr/>
+            <p:nvPr/>
+          </p:nvGrpSpPr>
+          <p:grpSpPr>
+            <a:xfrm>
+              <a:off x="1417269" y="2662035"/>
+              <a:ext cx="2150713" cy="523917"/>
+              <a:chOff x="1417269" y="2662035"/>
+              <a:chExt cx="2150713" cy="523917"/>
+            </a:xfrm>
+          </p:grpSpPr>
+          <mc:AlternateContent xmlns:mc="http://schemas.openxmlformats.org/markup-compatibility/2006">
+            <mc:Choice xmlns:a14="http://schemas.microsoft.com/office/drawing/2010/main" Requires="a14">
+              <p:sp>
+                <p:nvSpPr>
+                  <p:cNvPr id="102" name="CuadroTexto 101">
+                    <a:extLst>
+                      <a:ext uri="{FF2B5EF4-FFF2-40B4-BE49-F238E27FC236}">
+                        <a16:creationId xmlns:a16="http://schemas.microsoft.com/office/drawing/2014/main" id="{923ADB04-0BF1-6362-281A-5B3FF9060168}"/>
+                      </a:ext>
+                    </a:extLst>
+                  </p:cNvPr>
+                  <p:cNvSpPr txBox="1"/>
+                  <p:nvPr/>
+                </p:nvSpPr>
+                <p:spPr>
+                  <a:xfrm>
+                    <a:off x="1417269" y="2662035"/>
+                    <a:ext cx="302967" cy="520399"/>
+                  </a:xfrm>
+                  <a:prstGeom prst="rect">
+                    <a:avLst/>
+                  </a:prstGeom>
+                  <a:noFill/>
+                </p:spPr>
+                <p:txBody>
+                  <a:bodyPr wrap="square" lIns="0" tIns="0" rIns="0" bIns="0" rtlCol="0">
+                    <a:spAutoFit/>
+                  </a:bodyPr>
+                  <a:lstStyle/>
+                  <a:p>
+                    <a14:m>
+                      <m:oMathPara xmlns:m="http://schemas.openxmlformats.org/officeDocument/2006/math">
+                        <m:oMathParaPr>
+                          <m:jc m:val="centerGroup"/>
+                        </m:oMathParaPr>
+                        <m:oMath xmlns:m="http://schemas.openxmlformats.org/officeDocument/2006/math">
+                          <m:f>
+                            <m:fPr>
+                              <m:ctrlPr>
+                                <a:rPr lang="es-MX" b="0" i="1" smtClean="0">
+                                  <a:latin typeface="Cambria Math" panose="02040503050406030204" pitchFamily="18" charset="0"/>
+                                </a:rPr>
+                              </m:ctrlPr>
+                            </m:fPr>
+                            <m:num>
+                              <m:r>
+                                <a:rPr lang="es-MX" b="0" i="1" smtClean="0">
+                                  <a:latin typeface="Cambria Math" panose="02040503050406030204" pitchFamily="18" charset="0"/>
+                                </a:rPr>
+                                <m:t>1</m:t>
+                              </m:r>
+                            </m:num>
+                            <m:den>
+                              <m:r>
+                                <a:rPr lang="es-MX" b="0" i="1" smtClean="0">
+                                  <a:latin typeface="Cambria Math" panose="02040503050406030204" pitchFamily="18" charset="0"/>
+                                </a:rPr>
+                                <m:t>20</m:t>
+                              </m:r>
+                            </m:den>
+                          </m:f>
+                        </m:oMath>
+                      </m:oMathPara>
+                    </a14:m>
+                    <a:endParaRPr lang="es-MX" dirty="0">
+                      <a:latin typeface="Google Sans" pitchFamily="2" charset="0"/>
+                      <a:ea typeface="Google Sans" pitchFamily="2" charset="0"/>
+                      <a:cs typeface="Google Sans" pitchFamily="2" charset="0"/>
+                    </a:endParaRPr>
+                  </a:p>
+                </p:txBody>
+              </p:sp>
+            </mc:Choice>
+            <mc:Fallback>
+              <p:sp>
+                <p:nvSpPr>
+                  <p:cNvPr id="102" name="CuadroTexto 101">
+                    <a:extLst>
+                      <a:ext uri="{FF2B5EF4-FFF2-40B4-BE49-F238E27FC236}">
+                        <a16:creationId xmlns:a16="http://schemas.microsoft.com/office/drawing/2014/main" id="{923ADB04-0BF1-6362-281A-5B3FF9060168}"/>
+                      </a:ext>
+                    </a:extLst>
+                  </p:cNvPr>
+                  <p:cNvSpPr txBox="1">
+                    <a:spLocks noRot="1" noChangeAspect="1" noMove="1" noResize="1" noEditPoints="1" noAdjustHandles="1" noChangeArrowheads="1" noChangeShapeType="1" noTextEdit="1"/>
+                  </p:cNvSpPr>
+                  <p:nvPr/>
+                </p:nvSpPr>
+                <p:spPr>
+                  <a:xfrm>
+                    <a:off x="1417269" y="2662035"/>
+                    <a:ext cx="302967" cy="520399"/>
+                  </a:xfrm>
+                  <a:prstGeom prst="rect">
+                    <a:avLst/>
+                  </a:prstGeom>
+                  <a:blipFill>
+                    <a:blip r:embed="rId2"/>
+                    <a:stretch>
+                      <a:fillRect/>
+                    </a:stretch>
+                  </a:blipFill>
+                </p:spPr>
+                <p:txBody>
+                  <a:bodyPr/>
+                  <a:lstStyle/>
+                  <a:p>
+                    <a:r>
+                      <a:rPr lang="es-MX">
+                        <a:noFill/>
+                      </a:rPr>
+                      <a:t> </a:t>
+                    </a:r>
+                  </a:p>
+                </p:txBody>
+              </p:sp>
+            </mc:Fallback>
+          </mc:AlternateContent>
+          <mc:AlternateContent xmlns:mc="http://schemas.openxmlformats.org/markup-compatibility/2006">
+            <mc:Choice xmlns:a14="http://schemas.microsoft.com/office/drawing/2010/main" Requires="a14">
+              <p:sp>
+                <p:nvSpPr>
+                  <p:cNvPr id="105" name="CuadroTexto 104">
+                    <a:extLst>
+                      <a:ext uri="{FF2B5EF4-FFF2-40B4-BE49-F238E27FC236}">
+                        <a16:creationId xmlns:a16="http://schemas.microsoft.com/office/drawing/2014/main" id="{3D5CC79E-C9A1-444C-696A-37671B7C82C9}"/>
+                      </a:ext>
+                    </a:extLst>
+                  </p:cNvPr>
+                  <p:cNvSpPr txBox="1"/>
+                  <p:nvPr/>
+                </p:nvSpPr>
+                <p:spPr>
+                  <a:xfrm>
+                    <a:off x="1886990" y="2662035"/>
+                    <a:ext cx="302967" cy="520399"/>
+                  </a:xfrm>
+                  <a:prstGeom prst="rect">
+                    <a:avLst/>
+                  </a:prstGeom>
+                  <a:noFill/>
+                </p:spPr>
+                <p:txBody>
+                  <a:bodyPr wrap="square" lIns="0" tIns="0" rIns="0" bIns="0" rtlCol="0">
+                    <a:spAutoFit/>
+                  </a:bodyPr>
+                  <a:lstStyle/>
+                  <a:p>
+                    <a:pPr/>
+                    <a14:m>
+                      <m:oMathPara xmlns:m="http://schemas.openxmlformats.org/officeDocument/2006/math">
+                        <m:oMathParaPr>
+                          <m:jc m:val="centerGroup"/>
+                        </m:oMathParaPr>
+                        <m:oMath xmlns:m="http://schemas.openxmlformats.org/officeDocument/2006/math">
+                          <m:f>
+                            <m:fPr>
+                              <m:ctrlPr>
+                                <a:rPr lang="es-MX" b="0" i="1" smtClean="0">
+                                  <a:latin typeface="Cambria Math" panose="02040503050406030204" pitchFamily="18" charset="0"/>
+                                </a:rPr>
+                              </m:ctrlPr>
+                            </m:fPr>
+                            <m:num>
+                              <m:r>
+                                <a:rPr lang="es-MX" b="0" i="1" smtClean="0">
+                                  <a:latin typeface="Cambria Math" panose="02040503050406030204" pitchFamily="18" charset="0"/>
+                                </a:rPr>
+                                <m:t>1</m:t>
+                              </m:r>
+                            </m:num>
+                            <m:den>
+                              <m:r>
+                                <a:rPr lang="es-MX" b="0" i="1" smtClean="0">
+                                  <a:latin typeface="Cambria Math" panose="02040503050406030204" pitchFamily="18" charset="0"/>
+                                </a:rPr>
+                                <m:t>20</m:t>
+                              </m:r>
+                            </m:den>
+                          </m:f>
+                        </m:oMath>
+                      </m:oMathPara>
+                    </a14:m>
+                    <a:endParaRPr lang="es-MX" dirty="0">
+                      <a:latin typeface="Google Sans" pitchFamily="2" charset="0"/>
+                      <a:ea typeface="Google Sans" pitchFamily="2" charset="0"/>
+                      <a:cs typeface="Google Sans" pitchFamily="2" charset="0"/>
+                    </a:endParaRPr>
+                  </a:p>
+                </p:txBody>
+              </p:sp>
+            </mc:Choice>
+            <mc:Fallback>
+              <p:sp>
+                <p:nvSpPr>
+                  <p:cNvPr id="105" name="CuadroTexto 104">
+                    <a:extLst>
+                      <a:ext uri="{FF2B5EF4-FFF2-40B4-BE49-F238E27FC236}">
+                        <a16:creationId xmlns:a16="http://schemas.microsoft.com/office/drawing/2014/main" id="{3D5CC79E-C9A1-444C-696A-37671B7C82C9}"/>
+                      </a:ext>
+                    </a:extLst>
+                  </p:cNvPr>
+                  <p:cNvSpPr txBox="1">
+                    <a:spLocks noRot="1" noChangeAspect="1" noMove="1" noResize="1" noEditPoints="1" noAdjustHandles="1" noChangeArrowheads="1" noChangeShapeType="1" noTextEdit="1"/>
+                  </p:cNvSpPr>
+                  <p:nvPr/>
+                </p:nvSpPr>
+                <p:spPr>
+                  <a:xfrm>
+                    <a:off x="1886990" y="2662035"/>
+                    <a:ext cx="302967" cy="520399"/>
+                  </a:xfrm>
+                  <a:prstGeom prst="rect">
+                    <a:avLst/>
+                  </a:prstGeom>
+                  <a:blipFill>
+                    <a:blip r:embed="rId3"/>
+                    <a:stretch>
+                      <a:fillRect/>
+                    </a:stretch>
+                  </a:blipFill>
+                </p:spPr>
+                <p:txBody>
+                  <a:bodyPr/>
+                  <a:lstStyle/>
+                  <a:p>
+                    <a:r>
+                      <a:rPr lang="es-MX">
+                        <a:noFill/>
+                      </a:rPr>
+                      <a:t> </a:t>
+                    </a:r>
+                  </a:p>
+                </p:txBody>
+              </p:sp>
+            </mc:Fallback>
+          </mc:AlternateContent>
+          <mc:AlternateContent xmlns:mc="http://schemas.openxmlformats.org/markup-compatibility/2006">
+            <mc:Choice xmlns:a14="http://schemas.microsoft.com/office/drawing/2010/main" Requires="a14">
+              <p:sp>
+                <p:nvSpPr>
+                  <p:cNvPr id="107" name="CuadroTexto 106">
+                    <a:extLst>
+                      <a:ext uri="{FF2B5EF4-FFF2-40B4-BE49-F238E27FC236}">
+                        <a16:creationId xmlns:a16="http://schemas.microsoft.com/office/drawing/2014/main" id="{38AA41E3-B835-1422-3AFD-953503785933}"/>
+                      </a:ext>
+                    </a:extLst>
+                  </p:cNvPr>
+                  <p:cNvSpPr txBox="1"/>
+                  <p:nvPr/>
+                </p:nvSpPr>
+                <p:spPr>
+                  <a:xfrm>
+                    <a:off x="2356711" y="2662035"/>
+                    <a:ext cx="302967" cy="520399"/>
+                  </a:xfrm>
+                  <a:prstGeom prst="rect">
+                    <a:avLst/>
+                  </a:prstGeom>
+                  <a:noFill/>
+                </p:spPr>
+                <p:txBody>
+                  <a:bodyPr wrap="square" lIns="0" tIns="0" rIns="0" bIns="0" rtlCol="0">
+                    <a:spAutoFit/>
+                  </a:bodyPr>
+                  <a:lstStyle/>
+                  <a:p>
+                    <a:pPr/>
+                    <a14:m>
+                      <m:oMathPara xmlns:m="http://schemas.openxmlformats.org/officeDocument/2006/math">
+                        <m:oMathParaPr>
+                          <m:jc m:val="centerGroup"/>
+                        </m:oMathParaPr>
+                        <m:oMath xmlns:m="http://schemas.openxmlformats.org/officeDocument/2006/math">
+                          <m:f>
+                            <m:fPr>
+                              <m:ctrlPr>
+                                <a:rPr lang="es-MX" b="0" i="1" smtClean="0">
+                                  <a:latin typeface="Cambria Math" panose="02040503050406030204" pitchFamily="18" charset="0"/>
+                                </a:rPr>
+                              </m:ctrlPr>
+                            </m:fPr>
+                            <m:num>
+                              <m:r>
+                                <a:rPr lang="es-MX" b="0" i="1" smtClean="0">
+                                  <a:latin typeface="Cambria Math" panose="02040503050406030204" pitchFamily="18" charset="0"/>
+                                </a:rPr>
+                                <m:t>1</m:t>
+                              </m:r>
+                            </m:num>
+                            <m:den>
+                              <m:r>
+                                <a:rPr lang="es-MX" b="0" i="1" smtClean="0">
+                                  <a:latin typeface="Cambria Math" panose="02040503050406030204" pitchFamily="18" charset="0"/>
+                                </a:rPr>
+                                <m:t>20</m:t>
+                              </m:r>
+                            </m:den>
+                          </m:f>
+                        </m:oMath>
+                      </m:oMathPara>
+                    </a14:m>
+                    <a:endParaRPr lang="es-MX" dirty="0">
+                      <a:latin typeface="Google Sans" pitchFamily="2" charset="0"/>
+                      <a:ea typeface="Google Sans" pitchFamily="2" charset="0"/>
+                      <a:cs typeface="Google Sans" pitchFamily="2" charset="0"/>
+                    </a:endParaRPr>
+                  </a:p>
+                </p:txBody>
+              </p:sp>
+            </mc:Choice>
+            <mc:Fallback>
+              <p:sp>
+                <p:nvSpPr>
+                  <p:cNvPr id="107" name="CuadroTexto 106">
+                    <a:extLst>
+                      <a:ext uri="{FF2B5EF4-FFF2-40B4-BE49-F238E27FC236}">
+                        <a16:creationId xmlns:a16="http://schemas.microsoft.com/office/drawing/2014/main" id="{38AA41E3-B835-1422-3AFD-953503785933}"/>
+                      </a:ext>
+                    </a:extLst>
+                  </p:cNvPr>
+                  <p:cNvSpPr txBox="1">
+                    <a:spLocks noRot="1" noChangeAspect="1" noMove="1" noResize="1" noEditPoints="1" noAdjustHandles="1" noChangeArrowheads="1" noChangeShapeType="1" noTextEdit="1"/>
+                  </p:cNvSpPr>
+                  <p:nvPr/>
+                </p:nvSpPr>
+                <p:spPr>
+                  <a:xfrm>
+                    <a:off x="2356711" y="2662035"/>
+                    <a:ext cx="302967" cy="520399"/>
+                  </a:xfrm>
+                  <a:prstGeom prst="rect">
+                    <a:avLst/>
+                  </a:prstGeom>
+                  <a:blipFill>
+                    <a:blip r:embed="rId4"/>
+                    <a:stretch>
+                      <a:fillRect/>
+                    </a:stretch>
+                  </a:blipFill>
+                </p:spPr>
+                <p:txBody>
+                  <a:bodyPr/>
+                  <a:lstStyle/>
+                  <a:p>
+                    <a:r>
+                      <a:rPr lang="es-MX">
+                        <a:noFill/>
+                      </a:rPr>
+                      <a:t> </a:t>
+                    </a:r>
+                  </a:p>
+                </p:txBody>
+              </p:sp>
+            </mc:Fallback>
+          </mc:AlternateContent>
+          <mc:AlternateContent xmlns:mc="http://schemas.openxmlformats.org/markup-compatibility/2006">
+            <mc:Choice xmlns:a14="http://schemas.microsoft.com/office/drawing/2010/main" Requires="a14">
+              <p:sp>
+                <p:nvSpPr>
+                  <p:cNvPr id="109" name="CuadroTexto 108">
+                    <a:extLst>
+                      <a:ext uri="{FF2B5EF4-FFF2-40B4-BE49-F238E27FC236}">
+                        <a16:creationId xmlns:a16="http://schemas.microsoft.com/office/drawing/2014/main" id="{61A2EB5A-B06C-B8E6-89E7-E5EA6A351BBE}"/>
+                      </a:ext>
+                    </a:extLst>
+                  </p:cNvPr>
+                  <p:cNvSpPr txBox="1"/>
+                  <p:nvPr/>
+                </p:nvSpPr>
+                <p:spPr>
+                  <a:xfrm>
+                    <a:off x="2810863" y="2665553"/>
+                    <a:ext cx="302967" cy="520399"/>
+                  </a:xfrm>
+                  <a:prstGeom prst="rect">
+                    <a:avLst/>
+                  </a:prstGeom>
+                  <a:noFill/>
+                </p:spPr>
+                <p:txBody>
+                  <a:bodyPr wrap="square" lIns="0" tIns="0" rIns="0" bIns="0" rtlCol="0">
+                    <a:spAutoFit/>
+                  </a:bodyPr>
+                  <a:lstStyle/>
+                  <a:p>
+                    <a:pPr/>
+                    <a14:m>
+                      <m:oMathPara xmlns:m="http://schemas.openxmlformats.org/officeDocument/2006/math">
+                        <m:oMathParaPr>
+                          <m:jc m:val="centerGroup"/>
+                        </m:oMathParaPr>
+                        <m:oMath xmlns:m="http://schemas.openxmlformats.org/officeDocument/2006/math">
+                          <m:f>
+                            <m:fPr>
+                              <m:ctrlPr>
+                                <a:rPr lang="es-MX" b="0" i="1" smtClean="0">
+                                  <a:latin typeface="Cambria Math" panose="02040503050406030204" pitchFamily="18" charset="0"/>
+                                </a:rPr>
+                              </m:ctrlPr>
+                            </m:fPr>
+                            <m:num>
+                              <m:r>
+                                <a:rPr lang="es-MX" b="0" i="1" smtClean="0">
+                                  <a:latin typeface="Cambria Math" panose="02040503050406030204" pitchFamily="18" charset="0"/>
+                                </a:rPr>
+                                <m:t>1</m:t>
+                              </m:r>
+                            </m:num>
+                            <m:den>
+                              <m:r>
+                                <a:rPr lang="es-MX" b="0" i="1" smtClean="0">
+                                  <a:latin typeface="Cambria Math" panose="02040503050406030204" pitchFamily="18" charset="0"/>
+                                </a:rPr>
+                                <m:t>20</m:t>
+                              </m:r>
+                            </m:den>
+                          </m:f>
+                        </m:oMath>
+                      </m:oMathPara>
+                    </a14:m>
+                    <a:endParaRPr lang="es-MX" dirty="0">
+                      <a:latin typeface="Google Sans" pitchFamily="2" charset="0"/>
+                      <a:ea typeface="Google Sans" pitchFamily="2" charset="0"/>
+                      <a:cs typeface="Google Sans" pitchFamily="2" charset="0"/>
+                    </a:endParaRPr>
+                  </a:p>
+                </p:txBody>
+              </p:sp>
+            </mc:Choice>
+            <mc:Fallback>
+              <p:sp>
+                <p:nvSpPr>
+                  <p:cNvPr id="109" name="CuadroTexto 108">
+                    <a:extLst>
+                      <a:ext uri="{FF2B5EF4-FFF2-40B4-BE49-F238E27FC236}">
+                        <a16:creationId xmlns:a16="http://schemas.microsoft.com/office/drawing/2014/main" id="{61A2EB5A-B06C-B8E6-89E7-E5EA6A351BBE}"/>
+                      </a:ext>
+                    </a:extLst>
+                  </p:cNvPr>
+                  <p:cNvSpPr txBox="1">
+                    <a:spLocks noRot="1" noChangeAspect="1" noMove="1" noResize="1" noEditPoints="1" noAdjustHandles="1" noChangeArrowheads="1" noChangeShapeType="1" noTextEdit="1"/>
+                  </p:cNvSpPr>
+                  <p:nvPr/>
+                </p:nvSpPr>
+                <p:spPr>
+                  <a:xfrm>
+                    <a:off x="2810863" y="2665553"/>
+                    <a:ext cx="302967" cy="520399"/>
+                  </a:xfrm>
+                  <a:prstGeom prst="rect">
+                    <a:avLst/>
+                  </a:prstGeom>
+                  <a:blipFill>
+                    <a:blip r:embed="rId5"/>
+                    <a:stretch>
+                      <a:fillRect/>
+                    </a:stretch>
+                  </a:blipFill>
+                </p:spPr>
+                <p:txBody>
+                  <a:bodyPr/>
+                  <a:lstStyle/>
+                  <a:p>
+                    <a:r>
+                      <a:rPr lang="es-MX">
+                        <a:noFill/>
+                      </a:rPr>
+                      <a:t> </a:t>
+                    </a:r>
+                  </a:p>
+                </p:txBody>
+              </p:sp>
+            </mc:Fallback>
+          </mc:AlternateContent>
+          <mc:AlternateContent xmlns:mc="http://schemas.openxmlformats.org/markup-compatibility/2006">
+            <mc:Choice xmlns:a14="http://schemas.microsoft.com/office/drawing/2010/main" Requires="a14">
+              <p:sp>
+                <p:nvSpPr>
+                  <p:cNvPr id="111" name="CuadroTexto 110">
+                    <a:extLst>
+                      <a:ext uri="{FF2B5EF4-FFF2-40B4-BE49-F238E27FC236}">
+                        <a16:creationId xmlns:a16="http://schemas.microsoft.com/office/drawing/2014/main" id="{99999A55-4E3C-6942-B6C7-C0CDD9C884E2}"/>
+                      </a:ext>
+                    </a:extLst>
+                  </p:cNvPr>
+                  <p:cNvSpPr txBox="1"/>
+                  <p:nvPr/>
+                </p:nvSpPr>
+                <p:spPr>
+                  <a:xfrm>
+                    <a:off x="3265015" y="2662035"/>
+                    <a:ext cx="302967" cy="520399"/>
+                  </a:xfrm>
+                  <a:prstGeom prst="rect">
+                    <a:avLst/>
+                  </a:prstGeom>
+                  <a:noFill/>
+                </p:spPr>
+                <p:txBody>
+                  <a:bodyPr wrap="square" lIns="0" tIns="0" rIns="0" bIns="0" rtlCol="0">
+                    <a:spAutoFit/>
+                  </a:bodyPr>
+                  <a:lstStyle/>
+                  <a:p>
+                    <a:pPr/>
+                    <a14:m>
+                      <m:oMathPara xmlns:m="http://schemas.openxmlformats.org/officeDocument/2006/math">
+                        <m:oMathParaPr>
+                          <m:jc m:val="centerGroup"/>
+                        </m:oMathParaPr>
+                        <m:oMath xmlns:m="http://schemas.openxmlformats.org/officeDocument/2006/math">
+                          <m:f>
+                            <m:fPr>
+                              <m:ctrlPr>
+                                <a:rPr lang="es-MX" b="0" i="1" smtClean="0">
+                                  <a:latin typeface="Cambria Math" panose="02040503050406030204" pitchFamily="18" charset="0"/>
+                                </a:rPr>
+                              </m:ctrlPr>
+                            </m:fPr>
+                            <m:num>
+                              <m:r>
+                                <a:rPr lang="es-MX" b="0" i="1" smtClean="0">
+                                  <a:latin typeface="Cambria Math" panose="02040503050406030204" pitchFamily="18" charset="0"/>
+                                </a:rPr>
+                                <m:t>1</m:t>
+                              </m:r>
+                            </m:num>
+                            <m:den>
+                              <m:r>
+                                <a:rPr lang="es-MX" b="0" i="1" smtClean="0">
+                                  <a:latin typeface="Cambria Math" panose="02040503050406030204" pitchFamily="18" charset="0"/>
+                                </a:rPr>
+                                <m:t>20</m:t>
+                              </m:r>
+                            </m:den>
+                          </m:f>
+                        </m:oMath>
+                      </m:oMathPara>
+                    </a14:m>
+                    <a:endParaRPr lang="es-MX" dirty="0">
+                      <a:latin typeface="Google Sans" pitchFamily="2" charset="0"/>
+                      <a:ea typeface="Google Sans" pitchFamily="2" charset="0"/>
+                      <a:cs typeface="Google Sans" pitchFamily="2" charset="0"/>
+                    </a:endParaRPr>
+                  </a:p>
+                </p:txBody>
+              </p:sp>
+            </mc:Choice>
+            <mc:Fallback>
+              <p:sp>
+                <p:nvSpPr>
+                  <p:cNvPr id="111" name="CuadroTexto 110">
+                    <a:extLst>
+                      <a:ext uri="{FF2B5EF4-FFF2-40B4-BE49-F238E27FC236}">
+                        <a16:creationId xmlns:a16="http://schemas.microsoft.com/office/drawing/2014/main" id="{99999A55-4E3C-6942-B6C7-C0CDD9C884E2}"/>
+                      </a:ext>
+                    </a:extLst>
+                  </p:cNvPr>
+                  <p:cNvSpPr txBox="1">
+                    <a:spLocks noRot="1" noChangeAspect="1" noMove="1" noResize="1" noEditPoints="1" noAdjustHandles="1" noChangeArrowheads="1" noChangeShapeType="1" noTextEdit="1"/>
+                  </p:cNvSpPr>
+                  <p:nvPr/>
+                </p:nvSpPr>
+                <p:spPr>
+                  <a:xfrm>
+                    <a:off x="3265015" y="2662035"/>
+                    <a:ext cx="302967" cy="520399"/>
+                  </a:xfrm>
+                  <a:prstGeom prst="rect">
+                    <a:avLst/>
+                  </a:prstGeom>
+                  <a:blipFill>
+                    <a:blip r:embed="rId4"/>
+                    <a:stretch>
+                      <a:fillRect/>
+                    </a:stretch>
+                  </a:blipFill>
+                </p:spPr>
+                <p:txBody>
+                  <a:bodyPr/>
+                  <a:lstStyle/>
+                  <a:p>
+                    <a:r>
+                      <a:rPr lang="es-MX">
+                        <a:noFill/>
+                      </a:rPr>
+                      <a:t> </a:t>
+                    </a:r>
+                  </a:p>
+                </p:txBody>
+              </p:sp>
+            </mc:Fallback>
+          </mc:AlternateContent>
+        </p:grpSp>
+        <p:grpSp>
+          <p:nvGrpSpPr>
+            <p:cNvPr id="127" name="Grupo 126">
+              <a:extLst>
+                <a:ext uri="{FF2B5EF4-FFF2-40B4-BE49-F238E27FC236}">
+                  <a16:creationId xmlns:a16="http://schemas.microsoft.com/office/drawing/2014/main" id="{CF906B1C-D1A0-D72F-4CE2-73310E08C670}"/>
+                </a:ext>
+              </a:extLst>
+            </p:cNvPr>
+            <p:cNvGrpSpPr/>
+            <p:nvPr/>
+          </p:nvGrpSpPr>
+          <p:grpSpPr>
+            <a:xfrm>
+              <a:off x="3668573" y="2673946"/>
+              <a:ext cx="2150713" cy="523917"/>
+              <a:chOff x="1417269" y="2662035"/>
+              <a:chExt cx="2150713" cy="523917"/>
+            </a:xfrm>
+          </p:grpSpPr>
+          <mc:AlternateContent xmlns:mc="http://schemas.openxmlformats.org/markup-compatibility/2006">
+            <mc:Choice xmlns:a14="http://schemas.microsoft.com/office/drawing/2010/main" Requires="a14">
+              <p:sp>
+                <p:nvSpPr>
+                  <p:cNvPr id="128" name="CuadroTexto 127">
+                    <a:extLst>
+                      <a:ext uri="{FF2B5EF4-FFF2-40B4-BE49-F238E27FC236}">
+                        <a16:creationId xmlns:a16="http://schemas.microsoft.com/office/drawing/2014/main" id="{11E9EF7A-466B-37A8-38F9-9A9E721C31FD}"/>
+                      </a:ext>
+                    </a:extLst>
+                  </p:cNvPr>
+                  <p:cNvSpPr txBox="1"/>
+                  <p:nvPr/>
+                </p:nvSpPr>
+                <p:spPr>
+                  <a:xfrm>
+                    <a:off x="1417269" y="2662035"/>
+                    <a:ext cx="302967" cy="520399"/>
+                  </a:xfrm>
+                  <a:prstGeom prst="rect">
+                    <a:avLst/>
+                  </a:prstGeom>
+                  <a:noFill/>
+                </p:spPr>
+                <p:txBody>
+                  <a:bodyPr wrap="square" lIns="0" tIns="0" rIns="0" bIns="0" rtlCol="0">
+                    <a:spAutoFit/>
+                  </a:bodyPr>
+                  <a:lstStyle/>
+                  <a:p>
+                    <a14:m>
+                      <m:oMathPara xmlns:m="http://schemas.openxmlformats.org/officeDocument/2006/math">
+                        <m:oMathParaPr>
+                          <m:jc m:val="centerGroup"/>
+                        </m:oMathParaPr>
+                        <m:oMath xmlns:m="http://schemas.openxmlformats.org/officeDocument/2006/math">
+                          <m:f>
+                            <m:fPr>
+                              <m:ctrlPr>
+                                <a:rPr lang="es-MX" b="0" i="1" smtClean="0">
+                                  <a:latin typeface="Cambria Math" panose="02040503050406030204" pitchFamily="18" charset="0"/>
+                                </a:rPr>
+                              </m:ctrlPr>
+                            </m:fPr>
+                            <m:num>
+                              <m:r>
+                                <a:rPr lang="es-MX" b="0" i="1" smtClean="0">
+                                  <a:latin typeface="Cambria Math" panose="02040503050406030204" pitchFamily="18" charset="0"/>
+                                </a:rPr>
+                                <m:t>1</m:t>
+                              </m:r>
+                            </m:num>
+                            <m:den>
+                              <m:r>
+                                <a:rPr lang="es-MX" b="0" i="1" smtClean="0">
+                                  <a:latin typeface="Cambria Math" panose="02040503050406030204" pitchFamily="18" charset="0"/>
+                                </a:rPr>
+                                <m:t>20</m:t>
+                              </m:r>
+                            </m:den>
+                          </m:f>
+                        </m:oMath>
+                      </m:oMathPara>
+                    </a14:m>
+                    <a:endParaRPr lang="es-MX" dirty="0">
+                      <a:latin typeface="Google Sans" pitchFamily="2" charset="0"/>
+                      <a:ea typeface="Google Sans" pitchFamily="2" charset="0"/>
+                      <a:cs typeface="Google Sans" pitchFamily="2" charset="0"/>
+                    </a:endParaRPr>
+                  </a:p>
+                </p:txBody>
+              </p:sp>
+            </mc:Choice>
+            <mc:Fallback>
+              <p:sp>
+                <p:nvSpPr>
+                  <p:cNvPr id="128" name="CuadroTexto 127">
+                    <a:extLst>
+                      <a:ext uri="{FF2B5EF4-FFF2-40B4-BE49-F238E27FC236}">
+                        <a16:creationId xmlns:a16="http://schemas.microsoft.com/office/drawing/2014/main" id="{11E9EF7A-466B-37A8-38F9-9A9E721C31FD}"/>
+                      </a:ext>
+                    </a:extLst>
+                  </p:cNvPr>
+                  <p:cNvSpPr txBox="1">
+                    <a:spLocks noRot="1" noChangeAspect="1" noMove="1" noResize="1" noEditPoints="1" noAdjustHandles="1" noChangeArrowheads="1" noChangeShapeType="1" noTextEdit="1"/>
+                  </p:cNvSpPr>
+                  <p:nvPr/>
+                </p:nvSpPr>
+                <p:spPr>
+                  <a:xfrm>
+                    <a:off x="1417269" y="2662035"/>
+                    <a:ext cx="302967" cy="520399"/>
+                  </a:xfrm>
+                  <a:prstGeom prst="rect">
+                    <a:avLst/>
+                  </a:prstGeom>
+                  <a:blipFill>
+                    <a:blip r:embed="rId6"/>
+                    <a:stretch>
+                      <a:fillRect/>
+                    </a:stretch>
+                  </a:blipFill>
+                </p:spPr>
+                <p:txBody>
+                  <a:bodyPr/>
+                  <a:lstStyle/>
+                  <a:p>
+                    <a:r>
+                      <a:rPr lang="es-MX">
+                        <a:noFill/>
+                      </a:rPr>
+                      <a:t> </a:t>
+                    </a:r>
+                  </a:p>
+                </p:txBody>
+              </p:sp>
+            </mc:Fallback>
+          </mc:AlternateContent>
+          <mc:AlternateContent xmlns:mc="http://schemas.openxmlformats.org/markup-compatibility/2006">
+            <mc:Choice xmlns:a14="http://schemas.microsoft.com/office/drawing/2010/main" Requires="a14">
+              <p:sp>
+                <p:nvSpPr>
+                  <p:cNvPr id="129" name="CuadroTexto 128">
+                    <a:extLst>
+                      <a:ext uri="{FF2B5EF4-FFF2-40B4-BE49-F238E27FC236}">
+                        <a16:creationId xmlns:a16="http://schemas.microsoft.com/office/drawing/2014/main" id="{6DF1CCCD-E8CF-9FAE-0F52-D537A593DB3E}"/>
+                      </a:ext>
+                    </a:extLst>
+                  </p:cNvPr>
+                  <p:cNvSpPr txBox="1"/>
+                  <p:nvPr/>
+                </p:nvSpPr>
+                <p:spPr>
+                  <a:xfrm>
+                    <a:off x="1886990" y="2662035"/>
+                    <a:ext cx="302967" cy="520399"/>
+                  </a:xfrm>
+                  <a:prstGeom prst="rect">
+                    <a:avLst/>
+                  </a:prstGeom>
+                  <a:noFill/>
+                </p:spPr>
+                <p:txBody>
+                  <a:bodyPr wrap="square" lIns="0" tIns="0" rIns="0" bIns="0" rtlCol="0">
+                    <a:spAutoFit/>
+                  </a:bodyPr>
+                  <a:lstStyle/>
+                  <a:p>
+                    <a:pPr/>
+                    <a14:m>
+                      <m:oMathPara xmlns:m="http://schemas.openxmlformats.org/officeDocument/2006/math">
+                        <m:oMathParaPr>
+                          <m:jc m:val="centerGroup"/>
+                        </m:oMathParaPr>
+                        <m:oMath xmlns:m="http://schemas.openxmlformats.org/officeDocument/2006/math">
+                          <m:f>
+                            <m:fPr>
+                              <m:ctrlPr>
+                                <a:rPr lang="es-MX" b="0" i="1" smtClean="0">
+                                  <a:latin typeface="Cambria Math" panose="02040503050406030204" pitchFamily="18" charset="0"/>
+                                </a:rPr>
+                              </m:ctrlPr>
+                            </m:fPr>
+                            <m:num>
+                              <m:r>
+                                <a:rPr lang="es-MX" b="0" i="1" smtClean="0">
+                                  <a:latin typeface="Cambria Math" panose="02040503050406030204" pitchFamily="18" charset="0"/>
+                                </a:rPr>
+                                <m:t>1</m:t>
+                              </m:r>
+                            </m:num>
+                            <m:den>
+                              <m:r>
+                                <a:rPr lang="es-MX" b="0" i="1" smtClean="0">
+                                  <a:latin typeface="Cambria Math" panose="02040503050406030204" pitchFamily="18" charset="0"/>
+                                </a:rPr>
+                                <m:t>20</m:t>
+                              </m:r>
+                            </m:den>
+                          </m:f>
+                        </m:oMath>
+                      </m:oMathPara>
+                    </a14:m>
+                    <a:endParaRPr lang="es-MX" dirty="0">
+                      <a:latin typeface="Google Sans" pitchFamily="2" charset="0"/>
+                      <a:ea typeface="Google Sans" pitchFamily="2" charset="0"/>
+                      <a:cs typeface="Google Sans" pitchFamily="2" charset="0"/>
+                    </a:endParaRPr>
+                  </a:p>
+                </p:txBody>
+              </p:sp>
+            </mc:Choice>
+            <mc:Fallback>
+              <p:sp>
+                <p:nvSpPr>
+                  <p:cNvPr id="129" name="CuadroTexto 128">
+                    <a:extLst>
+                      <a:ext uri="{FF2B5EF4-FFF2-40B4-BE49-F238E27FC236}">
+                        <a16:creationId xmlns:a16="http://schemas.microsoft.com/office/drawing/2014/main" id="{6DF1CCCD-E8CF-9FAE-0F52-D537A593DB3E}"/>
+                      </a:ext>
+                    </a:extLst>
+                  </p:cNvPr>
+                  <p:cNvSpPr txBox="1">
+                    <a:spLocks noRot="1" noChangeAspect="1" noMove="1" noResize="1" noEditPoints="1" noAdjustHandles="1" noChangeArrowheads="1" noChangeShapeType="1" noTextEdit="1"/>
+                  </p:cNvSpPr>
+                  <p:nvPr/>
+                </p:nvSpPr>
+                <p:spPr>
+                  <a:xfrm>
+                    <a:off x="1886990" y="2662035"/>
+                    <a:ext cx="302967" cy="520399"/>
+                  </a:xfrm>
+                  <a:prstGeom prst="rect">
+                    <a:avLst/>
+                  </a:prstGeom>
+                  <a:blipFill>
+                    <a:blip r:embed="rId7"/>
+                    <a:stretch>
+                      <a:fillRect/>
+                    </a:stretch>
+                  </a:blipFill>
+                </p:spPr>
+                <p:txBody>
+                  <a:bodyPr/>
+                  <a:lstStyle/>
+                  <a:p>
+                    <a:r>
+                      <a:rPr lang="es-MX">
+                        <a:noFill/>
+                      </a:rPr>
+                      <a:t> </a:t>
+                    </a:r>
+                  </a:p>
+                </p:txBody>
+              </p:sp>
+            </mc:Fallback>
+          </mc:AlternateContent>
+          <mc:AlternateContent xmlns:mc="http://schemas.openxmlformats.org/markup-compatibility/2006">
+            <mc:Choice xmlns:a14="http://schemas.microsoft.com/office/drawing/2010/main" Requires="a14">
+              <p:sp>
+                <p:nvSpPr>
+                  <p:cNvPr id="130" name="CuadroTexto 129">
+                    <a:extLst>
+                      <a:ext uri="{FF2B5EF4-FFF2-40B4-BE49-F238E27FC236}">
+                        <a16:creationId xmlns:a16="http://schemas.microsoft.com/office/drawing/2014/main" id="{B88AD8BE-F3E3-C9A6-01CE-AF8140170139}"/>
+                      </a:ext>
+                    </a:extLst>
+                  </p:cNvPr>
+                  <p:cNvSpPr txBox="1"/>
+                  <p:nvPr/>
+                </p:nvSpPr>
+                <p:spPr>
+                  <a:xfrm>
+                    <a:off x="2356711" y="2662035"/>
+                    <a:ext cx="302967" cy="520399"/>
+                  </a:xfrm>
+                  <a:prstGeom prst="rect">
+                    <a:avLst/>
+                  </a:prstGeom>
+                  <a:noFill/>
+                </p:spPr>
+                <p:txBody>
+                  <a:bodyPr wrap="square" lIns="0" tIns="0" rIns="0" bIns="0" rtlCol="0">
+                    <a:spAutoFit/>
+                  </a:bodyPr>
+                  <a:lstStyle/>
+                  <a:p>
+                    <a:pPr/>
+                    <a14:m>
+                      <m:oMathPara xmlns:m="http://schemas.openxmlformats.org/officeDocument/2006/math">
+                        <m:oMathParaPr>
+                          <m:jc m:val="centerGroup"/>
+                        </m:oMathParaPr>
+                        <m:oMath xmlns:m="http://schemas.openxmlformats.org/officeDocument/2006/math">
+                          <m:f>
+                            <m:fPr>
+                              <m:ctrlPr>
+                                <a:rPr lang="es-MX" b="0" i="1" smtClean="0">
+                                  <a:latin typeface="Cambria Math" panose="02040503050406030204" pitchFamily="18" charset="0"/>
+                                </a:rPr>
+                              </m:ctrlPr>
+                            </m:fPr>
+                            <m:num>
+                              <m:r>
+                                <a:rPr lang="es-MX" b="0" i="1" smtClean="0">
+                                  <a:latin typeface="Cambria Math" panose="02040503050406030204" pitchFamily="18" charset="0"/>
+                                </a:rPr>
+                                <m:t>1</m:t>
+                              </m:r>
+                            </m:num>
+                            <m:den>
+                              <m:r>
+                                <a:rPr lang="es-MX" b="0" i="1" smtClean="0">
+                                  <a:latin typeface="Cambria Math" panose="02040503050406030204" pitchFamily="18" charset="0"/>
+                                </a:rPr>
+                                <m:t>20</m:t>
+                              </m:r>
+                            </m:den>
+                          </m:f>
+                        </m:oMath>
+                      </m:oMathPara>
+                    </a14:m>
+                    <a:endParaRPr lang="es-MX" dirty="0">
+                      <a:latin typeface="Google Sans" pitchFamily="2" charset="0"/>
+                      <a:ea typeface="Google Sans" pitchFamily="2" charset="0"/>
+                      <a:cs typeface="Google Sans" pitchFamily="2" charset="0"/>
+                    </a:endParaRPr>
+                  </a:p>
+                </p:txBody>
+              </p:sp>
+            </mc:Choice>
+            <mc:Fallback>
+              <p:sp>
+                <p:nvSpPr>
+                  <p:cNvPr id="130" name="CuadroTexto 129">
+                    <a:extLst>
+                      <a:ext uri="{FF2B5EF4-FFF2-40B4-BE49-F238E27FC236}">
+                        <a16:creationId xmlns:a16="http://schemas.microsoft.com/office/drawing/2014/main" id="{B88AD8BE-F3E3-C9A6-01CE-AF8140170139}"/>
+                      </a:ext>
+                    </a:extLst>
+                  </p:cNvPr>
+                  <p:cNvSpPr txBox="1">
+                    <a:spLocks noRot="1" noChangeAspect="1" noMove="1" noResize="1" noEditPoints="1" noAdjustHandles="1" noChangeArrowheads="1" noChangeShapeType="1" noTextEdit="1"/>
+                  </p:cNvSpPr>
+                  <p:nvPr/>
+                </p:nvSpPr>
+                <p:spPr>
+                  <a:xfrm>
+                    <a:off x="2356711" y="2662035"/>
+                    <a:ext cx="302967" cy="520399"/>
+                  </a:xfrm>
+                  <a:prstGeom prst="rect">
+                    <a:avLst/>
+                  </a:prstGeom>
+                  <a:blipFill>
+                    <a:blip r:embed="rId8"/>
+                    <a:stretch>
+                      <a:fillRect/>
+                    </a:stretch>
+                  </a:blipFill>
+                </p:spPr>
+                <p:txBody>
+                  <a:bodyPr/>
+                  <a:lstStyle/>
+                  <a:p>
+                    <a:r>
+                      <a:rPr lang="es-MX">
+                        <a:noFill/>
+                      </a:rPr>
+                      <a:t> </a:t>
+                    </a:r>
+                  </a:p>
+                </p:txBody>
+              </p:sp>
+            </mc:Fallback>
+          </mc:AlternateContent>
+          <mc:AlternateContent xmlns:mc="http://schemas.openxmlformats.org/markup-compatibility/2006">
+            <mc:Choice xmlns:a14="http://schemas.microsoft.com/office/drawing/2010/main" Requires="a14">
+              <p:sp>
+                <p:nvSpPr>
+                  <p:cNvPr id="131" name="CuadroTexto 130">
+                    <a:extLst>
+                      <a:ext uri="{FF2B5EF4-FFF2-40B4-BE49-F238E27FC236}">
+                        <a16:creationId xmlns:a16="http://schemas.microsoft.com/office/drawing/2014/main" id="{22EC5355-18FF-E39D-E8C5-46A2FA16DA45}"/>
+                      </a:ext>
+                    </a:extLst>
+                  </p:cNvPr>
+                  <p:cNvSpPr txBox="1"/>
+                  <p:nvPr/>
+                </p:nvSpPr>
+                <p:spPr>
+                  <a:xfrm>
+                    <a:off x="2810863" y="2665553"/>
+                    <a:ext cx="302967" cy="520399"/>
+                  </a:xfrm>
+                  <a:prstGeom prst="rect">
+                    <a:avLst/>
+                  </a:prstGeom>
+                  <a:noFill/>
+                </p:spPr>
+                <p:txBody>
+                  <a:bodyPr wrap="square" lIns="0" tIns="0" rIns="0" bIns="0" rtlCol="0">
+                    <a:spAutoFit/>
+                  </a:bodyPr>
+                  <a:lstStyle/>
+                  <a:p>
+                    <a:pPr/>
+                    <a14:m>
+                      <m:oMathPara xmlns:m="http://schemas.openxmlformats.org/officeDocument/2006/math">
+                        <m:oMathParaPr>
+                          <m:jc m:val="centerGroup"/>
+                        </m:oMathParaPr>
+                        <m:oMath xmlns:m="http://schemas.openxmlformats.org/officeDocument/2006/math">
+                          <m:f>
+                            <m:fPr>
+                              <m:ctrlPr>
+                                <a:rPr lang="es-MX" b="0" i="1" smtClean="0">
+                                  <a:latin typeface="Cambria Math" panose="02040503050406030204" pitchFamily="18" charset="0"/>
+                                </a:rPr>
+                              </m:ctrlPr>
+                            </m:fPr>
+                            <m:num>
+                              <m:r>
+                                <a:rPr lang="es-MX" b="0" i="1" smtClean="0">
+                                  <a:latin typeface="Cambria Math" panose="02040503050406030204" pitchFamily="18" charset="0"/>
+                                </a:rPr>
+                                <m:t>1</m:t>
+                              </m:r>
+                            </m:num>
+                            <m:den>
+                              <m:r>
+                                <a:rPr lang="es-MX" b="0" i="1" smtClean="0">
+                                  <a:latin typeface="Cambria Math" panose="02040503050406030204" pitchFamily="18" charset="0"/>
+                                </a:rPr>
+                                <m:t>20</m:t>
+                              </m:r>
+                            </m:den>
+                          </m:f>
+                        </m:oMath>
+                      </m:oMathPara>
+                    </a14:m>
+                    <a:endParaRPr lang="es-MX" dirty="0">
+                      <a:latin typeface="Google Sans" pitchFamily="2" charset="0"/>
+                      <a:ea typeface="Google Sans" pitchFamily="2" charset="0"/>
+                      <a:cs typeface="Google Sans" pitchFamily="2" charset="0"/>
+                    </a:endParaRPr>
+                  </a:p>
+                </p:txBody>
+              </p:sp>
+            </mc:Choice>
+            <mc:Fallback>
+              <p:sp>
+                <p:nvSpPr>
+                  <p:cNvPr id="131" name="CuadroTexto 130">
+                    <a:extLst>
+                      <a:ext uri="{FF2B5EF4-FFF2-40B4-BE49-F238E27FC236}">
+                        <a16:creationId xmlns:a16="http://schemas.microsoft.com/office/drawing/2014/main" id="{22EC5355-18FF-E39D-E8C5-46A2FA16DA45}"/>
+                      </a:ext>
+                    </a:extLst>
+                  </p:cNvPr>
+                  <p:cNvSpPr txBox="1">
+                    <a:spLocks noRot="1" noChangeAspect="1" noMove="1" noResize="1" noEditPoints="1" noAdjustHandles="1" noChangeArrowheads="1" noChangeShapeType="1" noTextEdit="1"/>
+                  </p:cNvSpPr>
+                  <p:nvPr/>
+                </p:nvSpPr>
+                <p:spPr>
+                  <a:xfrm>
+                    <a:off x="2810863" y="2665553"/>
+                    <a:ext cx="302967" cy="520399"/>
+                  </a:xfrm>
+                  <a:prstGeom prst="rect">
+                    <a:avLst/>
+                  </a:prstGeom>
+                  <a:blipFill>
+                    <a:blip r:embed="rId9"/>
+                    <a:stretch>
+                      <a:fillRect/>
+                    </a:stretch>
+                  </a:blipFill>
+                </p:spPr>
+                <p:txBody>
+                  <a:bodyPr/>
+                  <a:lstStyle/>
+                  <a:p>
+                    <a:r>
+                      <a:rPr lang="es-MX">
+                        <a:noFill/>
+                      </a:rPr>
+                      <a:t> </a:t>
+                    </a:r>
+                  </a:p>
+                </p:txBody>
+              </p:sp>
+            </mc:Fallback>
+          </mc:AlternateContent>
+          <mc:AlternateContent xmlns:mc="http://schemas.openxmlformats.org/markup-compatibility/2006">
+            <mc:Choice xmlns:a14="http://schemas.microsoft.com/office/drawing/2010/main" Requires="a14">
+              <p:sp>
+                <p:nvSpPr>
+                  <p:cNvPr id="132" name="CuadroTexto 131">
+                    <a:extLst>
+                      <a:ext uri="{FF2B5EF4-FFF2-40B4-BE49-F238E27FC236}">
+                        <a16:creationId xmlns:a16="http://schemas.microsoft.com/office/drawing/2014/main" id="{9F5032B5-3997-E94A-E717-B4F6BE9E3599}"/>
+                      </a:ext>
+                    </a:extLst>
+                  </p:cNvPr>
+                  <p:cNvSpPr txBox="1"/>
+                  <p:nvPr/>
+                </p:nvSpPr>
+                <p:spPr>
+                  <a:xfrm>
+                    <a:off x="3265015" y="2662035"/>
+                    <a:ext cx="302967" cy="520399"/>
+                  </a:xfrm>
+                  <a:prstGeom prst="rect">
+                    <a:avLst/>
+                  </a:prstGeom>
+                  <a:noFill/>
+                </p:spPr>
+                <p:txBody>
+                  <a:bodyPr wrap="square" lIns="0" tIns="0" rIns="0" bIns="0" rtlCol="0">
+                    <a:spAutoFit/>
+                  </a:bodyPr>
+                  <a:lstStyle/>
+                  <a:p>
+                    <a:pPr/>
+                    <a14:m>
+                      <m:oMathPara xmlns:m="http://schemas.openxmlformats.org/officeDocument/2006/math">
+                        <m:oMathParaPr>
+                          <m:jc m:val="centerGroup"/>
+                        </m:oMathParaPr>
+                        <m:oMath xmlns:m="http://schemas.openxmlformats.org/officeDocument/2006/math">
+                          <m:f>
+                            <m:fPr>
+                              <m:ctrlPr>
+                                <a:rPr lang="es-MX" b="0" i="1" smtClean="0">
+                                  <a:latin typeface="Cambria Math" panose="02040503050406030204" pitchFamily="18" charset="0"/>
+                                </a:rPr>
+                              </m:ctrlPr>
+                            </m:fPr>
+                            <m:num>
+                              <m:r>
+                                <a:rPr lang="es-MX" b="0" i="1" smtClean="0">
+                                  <a:latin typeface="Cambria Math" panose="02040503050406030204" pitchFamily="18" charset="0"/>
+                                </a:rPr>
+                                <m:t>1</m:t>
+                              </m:r>
+                            </m:num>
+                            <m:den>
+                              <m:r>
+                                <a:rPr lang="es-MX" b="0" i="1" smtClean="0">
+                                  <a:latin typeface="Cambria Math" panose="02040503050406030204" pitchFamily="18" charset="0"/>
+                                </a:rPr>
+                                <m:t>20</m:t>
+                              </m:r>
+                            </m:den>
+                          </m:f>
+                        </m:oMath>
+                      </m:oMathPara>
+                    </a14:m>
+                    <a:endParaRPr lang="es-MX" dirty="0">
+                      <a:latin typeface="Google Sans" pitchFamily="2" charset="0"/>
+                      <a:ea typeface="Google Sans" pitchFamily="2" charset="0"/>
+                      <a:cs typeface="Google Sans" pitchFamily="2" charset="0"/>
+                    </a:endParaRPr>
+                  </a:p>
+                </p:txBody>
+              </p:sp>
+            </mc:Choice>
+            <mc:Fallback>
+              <p:sp>
+                <p:nvSpPr>
+                  <p:cNvPr id="132" name="CuadroTexto 131">
+                    <a:extLst>
+                      <a:ext uri="{FF2B5EF4-FFF2-40B4-BE49-F238E27FC236}">
+                        <a16:creationId xmlns:a16="http://schemas.microsoft.com/office/drawing/2014/main" id="{9F5032B5-3997-E94A-E717-B4F6BE9E3599}"/>
+                      </a:ext>
+                    </a:extLst>
+                  </p:cNvPr>
+                  <p:cNvSpPr txBox="1">
+                    <a:spLocks noRot="1" noChangeAspect="1" noMove="1" noResize="1" noEditPoints="1" noAdjustHandles="1" noChangeArrowheads="1" noChangeShapeType="1" noTextEdit="1"/>
+                  </p:cNvSpPr>
+                  <p:nvPr/>
+                </p:nvSpPr>
+                <p:spPr>
+                  <a:xfrm>
+                    <a:off x="3265015" y="2662035"/>
+                    <a:ext cx="302967" cy="520399"/>
+                  </a:xfrm>
+                  <a:prstGeom prst="rect">
+                    <a:avLst/>
+                  </a:prstGeom>
+                  <a:blipFill>
+                    <a:blip r:embed="rId8"/>
+                    <a:stretch>
+                      <a:fillRect/>
+                    </a:stretch>
+                  </a:blipFill>
+                </p:spPr>
+                <p:txBody>
+                  <a:bodyPr/>
+                  <a:lstStyle/>
+                  <a:p>
+                    <a:r>
+                      <a:rPr lang="es-MX">
+                        <a:noFill/>
+                      </a:rPr>
+                      <a:t> </a:t>
+                    </a:r>
+                  </a:p>
+                </p:txBody>
+              </p:sp>
+            </mc:Fallback>
+          </mc:AlternateContent>
+        </p:grpSp>
+        <p:grpSp>
+          <p:nvGrpSpPr>
+            <p:cNvPr id="133" name="Grupo 132">
+              <a:extLst>
+                <a:ext uri="{FF2B5EF4-FFF2-40B4-BE49-F238E27FC236}">
+                  <a16:creationId xmlns:a16="http://schemas.microsoft.com/office/drawing/2014/main" id="{54AD10DD-92DB-3A92-7409-F96A57BC9E99}"/>
+                </a:ext>
+              </a:extLst>
+            </p:cNvPr>
+            <p:cNvGrpSpPr/>
+            <p:nvPr/>
+          </p:nvGrpSpPr>
+          <p:grpSpPr>
+            <a:xfrm>
+              <a:off x="5970471" y="2681085"/>
+              <a:ext cx="2150713" cy="523917"/>
+              <a:chOff x="1417269" y="2662035"/>
+              <a:chExt cx="2150713" cy="523917"/>
+            </a:xfrm>
+          </p:grpSpPr>
+          <mc:AlternateContent xmlns:mc="http://schemas.openxmlformats.org/markup-compatibility/2006">
+            <mc:Choice xmlns:a14="http://schemas.microsoft.com/office/drawing/2010/main" Requires="a14">
+              <p:sp>
+                <p:nvSpPr>
+                  <p:cNvPr id="134" name="CuadroTexto 133">
+                    <a:extLst>
+                      <a:ext uri="{FF2B5EF4-FFF2-40B4-BE49-F238E27FC236}">
+                        <a16:creationId xmlns:a16="http://schemas.microsoft.com/office/drawing/2014/main" id="{5DE5FCA9-6041-240C-CF54-57D28B584C40}"/>
+                      </a:ext>
+                    </a:extLst>
+                  </p:cNvPr>
+                  <p:cNvSpPr txBox="1"/>
+                  <p:nvPr/>
+                </p:nvSpPr>
+                <p:spPr>
+                  <a:xfrm>
+                    <a:off x="1417269" y="2662035"/>
+                    <a:ext cx="302967" cy="520399"/>
+                  </a:xfrm>
+                  <a:prstGeom prst="rect">
+                    <a:avLst/>
+                  </a:prstGeom>
+                  <a:noFill/>
+                </p:spPr>
+                <p:txBody>
+                  <a:bodyPr wrap="square" lIns="0" tIns="0" rIns="0" bIns="0" rtlCol="0">
+                    <a:spAutoFit/>
+                  </a:bodyPr>
+                  <a:lstStyle/>
+                  <a:p>
+                    <a14:m>
+                      <m:oMathPara xmlns:m="http://schemas.openxmlformats.org/officeDocument/2006/math">
+                        <m:oMathParaPr>
+                          <m:jc m:val="centerGroup"/>
+                        </m:oMathParaPr>
+                        <m:oMath xmlns:m="http://schemas.openxmlformats.org/officeDocument/2006/math">
+                          <m:f>
+                            <m:fPr>
+                              <m:ctrlPr>
+                                <a:rPr lang="es-MX" b="0" i="1" smtClean="0">
+                                  <a:latin typeface="Cambria Math" panose="02040503050406030204" pitchFamily="18" charset="0"/>
+                                </a:rPr>
+                              </m:ctrlPr>
+                            </m:fPr>
+                            <m:num>
+                              <m:r>
+                                <a:rPr lang="es-MX" b="0" i="1" smtClean="0">
+                                  <a:latin typeface="Cambria Math" panose="02040503050406030204" pitchFamily="18" charset="0"/>
+                                </a:rPr>
+                                <m:t>1</m:t>
+                              </m:r>
+                            </m:num>
+                            <m:den>
+                              <m:r>
+                                <a:rPr lang="es-MX" b="0" i="1" smtClean="0">
+                                  <a:latin typeface="Cambria Math" panose="02040503050406030204" pitchFamily="18" charset="0"/>
+                                </a:rPr>
+                                <m:t>20</m:t>
+                              </m:r>
+                            </m:den>
+                          </m:f>
+                        </m:oMath>
+                      </m:oMathPara>
+                    </a14:m>
+                    <a:endParaRPr lang="es-MX" dirty="0">
+                      <a:latin typeface="Google Sans" pitchFamily="2" charset="0"/>
+                      <a:ea typeface="Google Sans" pitchFamily="2" charset="0"/>
+                      <a:cs typeface="Google Sans" pitchFamily="2" charset="0"/>
+                    </a:endParaRPr>
+                  </a:p>
+                </p:txBody>
+              </p:sp>
+            </mc:Choice>
+            <mc:Fallback>
+              <p:sp>
+                <p:nvSpPr>
+                  <p:cNvPr id="134" name="CuadroTexto 133">
+                    <a:extLst>
+                      <a:ext uri="{FF2B5EF4-FFF2-40B4-BE49-F238E27FC236}">
+                        <a16:creationId xmlns:a16="http://schemas.microsoft.com/office/drawing/2014/main" id="{5DE5FCA9-6041-240C-CF54-57D28B584C40}"/>
+                      </a:ext>
+                    </a:extLst>
+                  </p:cNvPr>
+                  <p:cNvSpPr txBox="1">
+                    <a:spLocks noRot="1" noChangeAspect="1" noMove="1" noResize="1" noEditPoints="1" noAdjustHandles="1" noChangeArrowheads="1" noChangeShapeType="1" noTextEdit="1"/>
+                  </p:cNvSpPr>
+                  <p:nvPr/>
+                </p:nvSpPr>
+                <p:spPr>
+                  <a:xfrm>
+                    <a:off x="1417269" y="2662035"/>
+                    <a:ext cx="302967" cy="520399"/>
+                  </a:xfrm>
+                  <a:prstGeom prst="rect">
+                    <a:avLst/>
+                  </a:prstGeom>
+                  <a:blipFill>
+                    <a:blip r:embed="rId10"/>
+                    <a:stretch>
+                      <a:fillRect/>
+                    </a:stretch>
+                  </a:blipFill>
+                </p:spPr>
+                <p:txBody>
+                  <a:bodyPr/>
+                  <a:lstStyle/>
+                  <a:p>
+                    <a:r>
+                      <a:rPr lang="es-MX">
+                        <a:noFill/>
+                      </a:rPr>
+                      <a:t> </a:t>
+                    </a:r>
+                  </a:p>
+                </p:txBody>
+              </p:sp>
+            </mc:Fallback>
+          </mc:AlternateContent>
+          <mc:AlternateContent xmlns:mc="http://schemas.openxmlformats.org/markup-compatibility/2006">
+            <mc:Choice xmlns:a14="http://schemas.microsoft.com/office/drawing/2010/main" Requires="a14">
+              <p:sp>
+                <p:nvSpPr>
+                  <p:cNvPr id="135" name="CuadroTexto 134">
+                    <a:extLst>
+                      <a:ext uri="{FF2B5EF4-FFF2-40B4-BE49-F238E27FC236}">
+                        <a16:creationId xmlns:a16="http://schemas.microsoft.com/office/drawing/2014/main" id="{C852722E-11B3-B5B4-3299-5DCB86843DC7}"/>
+                      </a:ext>
+                    </a:extLst>
+                  </p:cNvPr>
+                  <p:cNvSpPr txBox="1"/>
+                  <p:nvPr/>
+                </p:nvSpPr>
+                <p:spPr>
+                  <a:xfrm>
+                    <a:off x="1886990" y="2662035"/>
+                    <a:ext cx="302967" cy="520399"/>
+                  </a:xfrm>
+                  <a:prstGeom prst="rect">
+                    <a:avLst/>
+                  </a:prstGeom>
+                  <a:noFill/>
+                </p:spPr>
+                <p:txBody>
+                  <a:bodyPr wrap="square" lIns="0" tIns="0" rIns="0" bIns="0" rtlCol="0">
+                    <a:spAutoFit/>
+                  </a:bodyPr>
+                  <a:lstStyle/>
+                  <a:p>
+                    <a:pPr/>
+                    <a14:m>
+                      <m:oMathPara xmlns:m="http://schemas.openxmlformats.org/officeDocument/2006/math">
+                        <m:oMathParaPr>
+                          <m:jc m:val="centerGroup"/>
+                        </m:oMathParaPr>
+                        <m:oMath xmlns:m="http://schemas.openxmlformats.org/officeDocument/2006/math">
+                          <m:f>
+                            <m:fPr>
+                              <m:ctrlPr>
+                                <a:rPr lang="es-MX" b="0" i="1" smtClean="0">
+                                  <a:latin typeface="Cambria Math" panose="02040503050406030204" pitchFamily="18" charset="0"/>
+                                </a:rPr>
+                              </m:ctrlPr>
+                            </m:fPr>
+                            <m:num>
+                              <m:r>
+                                <a:rPr lang="es-MX" b="0" i="1" smtClean="0">
+                                  <a:latin typeface="Cambria Math" panose="02040503050406030204" pitchFamily="18" charset="0"/>
+                                </a:rPr>
+                                <m:t>1</m:t>
+                              </m:r>
+                            </m:num>
+                            <m:den>
+                              <m:r>
+                                <a:rPr lang="es-MX" b="0" i="1" smtClean="0">
+                                  <a:latin typeface="Cambria Math" panose="02040503050406030204" pitchFamily="18" charset="0"/>
+                                </a:rPr>
+                                <m:t>20</m:t>
+                              </m:r>
+                            </m:den>
+                          </m:f>
+                        </m:oMath>
+                      </m:oMathPara>
+                    </a14:m>
+                    <a:endParaRPr lang="es-MX" dirty="0">
+                      <a:latin typeface="Google Sans" pitchFamily="2" charset="0"/>
+                      <a:ea typeface="Google Sans" pitchFamily="2" charset="0"/>
+                      <a:cs typeface="Google Sans" pitchFamily="2" charset="0"/>
+                    </a:endParaRPr>
+                  </a:p>
+                </p:txBody>
+              </p:sp>
+            </mc:Choice>
+            <mc:Fallback>
+              <p:sp>
+                <p:nvSpPr>
+                  <p:cNvPr id="135" name="CuadroTexto 134">
+                    <a:extLst>
+                      <a:ext uri="{FF2B5EF4-FFF2-40B4-BE49-F238E27FC236}">
+                        <a16:creationId xmlns:a16="http://schemas.microsoft.com/office/drawing/2014/main" id="{C852722E-11B3-B5B4-3299-5DCB86843DC7}"/>
+                      </a:ext>
+                    </a:extLst>
+                  </p:cNvPr>
+                  <p:cNvSpPr txBox="1">
+                    <a:spLocks noRot="1" noChangeAspect="1" noMove="1" noResize="1" noEditPoints="1" noAdjustHandles="1" noChangeArrowheads="1" noChangeShapeType="1" noTextEdit="1"/>
+                  </p:cNvSpPr>
+                  <p:nvPr/>
+                </p:nvSpPr>
+                <p:spPr>
+                  <a:xfrm>
+                    <a:off x="1886990" y="2662035"/>
+                    <a:ext cx="302967" cy="520399"/>
+                  </a:xfrm>
+                  <a:prstGeom prst="rect">
+                    <a:avLst/>
+                  </a:prstGeom>
+                  <a:blipFill>
+                    <a:blip r:embed="rId11"/>
+                    <a:stretch>
+                      <a:fillRect/>
+                    </a:stretch>
+                  </a:blipFill>
+                </p:spPr>
+                <p:txBody>
+                  <a:bodyPr/>
+                  <a:lstStyle/>
+                  <a:p>
+                    <a:r>
+                      <a:rPr lang="es-MX">
+                        <a:noFill/>
+                      </a:rPr>
+                      <a:t> </a:t>
+                    </a:r>
+                  </a:p>
+                </p:txBody>
+              </p:sp>
+            </mc:Fallback>
+          </mc:AlternateContent>
+          <mc:AlternateContent xmlns:mc="http://schemas.openxmlformats.org/markup-compatibility/2006">
+            <mc:Choice xmlns:a14="http://schemas.microsoft.com/office/drawing/2010/main" Requires="a14">
+              <p:sp>
+                <p:nvSpPr>
+                  <p:cNvPr id="136" name="CuadroTexto 135">
+                    <a:extLst>
+                      <a:ext uri="{FF2B5EF4-FFF2-40B4-BE49-F238E27FC236}">
+                        <a16:creationId xmlns:a16="http://schemas.microsoft.com/office/drawing/2014/main" id="{913BE50A-47DC-A025-F84A-9CDC60E1E3F0}"/>
+                      </a:ext>
+                    </a:extLst>
+                  </p:cNvPr>
+                  <p:cNvSpPr txBox="1"/>
+                  <p:nvPr/>
+                </p:nvSpPr>
+                <p:spPr>
+                  <a:xfrm>
+                    <a:off x="2356711" y="2662035"/>
+                    <a:ext cx="302967" cy="520399"/>
+                  </a:xfrm>
+                  <a:prstGeom prst="rect">
+                    <a:avLst/>
+                  </a:prstGeom>
+                  <a:noFill/>
+                </p:spPr>
+                <p:txBody>
+                  <a:bodyPr wrap="square" lIns="0" tIns="0" rIns="0" bIns="0" rtlCol="0">
+                    <a:spAutoFit/>
+                  </a:bodyPr>
+                  <a:lstStyle/>
+                  <a:p>
+                    <a:pPr/>
+                    <a14:m>
+                      <m:oMathPara xmlns:m="http://schemas.openxmlformats.org/officeDocument/2006/math">
+                        <m:oMathParaPr>
+                          <m:jc m:val="centerGroup"/>
+                        </m:oMathParaPr>
+                        <m:oMath xmlns:m="http://schemas.openxmlformats.org/officeDocument/2006/math">
+                          <m:f>
+                            <m:fPr>
+                              <m:ctrlPr>
+                                <a:rPr lang="es-MX" b="0" i="1" smtClean="0">
+                                  <a:latin typeface="Cambria Math" panose="02040503050406030204" pitchFamily="18" charset="0"/>
+                                </a:rPr>
+                              </m:ctrlPr>
+                            </m:fPr>
+                            <m:num>
+                              <m:r>
+                                <a:rPr lang="es-MX" b="0" i="1" smtClean="0">
+                                  <a:latin typeface="Cambria Math" panose="02040503050406030204" pitchFamily="18" charset="0"/>
+                                </a:rPr>
+                                <m:t>1</m:t>
+                              </m:r>
+                            </m:num>
+                            <m:den>
+                              <m:r>
+                                <a:rPr lang="es-MX" b="0" i="1" smtClean="0">
+                                  <a:latin typeface="Cambria Math" panose="02040503050406030204" pitchFamily="18" charset="0"/>
+                                </a:rPr>
+                                <m:t>20</m:t>
+                              </m:r>
+                            </m:den>
+                          </m:f>
+                        </m:oMath>
+                      </m:oMathPara>
+                    </a14:m>
+                    <a:endParaRPr lang="es-MX" dirty="0">
+                      <a:latin typeface="Google Sans" pitchFamily="2" charset="0"/>
+                      <a:ea typeface="Google Sans" pitchFamily="2" charset="0"/>
+                      <a:cs typeface="Google Sans" pitchFamily="2" charset="0"/>
+                    </a:endParaRPr>
+                  </a:p>
+                </p:txBody>
+              </p:sp>
+            </mc:Choice>
+            <mc:Fallback>
+              <p:sp>
+                <p:nvSpPr>
+                  <p:cNvPr id="136" name="CuadroTexto 135">
+                    <a:extLst>
+                      <a:ext uri="{FF2B5EF4-FFF2-40B4-BE49-F238E27FC236}">
+                        <a16:creationId xmlns:a16="http://schemas.microsoft.com/office/drawing/2014/main" id="{913BE50A-47DC-A025-F84A-9CDC60E1E3F0}"/>
+                      </a:ext>
+                    </a:extLst>
+                  </p:cNvPr>
+                  <p:cNvSpPr txBox="1">
+                    <a:spLocks noRot="1" noChangeAspect="1" noMove="1" noResize="1" noEditPoints="1" noAdjustHandles="1" noChangeArrowheads="1" noChangeShapeType="1" noTextEdit="1"/>
+                  </p:cNvSpPr>
+                  <p:nvPr/>
+                </p:nvSpPr>
+                <p:spPr>
+                  <a:xfrm>
+                    <a:off x="2356711" y="2662035"/>
+                    <a:ext cx="302967" cy="520399"/>
+                  </a:xfrm>
+                  <a:prstGeom prst="rect">
+                    <a:avLst/>
+                  </a:prstGeom>
+                  <a:blipFill>
+                    <a:blip r:embed="rId12"/>
+                    <a:stretch>
+                      <a:fillRect/>
+                    </a:stretch>
+                  </a:blipFill>
+                </p:spPr>
+                <p:txBody>
+                  <a:bodyPr/>
+                  <a:lstStyle/>
+                  <a:p>
+                    <a:r>
+                      <a:rPr lang="es-MX">
+                        <a:noFill/>
+                      </a:rPr>
+                      <a:t> </a:t>
+                    </a:r>
+                  </a:p>
+                </p:txBody>
+              </p:sp>
+            </mc:Fallback>
+          </mc:AlternateContent>
+          <mc:AlternateContent xmlns:mc="http://schemas.openxmlformats.org/markup-compatibility/2006">
+            <mc:Choice xmlns:a14="http://schemas.microsoft.com/office/drawing/2010/main" Requires="a14">
+              <p:sp>
+                <p:nvSpPr>
+                  <p:cNvPr id="137" name="CuadroTexto 136">
+                    <a:extLst>
+                      <a:ext uri="{FF2B5EF4-FFF2-40B4-BE49-F238E27FC236}">
+                        <a16:creationId xmlns:a16="http://schemas.microsoft.com/office/drawing/2014/main" id="{95DCBE4A-C4B6-639F-98A5-7E54FE1A4AD5}"/>
+                      </a:ext>
+                    </a:extLst>
+                  </p:cNvPr>
+                  <p:cNvSpPr txBox="1"/>
+                  <p:nvPr/>
+                </p:nvSpPr>
+                <p:spPr>
+                  <a:xfrm>
+                    <a:off x="2810863" y="2665553"/>
+                    <a:ext cx="302967" cy="520399"/>
+                  </a:xfrm>
+                  <a:prstGeom prst="rect">
+                    <a:avLst/>
+                  </a:prstGeom>
+                  <a:noFill/>
+                </p:spPr>
+                <p:txBody>
+                  <a:bodyPr wrap="square" lIns="0" tIns="0" rIns="0" bIns="0" rtlCol="0">
+                    <a:spAutoFit/>
+                  </a:bodyPr>
+                  <a:lstStyle/>
+                  <a:p>
+                    <a:pPr/>
+                    <a14:m>
+                      <m:oMathPara xmlns:m="http://schemas.openxmlformats.org/officeDocument/2006/math">
+                        <m:oMathParaPr>
+                          <m:jc m:val="centerGroup"/>
+                        </m:oMathParaPr>
+                        <m:oMath xmlns:m="http://schemas.openxmlformats.org/officeDocument/2006/math">
+                          <m:f>
+                            <m:fPr>
+                              <m:ctrlPr>
+                                <a:rPr lang="es-MX" b="0" i="1" smtClean="0">
+                                  <a:latin typeface="Cambria Math" panose="02040503050406030204" pitchFamily="18" charset="0"/>
+                                </a:rPr>
+                              </m:ctrlPr>
+                            </m:fPr>
+                            <m:num>
+                              <m:r>
+                                <a:rPr lang="es-MX" b="0" i="1" smtClean="0">
+                                  <a:latin typeface="Cambria Math" panose="02040503050406030204" pitchFamily="18" charset="0"/>
+                                </a:rPr>
+                                <m:t>1</m:t>
+                              </m:r>
+                            </m:num>
+                            <m:den>
+                              <m:r>
+                                <a:rPr lang="es-MX" b="0" i="1" smtClean="0">
+                                  <a:latin typeface="Cambria Math" panose="02040503050406030204" pitchFamily="18" charset="0"/>
+                                </a:rPr>
+                                <m:t>20</m:t>
+                              </m:r>
+                            </m:den>
+                          </m:f>
+                        </m:oMath>
+                      </m:oMathPara>
+                    </a14:m>
+                    <a:endParaRPr lang="es-MX" dirty="0">
+                      <a:latin typeface="Google Sans" pitchFamily="2" charset="0"/>
+                      <a:ea typeface="Google Sans" pitchFamily="2" charset="0"/>
+                      <a:cs typeface="Google Sans" pitchFamily="2" charset="0"/>
+                    </a:endParaRPr>
+                  </a:p>
+                </p:txBody>
+              </p:sp>
+            </mc:Choice>
+            <mc:Fallback>
+              <p:sp>
+                <p:nvSpPr>
+                  <p:cNvPr id="137" name="CuadroTexto 136">
+                    <a:extLst>
+                      <a:ext uri="{FF2B5EF4-FFF2-40B4-BE49-F238E27FC236}">
+                        <a16:creationId xmlns:a16="http://schemas.microsoft.com/office/drawing/2014/main" id="{95DCBE4A-C4B6-639F-98A5-7E54FE1A4AD5}"/>
+                      </a:ext>
+                    </a:extLst>
+                  </p:cNvPr>
+                  <p:cNvSpPr txBox="1">
+                    <a:spLocks noRot="1" noChangeAspect="1" noMove="1" noResize="1" noEditPoints="1" noAdjustHandles="1" noChangeArrowheads="1" noChangeShapeType="1" noTextEdit="1"/>
+                  </p:cNvSpPr>
+                  <p:nvPr/>
+                </p:nvSpPr>
+                <p:spPr>
+                  <a:xfrm>
+                    <a:off x="2810863" y="2665553"/>
+                    <a:ext cx="302967" cy="520399"/>
+                  </a:xfrm>
+                  <a:prstGeom prst="rect">
+                    <a:avLst/>
+                  </a:prstGeom>
+                  <a:blipFill>
+                    <a:blip r:embed="rId13"/>
+                    <a:stretch>
+                      <a:fillRect/>
+                    </a:stretch>
+                  </a:blipFill>
+                </p:spPr>
+                <p:txBody>
+                  <a:bodyPr/>
+                  <a:lstStyle/>
+                  <a:p>
+                    <a:r>
+                      <a:rPr lang="es-MX">
+                        <a:noFill/>
+                      </a:rPr>
+                      <a:t> </a:t>
+                    </a:r>
+                  </a:p>
+                </p:txBody>
+              </p:sp>
+            </mc:Fallback>
+          </mc:AlternateContent>
+          <mc:AlternateContent xmlns:mc="http://schemas.openxmlformats.org/markup-compatibility/2006">
+            <mc:Choice xmlns:a14="http://schemas.microsoft.com/office/drawing/2010/main" Requires="a14">
+              <p:sp>
+                <p:nvSpPr>
+                  <p:cNvPr id="138" name="CuadroTexto 137">
+                    <a:extLst>
+                      <a:ext uri="{FF2B5EF4-FFF2-40B4-BE49-F238E27FC236}">
+                        <a16:creationId xmlns:a16="http://schemas.microsoft.com/office/drawing/2014/main" id="{D4B61552-F198-B476-A4B1-3E7FD26E5576}"/>
+                      </a:ext>
+                    </a:extLst>
+                  </p:cNvPr>
+                  <p:cNvSpPr txBox="1"/>
+                  <p:nvPr/>
+                </p:nvSpPr>
+                <p:spPr>
+                  <a:xfrm>
+                    <a:off x="3265015" y="2662035"/>
+                    <a:ext cx="302967" cy="520399"/>
+                  </a:xfrm>
+                  <a:prstGeom prst="rect">
+                    <a:avLst/>
+                  </a:prstGeom>
+                  <a:noFill/>
+                </p:spPr>
+                <p:txBody>
+                  <a:bodyPr wrap="square" lIns="0" tIns="0" rIns="0" bIns="0" rtlCol="0">
+                    <a:spAutoFit/>
+                  </a:bodyPr>
+                  <a:lstStyle/>
+                  <a:p>
+                    <a:pPr/>
+                    <a14:m>
+                      <m:oMathPara xmlns:m="http://schemas.openxmlformats.org/officeDocument/2006/math">
+                        <m:oMathParaPr>
+                          <m:jc m:val="centerGroup"/>
+                        </m:oMathParaPr>
+                        <m:oMath xmlns:m="http://schemas.openxmlformats.org/officeDocument/2006/math">
+                          <m:f>
+                            <m:fPr>
+                              <m:ctrlPr>
+                                <a:rPr lang="es-MX" b="0" i="1" smtClean="0">
+                                  <a:latin typeface="Cambria Math" panose="02040503050406030204" pitchFamily="18" charset="0"/>
+                                </a:rPr>
+                              </m:ctrlPr>
+                            </m:fPr>
+                            <m:num>
+                              <m:r>
+                                <a:rPr lang="es-MX" b="0" i="1" smtClean="0">
+                                  <a:latin typeface="Cambria Math" panose="02040503050406030204" pitchFamily="18" charset="0"/>
+                                </a:rPr>
+                                <m:t>1</m:t>
+                              </m:r>
+                            </m:num>
+                            <m:den>
+                              <m:r>
+                                <a:rPr lang="es-MX" b="0" i="1" smtClean="0">
+                                  <a:latin typeface="Cambria Math" panose="02040503050406030204" pitchFamily="18" charset="0"/>
+                                </a:rPr>
+                                <m:t>20</m:t>
+                              </m:r>
+                            </m:den>
+                          </m:f>
+                        </m:oMath>
+                      </m:oMathPara>
+                    </a14:m>
+                    <a:endParaRPr lang="es-MX" dirty="0">
+                      <a:latin typeface="Google Sans" pitchFamily="2" charset="0"/>
+                      <a:ea typeface="Google Sans" pitchFamily="2" charset="0"/>
+                      <a:cs typeface="Google Sans" pitchFamily="2" charset="0"/>
+                    </a:endParaRPr>
+                  </a:p>
+                </p:txBody>
+              </p:sp>
+            </mc:Choice>
+            <mc:Fallback>
+              <p:sp>
+                <p:nvSpPr>
+                  <p:cNvPr id="138" name="CuadroTexto 137">
+                    <a:extLst>
+                      <a:ext uri="{FF2B5EF4-FFF2-40B4-BE49-F238E27FC236}">
+                        <a16:creationId xmlns:a16="http://schemas.microsoft.com/office/drawing/2014/main" id="{D4B61552-F198-B476-A4B1-3E7FD26E5576}"/>
+                      </a:ext>
+                    </a:extLst>
+                  </p:cNvPr>
+                  <p:cNvSpPr txBox="1">
+                    <a:spLocks noRot="1" noChangeAspect="1" noMove="1" noResize="1" noEditPoints="1" noAdjustHandles="1" noChangeArrowheads="1" noChangeShapeType="1" noTextEdit="1"/>
+                  </p:cNvSpPr>
+                  <p:nvPr/>
+                </p:nvSpPr>
+                <p:spPr>
+                  <a:xfrm>
+                    <a:off x="3265015" y="2662035"/>
+                    <a:ext cx="302967" cy="520399"/>
+                  </a:xfrm>
+                  <a:prstGeom prst="rect">
+                    <a:avLst/>
+                  </a:prstGeom>
+                  <a:blipFill>
+                    <a:blip r:embed="rId12"/>
+                    <a:stretch>
+                      <a:fillRect/>
+                    </a:stretch>
+                  </a:blipFill>
+                </p:spPr>
+                <p:txBody>
+                  <a:bodyPr/>
+                  <a:lstStyle/>
+                  <a:p>
+                    <a:r>
+                      <a:rPr lang="es-MX">
+                        <a:noFill/>
+                      </a:rPr>
+                      <a:t> </a:t>
+                    </a:r>
+                  </a:p>
+                </p:txBody>
+              </p:sp>
+            </mc:Fallback>
+          </mc:AlternateContent>
+        </p:grpSp>
+        <p:grpSp>
+          <p:nvGrpSpPr>
+            <p:cNvPr id="139" name="Grupo 138">
+              <a:extLst>
+                <a:ext uri="{FF2B5EF4-FFF2-40B4-BE49-F238E27FC236}">
+                  <a16:creationId xmlns:a16="http://schemas.microsoft.com/office/drawing/2014/main" id="{B4862337-316A-4E1C-5A22-27F7485DB9B4}"/>
+                </a:ext>
+              </a:extLst>
+            </p:cNvPr>
+            <p:cNvGrpSpPr/>
+            <p:nvPr/>
+          </p:nvGrpSpPr>
+          <p:grpSpPr>
+            <a:xfrm>
+              <a:off x="8232334" y="2662035"/>
+              <a:ext cx="2150713" cy="523917"/>
+              <a:chOff x="1417269" y="2662035"/>
+              <a:chExt cx="2150713" cy="523917"/>
+            </a:xfrm>
+          </p:grpSpPr>
+          <mc:AlternateContent xmlns:mc="http://schemas.openxmlformats.org/markup-compatibility/2006">
+            <mc:Choice xmlns:a14="http://schemas.microsoft.com/office/drawing/2010/main" Requires="a14">
+              <p:sp>
+                <p:nvSpPr>
+                  <p:cNvPr id="140" name="CuadroTexto 139">
+                    <a:extLst>
+                      <a:ext uri="{FF2B5EF4-FFF2-40B4-BE49-F238E27FC236}">
+                        <a16:creationId xmlns:a16="http://schemas.microsoft.com/office/drawing/2014/main" id="{700242F2-FECE-6D22-8122-84C7B92D2B06}"/>
+                      </a:ext>
+                    </a:extLst>
+                  </p:cNvPr>
+                  <p:cNvSpPr txBox="1"/>
+                  <p:nvPr/>
+                </p:nvSpPr>
+                <p:spPr>
+                  <a:xfrm>
+                    <a:off x="1417269" y="2662035"/>
+                    <a:ext cx="302967" cy="520399"/>
+                  </a:xfrm>
+                  <a:prstGeom prst="rect">
+                    <a:avLst/>
+                  </a:prstGeom>
+                  <a:noFill/>
+                </p:spPr>
+                <p:txBody>
+                  <a:bodyPr wrap="square" lIns="0" tIns="0" rIns="0" bIns="0" rtlCol="0">
+                    <a:spAutoFit/>
+                  </a:bodyPr>
+                  <a:lstStyle/>
+                  <a:p>
+                    <a14:m>
+                      <m:oMathPara xmlns:m="http://schemas.openxmlformats.org/officeDocument/2006/math">
+                        <m:oMathParaPr>
+                          <m:jc m:val="centerGroup"/>
+                        </m:oMathParaPr>
+                        <m:oMath xmlns:m="http://schemas.openxmlformats.org/officeDocument/2006/math">
+                          <m:f>
+                            <m:fPr>
+                              <m:ctrlPr>
+                                <a:rPr lang="es-MX" b="0" i="1" smtClean="0">
+                                  <a:latin typeface="Cambria Math" panose="02040503050406030204" pitchFamily="18" charset="0"/>
+                                </a:rPr>
+                              </m:ctrlPr>
+                            </m:fPr>
+                            <m:num>
+                              <m:r>
+                                <a:rPr lang="es-MX" b="0" i="1" smtClean="0">
+                                  <a:latin typeface="Cambria Math" panose="02040503050406030204" pitchFamily="18" charset="0"/>
+                                </a:rPr>
+                                <m:t>1</m:t>
+                              </m:r>
+                            </m:num>
+                            <m:den>
+                              <m:r>
+                                <a:rPr lang="es-MX" b="0" i="1" smtClean="0">
+                                  <a:latin typeface="Cambria Math" panose="02040503050406030204" pitchFamily="18" charset="0"/>
+                                </a:rPr>
+                                <m:t>20</m:t>
+                              </m:r>
+                            </m:den>
+                          </m:f>
+                        </m:oMath>
+                      </m:oMathPara>
+                    </a14:m>
+                    <a:endParaRPr lang="es-MX" dirty="0">
+                      <a:latin typeface="Google Sans" pitchFamily="2" charset="0"/>
+                      <a:ea typeface="Google Sans" pitchFamily="2" charset="0"/>
+                      <a:cs typeface="Google Sans" pitchFamily="2" charset="0"/>
+                    </a:endParaRPr>
+                  </a:p>
+                </p:txBody>
+              </p:sp>
+            </mc:Choice>
+            <mc:Fallback>
+              <p:sp>
+                <p:nvSpPr>
+                  <p:cNvPr id="140" name="CuadroTexto 139">
+                    <a:extLst>
+                      <a:ext uri="{FF2B5EF4-FFF2-40B4-BE49-F238E27FC236}">
+                        <a16:creationId xmlns:a16="http://schemas.microsoft.com/office/drawing/2014/main" id="{700242F2-FECE-6D22-8122-84C7B92D2B06}"/>
+                      </a:ext>
+                    </a:extLst>
+                  </p:cNvPr>
+                  <p:cNvSpPr txBox="1">
+                    <a:spLocks noRot="1" noChangeAspect="1" noMove="1" noResize="1" noEditPoints="1" noAdjustHandles="1" noChangeArrowheads="1" noChangeShapeType="1" noTextEdit="1"/>
+                  </p:cNvSpPr>
+                  <p:nvPr/>
+                </p:nvSpPr>
+                <p:spPr>
+                  <a:xfrm>
+                    <a:off x="1417269" y="2662035"/>
+                    <a:ext cx="302967" cy="520399"/>
+                  </a:xfrm>
+                  <a:prstGeom prst="rect">
+                    <a:avLst/>
+                  </a:prstGeom>
+                  <a:blipFill>
+                    <a:blip r:embed="rId14"/>
+                    <a:stretch>
+                      <a:fillRect/>
+                    </a:stretch>
+                  </a:blipFill>
+                </p:spPr>
+                <p:txBody>
+                  <a:bodyPr/>
+                  <a:lstStyle/>
+                  <a:p>
+                    <a:r>
+                      <a:rPr lang="es-MX">
+                        <a:noFill/>
+                      </a:rPr>
+                      <a:t> </a:t>
+                    </a:r>
+                  </a:p>
+                </p:txBody>
+              </p:sp>
+            </mc:Fallback>
+          </mc:AlternateContent>
+          <mc:AlternateContent xmlns:mc="http://schemas.openxmlformats.org/markup-compatibility/2006">
+            <mc:Choice xmlns:a14="http://schemas.microsoft.com/office/drawing/2010/main" Requires="a14">
+              <p:sp>
+                <p:nvSpPr>
+                  <p:cNvPr id="141" name="CuadroTexto 140">
+                    <a:extLst>
+                      <a:ext uri="{FF2B5EF4-FFF2-40B4-BE49-F238E27FC236}">
+                        <a16:creationId xmlns:a16="http://schemas.microsoft.com/office/drawing/2014/main" id="{EF1C72FC-C83B-CBDE-FE77-70D1646B108B}"/>
+                      </a:ext>
+                    </a:extLst>
+                  </p:cNvPr>
+                  <p:cNvSpPr txBox="1"/>
+                  <p:nvPr/>
+                </p:nvSpPr>
+                <p:spPr>
+                  <a:xfrm>
+                    <a:off x="1886990" y="2662035"/>
+                    <a:ext cx="302967" cy="520399"/>
+                  </a:xfrm>
+                  <a:prstGeom prst="rect">
+                    <a:avLst/>
+                  </a:prstGeom>
+                  <a:noFill/>
+                </p:spPr>
+                <p:txBody>
+                  <a:bodyPr wrap="square" lIns="0" tIns="0" rIns="0" bIns="0" rtlCol="0">
+                    <a:spAutoFit/>
+                  </a:bodyPr>
+                  <a:lstStyle/>
+                  <a:p>
+                    <a:pPr/>
+                    <a14:m>
+                      <m:oMathPara xmlns:m="http://schemas.openxmlformats.org/officeDocument/2006/math">
+                        <m:oMathParaPr>
+                          <m:jc m:val="centerGroup"/>
+                        </m:oMathParaPr>
+                        <m:oMath xmlns:m="http://schemas.openxmlformats.org/officeDocument/2006/math">
+                          <m:f>
+                            <m:fPr>
+                              <m:ctrlPr>
+                                <a:rPr lang="es-MX" b="0" i="1" smtClean="0">
+                                  <a:latin typeface="Cambria Math" panose="02040503050406030204" pitchFamily="18" charset="0"/>
+                                </a:rPr>
+                              </m:ctrlPr>
+                            </m:fPr>
+                            <m:num>
+                              <m:r>
+                                <a:rPr lang="es-MX" b="0" i="1" smtClean="0">
+                                  <a:latin typeface="Cambria Math" panose="02040503050406030204" pitchFamily="18" charset="0"/>
+                                </a:rPr>
+                                <m:t>1</m:t>
+                              </m:r>
+                            </m:num>
+                            <m:den>
+                              <m:r>
+                                <a:rPr lang="es-MX" b="0" i="1" smtClean="0">
+                                  <a:latin typeface="Cambria Math" panose="02040503050406030204" pitchFamily="18" charset="0"/>
+                                </a:rPr>
+                                <m:t>20</m:t>
+                              </m:r>
+                            </m:den>
+                          </m:f>
+                        </m:oMath>
+                      </m:oMathPara>
+                    </a14:m>
+                    <a:endParaRPr lang="es-MX" dirty="0">
+                      <a:latin typeface="Google Sans" pitchFamily="2" charset="0"/>
+                      <a:ea typeface="Google Sans" pitchFamily="2" charset="0"/>
+                      <a:cs typeface="Google Sans" pitchFamily="2" charset="0"/>
+                    </a:endParaRPr>
+                  </a:p>
+                </p:txBody>
+              </p:sp>
+            </mc:Choice>
+            <mc:Fallback>
+              <p:sp>
+                <p:nvSpPr>
+                  <p:cNvPr id="141" name="CuadroTexto 140">
+                    <a:extLst>
+                      <a:ext uri="{FF2B5EF4-FFF2-40B4-BE49-F238E27FC236}">
+                        <a16:creationId xmlns:a16="http://schemas.microsoft.com/office/drawing/2014/main" id="{EF1C72FC-C83B-CBDE-FE77-70D1646B108B}"/>
+                      </a:ext>
+                    </a:extLst>
+                  </p:cNvPr>
+                  <p:cNvSpPr txBox="1">
+                    <a:spLocks noRot="1" noChangeAspect="1" noMove="1" noResize="1" noEditPoints="1" noAdjustHandles="1" noChangeArrowheads="1" noChangeShapeType="1" noTextEdit="1"/>
+                  </p:cNvSpPr>
+                  <p:nvPr/>
+                </p:nvSpPr>
+                <p:spPr>
+                  <a:xfrm>
+                    <a:off x="1886990" y="2662035"/>
+                    <a:ext cx="302967" cy="520399"/>
+                  </a:xfrm>
+                  <a:prstGeom prst="rect">
+                    <a:avLst/>
+                  </a:prstGeom>
+                  <a:blipFill>
+                    <a:blip r:embed="rId15"/>
+                    <a:stretch>
+                      <a:fillRect/>
+                    </a:stretch>
+                  </a:blipFill>
+                </p:spPr>
+                <p:txBody>
+                  <a:bodyPr/>
+                  <a:lstStyle/>
+                  <a:p>
+                    <a:r>
+                      <a:rPr lang="es-MX">
+                        <a:noFill/>
+                      </a:rPr>
+                      <a:t> </a:t>
+                    </a:r>
+                  </a:p>
+                </p:txBody>
+              </p:sp>
+            </mc:Fallback>
+          </mc:AlternateContent>
+          <mc:AlternateContent xmlns:mc="http://schemas.openxmlformats.org/markup-compatibility/2006">
+            <mc:Choice xmlns:a14="http://schemas.microsoft.com/office/drawing/2010/main" Requires="a14">
+              <p:sp>
+                <p:nvSpPr>
+                  <p:cNvPr id="142" name="CuadroTexto 141">
+                    <a:extLst>
+                      <a:ext uri="{FF2B5EF4-FFF2-40B4-BE49-F238E27FC236}">
+                        <a16:creationId xmlns:a16="http://schemas.microsoft.com/office/drawing/2014/main" id="{4C01C504-5E33-AAB6-D4D6-286242C98B7C}"/>
+                      </a:ext>
+                    </a:extLst>
+                  </p:cNvPr>
+                  <p:cNvSpPr txBox="1"/>
+                  <p:nvPr/>
+                </p:nvSpPr>
+                <p:spPr>
+                  <a:xfrm>
+                    <a:off x="2356711" y="2662035"/>
+                    <a:ext cx="302967" cy="520399"/>
+                  </a:xfrm>
+                  <a:prstGeom prst="rect">
+                    <a:avLst/>
+                  </a:prstGeom>
+                  <a:noFill/>
+                </p:spPr>
+                <p:txBody>
+                  <a:bodyPr wrap="square" lIns="0" tIns="0" rIns="0" bIns="0" rtlCol="0">
+                    <a:spAutoFit/>
+                  </a:bodyPr>
+                  <a:lstStyle/>
+                  <a:p>
+                    <a:pPr/>
+                    <a14:m>
+                      <m:oMathPara xmlns:m="http://schemas.openxmlformats.org/officeDocument/2006/math">
+                        <m:oMathParaPr>
+                          <m:jc m:val="centerGroup"/>
+                        </m:oMathParaPr>
+                        <m:oMath xmlns:m="http://schemas.openxmlformats.org/officeDocument/2006/math">
+                          <m:f>
+                            <m:fPr>
+                              <m:ctrlPr>
+                                <a:rPr lang="es-MX" b="0" i="1" smtClean="0">
+                                  <a:latin typeface="Cambria Math" panose="02040503050406030204" pitchFamily="18" charset="0"/>
+                                </a:rPr>
+                              </m:ctrlPr>
+                            </m:fPr>
+                            <m:num>
+                              <m:r>
+                                <a:rPr lang="es-MX" b="0" i="1" smtClean="0">
+                                  <a:latin typeface="Cambria Math" panose="02040503050406030204" pitchFamily="18" charset="0"/>
+                                </a:rPr>
+                                <m:t>1</m:t>
+                              </m:r>
+                            </m:num>
+                            <m:den>
+                              <m:r>
+                                <a:rPr lang="es-MX" b="0" i="1" smtClean="0">
+                                  <a:latin typeface="Cambria Math" panose="02040503050406030204" pitchFamily="18" charset="0"/>
+                                </a:rPr>
+                                <m:t>20</m:t>
+                              </m:r>
+                            </m:den>
+                          </m:f>
+                        </m:oMath>
+                      </m:oMathPara>
+                    </a14:m>
+                    <a:endParaRPr lang="es-MX" dirty="0">
+                      <a:latin typeface="Google Sans" pitchFamily="2" charset="0"/>
+                      <a:ea typeface="Google Sans" pitchFamily="2" charset="0"/>
+                      <a:cs typeface="Google Sans" pitchFamily="2" charset="0"/>
+                    </a:endParaRPr>
+                  </a:p>
+                </p:txBody>
+              </p:sp>
+            </mc:Choice>
+            <mc:Fallback>
+              <p:sp>
+                <p:nvSpPr>
+                  <p:cNvPr id="142" name="CuadroTexto 141">
+                    <a:extLst>
+                      <a:ext uri="{FF2B5EF4-FFF2-40B4-BE49-F238E27FC236}">
+                        <a16:creationId xmlns:a16="http://schemas.microsoft.com/office/drawing/2014/main" id="{4C01C504-5E33-AAB6-D4D6-286242C98B7C}"/>
+                      </a:ext>
+                    </a:extLst>
+                  </p:cNvPr>
+                  <p:cNvSpPr txBox="1">
+                    <a:spLocks noRot="1" noChangeAspect="1" noMove="1" noResize="1" noEditPoints="1" noAdjustHandles="1" noChangeArrowheads="1" noChangeShapeType="1" noTextEdit="1"/>
+                  </p:cNvSpPr>
+                  <p:nvPr/>
+                </p:nvSpPr>
+                <p:spPr>
+                  <a:xfrm>
+                    <a:off x="2356711" y="2662035"/>
+                    <a:ext cx="302967" cy="520399"/>
+                  </a:xfrm>
+                  <a:prstGeom prst="rect">
+                    <a:avLst/>
+                  </a:prstGeom>
+                  <a:blipFill>
+                    <a:blip r:embed="rId16"/>
+                    <a:stretch>
+                      <a:fillRect/>
+                    </a:stretch>
+                  </a:blipFill>
+                </p:spPr>
+                <p:txBody>
+                  <a:bodyPr/>
+                  <a:lstStyle/>
+                  <a:p>
+                    <a:r>
+                      <a:rPr lang="es-MX">
+                        <a:noFill/>
+                      </a:rPr>
+                      <a:t> </a:t>
+                    </a:r>
+                  </a:p>
+                </p:txBody>
+              </p:sp>
+            </mc:Fallback>
+          </mc:AlternateContent>
+          <mc:AlternateContent xmlns:mc="http://schemas.openxmlformats.org/markup-compatibility/2006">
+            <mc:Choice xmlns:a14="http://schemas.microsoft.com/office/drawing/2010/main" Requires="a14">
+              <p:sp>
+                <p:nvSpPr>
+                  <p:cNvPr id="143" name="CuadroTexto 142">
+                    <a:extLst>
+                      <a:ext uri="{FF2B5EF4-FFF2-40B4-BE49-F238E27FC236}">
+                        <a16:creationId xmlns:a16="http://schemas.microsoft.com/office/drawing/2014/main" id="{8ABE17B7-26E1-081E-2277-85C1DEE5F03B}"/>
+                      </a:ext>
+                    </a:extLst>
+                  </p:cNvPr>
+                  <p:cNvSpPr txBox="1"/>
+                  <p:nvPr/>
+                </p:nvSpPr>
+                <p:spPr>
+                  <a:xfrm>
+                    <a:off x="2810863" y="2665553"/>
+                    <a:ext cx="302967" cy="520399"/>
+                  </a:xfrm>
+                  <a:prstGeom prst="rect">
+                    <a:avLst/>
+                  </a:prstGeom>
+                  <a:noFill/>
+                </p:spPr>
+                <p:txBody>
+                  <a:bodyPr wrap="square" lIns="0" tIns="0" rIns="0" bIns="0" rtlCol="0">
+                    <a:spAutoFit/>
+                  </a:bodyPr>
+                  <a:lstStyle/>
+                  <a:p>
+                    <a:pPr/>
+                    <a14:m>
+                      <m:oMathPara xmlns:m="http://schemas.openxmlformats.org/officeDocument/2006/math">
+                        <m:oMathParaPr>
+                          <m:jc m:val="centerGroup"/>
+                        </m:oMathParaPr>
+                        <m:oMath xmlns:m="http://schemas.openxmlformats.org/officeDocument/2006/math">
+                          <m:f>
+                            <m:fPr>
+                              <m:ctrlPr>
+                                <a:rPr lang="es-MX" b="0" i="1" smtClean="0">
+                                  <a:latin typeface="Cambria Math" panose="02040503050406030204" pitchFamily="18" charset="0"/>
+                                </a:rPr>
+                              </m:ctrlPr>
+                            </m:fPr>
+                            <m:num>
+                              <m:r>
+                                <a:rPr lang="es-MX" b="0" i="1" smtClean="0">
+                                  <a:latin typeface="Cambria Math" panose="02040503050406030204" pitchFamily="18" charset="0"/>
+                                </a:rPr>
+                                <m:t>1</m:t>
+                              </m:r>
+                            </m:num>
+                            <m:den>
+                              <m:r>
+                                <a:rPr lang="es-MX" b="0" i="1" smtClean="0">
+                                  <a:latin typeface="Cambria Math" panose="02040503050406030204" pitchFamily="18" charset="0"/>
+                                </a:rPr>
+                                <m:t>20</m:t>
+                              </m:r>
+                            </m:den>
+                          </m:f>
+                        </m:oMath>
+                      </m:oMathPara>
+                    </a14:m>
+                    <a:endParaRPr lang="es-MX" dirty="0">
+                      <a:latin typeface="Google Sans" pitchFamily="2" charset="0"/>
+                      <a:ea typeface="Google Sans" pitchFamily="2" charset="0"/>
+                      <a:cs typeface="Google Sans" pitchFamily="2" charset="0"/>
+                    </a:endParaRPr>
+                  </a:p>
+                </p:txBody>
+              </p:sp>
+            </mc:Choice>
+            <mc:Fallback>
+              <p:sp>
+                <p:nvSpPr>
+                  <p:cNvPr id="143" name="CuadroTexto 142">
+                    <a:extLst>
+                      <a:ext uri="{FF2B5EF4-FFF2-40B4-BE49-F238E27FC236}">
+                        <a16:creationId xmlns:a16="http://schemas.microsoft.com/office/drawing/2014/main" id="{8ABE17B7-26E1-081E-2277-85C1DEE5F03B}"/>
+                      </a:ext>
+                    </a:extLst>
+                  </p:cNvPr>
+                  <p:cNvSpPr txBox="1">
+                    <a:spLocks noRot="1" noChangeAspect="1" noMove="1" noResize="1" noEditPoints="1" noAdjustHandles="1" noChangeArrowheads="1" noChangeShapeType="1" noTextEdit="1"/>
+                  </p:cNvSpPr>
+                  <p:nvPr/>
+                </p:nvSpPr>
+                <p:spPr>
+                  <a:xfrm>
+                    <a:off x="2810863" y="2665553"/>
+                    <a:ext cx="302967" cy="520399"/>
+                  </a:xfrm>
+                  <a:prstGeom prst="rect">
+                    <a:avLst/>
+                  </a:prstGeom>
+                  <a:blipFill>
+                    <a:blip r:embed="rId17"/>
+                    <a:stretch>
+                      <a:fillRect/>
+                    </a:stretch>
+                  </a:blipFill>
+                </p:spPr>
+                <p:txBody>
+                  <a:bodyPr/>
+                  <a:lstStyle/>
+                  <a:p>
+                    <a:r>
+                      <a:rPr lang="es-MX">
+                        <a:noFill/>
+                      </a:rPr>
+                      <a:t> </a:t>
+                    </a:r>
+                  </a:p>
+                </p:txBody>
+              </p:sp>
+            </mc:Fallback>
+          </mc:AlternateContent>
+          <mc:AlternateContent xmlns:mc="http://schemas.openxmlformats.org/markup-compatibility/2006">
+            <mc:Choice xmlns:a14="http://schemas.microsoft.com/office/drawing/2010/main" Requires="a14">
+              <p:sp>
+                <p:nvSpPr>
+                  <p:cNvPr id="144" name="CuadroTexto 143">
+                    <a:extLst>
+                      <a:ext uri="{FF2B5EF4-FFF2-40B4-BE49-F238E27FC236}">
+                        <a16:creationId xmlns:a16="http://schemas.microsoft.com/office/drawing/2014/main" id="{13755D75-370C-56A1-6674-2E0436BFA7C2}"/>
+                      </a:ext>
+                    </a:extLst>
+                  </p:cNvPr>
+                  <p:cNvSpPr txBox="1"/>
+                  <p:nvPr/>
+                </p:nvSpPr>
+                <p:spPr>
+                  <a:xfrm>
+                    <a:off x="3265015" y="2662035"/>
+                    <a:ext cx="302967" cy="520399"/>
+                  </a:xfrm>
+                  <a:prstGeom prst="rect">
+                    <a:avLst/>
+                  </a:prstGeom>
+                  <a:noFill/>
+                </p:spPr>
+                <p:txBody>
+                  <a:bodyPr wrap="square" lIns="0" tIns="0" rIns="0" bIns="0" rtlCol="0">
+                    <a:spAutoFit/>
+                  </a:bodyPr>
+                  <a:lstStyle/>
+                  <a:p>
+                    <a:pPr/>
+                    <a14:m>
+                      <m:oMathPara xmlns:m="http://schemas.openxmlformats.org/officeDocument/2006/math">
+                        <m:oMathParaPr>
+                          <m:jc m:val="centerGroup"/>
+                        </m:oMathParaPr>
+                        <m:oMath xmlns:m="http://schemas.openxmlformats.org/officeDocument/2006/math">
+                          <m:f>
+                            <m:fPr>
+                              <m:ctrlPr>
+                                <a:rPr lang="es-MX" b="0" i="1" smtClean="0">
+                                  <a:latin typeface="Cambria Math" panose="02040503050406030204" pitchFamily="18" charset="0"/>
+                                </a:rPr>
+                              </m:ctrlPr>
+                            </m:fPr>
+                            <m:num>
+                              <m:r>
+                                <a:rPr lang="es-MX" b="0" i="1" smtClean="0">
+                                  <a:latin typeface="Cambria Math" panose="02040503050406030204" pitchFamily="18" charset="0"/>
+                                </a:rPr>
+                                <m:t>1</m:t>
+                              </m:r>
+                            </m:num>
+                            <m:den>
+                              <m:r>
+                                <a:rPr lang="es-MX" b="0" i="1" smtClean="0">
+                                  <a:latin typeface="Cambria Math" panose="02040503050406030204" pitchFamily="18" charset="0"/>
+                                </a:rPr>
+                                <m:t>20</m:t>
+                              </m:r>
+                            </m:den>
+                          </m:f>
+                        </m:oMath>
+                      </m:oMathPara>
+                    </a14:m>
+                    <a:endParaRPr lang="es-MX" dirty="0">
+                      <a:latin typeface="Google Sans" pitchFamily="2" charset="0"/>
+                      <a:ea typeface="Google Sans" pitchFamily="2" charset="0"/>
+                      <a:cs typeface="Google Sans" pitchFamily="2" charset="0"/>
+                    </a:endParaRPr>
+                  </a:p>
+                </p:txBody>
+              </p:sp>
+            </mc:Choice>
+            <mc:Fallback>
+              <p:sp>
+                <p:nvSpPr>
+                  <p:cNvPr id="144" name="CuadroTexto 143">
+                    <a:extLst>
+                      <a:ext uri="{FF2B5EF4-FFF2-40B4-BE49-F238E27FC236}">
+                        <a16:creationId xmlns:a16="http://schemas.microsoft.com/office/drawing/2014/main" id="{13755D75-370C-56A1-6674-2E0436BFA7C2}"/>
+                      </a:ext>
+                    </a:extLst>
+                  </p:cNvPr>
+                  <p:cNvSpPr txBox="1">
+                    <a:spLocks noRot="1" noChangeAspect="1" noMove="1" noResize="1" noEditPoints="1" noAdjustHandles="1" noChangeArrowheads="1" noChangeShapeType="1" noTextEdit="1"/>
+                  </p:cNvSpPr>
+                  <p:nvPr/>
+                </p:nvSpPr>
+                <p:spPr>
+                  <a:xfrm>
+                    <a:off x="3265015" y="2662035"/>
+                    <a:ext cx="302967" cy="520399"/>
+                  </a:xfrm>
+                  <a:prstGeom prst="rect">
+                    <a:avLst/>
+                  </a:prstGeom>
+                  <a:blipFill>
+                    <a:blip r:embed="rId16"/>
+                    <a:stretch>
+                      <a:fillRect/>
+                    </a:stretch>
+                  </a:blipFill>
+                </p:spPr>
+                <p:txBody>
+                  <a:bodyPr/>
+                  <a:lstStyle/>
+                  <a:p>
+                    <a:r>
+                      <a:rPr lang="es-MX">
+                        <a:noFill/>
+                      </a:rPr>
+                      <a:t> </a:t>
+                    </a:r>
+                  </a:p>
+                </p:txBody>
+              </p:sp>
+            </mc:Fallback>
+          </mc:AlternateContent>
+        </p:grpSp>
+      </p:grpSp>
+      <p:sp>
+        <p:nvSpPr>
+          <p:cNvPr id="147" name="CuadroTexto 146">
+            <a:extLst>
+              <a:ext uri="{FF2B5EF4-FFF2-40B4-BE49-F238E27FC236}">
+                <a16:creationId xmlns:a16="http://schemas.microsoft.com/office/drawing/2014/main" id="{129FD8BF-289F-9E65-6E16-CA492F247F7E}"/>
+              </a:ext>
+            </a:extLst>
+          </p:cNvPr>
+          <p:cNvSpPr txBox="1"/>
+          <p:nvPr/>
+        </p:nvSpPr>
+        <p:spPr>
+          <a:xfrm>
+            <a:off x="626813" y="1933321"/>
+            <a:ext cx="1337349" cy="323165"/>
+          </a:xfrm>
+          <a:prstGeom prst="rect">
+            <a:avLst/>
+          </a:prstGeom>
+          <a:noFill/>
+          <a:ln w="38100">
+            <a:noFill/>
+          </a:ln>
+        </p:spPr>
+        <p:txBody>
+          <a:bodyPr wrap="square" rtlCol="0">
+            <a:spAutoFit/>
+          </a:bodyPr>
+          <a:lstStyle/>
+          <a:p>
+            <a:r>
+              <a:rPr lang="es-MX" sz="1500" dirty="0">
+                <a:latin typeface="Google Sans" pitchFamily="2" charset="0"/>
+                <a:ea typeface="Google Sans" pitchFamily="2" charset="0"/>
+                <a:cs typeface="Google Sans" pitchFamily="2" charset="0"/>
+              </a:rPr>
+              <a:t>Amino </a:t>
+            </a:r>
+            <a:r>
+              <a:rPr lang="es-MX" sz="1500" dirty="0" err="1">
+                <a:latin typeface="Google Sans" pitchFamily="2" charset="0"/>
+                <a:ea typeface="Google Sans" pitchFamily="2" charset="0"/>
+                <a:cs typeface="Google Sans" pitchFamily="2" charset="0"/>
+              </a:rPr>
+              <a:t>acid</a:t>
+            </a:r>
+            <a:endParaRPr lang="es-MX" sz="1500" dirty="0">
+              <a:latin typeface="Google Sans" pitchFamily="2" charset="0"/>
+              <a:ea typeface="Google Sans" pitchFamily="2" charset="0"/>
+              <a:cs typeface="Google Sans" pitchFamily="2" charset="0"/>
+            </a:endParaRPr>
+          </a:p>
+        </p:txBody>
+      </p:sp>
+      <p:sp>
+        <p:nvSpPr>
+          <p:cNvPr id="149" name="CuadroTexto 148">
+            <a:extLst>
+              <a:ext uri="{FF2B5EF4-FFF2-40B4-BE49-F238E27FC236}">
+                <a16:creationId xmlns:a16="http://schemas.microsoft.com/office/drawing/2014/main" id="{0256B87F-8ADE-E811-37D4-6B463C694C45}"/>
+              </a:ext>
+            </a:extLst>
+          </p:cNvPr>
+          <p:cNvSpPr txBox="1"/>
+          <p:nvPr/>
+        </p:nvSpPr>
+        <p:spPr>
+          <a:xfrm>
+            <a:off x="611244" y="2586915"/>
+            <a:ext cx="1314460" cy="323165"/>
+          </a:xfrm>
+          <a:prstGeom prst="rect">
+            <a:avLst/>
+          </a:prstGeom>
+          <a:noFill/>
+          <a:ln w="38100">
+            <a:noFill/>
+          </a:ln>
+        </p:spPr>
+        <p:txBody>
+          <a:bodyPr wrap="square" rtlCol="0">
+            <a:spAutoFit/>
+          </a:bodyPr>
+          <a:lstStyle/>
+          <a:p>
+            <a:r>
+              <a:rPr lang="es-MX" sz="1500" dirty="0" err="1">
+                <a:latin typeface="Google Sans" pitchFamily="2" charset="0"/>
+                <a:ea typeface="Google Sans" pitchFamily="2" charset="0"/>
+                <a:cs typeface="Google Sans" pitchFamily="2" charset="0"/>
+              </a:rPr>
+              <a:t>Probability</a:t>
+            </a:r>
+            <a:endParaRPr lang="es-MX" sz="1500" dirty="0">
+              <a:latin typeface="Google Sans" pitchFamily="2" charset="0"/>
+              <a:ea typeface="Google Sans" pitchFamily="2" charset="0"/>
+              <a:cs typeface="Google Sans" pitchFamily="2" charset="0"/>
+            </a:endParaRPr>
+          </a:p>
+        </p:txBody>
+      </p:sp>
+      <p:sp>
+        <p:nvSpPr>
+          <p:cNvPr id="151" name="CuadroTexto 150">
+            <a:extLst>
+              <a:ext uri="{FF2B5EF4-FFF2-40B4-BE49-F238E27FC236}">
+                <a16:creationId xmlns:a16="http://schemas.microsoft.com/office/drawing/2014/main" id="{491E2409-6580-BA91-5F7C-70D923268AEF}"/>
+              </a:ext>
+            </a:extLst>
+          </p:cNvPr>
+          <p:cNvSpPr txBox="1"/>
+          <p:nvPr/>
+        </p:nvSpPr>
+        <p:spPr>
+          <a:xfrm>
+            <a:off x="611244" y="3552895"/>
+            <a:ext cx="1314460" cy="323165"/>
+          </a:xfrm>
+          <a:prstGeom prst="rect">
+            <a:avLst/>
+          </a:prstGeom>
+          <a:noFill/>
+          <a:ln w="38100">
+            <a:noFill/>
+          </a:ln>
+        </p:spPr>
+        <p:txBody>
+          <a:bodyPr wrap="square" rtlCol="0">
+            <a:spAutoFit/>
+          </a:bodyPr>
+          <a:lstStyle/>
+          <a:p>
+            <a:r>
+              <a:rPr lang="es-MX" sz="1500" b="1" dirty="0" err="1">
+                <a:solidFill>
+                  <a:schemeClr val="tx1">
+                    <a:lumMod val="95000"/>
+                    <a:lumOff val="5000"/>
+                  </a:schemeClr>
+                </a:solidFill>
+                <a:latin typeface="Google Sans" pitchFamily="2" charset="0"/>
+                <a:ea typeface="Google Sans" pitchFamily="2" charset="0"/>
+                <a:cs typeface="Google Sans" pitchFamily="2" charset="0"/>
+              </a:rPr>
+              <a:t>Example</a:t>
+            </a:r>
+            <a:endParaRPr lang="es-MX" sz="1500" b="1" dirty="0">
+              <a:solidFill>
+                <a:schemeClr val="tx1">
+                  <a:lumMod val="95000"/>
+                  <a:lumOff val="5000"/>
+                </a:schemeClr>
+              </a:solidFill>
+              <a:latin typeface="Google Sans" pitchFamily="2" charset="0"/>
+              <a:ea typeface="Google Sans" pitchFamily="2" charset="0"/>
+              <a:cs typeface="Google Sans" pitchFamily="2" charset="0"/>
+            </a:endParaRPr>
+          </a:p>
+        </p:txBody>
+      </p:sp>
+      <p:grpSp>
+        <p:nvGrpSpPr>
+          <p:cNvPr id="254" name="Grupo 253">
+            <a:extLst>
+              <a:ext uri="{FF2B5EF4-FFF2-40B4-BE49-F238E27FC236}">
+                <a16:creationId xmlns:a16="http://schemas.microsoft.com/office/drawing/2014/main" id="{2CA57A33-6694-F8A6-2119-424F22E62438}"/>
+              </a:ext>
+            </a:extLst>
+          </p:cNvPr>
+          <p:cNvGrpSpPr/>
+          <p:nvPr/>
+        </p:nvGrpSpPr>
+        <p:grpSpPr>
+          <a:xfrm>
+            <a:off x="3155799" y="3429000"/>
+            <a:ext cx="5907217" cy="3206480"/>
+            <a:chOff x="3079012" y="3239778"/>
+            <a:chExt cx="5907217" cy="3206480"/>
+          </a:xfrm>
+        </p:grpSpPr>
+        <p:grpSp>
+          <p:nvGrpSpPr>
+            <p:cNvPr id="226" name="Grupo 225">
+              <a:extLst>
+                <a:ext uri="{FF2B5EF4-FFF2-40B4-BE49-F238E27FC236}">
+                  <a16:creationId xmlns:a16="http://schemas.microsoft.com/office/drawing/2014/main" id="{B33B8F66-1A49-F94E-95BF-FD61A28C59C4}"/>
+                </a:ext>
+              </a:extLst>
+            </p:cNvPr>
+            <p:cNvGrpSpPr/>
+            <p:nvPr/>
+          </p:nvGrpSpPr>
+          <p:grpSpPr>
+            <a:xfrm>
+              <a:off x="3079012" y="3239778"/>
+              <a:ext cx="5907217" cy="3206480"/>
+              <a:chOff x="4281487" y="3322336"/>
+              <a:chExt cx="5907217" cy="3206480"/>
+            </a:xfrm>
+          </p:grpSpPr>
+          <p:sp>
+            <p:nvSpPr>
+              <p:cNvPr id="177" name="CuadroTexto 176">
+                <a:extLst>
+                  <a:ext uri="{FF2B5EF4-FFF2-40B4-BE49-F238E27FC236}">
+                    <a16:creationId xmlns:a16="http://schemas.microsoft.com/office/drawing/2014/main" id="{167EECC2-3313-18CD-E54D-A69372E2197D}"/>
+                  </a:ext>
+                </a:extLst>
+              </p:cNvPr>
+              <p:cNvSpPr txBox="1"/>
+              <p:nvPr/>
+            </p:nvSpPr>
+            <p:spPr>
+              <a:xfrm>
+                <a:off x="5299008" y="3886029"/>
+                <a:ext cx="4141120" cy="830997"/>
+              </a:xfrm>
+              <a:prstGeom prst="rect">
+                <a:avLst/>
+              </a:prstGeom>
+              <a:noFill/>
+              <a:ln w="38100">
+                <a:noFill/>
+              </a:ln>
+            </p:spPr>
+            <p:txBody>
+              <a:bodyPr wrap="square" rtlCol="0">
+                <a:spAutoFit/>
+              </a:bodyPr>
+              <a:lstStyle/>
+              <a:p>
+                <a:r>
+                  <a:rPr lang="es-MX" sz="4800" dirty="0">
+                    <a:latin typeface="Google Sans" pitchFamily="2" charset="0"/>
+                    <a:ea typeface="Google Sans" pitchFamily="2" charset="0"/>
+                    <a:cs typeface="Google Sans" pitchFamily="2" charset="0"/>
+                  </a:rPr>
+                  <a:t>_  _  _  _  _</a:t>
+                </a:r>
+              </a:p>
+            </p:txBody>
+          </p:sp>
+          <p:sp>
+            <p:nvSpPr>
+              <p:cNvPr id="163" name="CuadroTexto 162">
+                <a:extLst>
+                  <a:ext uri="{FF2B5EF4-FFF2-40B4-BE49-F238E27FC236}">
+                    <a16:creationId xmlns:a16="http://schemas.microsoft.com/office/drawing/2014/main" id="{C97AD462-2C96-1B0A-56D7-79F768AE7457}"/>
+                  </a:ext>
+                </a:extLst>
+              </p:cNvPr>
+              <p:cNvSpPr txBox="1"/>
+              <p:nvPr/>
+            </p:nvSpPr>
+            <p:spPr>
+              <a:xfrm>
+                <a:off x="5311464" y="3322336"/>
+                <a:ext cx="4141120" cy="830997"/>
+              </a:xfrm>
+              <a:prstGeom prst="rect">
+                <a:avLst/>
+              </a:prstGeom>
+              <a:noFill/>
+              <a:ln w="38100">
+                <a:noFill/>
+              </a:ln>
+            </p:spPr>
+            <p:txBody>
+              <a:bodyPr wrap="square" rtlCol="0">
+                <a:spAutoFit/>
+              </a:bodyPr>
+              <a:lstStyle/>
+              <a:p>
+                <a:r>
+                  <a:rPr lang="es-MX" sz="4800" dirty="0">
+                    <a:latin typeface="Google Sans" pitchFamily="2" charset="0"/>
+                    <a:ea typeface="Google Sans" pitchFamily="2" charset="0"/>
+                    <a:cs typeface="Google Sans" pitchFamily="2" charset="0"/>
+                  </a:rPr>
+                  <a:t>_  _  _  _  _</a:t>
+                </a:r>
+              </a:p>
+            </p:txBody>
+          </p:sp>
+          <p:sp>
+            <p:nvSpPr>
+              <p:cNvPr id="165" name="CuadroTexto 164">
+                <a:extLst>
+                  <a:ext uri="{FF2B5EF4-FFF2-40B4-BE49-F238E27FC236}">
+                    <a16:creationId xmlns:a16="http://schemas.microsoft.com/office/drawing/2014/main" id="{DEC4644A-D201-4E21-E36B-C29CD61D7A57}"/>
+                  </a:ext>
+                </a:extLst>
+              </p:cNvPr>
+              <p:cNvSpPr txBox="1"/>
+              <p:nvPr/>
+            </p:nvSpPr>
+            <p:spPr>
+              <a:xfrm>
+                <a:off x="5311464" y="3507969"/>
+                <a:ext cx="554347" cy="523220"/>
+              </a:xfrm>
+              <a:prstGeom prst="rect">
+                <a:avLst/>
+              </a:prstGeom>
+              <a:noFill/>
+            </p:spPr>
+            <p:txBody>
+              <a:bodyPr wrap="square">
+                <a:spAutoFit/>
+              </a:bodyPr>
+              <a:lstStyle/>
+              <a:p>
+                <a:r>
+                  <a:rPr lang="es-MX" sz="2800" b="1" dirty="0">
+                    <a:solidFill>
+                      <a:schemeClr val="accent6">
+                        <a:lumMod val="50000"/>
+                      </a:schemeClr>
+                    </a:solidFill>
+                    <a:latin typeface="Google Sans" pitchFamily="2" charset="0"/>
+                    <a:ea typeface="Google Sans" pitchFamily="2" charset="0"/>
+                    <a:cs typeface="Google Sans" pitchFamily="2" charset="0"/>
+                  </a:rPr>
+                  <a:t>Q</a:t>
+                </a:r>
+                <a:endParaRPr lang="es-MX" sz="1600" dirty="0">
+                  <a:latin typeface="Google Sans" pitchFamily="2" charset="0"/>
+                  <a:ea typeface="Google Sans" pitchFamily="2" charset="0"/>
+                  <a:cs typeface="Google Sans" pitchFamily="2" charset="0"/>
+                </a:endParaRPr>
+              </a:p>
+            </p:txBody>
+          </p:sp>
+          <p:sp>
+            <p:nvSpPr>
+              <p:cNvPr id="173" name="CuadroTexto 172">
+                <a:extLst>
+                  <a:ext uri="{FF2B5EF4-FFF2-40B4-BE49-F238E27FC236}">
+                    <a16:creationId xmlns:a16="http://schemas.microsoft.com/office/drawing/2014/main" id="{10EB58F0-83BF-1A33-D9B1-AAB632D41F5D}"/>
+                  </a:ext>
+                </a:extLst>
+              </p:cNvPr>
+              <p:cNvSpPr txBox="1"/>
+              <p:nvPr/>
+            </p:nvSpPr>
+            <p:spPr>
+              <a:xfrm>
+                <a:off x="5345844" y="4889480"/>
+                <a:ext cx="4141120" cy="830997"/>
+              </a:xfrm>
+              <a:prstGeom prst="rect">
+                <a:avLst/>
+              </a:prstGeom>
+              <a:noFill/>
+              <a:ln w="38100">
+                <a:noFill/>
+              </a:ln>
+            </p:spPr>
+            <p:txBody>
+              <a:bodyPr wrap="square" rtlCol="0">
+                <a:spAutoFit/>
+              </a:bodyPr>
+              <a:lstStyle/>
+              <a:p>
+                <a:r>
+                  <a:rPr lang="es-MX" sz="4800" dirty="0">
+                    <a:latin typeface="Google Sans" pitchFamily="2" charset="0"/>
+                    <a:ea typeface="Google Sans" pitchFamily="2" charset="0"/>
+                    <a:cs typeface="Google Sans" pitchFamily="2" charset="0"/>
+                  </a:rPr>
+                  <a:t>_  _  _  _  _</a:t>
+                </a:r>
+              </a:p>
+            </p:txBody>
+          </p:sp>
+          <p:sp>
+            <p:nvSpPr>
+              <p:cNvPr id="175" name="CuadroTexto 174">
+                <a:extLst>
+                  <a:ext uri="{FF2B5EF4-FFF2-40B4-BE49-F238E27FC236}">
+                    <a16:creationId xmlns:a16="http://schemas.microsoft.com/office/drawing/2014/main" id="{A74BC2E6-AA5C-3E6A-CED6-3573D8434B1E}"/>
+                  </a:ext>
+                </a:extLst>
+              </p:cNvPr>
+              <p:cNvSpPr txBox="1"/>
+              <p:nvPr/>
+            </p:nvSpPr>
+            <p:spPr>
+              <a:xfrm>
+                <a:off x="5311464" y="5410764"/>
+                <a:ext cx="4141120" cy="830997"/>
+              </a:xfrm>
+              <a:prstGeom prst="rect">
+                <a:avLst/>
+              </a:prstGeom>
+              <a:noFill/>
+              <a:ln w="38100">
+                <a:noFill/>
+              </a:ln>
+            </p:spPr>
+            <p:txBody>
+              <a:bodyPr wrap="square" rtlCol="0">
+                <a:spAutoFit/>
+              </a:bodyPr>
+              <a:lstStyle/>
+              <a:p>
+                <a:r>
+                  <a:rPr lang="es-MX" sz="4800" dirty="0">
+                    <a:latin typeface="Google Sans" pitchFamily="2" charset="0"/>
+                    <a:ea typeface="Google Sans" pitchFamily="2" charset="0"/>
+                    <a:cs typeface="Google Sans" pitchFamily="2" charset="0"/>
+                  </a:rPr>
+                  <a:t>_  _  _  _  _</a:t>
+                </a:r>
+              </a:p>
+            </p:txBody>
+          </p:sp>
+          <p:sp>
+            <p:nvSpPr>
+              <p:cNvPr id="183" name="CuadroTexto 182">
+                <a:extLst>
+                  <a:ext uri="{FF2B5EF4-FFF2-40B4-BE49-F238E27FC236}">
+                    <a16:creationId xmlns:a16="http://schemas.microsoft.com/office/drawing/2014/main" id="{686477A5-444F-38C4-E492-34FF0A304973}"/>
+                  </a:ext>
+                </a:extLst>
+              </p:cNvPr>
+              <p:cNvSpPr txBox="1"/>
+              <p:nvPr/>
+            </p:nvSpPr>
+            <p:spPr>
+              <a:xfrm>
+                <a:off x="5918046" y="4125674"/>
+                <a:ext cx="408145" cy="523220"/>
+              </a:xfrm>
+              <a:prstGeom prst="rect">
+                <a:avLst/>
+              </a:prstGeom>
+              <a:noFill/>
+            </p:spPr>
+            <p:txBody>
+              <a:bodyPr wrap="square">
+                <a:spAutoFit/>
+              </a:bodyPr>
+              <a:lstStyle/>
+              <a:p>
+                <a:pPr algn="ctr"/>
+                <a:r>
+                  <a:rPr lang="es-MX" sz="2800" b="1" dirty="0">
+                    <a:solidFill>
+                      <a:schemeClr val="accent6">
+                        <a:lumMod val="50000"/>
+                      </a:schemeClr>
+                    </a:solidFill>
+                    <a:latin typeface="Google Sans" pitchFamily="2" charset="0"/>
+                    <a:ea typeface="Google Sans" pitchFamily="2" charset="0"/>
+                    <a:cs typeface="Google Sans" pitchFamily="2" charset="0"/>
+                  </a:rPr>
+                  <a:t>G</a:t>
+                </a:r>
+                <a:endParaRPr lang="es-MX" sz="1600" dirty="0">
+                  <a:latin typeface="Google Sans" pitchFamily="2" charset="0"/>
+                  <a:ea typeface="Google Sans" pitchFamily="2" charset="0"/>
+                  <a:cs typeface="Google Sans" pitchFamily="2" charset="0"/>
+                </a:endParaRPr>
+              </a:p>
+            </p:txBody>
+          </p:sp>
+          <p:sp>
+            <p:nvSpPr>
+              <p:cNvPr id="185" name="CuadroTexto 184">
+                <a:extLst>
+                  <a:ext uri="{FF2B5EF4-FFF2-40B4-BE49-F238E27FC236}">
+                    <a16:creationId xmlns:a16="http://schemas.microsoft.com/office/drawing/2014/main" id="{086451F8-3D49-0373-8064-439133EF47BC}"/>
+                  </a:ext>
+                </a:extLst>
+              </p:cNvPr>
+              <p:cNvSpPr txBox="1"/>
+              <p:nvPr/>
+            </p:nvSpPr>
+            <p:spPr>
+              <a:xfrm>
+                <a:off x="5333555" y="4627434"/>
+                <a:ext cx="554347" cy="523220"/>
+              </a:xfrm>
+              <a:prstGeom prst="rect">
+                <a:avLst/>
+              </a:prstGeom>
+              <a:noFill/>
+            </p:spPr>
+            <p:txBody>
+              <a:bodyPr wrap="square">
+                <a:spAutoFit/>
+              </a:bodyPr>
+              <a:lstStyle/>
+              <a:p>
+                <a:r>
+                  <a:rPr lang="es-MX" sz="2800" b="1" dirty="0">
+                    <a:solidFill>
+                      <a:schemeClr val="accent6">
+                        <a:lumMod val="50000"/>
+                      </a:schemeClr>
+                    </a:solidFill>
+                    <a:latin typeface="Google Sans" pitchFamily="2" charset="0"/>
+                    <a:ea typeface="Google Sans" pitchFamily="2" charset="0"/>
+                    <a:cs typeface="Google Sans" pitchFamily="2" charset="0"/>
+                  </a:rPr>
+                  <a:t>Q</a:t>
+                </a:r>
+                <a:endParaRPr lang="es-MX" sz="1600" dirty="0">
+                  <a:latin typeface="Google Sans" pitchFamily="2" charset="0"/>
+                  <a:ea typeface="Google Sans" pitchFamily="2" charset="0"/>
+                  <a:cs typeface="Google Sans" pitchFamily="2" charset="0"/>
+                </a:endParaRPr>
+              </a:p>
+            </p:txBody>
+          </p:sp>
+          <p:sp>
+            <p:nvSpPr>
+              <p:cNvPr id="187" name="CuadroTexto 186">
+                <a:extLst>
+                  <a:ext uri="{FF2B5EF4-FFF2-40B4-BE49-F238E27FC236}">
+                    <a16:creationId xmlns:a16="http://schemas.microsoft.com/office/drawing/2014/main" id="{41D1B563-C11C-143D-88C0-237637DA6A85}"/>
+                  </a:ext>
+                </a:extLst>
+              </p:cNvPr>
+              <p:cNvSpPr txBox="1"/>
+              <p:nvPr/>
+            </p:nvSpPr>
+            <p:spPr>
+              <a:xfrm>
+                <a:off x="5325069" y="5120118"/>
+                <a:ext cx="554347" cy="523220"/>
+              </a:xfrm>
+              <a:prstGeom prst="rect">
+                <a:avLst/>
+              </a:prstGeom>
+              <a:noFill/>
+            </p:spPr>
+            <p:txBody>
+              <a:bodyPr wrap="square">
+                <a:spAutoFit/>
+              </a:bodyPr>
+              <a:lstStyle/>
+              <a:p>
+                <a:r>
+                  <a:rPr lang="es-MX" sz="2800" b="1" dirty="0">
+                    <a:solidFill>
+                      <a:schemeClr val="accent6">
+                        <a:lumMod val="50000"/>
+                      </a:schemeClr>
+                    </a:solidFill>
+                    <a:latin typeface="Google Sans" pitchFamily="2" charset="0"/>
+                    <a:ea typeface="Google Sans" pitchFamily="2" charset="0"/>
+                    <a:cs typeface="Google Sans" pitchFamily="2" charset="0"/>
+                  </a:rPr>
+                  <a:t>Q</a:t>
+                </a:r>
+                <a:endParaRPr lang="es-MX" sz="1600" dirty="0">
+                  <a:latin typeface="Google Sans" pitchFamily="2" charset="0"/>
+                  <a:ea typeface="Google Sans" pitchFamily="2" charset="0"/>
+                  <a:cs typeface="Google Sans" pitchFamily="2" charset="0"/>
+                </a:endParaRPr>
+              </a:p>
+            </p:txBody>
+          </p:sp>
+          <p:sp>
+            <p:nvSpPr>
+              <p:cNvPr id="189" name="CuadroTexto 188">
+                <a:extLst>
+                  <a:ext uri="{FF2B5EF4-FFF2-40B4-BE49-F238E27FC236}">
+                    <a16:creationId xmlns:a16="http://schemas.microsoft.com/office/drawing/2014/main" id="{1C73DADA-1C0B-D74E-8516-231F6AD63ACE}"/>
+                  </a:ext>
+                </a:extLst>
+              </p:cNvPr>
+              <p:cNvSpPr txBox="1"/>
+              <p:nvPr/>
+            </p:nvSpPr>
+            <p:spPr>
+              <a:xfrm>
+                <a:off x="5325069" y="5586966"/>
+                <a:ext cx="554347" cy="523220"/>
+              </a:xfrm>
+              <a:prstGeom prst="rect">
+                <a:avLst/>
+              </a:prstGeom>
+              <a:noFill/>
+            </p:spPr>
+            <p:txBody>
+              <a:bodyPr wrap="square">
+                <a:spAutoFit/>
+              </a:bodyPr>
+              <a:lstStyle/>
+              <a:p>
+                <a:r>
+                  <a:rPr lang="es-MX" sz="2800" b="1" dirty="0">
+                    <a:solidFill>
+                      <a:schemeClr val="accent6">
+                        <a:lumMod val="50000"/>
+                      </a:schemeClr>
+                    </a:solidFill>
+                    <a:latin typeface="Google Sans" pitchFamily="2" charset="0"/>
+                    <a:ea typeface="Google Sans" pitchFamily="2" charset="0"/>
+                    <a:cs typeface="Google Sans" pitchFamily="2" charset="0"/>
+                  </a:rPr>
+                  <a:t>Q</a:t>
+                </a:r>
+                <a:endParaRPr lang="es-MX" sz="1600" dirty="0">
+                  <a:latin typeface="Google Sans" pitchFamily="2" charset="0"/>
+                  <a:ea typeface="Google Sans" pitchFamily="2" charset="0"/>
+                  <a:cs typeface="Google Sans" pitchFamily="2" charset="0"/>
+                </a:endParaRPr>
+              </a:p>
+            </p:txBody>
+          </p:sp>
+          <p:sp>
+            <p:nvSpPr>
+              <p:cNvPr id="191" name="CuadroTexto 190">
+                <a:extLst>
+                  <a:ext uri="{FF2B5EF4-FFF2-40B4-BE49-F238E27FC236}">
+                    <a16:creationId xmlns:a16="http://schemas.microsoft.com/office/drawing/2014/main" id="{CB9BD67E-01CA-580F-7A0A-0EA972386BAD}"/>
+                  </a:ext>
+                </a:extLst>
+              </p:cNvPr>
+              <p:cNvSpPr txBox="1"/>
+              <p:nvPr/>
+            </p:nvSpPr>
+            <p:spPr>
+              <a:xfrm>
+                <a:off x="5918046" y="4627434"/>
+                <a:ext cx="408145" cy="523220"/>
+              </a:xfrm>
+              <a:prstGeom prst="rect">
+                <a:avLst/>
+              </a:prstGeom>
+              <a:noFill/>
+            </p:spPr>
+            <p:txBody>
+              <a:bodyPr wrap="square">
+                <a:spAutoFit/>
+              </a:bodyPr>
+              <a:lstStyle/>
+              <a:p>
+                <a:pPr algn="ctr"/>
+                <a:r>
+                  <a:rPr lang="es-MX" sz="2800" b="1" dirty="0">
+                    <a:solidFill>
+                      <a:schemeClr val="accent6">
+                        <a:lumMod val="50000"/>
+                      </a:schemeClr>
+                    </a:solidFill>
+                    <a:latin typeface="Google Sans" pitchFamily="2" charset="0"/>
+                    <a:ea typeface="Google Sans" pitchFamily="2" charset="0"/>
+                    <a:cs typeface="Google Sans" pitchFamily="2" charset="0"/>
+                  </a:rPr>
+                  <a:t>G</a:t>
+                </a:r>
+                <a:endParaRPr lang="es-MX" sz="1600" dirty="0">
+                  <a:latin typeface="Google Sans" pitchFamily="2" charset="0"/>
+                  <a:ea typeface="Google Sans" pitchFamily="2" charset="0"/>
+                  <a:cs typeface="Google Sans" pitchFamily="2" charset="0"/>
+                </a:endParaRPr>
+              </a:p>
+            </p:txBody>
+          </p:sp>
+          <p:sp>
+            <p:nvSpPr>
+              <p:cNvPr id="193" name="CuadroTexto 192">
+                <a:extLst>
+                  <a:ext uri="{FF2B5EF4-FFF2-40B4-BE49-F238E27FC236}">
+                    <a16:creationId xmlns:a16="http://schemas.microsoft.com/office/drawing/2014/main" id="{10D2CC63-9F2A-8D5D-5C07-6969CEF70DD8}"/>
+                  </a:ext>
+                </a:extLst>
+              </p:cNvPr>
+              <p:cNvSpPr txBox="1"/>
+              <p:nvPr/>
+            </p:nvSpPr>
+            <p:spPr>
+              <a:xfrm>
+                <a:off x="5949487" y="5143202"/>
+                <a:ext cx="408145" cy="523220"/>
+              </a:xfrm>
+              <a:prstGeom prst="rect">
+                <a:avLst/>
+              </a:prstGeom>
+              <a:noFill/>
+            </p:spPr>
+            <p:txBody>
+              <a:bodyPr wrap="square">
+                <a:spAutoFit/>
+              </a:bodyPr>
+              <a:lstStyle/>
+              <a:p>
+                <a:pPr algn="ctr"/>
+                <a:r>
+                  <a:rPr lang="es-MX" sz="2800" b="1" dirty="0">
+                    <a:solidFill>
+                      <a:schemeClr val="accent6">
+                        <a:lumMod val="50000"/>
+                      </a:schemeClr>
+                    </a:solidFill>
+                    <a:latin typeface="Google Sans" pitchFamily="2" charset="0"/>
+                    <a:ea typeface="Google Sans" pitchFamily="2" charset="0"/>
+                    <a:cs typeface="Google Sans" pitchFamily="2" charset="0"/>
+                  </a:rPr>
+                  <a:t>G</a:t>
+                </a:r>
+                <a:endParaRPr lang="es-MX" sz="1600" dirty="0">
+                  <a:latin typeface="Google Sans" pitchFamily="2" charset="0"/>
+                  <a:ea typeface="Google Sans" pitchFamily="2" charset="0"/>
+                  <a:cs typeface="Google Sans" pitchFamily="2" charset="0"/>
+                </a:endParaRPr>
+              </a:p>
+            </p:txBody>
+          </p:sp>
+          <p:sp>
+            <p:nvSpPr>
+              <p:cNvPr id="195" name="CuadroTexto 194">
+                <a:extLst>
+                  <a:ext uri="{FF2B5EF4-FFF2-40B4-BE49-F238E27FC236}">
+                    <a16:creationId xmlns:a16="http://schemas.microsoft.com/office/drawing/2014/main" id="{5610143B-4FA7-BF9A-CA56-8390653D6D79}"/>
+                  </a:ext>
+                </a:extLst>
+              </p:cNvPr>
+              <p:cNvSpPr txBox="1"/>
+              <p:nvPr/>
+            </p:nvSpPr>
+            <p:spPr>
+              <a:xfrm>
+                <a:off x="5949487" y="5621863"/>
+                <a:ext cx="408145" cy="523220"/>
+              </a:xfrm>
+              <a:prstGeom prst="rect">
+                <a:avLst/>
+              </a:prstGeom>
+              <a:noFill/>
+            </p:spPr>
+            <p:txBody>
+              <a:bodyPr wrap="square">
+                <a:spAutoFit/>
+              </a:bodyPr>
+              <a:lstStyle/>
+              <a:p>
+                <a:pPr algn="ctr"/>
+                <a:r>
+                  <a:rPr lang="es-MX" sz="2800" b="1" dirty="0">
+                    <a:solidFill>
+                      <a:schemeClr val="accent6">
+                        <a:lumMod val="50000"/>
+                      </a:schemeClr>
+                    </a:solidFill>
+                    <a:latin typeface="Google Sans" pitchFamily="2" charset="0"/>
+                    <a:ea typeface="Google Sans" pitchFamily="2" charset="0"/>
+                    <a:cs typeface="Google Sans" pitchFamily="2" charset="0"/>
+                  </a:rPr>
+                  <a:t>G</a:t>
+                </a:r>
+                <a:endParaRPr lang="es-MX" sz="1600" dirty="0">
+                  <a:latin typeface="Google Sans" pitchFamily="2" charset="0"/>
+                  <a:ea typeface="Google Sans" pitchFamily="2" charset="0"/>
+                  <a:cs typeface="Google Sans" pitchFamily="2" charset="0"/>
+                </a:endParaRPr>
+              </a:p>
+            </p:txBody>
+          </p:sp>
+          <p:sp>
+            <p:nvSpPr>
+              <p:cNvPr id="197" name="CuadroTexto 196">
+                <a:extLst>
+                  <a:ext uri="{FF2B5EF4-FFF2-40B4-BE49-F238E27FC236}">
+                    <a16:creationId xmlns:a16="http://schemas.microsoft.com/office/drawing/2014/main" id="{FFF0F54A-B0A9-3A5B-1676-B03063CF3C43}"/>
+                  </a:ext>
+                </a:extLst>
+              </p:cNvPr>
+              <p:cNvSpPr txBox="1"/>
+              <p:nvPr/>
+            </p:nvSpPr>
+            <p:spPr>
+              <a:xfrm>
+                <a:off x="6524628" y="4641620"/>
+                <a:ext cx="408145" cy="523220"/>
+              </a:xfrm>
+              <a:prstGeom prst="rect">
+                <a:avLst/>
+              </a:prstGeom>
+              <a:noFill/>
+            </p:spPr>
+            <p:txBody>
+              <a:bodyPr wrap="square">
+                <a:spAutoFit/>
+              </a:bodyPr>
+              <a:lstStyle/>
+              <a:p>
+                <a:pPr algn="ctr"/>
+                <a:r>
+                  <a:rPr lang="es-MX" sz="2800" b="1" dirty="0">
+                    <a:solidFill>
+                      <a:schemeClr val="accent6">
+                        <a:lumMod val="50000"/>
+                      </a:schemeClr>
+                    </a:solidFill>
+                    <a:latin typeface="Google Sans" pitchFamily="2" charset="0"/>
+                    <a:ea typeface="Google Sans" pitchFamily="2" charset="0"/>
+                    <a:cs typeface="Google Sans" pitchFamily="2" charset="0"/>
+                  </a:rPr>
+                  <a:t>R</a:t>
+                </a:r>
+                <a:endParaRPr lang="es-MX" sz="1600" dirty="0">
+                  <a:latin typeface="Google Sans" pitchFamily="2" charset="0"/>
+                  <a:ea typeface="Google Sans" pitchFamily="2" charset="0"/>
+                  <a:cs typeface="Google Sans" pitchFamily="2" charset="0"/>
+                </a:endParaRPr>
+              </a:p>
+            </p:txBody>
+          </p:sp>
+          <p:sp>
+            <p:nvSpPr>
+              <p:cNvPr id="199" name="CuadroTexto 198">
+                <a:extLst>
+                  <a:ext uri="{FF2B5EF4-FFF2-40B4-BE49-F238E27FC236}">
+                    <a16:creationId xmlns:a16="http://schemas.microsoft.com/office/drawing/2014/main" id="{3018FBA0-C9C3-F4D9-2F6F-228FC93CE167}"/>
+                  </a:ext>
+                </a:extLst>
+              </p:cNvPr>
+              <p:cNvSpPr txBox="1"/>
+              <p:nvPr/>
+            </p:nvSpPr>
+            <p:spPr>
+              <a:xfrm>
+                <a:off x="6537084" y="5155235"/>
+                <a:ext cx="408145" cy="523220"/>
+              </a:xfrm>
+              <a:prstGeom prst="rect">
+                <a:avLst/>
+              </a:prstGeom>
+              <a:noFill/>
+            </p:spPr>
+            <p:txBody>
+              <a:bodyPr wrap="square">
+                <a:spAutoFit/>
+              </a:bodyPr>
+              <a:lstStyle/>
+              <a:p>
+                <a:pPr algn="ctr"/>
+                <a:r>
+                  <a:rPr lang="es-MX" sz="2800" b="1" dirty="0">
+                    <a:solidFill>
+                      <a:schemeClr val="accent6">
+                        <a:lumMod val="50000"/>
+                      </a:schemeClr>
+                    </a:solidFill>
+                    <a:latin typeface="Google Sans" pitchFamily="2" charset="0"/>
+                    <a:ea typeface="Google Sans" pitchFamily="2" charset="0"/>
+                    <a:cs typeface="Google Sans" pitchFamily="2" charset="0"/>
+                  </a:rPr>
+                  <a:t>R</a:t>
+                </a:r>
+                <a:endParaRPr lang="es-MX" sz="1600" dirty="0">
+                  <a:latin typeface="Google Sans" pitchFamily="2" charset="0"/>
+                  <a:ea typeface="Google Sans" pitchFamily="2" charset="0"/>
+                  <a:cs typeface="Google Sans" pitchFamily="2" charset="0"/>
+                </a:endParaRPr>
+              </a:p>
+            </p:txBody>
+          </p:sp>
+          <p:sp>
+            <p:nvSpPr>
+              <p:cNvPr id="201" name="CuadroTexto 200">
+                <a:extLst>
+                  <a:ext uri="{FF2B5EF4-FFF2-40B4-BE49-F238E27FC236}">
+                    <a16:creationId xmlns:a16="http://schemas.microsoft.com/office/drawing/2014/main" id="{806F7DA7-9A1A-B2EA-A2DB-C8BEB05C64C9}"/>
+                  </a:ext>
+                </a:extLst>
+              </p:cNvPr>
+              <p:cNvSpPr txBox="1"/>
+              <p:nvPr/>
+            </p:nvSpPr>
+            <p:spPr>
+              <a:xfrm>
+                <a:off x="6539086" y="5636514"/>
+                <a:ext cx="408145" cy="523220"/>
+              </a:xfrm>
+              <a:prstGeom prst="rect">
+                <a:avLst/>
+              </a:prstGeom>
+              <a:noFill/>
+            </p:spPr>
+            <p:txBody>
+              <a:bodyPr wrap="square">
+                <a:spAutoFit/>
+              </a:bodyPr>
+              <a:lstStyle/>
+              <a:p>
+                <a:pPr algn="ctr"/>
+                <a:r>
+                  <a:rPr lang="es-MX" sz="2800" b="1" dirty="0">
+                    <a:solidFill>
+                      <a:schemeClr val="accent6">
+                        <a:lumMod val="50000"/>
+                      </a:schemeClr>
+                    </a:solidFill>
+                    <a:latin typeface="Google Sans" pitchFamily="2" charset="0"/>
+                    <a:ea typeface="Google Sans" pitchFamily="2" charset="0"/>
+                    <a:cs typeface="Google Sans" pitchFamily="2" charset="0"/>
+                  </a:rPr>
+                  <a:t>R</a:t>
+                </a:r>
+                <a:endParaRPr lang="es-MX" sz="1600" dirty="0">
+                  <a:latin typeface="Google Sans" pitchFamily="2" charset="0"/>
+                  <a:ea typeface="Google Sans" pitchFamily="2" charset="0"/>
+                  <a:cs typeface="Google Sans" pitchFamily="2" charset="0"/>
+                </a:endParaRPr>
+              </a:p>
+            </p:txBody>
+          </p:sp>
+          <p:sp>
+            <p:nvSpPr>
+              <p:cNvPr id="203" name="CuadroTexto 202">
+                <a:extLst>
+                  <a:ext uri="{FF2B5EF4-FFF2-40B4-BE49-F238E27FC236}">
+                    <a16:creationId xmlns:a16="http://schemas.microsoft.com/office/drawing/2014/main" id="{000D5DE5-C29F-EB39-3D6E-105489A7C12B}"/>
+                  </a:ext>
+                </a:extLst>
+              </p:cNvPr>
+              <p:cNvSpPr txBox="1"/>
+              <p:nvPr/>
+            </p:nvSpPr>
+            <p:spPr>
+              <a:xfrm>
+                <a:off x="7124681" y="5176380"/>
+                <a:ext cx="408145" cy="523220"/>
+              </a:xfrm>
+              <a:prstGeom prst="rect">
+                <a:avLst/>
+              </a:prstGeom>
+              <a:noFill/>
+            </p:spPr>
+            <p:txBody>
+              <a:bodyPr wrap="square">
+                <a:spAutoFit/>
+              </a:bodyPr>
+              <a:lstStyle/>
+              <a:p>
+                <a:pPr algn="ctr"/>
+                <a:r>
+                  <a:rPr lang="es-MX" sz="2800" b="1" dirty="0">
+                    <a:solidFill>
+                      <a:schemeClr val="accent6">
+                        <a:lumMod val="50000"/>
+                      </a:schemeClr>
+                    </a:solidFill>
+                    <a:latin typeface="Google Sans" pitchFamily="2" charset="0"/>
+                    <a:ea typeface="Google Sans" pitchFamily="2" charset="0"/>
+                    <a:cs typeface="Google Sans" pitchFamily="2" charset="0"/>
+                  </a:rPr>
+                  <a:t>A</a:t>
+                </a:r>
+                <a:endParaRPr lang="es-MX" sz="1600" dirty="0">
+                  <a:latin typeface="Google Sans" pitchFamily="2" charset="0"/>
+                  <a:ea typeface="Google Sans" pitchFamily="2" charset="0"/>
+                  <a:cs typeface="Google Sans" pitchFamily="2" charset="0"/>
+                </a:endParaRPr>
+              </a:p>
+            </p:txBody>
+          </p:sp>
+          <p:sp>
+            <p:nvSpPr>
+              <p:cNvPr id="205" name="CuadroTexto 204">
+                <a:extLst>
+                  <a:ext uri="{FF2B5EF4-FFF2-40B4-BE49-F238E27FC236}">
+                    <a16:creationId xmlns:a16="http://schemas.microsoft.com/office/drawing/2014/main" id="{DF400B8A-D1C5-A017-238A-C293CD0FA87A}"/>
+                  </a:ext>
+                </a:extLst>
+              </p:cNvPr>
+              <p:cNvSpPr txBox="1"/>
+              <p:nvPr/>
+            </p:nvSpPr>
+            <p:spPr>
+              <a:xfrm>
+                <a:off x="7124681" y="5648090"/>
+                <a:ext cx="408145" cy="523220"/>
+              </a:xfrm>
+              <a:prstGeom prst="rect">
+                <a:avLst/>
+              </a:prstGeom>
+              <a:noFill/>
+            </p:spPr>
+            <p:txBody>
+              <a:bodyPr wrap="square">
+                <a:spAutoFit/>
+              </a:bodyPr>
+              <a:lstStyle/>
+              <a:p>
+                <a:pPr algn="ctr"/>
+                <a:r>
+                  <a:rPr lang="es-MX" sz="2800" b="1" dirty="0">
+                    <a:solidFill>
+                      <a:schemeClr val="accent6">
+                        <a:lumMod val="50000"/>
+                      </a:schemeClr>
+                    </a:solidFill>
+                    <a:latin typeface="Google Sans" pitchFamily="2" charset="0"/>
+                    <a:ea typeface="Google Sans" pitchFamily="2" charset="0"/>
+                    <a:cs typeface="Google Sans" pitchFamily="2" charset="0"/>
+                  </a:rPr>
+                  <a:t>A</a:t>
+                </a:r>
+                <a:endParaRPr lang="es-MX" sz="1600" dirty="0">
+                  <a:latin typeface="Google Sans" pitchFamily="2" charset="0"/>
+                  <a:ea typeface="Google Sans" pitchFamily="2" charset="0"/>
+                  <a:cs typeface="Google Sans" pitchFamily="2" charset="0"/>
+                </a:endParaRPr>
+              </a:p>
+            </p:txBody>
+          </p:sp>
+          <p:sp>
+            <p:nvSpPr>
+              <p:cNvPr id="207" name="CuadroTexto 206">
+                <a:extLst>
+                  <a:ext uri="{FF2B5EF4-FFF2-40B4-BE49-F238E27FC236}">
+                    <a16:creationId xmlns:a16="http://schemas.microsoft.com/office/drawing/2014/main" id="{D60443FF-4F46-0D97-6FD5-AE6C14AC3D0A}"/>
+                  </a:ext>
+                </a:extLst>
+              </p:cNvPr>
+              <p:cNvSpPr txBox="1"/>
+              <p:nvPr/>
+            </p:nvSpPr>
+            <p:spPr>
+              <a:xfrm>
+                <a:off x="7729121" y="5636514"/>
+                <a:ext cx="408145" cy="523220"/>
+              </a:xfrm>
+              <a:prstGeom prst="rect">
+                <a:avLst/>
+              </a:prstGeom>
+              <a:noFill/>
+            </p:spPr>
+            <p:txBody>
+              <a:bodyPr wrap="square">
+                <a:spAutoFit/>
+              </a:bodyPr>
+              <a:lstStyle/>
+              <a:p>
+                <a:pPr algn="ctr"/>
+                <a:r>
+                  <a:rPr lang="es-MX" sz="2800" b="1" dirty="0">
+                    <a:solidFill>
+                      <a:schemeClr val="accent6">
+                        <a:lumMod val="50000"/>
+                      </a:schemeClr>
+                    </a:solidFill>
+                    <a:latin typeface="Google Sans" pitchFamily="2" charset="0"/>
+                    <a:ea typeface="Google Sans" pitchFamily="2" charset="0"/>
+                    <a:cs typeface="Google Sans" pitchFamily="2" charset="0"/>
+                  </a:rPr>
+                  <a:t>L</a:t>
+                </a:r>
+                <a:endParaRPr lang="es-MX" sz="1600" dirty="0">
+                  <a:latin typeface="Google Sans" pitchFamily="2" charset="0"/>
+                  <a:ea typeface="Google Sans" pitchFamily="2" charset="0"/>
+                  <a:cs typeface="Google Sans" pitchFamily="2" charset="0"/>
+                </a:endParaRPr>
+              </a:p>
+            </p:txBody>
+          </p:sp>
+          <p:sp>
+            <p:nvSpPr>
+              <p:cNvPr id="209" name="CuadroTexto 208">
+                <a:extLst>
+                  <a:ext uri="{FF2B5EF4-FFF2-40B4-BE49-F238E27FC236}">
+                    <a16:creationId xmlns:a16="http://schemas.microsoft.com/office/drawing/2014/main" id="{8C81939A-34FF-0B61-A7FD-4B14A3ED0662}"/>
+                  </a:ext>
+                </a:extLst>
+              </p:cNvPr>
+              <p:cNvSpPr txBox="1"/>
+              <p:nvPr/>
+            </p:nvSpPr>
+            <p:spPr>
+              <a:xfrm>
+                <a:off x="4281487" y="3687720"/>
+                <a:ext cx="869770" cy="323165"/>
+              </a:xfrm>
+              <a:prstGeom prst="rect">
+                <a:avLst/>
+              </a:prstGeom>
+              <a:noFill/>
+              <a:ln w="38100">
+                <a:noFill/>
+              </a:ln>
+            </p:spPr>
+            <p:txBody>
+              <a:bodyPr wrap="square" rtlCol="0">
+                <a:spAutoFit/>
+              </a:bodyPr>
+              <a:lstStyle/>
+              <a:p>
+                <a:r>
+                  <a:rPr lang="es-MX" sz="1500" dirty="0">
+                    <a:latin typeface="Google Sans" pitchFamily="2" charset="0"/>
+                    <a:ea typeface="Google Sans" pitchFamily="2" charset="0"/>
+                    <a:cs typeface="Google Sans" pitchFamily="2" charset="0"/>
+                  </a:rPr>
+                  <a:t>Step 1:</a:t>
+                </a:r>
+              </a:p>
+            </p:txBody>
+          </p:sp>
+          <p:sp>
+            <p:nvSpPr>
+              <p:cNvPr id="211" name="CuadroTexto 210">
+                <a:extLst>
+                  <a:ext uri="{FF2B5EF4-FFF2-40B4-BE49-F238E27FC236}">
+                    <a16:creationId xmlns:a16="http://schemas.microsoft.com/office/drawing/2014/main" id="{F65D0622-2459-51B6-D51C-2539F13DC4BA}"/>
+                  </a:ext>
+                </a:extLst>
+              </p:cNvPr>
+              <p:cNvSpPr txBox="1"/>
+              <p:nvPr/>
+            </p:nvSpPr>
+            <p:spPr>
+              <a:xfrm>
+                <a:off x="4281487" y="4202528"/>
+                <a:ext cx="965285" cy="323165"/>
+              </a:xfrm>
+              <a:prstGeom prst="rect">
+                <a:avLst/>
+              </a:prstGeom>
+              <a:noFill/>
+              <a:ln w="38100">
+                <a:noFill/>
+              </a:ln>
+            </p:spPr>
+            <p:txBody>
+              <a:bodyPr wrap="square" rtlCol="0">
+                <a:spAutoFit/>
+              </a:bodyPr>
+              <a:lstStyle/>
+              <a:p>
+                <a:r>
+                  <a:rPr lang="es-MX" sz="1500" dirty="0">
+                    <a:latin typeface="Google Sans" pitchFamily="2" charset="0"/>
+                    <a:ea typeface="Google Sans" pitchFamily="2" charset="0"/>
+                    <a:cs typeface="Google Sans" pitchFamily="2" charset="0"/>
+                  </a:rPr>
+                  <a:t>Step 2:</a:t>
+                </a:r>
+              </a:p>
+            </p:txBody>
+          </p:sp>
+          <p:sp>
+            <p:nvSpPr>
+              <p:cNvPr id="213" name="CuadroTexto 212">
+                <a:extLst>
+                  <a:ext uri="{FF2B5EF4-FFF2-40B4-BE49-F238E27FC236}">
+                    <a16:creationId xmlns:a16="http://schemas.microsoft.com/office/drawing/2014/main" id="{BB29FBC0-3F1C-99FD-8494-DBF6733DC860}"/>
+                  </a:ext>
+                </a:extLst>
+              </p:cNvPr>
+              <p:cNvSpPr txBox="1"/>
+              <p:nvPr/>
+            </p:nvSpPr>
+            <p:spPr>
+              <a:xfrm>
+                <a:off x="4281487" y="4672346"/>
+                <a:ext cx="869770" cy="323165"/>
+              </a:xfrm>
+              <a:prstGeom prst="rect">
+                <a:avLst/>
+              </a:prstGeom>
+              <a:noFill/>
+              <a:ln w="38100">
+                <a:noFill/>
+              </a:ln>
+            </p:spPr>
+            <p:txBody>
+              <a:bodyPr wrap="square" rtlCol="0">
+                <a:spAutoFit/>
+              </a:bodyPr>
+              <a:lstStyle/>
+              <a:p>
+                <a:r>
+                  <a:rPr lang="es-MX" sz="1500" dirty="0">
+                    <a:latin typeface="Google Sans" pitchFamily="2" charset="0"/>
+                    <a:ea typeface="Google Sans" pitchFamily="2" charset="0"/>
+                    <a:cs typeface="Google Sans" pitchFamily="2" charset="0"/>
+                  </a:rPr>
+                  <a:t>Step 3:</a:t>
+                </a:r>
+              </a:p>
+            </p:txBody>
+          </p:sp>
+          <p:sp>
+            <p:nvSpPr>
+              <p:cNvPr id="215" name="CuadroTexto 214">
+                <a:extLst>
+                  <a:ext uri="{FF2B5EF4-FFF2-40B4-BE49-F238E27FC236}">
+                    <a16:creationId xmlns:a16="http://schemas.microsoft.com/office/drawing/2014/main" id="{B014CA4B-D65F-3774-5AFA-92932075EE8D}"/>
+                  </a:ext>
+                </a:extLst>
+              </p:cNvPr>
+              <p:cNvSpPr txBox="1"/>
+              <p:nvPr/>
+            </p:nvSpPr>
+            <p:spPr>
+              <a:xfrm>
+                <a:off x="4281487" y="5220145"/>
+                <a:ext cx="869770" cy="323165"/>
+              </a:xfrm>
+              <a:prstGeom prst="rect">
+                <a:avLst/>
+              </a:prstGeom>
+              <a:noFill/>
+              <a:ln w="38100">
+                <a:noFill/>
+              </a:ln>
+            </p:spPr>
+            <p:txBody>
+              <a:bodyPr wrap="square" rtlCol="0">
+                <a:spAutoFit/>
+              </a:bodyPr>
+              <a:lstStyle/>
+              <a:p>
+                <a:r>
+                  <a:rPr lang="es-MX" sz="1500" dirty="0">
+                    <a:latin typeface="Google Sans" pitchFamily="2" charset="0"/>
+                    <a:ea typeface="Google Sans" pitchFamily="2" charset="0"/>
+                    <a:cs typeface="Google Sans" pitchFamily="2" charset="0"/>
+                  </a:rPr>
+                  <a:t>Step 4:</a:t>
+                </a:r>
+              </a:p>
+            </p:txBody>
+          </p:sp>
+          <p:sp>
+            <p:nvSpPr>
+              <p:cNvPr id="217" name="CuadroTexto 216">
+                <a:extLst>
+                  <a:ext uri="{FF2B5EF4-FFF2-40B4-BE49-F238E27FC236}">
+                    <a16:creationId xmlns:a16="http://schemas.microsoft.com/office/drawing/2014/main" id="{EC156A02-6F44-58C1-52F5-93E1D43B5A31}"/>
+                  </a:ext>
+                </a:extLst>
+              </p:cNvPr>
+              <p:cNvSpPr txBox="1"/>
+              <p:nvPr/>
+            </p:nvSpPr>
+            <p:spPr>
+              <a:xfrm>
+                <a:off x="4281487" y="5762466"/>
+                <a:ext cx="869770" cy="323165"/>
+              </a:xfrm>
+              <a:prstGeom prst="rect">
+                <a:avLst/>
+              </a:prstGeom>
+              <a:noFill/>
+              <a:ln w="38100">
+                <a:noFill/>
+              </a:ln>
+            </p:spPr>
+            <p:txBody>
+              <a:bodyPr wrap="square" rtlCol="0">
+                <a:spAutoFit/>
+              </a:bodyPr>
+              <a:lstStyle/>
+              <a:p>
+                <a:r>
+                  <a:rPr lang="es-MX" sz="1500" dirty="0">
+                    <a:latin typeface="Google Sans" pitchFamily="2" charset="0"/>
+                    <a:ea typeface="Google Sans" pitchFamily="2" charset="0"/>
+                    <a:cs typeface="Google Sans" pitchFamily="2" charset="0"/>
+                  </a:rPr>
+                  <a:t>Step 5:</a:t>
+                </a:r>
+              </a:p>
+            </p:txBody>
+          </p:sp>
+          <p:sp>
+            <p:nvSpPr>
+              <p:cNvPr id="223" name="Cerrar llave 222">
+                <a:extLst>
+                  <a:ext uri="{FF2B5EF4-FFF2-40B4-BE49-F238E27FC236}">
+                    <a16:creationId xmlns:a16="http://schemas.microsoft.com/office/drawing/2014/main" id="{4BCFC8DA-1ABF-C009-2C44-082BF76D36FC}"/>
+                  </a:ext>
+                </a:extLst>
+              </p:cNvPr>
+              <p:cNvSpPr/>
+              <p:nvPr/>
+            </p:nvSpPr>
+            <p:spPr>
+              <a:xfrm>
+                <a:off x="8229600" y="3322336"/>
+                <a:ext cx="554347" cy="3206480"/>
+              </a:xfrm>
+              <a:prstGeom prst="rightBrace">
+                <a:avLst/>
+              </a:prstGeom>
+            </p:spPr>
+            <p:style>
+              <a:lnRef idx="3">
+                <a:schemeClr val="accent6"/>
+              </a:lnRef>
+              <a:fillRef idx="0">
+                <a:schemeClr val="accent6"/>
+              </a:fillRef>
+              <a:effectRef idx="2">
+                <a:schemeClr val="accent6"/>
+              </a:effectRef>
+              <a:fontRef idx="minor">
+                <a:schemeClr val="tx1"/>
+              </a:fontRef>
+            </p:style>
+            <p:txBody>
+              <a:bodyPr rtlCol="0" anchor="ctr"/>
+              <a:lstStyle/>
+              <a:p>
+                <a:pPr algn="ctr"/>
+                <a:endParaRPr lang="es-MX">
+                  <a:latin typeface="Google Sans" pitchFamily="2" charset="0"/>
+                  <a:ea typeface="Google Sans" pitchFamily="2" charset="0"/>
+                  <a:cs typeface="Google Sans" pitchFamily="2" charset="0"/>
+                </a:endParaRPr>
+              </a:p>
+            </p:txBody>
+          </p:sp>
+          <p:sp>
+            <p:nvSpPr>
+              <p:cNvPr id="225" name="CuadroTexto 224">
+                <a:extLst>
+                  <a:ext uri="{FF2B5EF4-FFF2-40B4-BE49-F238E27FC236}">
+                    <a16:creationId xmlns:a16="http://schemas.microsoft.com/office/drawing/2014/main" id="{015C2930-73FC-C997-D5BD-02B00299491F}"/>
+                  </a:ext>
+                </a:extLst>
+              </p:cNvPr>
+              <p:cNvSpPr txBox="1"/>
+              <p:nvPr/>
+            </p:nvSpPr>
+            <p:spPr>
+              <a:xfrm>
+                <a:off x="8901131" y="4745285"/>
+                <a:ext cx="1287573" cy="323165"/>
+              </a:xfrm>
+              <a:prstGeom prst="rect">
+                <a:avLst/>
+              </a:prstGeom>
+              <a:noFill/>
+              <a:ln w="38100">
+                <a:noFill/>
+              </a:ln>
+            </p:spPr>
+            <p:txBody>
+              <a:bodyPr wrap="square" rtlCol="0">
+                <a:spAutoFit/>
+              </a:bodyPr>
+              <a:lstStyle/>
+              <a:p>
+                <a:r>
+                  <a:rPr lang="es-MX" sz="1500" dirty="0">
+                    <a:latin typeface="Google Sans" pitchFamily="2" charset="0"/>
+                    <a:ea typeface="Google Sans" pitchFamily="2" charset="0"/>
+                    <a:cs typeface="Google Sans" pitchFamily="2" charset="0"/>
+                  </a:rPr>
+                  <a:t>40 times</a:t>
+                </a:r>
+              </a:p>
+            </p:txBody>
+          </p:sp>
+        </p:grpSp>
+        <p:grpSp>
+          <p:nvGrpSpPr>
+            <p:cNvPr id="253" name="Grupo 252">
+              <a:extLst>
+                <a:ext uri="{FF2B5EF4-FFF2-40B4-BE49-F238E27FC236}">
+                  <a16:creationId xmlns:a16="http://schemas.microsoft.com/office/drawing/2014/main" id="{8C3B9D1F-6E3F-9B57-E14B-2ADCF91E458E}"/>
+                </a:ext>
+              </a:extLst>
+            </p:cNvPr>
+            <p:cNvGrpSpPr/>
+            <p:nvPr/>
+          </p:nvGrpSpPr>
+          <p:grpSpPr>
+            <a:xfrm>
+              <a:off x="4122594" y="3966868"/>
+              <a:ext cx="4141120" cy="1156016"/>
+              <a:chOff x="5311464" y="4102501"/>
+              <a:chExt cx="4141120" cy="1156016"/>
+            </a:xfrm>
+          </p:grpSpPr>
+          <p:sp>
+            <p:nvSpPr>
+              <p:cNvPr id="171" name="CuadroTexto 170">
+                <a:extLst>
+                  <a:ext uri="{FF2B5EF4-FFF2-40B4-BE49-F238E27FC236}">
+                    <a16:creationId xmlns:a16="http://schemas.microsoft.com/office/drawing/2014/main" id="{E82C3E35-8366-BD5A-2A4F-8373D6D95584}"/>
+                  </a:ext>
+                </a:extLst>
+              </p:cNvPr>
+              <p:cNvSpPr txBox="1"/>
+              <p:nvPr/>
+            </p:nvSpPr>
+            <p:spPr>
+              <a:xfrm>
+                <a:off x="5311464" y="4427520"/>
+                <a:ext cx="4141120" cy="830997"/>
+              </a:xfrm>
+              <a:prstGeom prst="rect">
+                <a:avLst/>
+              </a:prstGeom>
+              <a:noFill/>
+              <a:ln w="38100">
+                <a:noFill/>
+              </a:ln>
+            </p:spPr>
+            <p:txBody>
+              <a:bodyPr wrap="square" rtlCol="0">
+                <a:spAutoFit/>
+              </a:bodyPr>
+              <a:lstStyle/>
+              <a:p>
+                <a:r>
+                  <a:rPr lang="es-MX" sz="4800" dirty="0">
+                    <a:latin typeface="Google Sans" pitchFamily="2" charset="0"/>
+                    <a:ea typeface="Google Sans" pitchFamily="2" charset="0"/>
+                    <a:cs typeface="Google Sans" pitchFamily="2" charset="0"/>
+                  </a:rPr>
+                  <a:t>_  _  _  _  _</a:t>
+                </a:r>
+              </a:p>
+            </p:txBody>
+          </p:sp>
+          <p:sp>
+            <p:nvSpPr>
+              <p:cNvPr id="181" name="CuadroTexto 180">
+                <a:extLst>
+                  <a:ext uri="{FF2B5EF4-FFF2-40B4-BE49-F238E27FC236}">
+                    <a16:creationId xmlns:a16="http://schemas.microsoft.com/office/drawing/2014/main" id="{A17DBCBB-D05D-4002-D124-82317A189FC2}"/>
+                  </a:ext>
+                </a:extLst>
+              </p:cNvPr>
+              <p:cNvSpPr txBox="1"/>
+              <p:nvPr/>
+            </p:nvSpPr>
+            <p:spPr>
+              <a:xfrm>
+                <a:off x="5311464" y="4102501"/>
+                <a:ext cx="554347" cy="523220"/>
+              </a:xfrm>
+              <a:prstGeom prst="rect">
+                <a:avLst/>
+              </a:prstGeom>
+              <a:noFill/>
+            </p:spPr>
+            <p:txBody>
+              <a:bodyPr wrap="square">
+                <a:spAutoFit/>
+              </a:bodyPr>
+              <a:lstStyle/>
+              <a:p>
+                <a:r>
+                  <a:rPr lang="es-MX" sz="2800" b="1" dirty="0">
+                    <a:solidFill>
+                      <a:schemeClr val="accent6">
+                        <a:lumMod val="50000"/>
+                      </a:schemeClr>
+                    </a:solidFill>
+                    <a:latin typeface="Google Sans" pitchFamily="2" charset="0"/>
+                    <a:ea typeface="Google Sans" pitchFamily="2" charset="0"/>
+                    <a:cs typeface="Google Sans" pitchFamily="2" charset="0"/>
+                  </a:rPr>
+                  <a:t>Q</a:t>
+                </a:r>
+                <a:endParaRPr lang="es-MX" sz="1600" dirty="0">
+                  <a:latin typeface="Google Sans" pitchFamily="2" charset="0"/>
+                  <a:ea typeface="Google Sans" pitchFamily="2" charset="0"/>
+                  <a:cs typeface="Google Sans" pitchFamily="2" charset="0"/>
+                </a:endParaRPr>
+              </a:p>
+            </p:txBody>
+          </p:sp>
+        </p:grpSp>
+      </p:grpSp>
+      <p:sp>
+        <p:nvSpPr>
+          <p:cNvPr id="256" name="CuadroTexto 255">
+            <a:extLst>
+              <a:ext uri="{FF2B5EF4-FFF2-40B4-BE49-F238E27FC236}">
+                <a16:creationId xmlns:a16="http://schemas.microsoft.com/office/drawing/2014/main" id="{51B5C7CF-8D28-B614-D7F1-90849DB44381}"/>
+              </a:ext>
+            </a:extLst>
+          </p:cNvPr>
+          <p:cNvSpPr txBox="1"/>
+          <p:nvPr/>
+        </p:nvSpPr>
+        <p:spPr>
+          <a:xfrm>
+            <a:off x="9174166" y="3636946"/>
+            <a:ext cx="2173758" cy="2677656"/>
+          </a:xfrm>
+          <a:prstGeom prst="rect">
+            <a:avLst/>
+          </a:prstGeom>
+          <a:noFill/>
+          <a:ln w="38100">
+            <a:noFill/>
+          </a:ln>
+        </p:spPr>
+        <p:txBody>
+          <a:bodyPr wrap="square" rtlCol="0">
+            <a:spAutoFit/>
+          </a:bodyPr>
+          <a:lstStyle/>
+          <a:p>
             <a:pPr algn="ctr"/>
             <a:r>
-              <a:rPr lang="es-MX" sz="2000" b="1" dirty="0" err="1">
+              <a:rPr lang="es-MX" sz="2400" b="1" dirty="0">
+                <a:solidFill>
+                  <a:schemeClr val="accent6">
+                    <a:lumMod val="50000"/>
+                  </a:schemeClr>
+                </a:solidFill>
                 <a:latin typeface="Google Sans" pitchFamily="2" charset="0"/>
                 <a:ea typeface="Google Sans" pitchFamily="2" charset="0"/>
+                <a:cs typeface="Google Sans" pitchFamily="2" charset="0"/>
+              </a:rPr>
+              <a:t>QGRAL</a:t>
+            </a:r>
+          </a:p>
+          <a:p>
+            <a:pPr algn="ctr"/>
+            <a:r>
+              <a:rPr lang="es-MX" sz="2400" b="1" dirty="0">
+                <a:solidFill>
+                  <a:schemeClr val="accent6">
+                    <a:lumMod val="50000"/>
+                  </a:schemeClr>
+                </a:solidFill>
+                <a:latin typeface="Google Sans" pitchFamily="2" charset="0"/>
+                <a:ea typeface="Google Sans" pitchFamily="2" charset="0"/>
+                <a:cs typeface="Google Sans" pitchFamily="2" charset="0"/>
+              </a:rPr>
+              <a:t>ENFPS</a:t>
+            </a:r>
+          </a:p>
+          <a:p>
+            <a:pPr algn="ctr"/>
+            <a:r>
+              <a:rPr lang="es-MX" sz="2400" b="1" dirty="0">
+                <a:solidFill>
+                  <a:schemeClr val="accent6">
+                    <a:lumMod val="50000"/>
+                  </a:schemeClr>
+                </a:solidFill>
+                <a:latin typeface="Google Sans" pitchFamily="2" charset="0"/>
+                <a:ea typeface="Google Sans" pitchFamily="2" charset="0"/>
+                <a:cs typeface="Google Sans" pitchFamily="2" charset="0"/>
+              </a:rPr>
+              <a:t>YEINW</a:t>
+            </a:r>
+          </a:p>
+          <a:p>
+            <a:pPr algn="ctr"/>
+            <a:r>
+              <a:rPr lang="es-MX" sz="2400" b="1" dirty="0">
+                <a:solidFill>
+                  <a:schemeClr val="accent6">
+                    <a:lumMod val="50000"/>
+                  </a:schemeClr>
+                </a:solidFill>
+                <a:latin typeface="Google Sans" pitchFamily="2" charset="0"/>
+                <a:ea typeface="Google Sans" pitchFamily="2" charset="0"/>
+                <a:cs typeface="Google Sans" pitchFamily="2" charset="0"/>
+              </a:rPr>
+              <a:t>.</a:t>
+            </a:r>
+          </a:p>
+          <a:p>
+            <a:pPr algn="ctr"/>
+            <a:r>
+              <a:rPr lang="es-MX" sz="2400" b="1" dirty="0">
+                <a:solidFill>
+                  <a:schemeClr val="accent6">
+                    <a:lumMod val="50000"/>
+                  </a:schemeClr>
+                </a:solidFill>
+                <a:latin typeface="Google Sans" pitchFamily="2" charset="0"/>
+                <a:ea typeface="Google Sans" pitchFamily="2" charset="0"/>
+                <a:cs typeface="Google Sans" pitchFamily="2" charset="0"/>
+              </a:rPr>
+              <a:t>.</a:t>
+            </a:r>
+          </a:p>
+          <a:p>
+            <a:pPr algn="ctr"/>
+            <a:r>
+              <a:rPr lang="es-MX" sz="2400" b="1" dirty="0">
+                <a:solidFill>
+                  <a:schemeClr val="accent6">
+                    <a:lumMod val="50000"/>
+                  </a:schemeClr>
+                </a:solidFill>
+                <a:latin typeface="Google Sans" pitchFamily="2" charset="0"/>
+                <a:ea typeface="Google Sans" pitchFamily="2" charset="0"/>
+                <a:cs typeface="Google Sans" pitchFamily="2" charset="0"/>
+              </a:rPr>
+              <a:t>.</a:t>
+            </a:r>
+          </a:p>
+          <a:p>
+            <a:pPr algn="ctr"/>
+            <a:r>
+              <a:rPr lang="es-MX" sz="2400" b="1" dirty="0">
+                <a:solidFill>
+                  <a:schemeClr val="accent6">
+                    <a:lumMod val="50000"/>
+                  </a:schemeClr>
+                </a:solidFill>
+                <a:latin typeface="Google Sans" pitchFamily="2" charset="0"/>
+                <a:ea typeface="Google Sans" pitchFamily="2" charset="0"/>
+                <a:cs typeface="Google Sans" pitchFamily="2" charset="0"/>
+              </a:rPr>
+              <a:t>WACQE</a:t>
+            </a:r>
+          </a:p>
+        </p:txBody>
+      </p:sp>
+      <p:grpSp>
+        <p:nvGrpSpPr>
+          <p:cNvPr id="265" name="Grupo 264">
+            <a:extLst>
+              <a:ext uri="{FF2B5EF4-FFF2-40B4-BE49-F238E27FC236}">
+                <a16:creationId xmlns:a16="http://schemas.microsoft.com/office/drawing/2014/main" id="{79FD3D2E-D13D-ACA2-9F78-391374FC97C5}"/>
+              </a:ext>
+            </a:extLst>
+          </p:cNvPr>
+          <p:cNvGrpSpPr/>
+          <p:nvPr/>
+        </p:nvGrpSpPr>
+        <p:grpSpPr>
+          <a:xfrm>
+            <a:off x="9108037" y="3733748"/>
+            <a:ext cx="503229" cy="2544657"/>
+            <a:chOff x="9222322" y="3645534"/>
+            <a:chExt cx="503229" cy="2544657"/>
+          </a:xfrm>
+        </p:grpSpPr>
+        <p:sp>
+          <p:nvSpPr>
+            <p:cNvPr id="258" name="CuadroTexto 257">
+              <a:extLst>
+                <a:ext uri="{FF2B5EF4-FFF2-40B4-BE49-F238E27FC236}">
+                  <a16:creationId xmlns:a16="http://schemas.microsoft.com/office/drawing/2014/main" id="{9379AD22-91EF-7178-3BF1-A3C10695D1CA}"/>
+                </a:ext>
+              </a:extLst>
+            </p:cNvPr>
+            <p:cNvSpPr txBox="1"/>
+            <p:nvPr/>
+          </p:nvSpPr>
+          <p:spPr>
+            <a:xfrm>
+              <a:off x="9278206" y="3645534"/>
+              <a:ext cx="388944" cy="338554"/>
+            </a:xfrm>
+            <a:prstGeom prst="rect">
+              <a:avLst/>
+            </a:prstGeom>
+            <a:noFill/>
+            <a:ln w="38100">
+              <a:noFill/>
+            </a:ln>
+          </p:spPr>
+          <p:txBody>
+            <a:bodyPr wrap="square" rtlCol="0">
+              <a:spAutoFit/>
+            </a:bodyPr>
+            <a:lstStyle/>
+            <a:p>
+              <a:r>
+                <a:rPr lang="es-MX" sz="1600" b="1" dirty="0">
+                  <a:solidFill>
+                    <a:schemeClr val="bg1">
+                      <a:lumMod val="65000"/>
+                    </a:schemeClr>
+                  </a:solidFill>
+                  <a:latin typeface="Google Sans" pitchFamily="2" charset="0"/>
+                  <a:ea typeface="Google Sans" pitchFamily="2" charset="0"/>
+                  <a:cs typeface="Google Sans" pitchFamily="2" charset="0"/>
+                </a:rPr>
+                <a:t>1</a:t>
+              </a:r>
+            </a:p>
+          </p:txBody>
+        </p:sp>
+        <p:sp>
+          <p:nvSpPr>
+            <p:cNvPr id="260" name="CuadroTexto 259">
+              <a:extLst>
+                <a:ext uri="{FF2B5EF4-FFF2-40B4-BE49-F238E27FC236}">
+                  <a16:creationId xmlns:a16="http://schemas.microsoft.com/office/drawing/2014/main" id="{F3DFE9EC-E882-B90C-F066-BD75B77B3D81}"/>
+                </a:ext>
+              </a:extLst>
+            </p:cNvPr>
+            <p:cNvSpPr txBox="1"/>
+            <p:nvPr/>
+          </p:nvSpPr>
+          <p:spPr>
+            <a:xfrm>
+              <a:off x="9278206" y="4027502"/>
+              <a:ext cx="388944" cy="338554"/>
+            </a:xfrm>
+            <a:prstGeom prst="rect">
+              <a:avLst/>
+            </a:prstGeom>
+            <a:noFill/>
+            <a:ln w="38100">
+              <a:noFill/>
+            </a:ln>
+          </p:spPr>
+          <p:txBody>
+            <a:bodyPr wrap="square" rtlCol="0">
+              <a:spAutoFit/>
+            </a:bodyPr>
+            <a:lstStyle/>
+            <a:p>
+              <a:r>
+                <a:rPr lang="es-MX" sz="1600" b="1" dirty="0">
+                  <a:solidFill>
+                    <a:schemeClr val="bg1">
+                      <a:lumMod val="65000"/>
+                    </a:schemeClr>
+                  </a:solidFill>
+                  <a:latin typeface="Google Sans" pitchFamily="2" charset="0"/>
+                  <a:ea typeface="Google Sans" pitchFamily="2" charset="0"/>
+                  <a:cs typeface="Google Sans" pitchFamily="2" charset="0"/>
+                </a:rPr>
+                <a:t>2</a:t>
+              </a:r>
+            </a:p>
+          </p:txBody>
+        </p:sp>
+        <p:sp>
+          <p:nvSpPr>
+            <p:cNvPr id="262" name="CuadroTexto 261">
+              <a:extLst>
+                <a:ext uri="{FF2B5EF4-FFF2-40B4-BE49-F238E27FC236}">
+                  <a16:creationId xmlns:a16="http://schemas.microsoft.com/office/drawing/2014/main" id="{62B77035-709F-01A3-5455-A3B9479CB0C5}"/>
+                </a:ext>
+              </a:extLst>
+            </p:cNvPr>
+            <p:cNvSpPr txBox="1"/>
+            <p:nvPr/>
+          </p:nvSpPr>
+          <p:spPr>
+            <a:xfrm>
+              <a:off x="9278206" y="4378952"/>
+              <a:ext cx="388944" cy="338554"/>
+            </a:xfrm>
+            <a:prstGeom prst="rect">
+              <a:avLst/>
+            </a:prstGeom>
+            <a:noFill/>
+            <a:ln w="38100">
+              <a:noFill/>
+            </a:ln>
+          </p:spPr>
+          <p:txBody>
+            <a:bodyPr wrap="square" rtlCol="0">
+              <a:spAutoFit/>
+            </a:bodyPr>
+            <a:lstStyle/>
+            <a:p>
+              <a:r>
+                <a:rPr lang="es-MX" sz="1600" b="1" dirty="0">
+                  <a:solidFill>
+                    <a:schemeClr val="bg1">
+                      <a:lumMod val="65000"/>
+                    </a:schemeClr>
+                  </a:solidFill>
+                  <a:latin typeface="Google Sans" pitchFamily="2" charset="0"/>
+                  <a:ea typeface="Google Sans" pitchFamily="2" charset="0"/>
+                  <a:cs typeface="Google Sans" pitchFamily="2" charset="0"/>
+                </a:rPr>
+                <a:t>3</a:t>
+              </a:r>
+            </a:p>
+          </p:txBody>
+        </p:sp>
+        <p:sp>
+          <p:nvSpPr>
+            <p:cNvPr id="264" name="CuadroTexto 263">
+              <a:extLst>
+                <a:ext uri="{FF2B5EF4-FFF2-40B4-BE49-F238E27FC236}">
+                  <a16:creationId xmlns:a16="http://schemas.microsoft.com/office/drawing/2014/main" id="{E8C127AC-55F8-8FF0-8542-E4166519F7F0}"/>
+                </a:ext>
+              </a:extLst>
+            </p:cNvPr>
+            <p:cNvSpPr txBox="1"/>
+            <p:nvPr/>
+          </p:nvSpPr>
+          <p:spPr>
+            <a:xfrm>
+              <a:off x="9222322" y="5851637"/>
+              <a:ext cx="503229" cy="338554"/>
+            </a:xfrm>
+            <a:prstGeom prst="rect">
+              <a:avLst/>
+            </a:prstGeom>
+            <a:noFill/>
+            <a:ln w="38100">
+              <a:noFill/>
+            </a:ln>
+          </p:spPr>
+          <p:txBody>
+            <a:bodyPr wrap="square" rtlCol="0">
+              <a:spAutoFit/>
+            </a:bodyPr>
+            <a:lstStyle/>
+            <a:p>
+              <a:r>
+                <a:rPr lang="es-MX" sz="1600" b="1" dirty="0">
+                  <a:solidFill>
+                    <a:schemeClr val="bg1">
+                      <a:lumMod val="65000"/>
+                    </a:schemeClr>
+                  </a:solidFill>
+                  <a:latin typeface="Google Sans" pitchFamily="2" charset="0"/>
+                  <a:ea typeface="Google Sans" pitchFamily="2" charset="0"/>
+                  <a:cs typeface="Google Sans" pitchFamily="2" charset="0"/>
+                </a:rPr>
+                <a:t>40</a:t>
+              </a:r>
+            </a:p>
+          </p:txBody>
+        </p:sp>
+      </p:grpSp>
+    </p:spTree>
+    <p:extLst>
+      <p:ext uri="{BB962C8B-B14F-4D97-AF65-F5344CB8AC3E}">
+        <p14:creationId xmlns:p14="http://schemas.microsoft.com/office/powerpoint/2010/main" val="2504126036"/>
+      </p:ext>
+    </p:extLst>
+  </p:cSld>
+  <p:clrMapOvr>
+    <a:masterClrMapping/>
+  </p:clrMapOvr>
+</p:sld>
+</file>
+
+<file path=ppt/slides/slide2.xml><?xml version="1.0" encoding="utf-8"?>
+<p:sld xmlns:a="http://schemas.openxmlformats.org/drawingml/2006/main" xmlns:r="http://schemas.openxmlformats.org/officeDocument/2006/relationships" xmlns:p="http://schemas.openxmlformats.org/presentationml/2006/main">
+  <p:cSld>
+    <p:spTree>
+      <p:nvGrpSpPr>
+        <p:cNvPr id="1" name="">
+          <a:extLst>
+            <a:ext uri="{FF2B5EF4-FFF2-40B4-BE49-F238E27FC236}">
+              <a16:creationId xmlns:a16="http://schemas.microsoft.com/office/drawing/2014/main" id="{DBC822FE-8207-2864-57C0-DE1237E54461}"/>
+            </a:ext>
+          </a:extLst>
+        </p:cNvPr>
+        <p:cNvGrpSpPr/>
+        <p:nvPr/>
+      </p:nvGrpSpPr>
+      <p:grpSpPr>
+        <a:xfrm>
+          <a:off x="0" y="0"/>
+          <a:ext cx="0" cy="0"/>
+          <a:chOff x="0" y="0"/>
+          <a:chExt cx="0" cy="0"/>
+        </a:xfrm>
+      </p:grpSpPr>
+      <p:sp>
+        <p:nvSpPr>
+          <p:cNvPr id="14" name="CuadroTexto 13">
+            <a:extLst>
+              <a:ext uri="{FF2B5EF4-FFF2-40B4-BE49-F238E27FC236}">
+                <a16:creationId xmlns:a16="http://schemas.microsoft.com/office/drawing/2014/main" id="{66884650-748D-FDD0-4638-3F6F74135D5F}"/>
+              </a:ext>
+            </a:extLst>
+          </p:cNvPr>
+          <p:cNvSpPr txBox="1"/>
+          <p:nvPr/>
+        </p:nvSpPr>
+        <p:spPr>
+          <a:xfrm>
+            <a:off x="930568" y="636110"/>
+            <a:ext cx="4783442" cy="646331"/>
+          </a:xfrm>
+          <a:prstGeom prst="rect">
+            <a:avLst/>
+          </a:prstGeom>
+          <a:noFill/>
+          <a:ln w="38100">
+            <a:noFill/>
+          </a:ln>
+        </p:spPr>
+        <p:txBody>
+          <a:bodyPr wrap="square" rtlCol="0">
+            <a:spAutoFit/>
+          </a:bodyPr>
+          <a:lstStyle/>
+          <a:p>
+            <a:pPr algn="ctr"/>
+            <a:r>
+              <a:rPr lang="es-MX" sz="3600" b="1" dirty="0" err="1">
+                <a:latin typeface="Cause ExtraBold" pitchFamily="2" charset="0"/>
+                <a:ea typeface="HGSSoeiKakugothicUB" panose="020B0400000000000000" pitchFamily="34" charset="-128"/>
                 <a:cs typeface="Google Sans" pitchFamily="2" charset="0"/>
               </a:rPr>
               <a:t>Uniform</a:t>
             </a:r>
             <a:r>
-              <a:rPr lang="es-MX" sz="2000" b="1" dirty="0">
-                <a:latin typeface="Google Sans" pitchFamily="2" charset="0"/>
-                <a:ea typeface="Google Sans" pitchFamily="2" charset="0"/>
+              <a:rPr lang="es-MX" sz="3600" b="1" dirty="0">
+                <a:latin typeface="Cause ExtraBold" pitchFamily="2" charset="0"/>
+                <a:ea typeface="HGSSoeiKakugothicUB" panose="020B0400000000000000" pitchFamily="34" charset="-128"/>
                 <a:cs typeface="Google Sans" pitchFamily="2" charset="0"/>
               </a:rPr>
               <a:t> Crossover</a:t>
@@ -3377,7 +8000,7 @@
           <p:cNvPr id="8" name="CuadroTexto 7">
             <a:extLst>
               <a:ext uri="{FF2B5EF4-FFF2-40B4-BE49-F238E27FC236}">
-                <a16:creationId xmlns:a16="http://schemas.microsoft.com/office/drawing/2014/main" id="{DE72EEDA-9C8E-746C-AE03-F640032CA2B5}"/>
+                <a16:creationId xmlns:a16="http://schemas.microsoft.com/office/drawing/2014/main" id="{4A1CEAA1-791B-54C5-880D-232092B64276}"/>
               </a:ext>
             </a:extLst>
           </p:cNvPr>
@@ -3424,7 +8047,7 @@
           <p:cNvPr id="10" name="CuadroTexto 9">
             <a:extLst>
               <a:ext uri="{FF2B5EF4-FFF2-40B4-BE49-F238E27FC236}">
-                <a16:creationId xmlns:a16="http://schemas.microsoft.com/office/drawing/2014/main" id="{BE42FA53-856D-D4DE-E3AF-42DE446CDFAC}"/>
+                <a16:creationId xmlns:a16="http://schemas.microsoft.com/office/drawing/2014/main" id="{57D781A7-D3FB-4632-8874-F083203773B0}"/>
               </a:ext>
             </a:extLst>
           </p:cNvPr>
@@ -3473,7 +8096,7 @@
           <p:cNvPr id="12" name="CuadroTexto 11">
             <a:extLst>
               <a:ext uri="{FF2B5EF4-FFF2-40B4-BE49-F238E27FC236}">
-                <a16:creationId xmlns:a16="http://schemas.microsoft.com/office/drawing/2014/main" id="{132FA3AD-DDE7-76A1-39D4-51B52AE959EE}"/>
+                <a16:creationId xmlns:a16="http://schemas.microsoft.com/office/drawing/2014/main" id="{39046658-03DE-4243-3DFB-1F48C6EB96B1}"/>
               </a:ext>
             </a:extLst>
           </p:cNvPr>
@@ -3515,7 +8138,7 @@
           <p:cNvPr id="29" name="Grupo 28">
             <a:extLst>
               <a:ext uri="{FF2B5EF4-FFF2-40B4-BE49-F238E27FC236}">
-                <a16:creationId xmlns:a16="http://schemas.microsoft.com/office/drawing/2014/main" id="{A136C4DD-D3CB-129E-88F3-F092FF165B92}"/>
+                <a16:creationId xmlns:a16="http://schemas.microsoft.com/office/drawing/2014/main" id="{896FB187-C8CF-0DEB-6B08-0E5432B93A83}"/>
               </a:ext>
             </a:extLst>
           </p:cNvPr>
@@ -3535,7 +8158,7 @@
             <p:cNvPr id="23" name="CuadroTexto 22">
               <a:extLst>
                 <a:ext uri="{FF2B5EF4-FFF2-40B4-BE49-F238E27FC236}">
-                  <a16:creationId xmlns:a16="http://schemas.microsoft.com/office/drawing/2014/main" id="{8ACC67EC-AC69-E804-77CA-DD2F7131CC2B}"/>
+                  <a16:creationId xmlns:a16="http://schemas.microsoft.com/office/drawing/2014/main" id="{8FC2D6A7-0760-A964-010E-3DFB0498D40C}"/>
                 </a:ext>
               </a:extLst>
             </p:cNvPr>
@@ -3577,7 +8200,7 @@
             <p:cNvPr id="27" name="CuadroTexto 26">
               <a:extLst>
                 <a:ext uri="{FF2B5EF4-FFF2-40B4-BE49-F238E27FC236}">
-                  <a16:creationId xmlns:a16="http://schemas.microsoft.com/office/drawing/2014/main" id="{E3D0BBAF-71A1-D94C-643A-854757EE3D4F}"/>
+                  <a16:creationId xmlns:a16="http://schemas.microsoft.com/office/drawing/2014/main" id="{E0BCDEE5-1D94-8A33-06C6-CC51D5A011C6}"/>
                 </a:ext>
               </a:extLst>
             </p:cNvPr>
@@ -3662,7 +8285,7 @@
           <p:cNvPr id="37" name="CuadroTexto 36">
             <a:extLst>
               <a:ext uri="{FF2B5EF4-FFF2-40B4-BE49-F238E27FC236}">
-                <a16:creationId xmlns:a16="http://schemas.microsoft.com/office/drawing/2014/main" id="{74CD4B83-3499-6EFB-1FBA-70551191342B}"/>
+                <a16:creationId xmlns:a16="http://schemas.microsoft.com/office/drawing/2014/main" id="{147D6590-3516-39A6-77F9-BA1835109062}"/>
               </a:ext>
             </a:extLst>
           </p:cNvPr>
@@ -3704,7 +8327,7 @@
           <p:cNvPr id="92" name="Grupo 91">
             <a:extLst>
               <a:ext uri="{FF2B5EF4-FFF2-40B4-BE49-F238E27FC236}">
-                <a16:creationId xmlns:a16="http://schemas.microsoft.com/office/drawing/2014/main" id="{6461EAA2-F316-6883-68A6-E02DFD651958}"/>
+                <a16:creationId xmlns:a16="http://schemas.microsoft.com/office/drawing/2014/main" id="{B04240D2-B485-1357-4EE7-7C950FEE3FA6}"/>
               </a:ext>
             </a:extLst>
           </p:cNvPr>
@@ -3724,7 +8347,7 @@
             <p:cNvPr id="81" name="Flecha: hacia abajo 80">
               <a:extLst>
                 <a:ext uri="{FF2B5EF4-FFF2-40B4-BE49-F238E27FC236}">
-                  <a16:creationId xmlns:a16="http://schemas.microsoft.com/office/drawing/2014/main" id="{530781DE-DB5C-15AF-095D-01ABD9E93506}"/>
+                  <a16:creationId xmlns:a16="http://schemas.microsoft.com/office/drawing/2014/main" id="{5369032F-E652-384C-C0AC-B490B9C4644A}"/>
                 </a:ext>
               </a:extLst>
             </p:cNvPr>
@@ -3778,7 +8401,7 @@
             <p:cNvPr id="83" name="Flecha: hacia abajo 82">
               <a:extLst>
                 <a:ext uri="{FF2B5EF4-FFF2-40B4-BE49-F238E27FC236}">
-                  <a16:creationId xmlns:a16="http://schemas.microsoft.com/office/drawing/2014/main" id="{CB9A49C8-C5C8-FDF0-5D28-A62CF0964C1F}"/>
+                  <a16:creationId xmlns:a16="http://schemas.microsoft.com/office/drawing/2014/main" id="{8B6B1B22-68BF-B233-E8EE-B293433BF287}"/>
                 </a:ext>
               </a:extLst>
             </p:cNvPr>
@@ -3832,7 +8455,7 @@
             <p:cNvPr id="85" name="Flecha: hacia abajo 84">
               <a:extLst>
                 <a:ext uri="{FF2B5EF4-FFF2-40B4-BE49-F238E27FC236}">
-                  <a16:creationId xmlns:a16="http://schemas.microsoft.com/office/drawing/2014/main" id="{BABE6B3D-88AB-A8D8-35DB-181150CD3130}"/>
+                  <a16:creationId xmlns:a16="http://schemas.microsoft.com/office/drawing/2014/main" id="{137D8A4E-0BD9-D560-F534-CD738CA98AA7}"/>
                 </a:ext>
               </a:extLst>
             </p:cNvPr>
@@ -3886,7 +8509,7 @@
             <p:cNvPr id="89" name="Flecha: hacia abajo 88">
               <a:extLst>
                 <a:ext uri="{FF2B5EF4-FFF2-40B4-BE49-F238E27FC236}">
-                  <a16:creationId xmlns:a16="http://schemas.microsoft.com/office/drawing/2014/main" id="{BC23FA8E-2A76-DFE7-5F6F-3D9E0FAA926C}"/>
+                  <a16:creationId xmlns:a16="http://schemas.microsoft.com/office/drawing/2014/main" id="{B0502CEF-2FD7-DB9E-56E8-8310E9EE5A74}"/>
                 </a:ext>
               </a:extLst>
             </p:cNvPr>
@@ -3940,7 +8563,7 @@
             <p:cNvPr id="91" name="Flecha: hacia abajo 90">
               <a:extLst>
                 <a:ext uri="{FF2B5EF4-FFF2-40B4-BE49-F238E27FC236}">
-                  <a16:creationId xmlns:a16="http://schemas.microsoft.com/office/drawing/2014/main" id="{EDA3299E-5519-D6D5-3CA9-7A1D00524E98}"/>
+                  <a16:creationId xmlns:a16="http://schemas.microsoft.com/office/drawing/2014/main" id="{30A88E20-0975-69E8-1F71-55C7817CA73D}"/>
                 </a:ext>
               </a:extLst>
             </p:cNvPr>
@@ -3995,7 +8618,7 @@
           <p:cNvPr id="40" name="CuadroTexto 39">
             <a:extLst>
               <a:ext uri="{FF2B5EF4-FFF2-40B4-BE49-F238E27FC236}">
-                <a16:creationId xmlns:a16="http://schemas.microsoft.com/office/drawing/2014/main" id="{8BEB3CE8-7FD3-1FF2-FD2C-4C19F54C2585}"/>
+                <a16:creationId xmlns:a16="http://schemas.microsoft.com/office/drawing/2014/main" id="{12A15E48-F0D7-5D74-E620-323D365C16DC}"/>
               </a:ext>
             </a:extLst>
           </p:cNvPr>
@@ -4004,8 +8627,8 @@
         </p:nvSpPr>
         <p:spPr>
           <a:xfrm>
-            <a:off x="6691472" y="858828"/>
-            <a:ext cx="4036978" cy="400110"/>
+            <a:off x="6767563" y="711603"/>
+            <a:ext cx="4036978" cy="646331"/>
           </a:xfrm>
           <a:prstGeom prst="rect">
             <a:avLst/>
@@ -4023,31 +8646,31 @@
           <a:p>
             <a:pPr algn="ctr"/>
             <a:r>
-              <a:rPr lang="es-MX" sz="2000" b="1" dirty="0" err="1">
-                <a:latin typeface="Google Sans" pitchFamily="2" charset="0"/>
+              <a:rPr lang="es-MX" sz="3600" b="1" dirty="0" err="1">
+                <a:latin typeface="Cause ExtraBold" pitchFamily="2" charset="0"/>
                 <a:ea typeface="Google Sans" pitchFamily="2" charset="0"/>
                 <a:cs typeface="Google Sans" pitchFamily="2" charset="0"/>
               </a:rPr>
               <a:t>Uniform</a:t>
             </a:r>
             <a:r>
-              <a:rPr lang="es-MX" sz="2000" b="1" dirty="0">
-                <a:latin typeface="Google Sans" pitchFamily="2" charset="0"/>
+              <a:rPr lang="es-MX" sz="3600" b="1" dirty="0">
+                <a:latin typeface="Cause ExtraBold" pitchFamily="2" charset="0"/>
                 <a:ea typeface="Google Sans" pitchFamily="2" charset="0"/>
                 <a:cs typeface="Google Sans" pitchFamily="2" charset="0"/>
               </a:rPr>
               <a:t> </a:t>
             </a:r>
             <a:r>
-              <a:rPr lang="es-MX" sz="2000" b="1" dirty="0" err="1">
-                <a:latin typeface="Google Sans" pitchFamily="2" charset="0"/>
+              <a:rPr lang="es-MX" sz="3600" b="1" dirty="0" err="1">
+                <a:latin typeface="Cause ExtraBold" pitchFamily="2" charset="0"/>
                 <a:ea typeface="Google Sans" pitchFamily="2" charset="0"/>
                 <a:cs typeface="Google Sans" pitchFamily="2" charset="0"/>
               </a:rPr>
               <a:t>Mutation</a:t>
             </a:r>
-            <a:endParaRPr lang="es-MX" sz="2000" b="1" dirty="0">
-              <a:latin typeface="Google Sans" pitchFamily="2" charset="0"/>
+            <a:endParaRPr lang="es-MX" sz="3600" b="1" dirty="0">
+              <a:latin typeface="Cause ExtraBold" pitchFamily="2" charset="0"/>
               <a:ea typeface="Google Sans" pitchFamily="2" charset="0"/>
               <a:cs typeface="Google Sans" pitchFamily="2" charset="0"/>
             </a:endParaRPr>
@@ -4059,7 +8682,7 @@
           <p:cNvPr id="48" name="Imagen 47">
             <a:extLst>
               <a:ext uri="{FF2B5EF4-FFF2-40B4-BE49-F238E27FC236}">
-                <a16:creationId xmlns:a16="http://schemas.microsoft.com/office/drawing/2014/main" id="{DE542286-0838-2870-DD69-8B9F663EE962}"/>
+                <a16:creationId xmlns:a16="http://schemas.microsoft.com/office/drawing/2014/main" id="{B3445AC9-BA1D-1496-9AA7-7F8A64607AA5}"/>
               </a:ext>
             </a:extLst>
           </p:cNvPr>
@@ -4095,7 +8718,7 @@
           <p:cNvPr id="60" name="Imagen 59">
             <a:extLst>
               <a:ext uri="{FF2B5EF4-FFF2-40B4-BE49-F238E27FC236}">
-                <a16:creationId xmlns:a16="http://schemas.microsoft.com/office/drawing/2014/main" id="{29B69C2B-8304-A08E-D851-B05639AE0FE6}"/>
+                <a16:creationId xmlns:a16="http://schemas.microsoft.com/office/drawing/2014/main" id="{8EB3E9C2-EE26-CADC-B088-C483576B2455}"/>
               </a:ext>
             </a:extLst>
           </p:cNvPr>
@@ -4131,7 +8754,7 @@
           <p:cNvPr id="72" name="Grupo 71">
             <a:extLst>
               <a:ext uri="{FF2B5EF4-FFF2-40B4-BE49-F238E27FC236}">
-                <a16:creationId xmlns:a16="http://schemas.microsoft.com/office/drawing/2014/main" id="{1608958A-F9D7-E591-DBAE-F187A51E8D05}"/>
+                <a16:creationId xmlns:a16="http://schemas.microsoft.com/office/drawing/2014/main" id="{C8E3C80E-51B4-6C21-7F6B-3EF362189F3D}"/>
               </a:ext>
             </a:extLst>
           </p:cNvPr>
@@ -4151,7 +8774,7 @@
             <p:cNvPr id="64" name="Imagen 63">
               <a:extLst>
                 <a:ext uri="{FF2B5EF4-FFF2-40B4-BE49-F238E27FC236}">
-                  <a16:creationId xmlns:a16="http://schemas.microsoft.com/office/drawing/2014/main" id="{F692AF06-DBBA-AE16-C9A3-98B30B1CD3B7}"/>
+                  <a16:creationId xmlns:a16="http://schemas.microsoft.com/office/drawing/2014/main" id="{9ED7317C-9A84-90D1-382A-C2AA0ECC2886}"/>
                 </a:ext>
               </a:extLst>
             </p:cNvPr>
@@ -4187,7 +8810,7 @@
             <p:cNvPr id="58" name="Imagen 57">
               <a:extLst>
                 <a:ext uri="{FF2B5EF4-FFF2-40B4-BE49-F238E27FC236}">
-                  <a16:creationId xmlns:a16="http://schemas.microsoft.com/office/drawing/2014/main" id="{BF36F532-A969-1DAF-CE96-382B0E7DE50F}"/>
+                  <a16:creationId xmlns:a16="http://schemas.microsoft.com/office/drawing/2014/main" id="{DCCF33D0-56F0-B765-4243-5C71925082CB}"/>
                 </a:ext>
               </a:extLst>
             </p:cNvPr>
@@ -4223,7 +8846,7 @@
             <p:cNvPr id="65" name="CuadroTexto 64">
               <a:extLst>
                 <a:ext uri="{FF2B5EF4-FFF2-40B4-BE49-F238E27FC236}">
-                  <a16:creationId xmlns:a16="http://schemas.microsoft.com/office/drawing/2014/main" id="{65E8B77E-BB30-B2CE-3FE2-7F58230F7352}"/>
+                  <a16:creationId xmlns:a16="http://schemas.microsoft.com/office/drawing/2014/main" id="{C02EEB3D-8917-FCCF-DA4E-D134BBDDE8AA}"/>
                 </a:ext>
               </a:extLst>
             </p:cNvPr>
@@ -4270,7 +8893,7 @@
             <p:cNvPr id="66" name="Imagen 65">
               <a:extLst>
                 <a:ext uri="{FF2B5EF4-FFF2-40B4-BE49-F238E27FC236}">
-                  <a16:creationId xmlns:a16="http://schemas.microsoft.com/office/drawing/2014/main" id="{08D4F4A4-A0DB-7803-D8E2-1459FC88182F}"/>
+                  <a16:creationId xmlns:a16="http://schemas.microsoft.com/office/drawing/2014/main" id="{26A31A8B-5EE3-F112-BD4E-E3C3F50549B1}"/>
                 </a:ext>
               </a:extLst>
             </p:cNvPr>
@@ -4306,7 +8929,7 @@
             <p:cNvPr id="67" name="Imagen 66">
               <a:extLst>
                 <a:ext uri="{FF2B5EF4-FFF2-40B4-BE49-F238E27FC236}">
-                  <a16:creationId xmlns:a16="http://schemas.microsoft.com/office/drawing/2014/main" id="{7A2BEA02-7512-0B41-44BB-DB9E559BE953}"/>
+                  <a16:creationId xmlns:a16="http://schemas.microsoft.com/office/drawing/2014/main" id="{8E979233-93E0-8CB6-613A-C657472A0B15}"/>
                 </a:ext>
               </a:extLst>
             </p:cNvPr>
@@ -4342,7 +8965,7 @@
             <p:cNvPr id="68" name="Imagen 67">
               <a:extLst>
                 <a:ext uri="{FF2B5EF4-FFF2-40B4-BE49-F238E27FC236}">
-                  <a16:creationId xmlns:a16="http://schemas.microsoft.com/office/drawing/2014/main" id="{90C5FF14-06A6-43E2-9681-231571608564}"/>
+                  <a16:creationId xmlns:a16="http://schemas.microsoft.com/office/drawing/2014/main" id="{2C91616E-2D42-BE94-6760-4567BBEA2ADE}"/>
                 </a:ext>
               </a:extLst>
             </p:cNvPr>
@@ -4378,7 +9001,7 @@
             <p:cNvPr id="69" name="Imagen 68">
               <a:extLst>
                 <a:ext uri="{FF2B5EF4-FFF2-40B4-BE49-F238E27FC236}">
-                  <a16:creationId xmlns:a16="http://schemas.microsoft.com/office/drawing/2014/main" id="{476C06D5-8759-2022-A5E5-3AF61EEC407B}"/>
+                  <a16:creationId xmlns:a16="http://schemas.microsoft.com/office/drawing/2014/main" id="{73E0D873-EFC0-1612-20BE-CFEA4A0FD920}"/>
                 </a:ext>
               </a:extLst>
             </p:cNvPr>
@@ -4414,7 +9037,7 @@
             <p:cNvPr id="70" name="Imagen 69">
               <a:extLst>
                 <a:ext uri="{FF2B5EF4-FFF2-40B4-BE49-F238E27FC236}">
-                  <a16:creationId xmlns:a16="http://schemas.microsoft.com/office/drawing/2014/main" id="{6367EE1D-F5B2-B346-CB40-9B093084ED08}"/>
+                  <a16:creationId xmlns:a16="http://schemas.microsoft.com/office/drawing/2014/main" id="{C99EF58A-AF66-1391-4A60-311CB0B8B502}"/>
                 </a:ext>
               </a:extLst>
             </p:cNvPr>
@@ -4451,7 +9074,7 @@
           <p:cNvPr id="78" name="CuadroTexto 77">
             <a:extLst>
               <a:ext uri="{FF2B5EF4-FFF2-40B4-BE49-F238E27FC236}">
-                <a16:creationId xmlns:a16="http://schemas.microsoft.com/office/drawing/2014/main" id="{3FDD770A-80CF-ED97-BB4F-EEDDEBD1D082}"/>
+                <a16:creationId xmlns:a16="http://schemas.microsoft.com/office/drawing/2014/main" id="{5297EAD8-C5E7-6095-04CA-F49ACEDA69EB}"/>
               </a:ext>
             </a:extLst>
           </p:cNvPr>
@@ -4557,7 +9180,7 @@
           <p:cNvPr id="93" name="Imagen 92">
             <a:extLst>
               <a:ext uri="{FF2B5EF4-FFF2-40B4-BE49-F238E27FC236}">
-                <a16:creationId xmlns:a16="http://schemas.microsoft.com/office/drawing/2014/main" id="{E2282B60-415C-2632-77B0-72DD1D938A88}"/>
+                <a16:creationId xmlns:a16="http://schemas.microsoft.com/office/drawing/2014/main" id="{57BDB14C-0601-C750-2AAF-368696E52FFD}"/>
               </a:ext>
             </a:extLst>
           </p:cNvPr>
@@ -4593,7 +9216,7 @@
           <p:cNvPr id="94" name="CuadroTexto 93">
             <a:extLst>
               <a:ext uri="{FF2B5EF4-FFF2-40B4-BE49-F238E27FC236}">
-                <a16:creationId xmlns:a16="http://schemas.microsoft.com/office/drawing/2014/main" id="{A7AD8359-C8A9-4DFC-B154-2DFB9FF8935A}"/>
+                <a16:creationId xmlns:a16="http://schemas.microsoft.com/office/drawing/2014/main" id="{E40594B7-2407-9B2A-7A88-D2116B6380B6}"/>
               </a:ext>
             </a:extLst>
           </p:cNvPr>
@@ -4642,7 +9265,1447 @@
     </p:spTree>
     <p:extLst>
       <p:ext uri="{BB962C8B-B14F-4D97-AF65-F5344CB8AC3E}">
-        <p14:creationId xmlns:p14="http://schemas.microsoft.com/office/powerpoint/2010/main" val="2504126036"/>
+        <p14:creationId xmlns:p14="http://schemas.microsoft.com/office/powerpoint/2010/main" val="3556262602"/>
+      </p:ext>
+    </p:extLst>
+  </p:cSld>
+  <p:clrMapOvr>
+    <a:masterClrMapping/>
+  </p:clrMapOvr>
+</p:sld>
+</file>
+
+<file path=ppt/slides/slide3.xml><?xml version="1.0" encoding="utf-8"?>
+<p:sld xmlns:a="http://schemas.openxmlformats.org/drawingml/2006/main" xmlns:r="http://schemas.openxmlformats.org/officeDocument/2006/relationships" xmlns:p="http://schemas.openxmlformats.org/presentationml/2006/main">
+  <p:cSld>
+    <p:spTree>
+      <p:nvGrpSpPr>
+        <p:cNvPr id="1" name="">
+          <a:extLst>
+            <a:ext uri="{FF2B5EF4-FFF2-40B4-BE49-F238E27FC236}">
+              <a16:creationId xmlns:a16="http://schemas.microsoft.com/office/drawing/2014/main" id="{C4BA740F-D643-A8E8-4D5C-884A1192B6C0}"/>
+            </a:ext>
+          </a:extLst>
+        </p:cNvPr>
+        <p:cNvGrpSpPr/>
+        <p:nvPr/>
+      </p:nvGrpSpPr>
+      <p:grpSpPr>
+        <a:xfrm>
+          <a:off x="0" y="0"/>
+          <a:ext cx="0" cy="0"/>
+          <a:chOff x="0" y="0"/>
+          <a:chExt cx="0" cy="0"/>
+        </a:xfrm>
+      </p:grpSpPr>
+      <p:sp>
+        <p:nvSpPr>
+          <p:cNvPr id="14" name="CuadroTexto 13">
+            <a:extLst>
+              <a:ext uri="{FF2B5EF4-FFF2-40B4-BE49-F238E27FC236}">
+                <a16:creationId xmlns:a16="http://schemas.microsoft.com/office/drawing/2014/main" id="{7EB0BF9B-D940-4ABF-8CAD-620266CFB45F}"/>
+              </a:ext>
+            </a:extLst>
+          </p:cNvPr>
+          <p:cNvSpPr txBox="1"/>
+          <p:nvPr/>
+        </p:nvSpPr>
+        <p:spPr>
+          <a:xfrm>
+            <a:off x="794398" y="711604"/>
+            <a:ext cx="4036978" cy="646331"/>
+          </a:xfrm>
+          <a:prstGeom prst="rect">
+            <a:avLst/>
+          </a:prstGeom>
+          <a:noFill/>
+          <a:ln w="38100">
+            <a:noFill/>
+          </a:ln>
+        </p:spPr>
+        <p:txBody>
+          <a:bodyPr wrap="square" rtlCol="0">
+            <a:spAutoFit/>
+          </a:bodyPr>
+          <a:lstStyle/>
+          <a:p>
+            <a:r>
+              <a:rPr lang="es-MX" sz="3600" b="1" dirty="0" err="1">
+                <a:latin typeface="Cause ExtraBold" pitchFamily="2" charset="0"/>
+                <a:ea typeface="HGSSoeiKakugothicUB" panose="020B0400000000000000" pitchFamily="34" charset="-128"/>
+                <a:cs typeface="Google Sans" pitchFamily="2" charset="0"/>
+              </a:rPr>
+              <a:t>Tournament</a:t>
+            </a:r>
+            <a:endParaRPr lang="es-MX" sz="3600" b="1" dirty="0">
+              <a:latin typeface="Cause ExtraBold" pitchFamily="2" charset="0"/>
+              <a:ea typeface="HGSSoeiKakugothicUB" panose="020B0400000000000000" pitchFamily="34" charset="-128"/>
+              <a:cs typeface="Google Sans" pitchFamily="2" charset="0"/>
+            </a:endParaRPr>
+          </a:p>
+        </p:txBody>
+      </p:sp>
+      <p:sp>
+        <p:nvSpPr>
+          <p:cNvPr id="78" name="CuadroTexto 77">
+            <a:extLst>
+              <a:ext uri="{FF2B5EF4-FFF2-40B4-BE49-F238E27FC236}">
+                <a16:creationId xmlns:a16="http://schemas.microsoft.com/office/drawing/2014/main" id="{369C6102-5E73-E89B-2B9D-83CCD324B045}"/>
+              </a:ext>
+            </a:extLst>
+          </p:cNvPr>
+          <p:cNvSpPr txBox="1"/>
+          <p:nvPr/>
+        </p:nvSpPr>
+        <p:spPr>
+          <a:xfrm>
+            <a:off x="457200" y="2333685"/>
+            <a:ext cx="1825105" cy="4470198"/>
+          </a:xfrm>
+          <a:prstGeom prst="rect">
+            <a:avLst/>
+          </a:prstGeom>
+          <a:noFill/>
+          <a:ln w="38100">
+            <a:noFill/>
+          </a:ln>
+        </p:spPr>
+        <p:txBody>
+          <a:bodyPr wrap="square" rtlCol="0">
+            <a:spAutoFit/>
+          </a:bodyPr>
+          <a:lstStyle/>
+          <a:p>
+            <a:pPr>
+              <a:lnSpc>
+                <a:spcPct val="150000"/>
+              </a:lnSpc>
+            </a:pPr>
+            <a:r>
+              <a:rPr lang="es-MX" sz="2400" b="1" dirty="0">
+                <a:solidFill>
+                  <a:schemeClr val="bg1">
+                    <a:lumMod val="65000"/>
+                  </a:schemeClr>
+                </a:solidFill>
+                <a:latin typeface="Google Sans" pitchFamily="2" charset="0"/>
+                <a:ea typeface="Google Sans" pitchFamily="2" charset="0"/>
+                <a:cs typeface="Google Sans" pitchFamily="2" charset="0"/>
+              </a:rPr>
+              <a:t>EKTTNMF</a:t>
+            </a:r>
+          </a:p>
+          <a:p>
+            <a:pPr>
+              <a:lnSpc>
+                <a:spcPct val="150000"/>
+              </a:lnSpc>
+            </a:pPr>
+            <a:r>
+              <a:rPr lang="es-MX" sz="2400" b="1" dirty="0">
+                <a:solidFill>
+                  <a:schemeClr val="bg1">
+                    <a:lumMod val="65000"/>
+                  </a:schemeClr>
+                </a:solidFill>
+                <a:latin typeface="Google Sans" pitchFamily="2" charset="0"/>
+                <a:ea typeface="Google Sans" pitchFamily="2" charset="0"/>
+                <a:cs typeface="Google Sans" pitchFamily="2" charset="0"/>
+              </a:rPr>
+              <a:t>HKVMRAT</a:t>
+            </a:r>
+          </a:p>
+          <a:p>
+            <a:pPr>
+              <a:lnSpc>
+                <a:spcPct val="150000"/>
+              </a:lnSpc>
+            </a:pPr>
+            <a:r>
+              <a:rPr lang="es-MX" sz="2400" b="1" dirty="0">
+                <a:solidFill>
+                  <a:schemeClr val="bg1">
+                    <a:lumMod val="65000"/>
+                  </a:schemeClr>
+                </a:solidFill>
+                <a:latin typeface="Google Sans" pitchFamily="2" charset="0"/>
+                <a:ea typeface="Google Sans" pitchFamily="2" charset="0"/>
+                <a:cs typeface="Google Sans" pitchFamily="2" charset="0"/>
+              </a:rPr>
+              <a:t>MMQYQEY</a:t>
+            </a:r>
+          </a:p>
+          <a:p>
+            <a:pPr>
+              <a:lnSpc>
+                <a:spcPct val="150000"/>
+              </a:lnSpc>
+            </a:pPr>
+            <a:r>
+              <a:rPr lang="es-MX" sz="2400" b="1" dirty="0">
+                <a:solidFill>
+                  <a:schemeClr val="bg1">
+                    <a:lumMod val="65000"/>
+                  </a:schemeClr>
+                </a:solidFill>
+                <a:latin typeface="Google Sans" pitchFamily="2" charset="0"/>
+                <a:ea typeface="Google Sans" pitchFamily="2" charset="0"/>
+                <a:cs typeface="Google Sans" pitchFamily="2" charset="0"/>
+              </a:rPr>
+              <a:t>MICRHPM</a:t>
+            </a:r>
+          </a:p>
+          <a:p>
+            <a:pPr>
+              <a:lnSpc>
+                <a:spcPct val="150000"/>
+              </a:lnSpc>
+            </a:pPr>
+            <a:r>
+              <a:rPr lang="es-MX" sz="2400" b="1" dirty="0">
+                <a:solidFill>
+                  <a:schemeClr val="bg1">
+                    <a:lumMod val="65000"/>
+                  </a:schemeClr>
+                </a:solidFill>
+                <a:latin typeface="Google Sans" pitchFamily="2" charset="0"/>
+                <a:ea typeface="Google Sans" pitchFamily="2" charset="0"/>
+                <a:cs typeface="Google Sans" pitchFamily="2" charset="0"/>
+              </a:rPr>
+              <a:t>CQRRCEW</a:t>
+            </a:r>
+          </a:p>
+          <a:p>
+            <a:pPr>
+              <a:lnSpc>
+                <a:spcPct val="150000"/>
+              </a:lnSpc>
+            </a:pPr>
+            <a:r>
+              <a:rPr lang="es-MX" sz="2400" b="1" dirty="0">
+                <a:solidFill>
+                  <a:schemeClr val="bg1">
+                    <a:lumMod val="65000"/>
+                  </a:schemeClr>
+                </a:solidFill>
+                <a:latin typeface="Google Sans" pitchFamily="2" charset="0"/>
+                <a:ea typeface="Google Sans" pitchFamily="2" charset="0"/>
+                <a:cs typeface="Google Sans" pitchFamily="2" charset="0"/>
+              </a:rPr>
+              <a:t>NQTSCSL</a:t>
+            </a:r>
+          </a:p>
+          <a:p>
+            <a:pPr>
+              <a:lnSpc>
+                <a:spcPct val="150000"/>
+              </a:lnSpc>
+            </a:pPr>
+            <a:r>
+              <a:rPr lang="es-MX" sz="2400" b="1" dirty="0">
+                <a:solidFill>
+                  <a:schemeClr val="bg1">
+                    <a:lumMod val="65000"/>
+                  </a:schemeClr>
+                </a:solidFill>
+                <a:latin typeface="Google Sans" pitchFamily="2" charset="0"/>
+                <a:ea typeface="Google Sans" pitchFamily="2" charset="0"/>
+                <a:cs typeface="Google Sans" pitchFamily="2" charset="0"/>
+              </a:rPr>
+              <a:t>TKHNYCN</a:t>
+            </a:r>
+          </a:p>
+          <a:p>
+            <a:pPr>
+              <a:lnSpc>
+                <a:spcPct val="150000"/>
+              </a:lnSpc>
+            </a:pPr>
+            <a:r>
+              <a:rPr lang="es-MX" sz="2400" b="1" dirty="0">
+                <a:solidFill>
+                  <a:schemeClr val="bg1">
+                    <a:lumMod val="65000"/>
+                  </a:schemeClr>
+                </a:solidFill>
+                <a:latin typeface="Google Sans" pitchFamily="2" charset="0"/>
+                <a:ea typeface="Google Sans" pitchFamily="2" charset="0"/>
+                <a:cs typeface="Google Sans" pitchFamily="2" charset="0"/>
+              </a:rPr>
+              <a:t>RDVEKFA</a:t>
+            </a:r>
+          </a:p>
+        </p:txBody>
+      </p:sp>
+      <p:sp>
+        <p:nvSpPr>
+          <p:cNvPr id="21" name="CuadroTexto 20">
+            <a:extLst>
+              <a:ext uri="{FF2B5EF4-FFF2-40B4-BE49-F238E27FC236}">
+                <a16:creationId xmlns:a16="http://schemas.microsoft.com/office/drawing/2014/main" id="{F58CE01E-35C2-2C32-E1D8-BB2133C2C92D}"/>
+              </a:ext>
+            </a:extLst>
+          </p:cNvPr>
+          <p:cNvSpPr txBox="1"/>
+          <p:nvPr/>
+        </p:nvSpPr>
+        <p:spPr>
+          <a:xfrm>
+            <a:off x="457200" y="1618504"/>
+            <a:ext cx="1838228" cy="400110"/>
+          </a:xfrm>
+          <a:prstGeom prst="rect">
+            <a:avLst/>
+          </a:prstGeom>
+          <a:noFill/>
+          <a:ln w="38100">
+            <a:noFill/>
+          </a:ln>
+        </p:spPr>
+        <p:txBody>
+          <a:bodyPr wrap="square" rtlCol="0">
+            <a:spAutoFit/>
+          </a:bodyPr>
+          <a:lstStyle/>
+          <a:p>
+            <a:r>
+              <a:rPr lang="es-MX" sz="2000" b="1" dirty="0" err="1">
+                <a:latin typeface="Google Sans" pitchFamily="2" charset="0"/>
+                <a:ea typeface="Google Sans" pitchFamily="2" charset="0"/>
+                <a:cs typeface="Google Sans" pitchFamily="2" charset="0"/>
+              </a:rPr>
+              <a:t>Population</a:t>
+            </a:r>
+            <a:endParaRPr lang="es-MX" sz="2000" b="1" dirty="0">
+              <a:latin typeface="Google Sans" pitchFamily="2" charset="0"/>
+              <a:ea typeface="Google Sans" pitchFamily="2" charset="0"/>
+              <a:cs typeface="Google Sans" pitchFamily="2" charset="0"/>
+            </a:endParaRPr>
+          </a:p>
+        </p:txBody>
+      </p:sp>
+      <mc:AlternateContent xmlns:mc="http://schemas.openxmlformats.org/markup-compatibility/2006">
+        <mc:Choice xmlns:a14="http://schemas.microsoft.com/office/drawing/2010/main" Requires="a14">
+          <p:sp>
+            <p:nvSpPr>
+              <p:cNvPr id="24" name="CuadroTexto 23">
+                <a:extLst>
+                  <a:ext uri="{FF2B5EF4-FFF2-40B4-BE49-F238E27FC236}">
+                    <a16:creationId xmlns:a16="http://schemas.microsoft.com/office/drawing/2014/main" id="{CE8D7B1D-EDDA-4947-1631-156B47BC6AA7}"/>
+                  </a:ext>
+                </a:extLst>
+              </p:cNvPr>
+              <p:cNvSpPr txBox="1"/>
+              <p:nvPr/>
+            </p:nvSpPr>
+            <p:spPr>
+              <a:xfrm flipH="1">
+                <a:off x="2953126" y="1941990"/>
+                <a:ext cx="521594" cy="461024"/>
+              </a:xfrm>
+              <a:prstGeom prst="rect">
+                <a:avLst/>
+              </a:prstGeom>
+              <a:noFill/>
+            </p:spPr>
+            <p:txBody>
+              <a:bodyPr wrap="square" lIns="0" tIns="0" rIns="0" bIns="0" rtlCol="0">
+                <a:spAutoFit/>
+              </a:bodyPr>
+              <a:lstStyle/>
+              <a:p>
+                <a:pPr/>
+                <a14:m>
+                  <m:oMathPara xmlns:m="http://schemas.openxmlformats.org/officeDocument/2006/math">
+                    <m:oMathParaPr>
+                      <m:jc m:val="centerGroup"/>
+                    </m:oMathParaPr>
+                    <m:oMath xmlns:m="http://schemas.openxmlformats.org/officeDocument/2006/math">
+                      <m:f>
+                        <m:fPr>
+                          <m:ctrlPr>
+                            <a:rPr lang="es-MX" sz="1600" b="0" i="1" smtClean="0">
+                              <a:latin typeface="Cambria Math" panose="02040503050406030204" pitchFamily="18" charset="0"/>
+                            </a:rPr>
+                          </m:ctrlPr>
+                        </m:fPr>
+                        <m:num>
+                          <m:r>
+                            <a:rPr lang="es-MX" sz="1600" b="0" i="1" smtClean="0">
+                              <a:latin typeface="Cambria Math" panose="02040503050406030204" pitchFamily="18" charset="0"/>
+                            </a:rPr>
+                            <m:t>1</m:t>
+                          </m:r>
+                        </m:num>
+                        <m:den>
+                          <m:r>
+                            <a:rPr lang="es-MX" sz="1600" b="0" i="1" smtClean="0">
+                              <a:latin typeface="Cambria Math" panose="02040503050406030204" pitchFamily="18" charset="0"/>
+                            </a:rPr>
+                            <m:t>𝑁</m:t>
+                          </m:r>
+                        </m:den>
+                      </m:f>
+                    </m:oMath>
+                  </m:oMathPara>
+                </a14:m>
+                <a:endParaRPr lang="es-MX" sz="1600" dirty="0">
+                  <a:latin typeface="Google Sans" pitchFamily="2" charset="0"/>
+                  <a:ea typeface="Google Sans" pitchFamily="2" charset="0"/>
+                  <a:cs typeface="Google Sans" pitchFamily="2" charset="0"/>
+                </a:endParaRPr>
+              </a:p>
+            </p:txBody>
+          </p:sp>
+        </mc:Choice>
+        <mc:Fallback>
+          <p:sp>
+            <p:nvSpPr>
+              <p:cNvPr id="24" name="CuadroTexto 23">
+                <a:extLst>
+                  <a:ext uri="{FF2B5EF4-FFF2-40B4-BE49-F238E27FC236}">
+                    <a16:creationId xmlns:a16="http://schemas.microsoft.com/office/drawing/2014/main" id="{CE8D7B1D-EDDA-4947-1631-156B47BC6AA7}"/>
+                  </a:ext>
+                </a:extLst>
+              </p:cNvPr>
+              <p:cNvSpPr txBox="1">
+                <a:spLocks noRot="1" noChangeAspect="1" noMove="1" noResize="1" noEditPoints="1" noAdjustHandles="1" noChangeArrowheads="1" noChangeShapeType="1" noTextEdit="1"/>
+              </p:cNvSpPr>
+              <p:nvPr/>
+            </p:nvSpPr>
+            <p:spPr>
+              <a:xfrm flipH="1">
+                <a:off x="2953126" y="1941990"/>
+                <a:ext cx="521594" cy="461024"/>
+              </a:xfrm>
+              <a:prstGeom prst="rect">
+                <a:avLst/>
+              </a:prstGeom>
+              <a:blipFill>
+                <a:blip r:embed="rId2"/>
+                <a:stretch>
+                  <a:fillRect/>
+                </a:stretch>
+              </a:blipFill>
+            </p:spPr>
+            <p:txBody>
+              <a:bodyPr/>
+              <a:lstStyle/>
+              <a:p>
+                <a:r>
+                  <a:rPr lang="es-MX">
+                    <a:noFill/>
+                  </a:rPr>
+                  <a:t> </a:t>
+                </a:r>
+              </a:p>
+            </p:txBody>
+          </p:sp>
+        </mc:Fallback>
+      </mc:AlternateContent>
+      <mc:AlternateContent xmlns:mc="http://schemas.openxmlformats.org/markup-compatibility/2006">
+        <mc:Choice xmlns:a14="http://schemas.microsoft.com/office/drawing/2010/main" Requires="a14">
+          <p:sp>
+            <p:nvSpPr>
+              <p:cNvPr id="26" name="CuadroTexto 25">
+                <a:extLst>
+                  <a:ext uri="{FF2B5EF4-FFF2-40B4-BE49-F238E27FC236}">
+                    <a16:creationId xmlns:a16="http://schemas.microsoft.com/office/drawing/2014/main" id="{5B144BDD-95F8-8C66-A01F-D70991D4E611}"/>
+                  </a:ext>
+                </a:extLst>
+              </p:cNvPr>
+              <p:cNvSpPr txBox="1"/>
+              <p:nvPr/>
+            </p:nvSpPr>
+            <p:spPr>
+              <a:xfrm>
+                <a:off x="2397212" y="2470498"/>
+                <a:ext cx="302967" cy="404726"/>
+              </a:xfrm>
+              <a:prstGeom prst="rect">
+                <a:avLst/>
+              </a:prstGeom>
+              <a:noFill/>
+            </p:spPr>
+            <p:txBody>
+              <a:bodyPr wrap="square" lIns="0" tIns="0" rIns="0" bIns="0" rtlCol="0">
+                <a:spAutoFit/>
+              </a:bodyPr>
+              <a:lstStyle/>
+              <a:p>
+                <a:pPr/>
+                <a14:m>
+                  <m:oMathPara xmlns:m="http://schemas.openxmlformats.org/officeDocument/2006/math">
+                    <m:oMathParaPr>
+                      <m:jc m:val="centerGroup"/>
+                    </m:oMathParaPr>
+                    <m:oMath xmlns:m="http://schemas.openxmlformats.org/officeDocument/2006/math">
+                      <m:f>
+                        <m:fPr>
+                          <m:ctrlPr>
+                            <a:rPr lang="es-MX" sz="1400" b="0" i="1" smtClean="0">
+                              <a:latin typeface="Cambria Math" panose="02040503050406030204" pitchFamily="18" charset="0"/>
+                            </a:rPr>
+                          </m:ctrlPr>
+                        </m:fPr>
+                        <m:num>
+                          <m:r>
+                            <a:rPr lang="es-MX" sz="1400" b="0" i="1" smtClean="0">
+                              <a:latin typeface="Cambria Math" panose="02040503050406030204" pitchFamily="18" charset="0"/>
+                            </a:rPr>
+                            <m:t>1</m:t>
+                          </m:r>
+                        </m:num>
+                        <m:den>
+                          <m:r>
+                            <a:rPr lang="es-MX" sz="1400" b="0" i="1" smtClean="0">
+                              <a:latin typeface="Cambria Math" panose="02040503050406030204" pitchFamily="18" charset="0"/>
+                            </a:rPr>
+                            <m:t>8</m:t>
+                          </m:r>
+                        </m:den>
+                      </m:f>
+                    </m:oMath>
+                  </m:oMathPara>
+                </a14:m>
+                <a:endParaRPr lang="es-MX" sz="1400" dirty="0">
+                  <a:latin typeface="Google Sans" pitchFamily="2" charset="0"/>
+                  <a:ea typeface="Google Sans" pitchFamily="2" charset="0"/>
+                  <a:cs typeface="Google Sans" pitchFamily="2" charset="0"/>
+                </a:endParaRPr>
+              </a:p>
+            </p:txBody>
+          </p:sp>
+        </mc:Choice>
+        <mc:Fallback>
+          <p:sp>
+            <p:nvSpPr>
+              <p:cNvPr id="26" name="CuadroTexto 25">
+                <a:extLst>
+                  <a:ext uri="{FF2B5EF4-FFF2-40B4-BE49-F238E27FC236}">
+                    <a16:creationId xmlns:a16="http://schemas.microsoft.com/office/drawing/2014/main" id="{5B144BDD-95F8-8C66-A01F-D70991D4E611}"/>
+                  </a:ext>
+                </a:extLst>
+              </p:cNvPr>
+              <p:cNvSpPr txBox="1">
+                <a:spLocks noRot="1" noChangeAspect="1" noMove="1" noResize="1" noEditPoints="1" noAdjustHandles="1" noChangeArrowheads="1" noChangeShapeType="1" noTextEdit="1"/>
+              </p:cNvSpPr>
+              <p:nvPr/>
+            </p:nvSpPr>
+            <p:spPr>
+              <a:xfrm>
+                <a:off x="2397212" y="2470498"/>
+                <a:ext cx="302967" cy="404726"/>
+              </a:xfrm>
+              <a:prstGeom prst="rect">
+                <a:avLst/>
+              </a:prstGeom>
+              <a:blipFill>
+                <a:blip r:embed="rId3"/>
+                <a:stretch>
+                  <a:fillRect b="-11940"/>
+                </a:stretch>
+              </a:blipFill>
+            </p:spPr>
+            <p:txBody>
+              <a:bodyPr/>
+              <a:lstStyle/>
+              <a:p>
+                <a:r>
+                  <a:rPr lang="es-MX">
+                    <a:noFill/>
+                  </a:rPr>
+                  <a:t> </a:t>
+                </a:r>
+              </a:p>
+            </p:txBody>
+          </p:sp>
+        </mc:Fallback>
+      </mc:AlternateContent>
+      <mc:AlternateContent xmlns:mc="http://schemas.openxmlformats.org/markup-compatibility/2006">
+        <mc:Choice xmlns:a14="http://schemas.microsoft.com/office/drawing/2010/main" Requires="a14">
+          <p:sp>
+            <p:nvSpPr>
+              <p:cNvPr id="35" name="CuadroTexto 34">
+                <a:extLst>
+                  <a:ext uri="{FF2B5EF4-FFF2-40B4-BE49-F238E27FC236}">
+                    <a16:creationId xmlns:a16="http://schemas.microsoft.com/office/drawing/2014/main" id="{7256DEA9-CD56-CA3A-4B54-8D0AE627359D}"/>
+                  </a:ext>
+                </a:extLst>
+              </p:cNvPr>
+              <p:cNvSpPr txBox="1"/>
+              <p:nvPr/>
+            </p:nvSpPr>
+            <p:spPr>
+              <a:xfrm>
+                <a:off x="2397211" y="3024274"/>
+                <a:ext cx="302967" cy="404726"/>
+              </a:xfrm>
+              <a:prstGeom prst="rect">
+                <a:avLst/>
+              </a:prstGeom>
+              <a:noFill/>
+            </p:spPr>
+            <p:txBody>
+              <a:bodyPr wrap="square" lIns="0" tIns="0" rIns="0" bIns="0" rtlCol="0">
+                <a:spAutoFit/>
+              </a:bodyPr>
+              <a:lstStyle/>
+              <a:p>
+                <a:pPr/>
+                <a14:m>
+                  <m:oMathPara xmlns:m="http://schemas.openxmlformats.org/officeDocument/2006/math">
+                    <m:oMathParaPr>
+                      <m:jc m:val="centerGroup"/>
+                    </m:oMathParaPr>
+                    <m:oMath xmlns:m="http://schemas.openxmlformats.org/officeDocument/2006/math">
+                      <m:f>
+                        <m:fPr>
+                          <m:ctrlPr>
+                            <a:rPr lang="es-MX" sz="1400" b="0" i="1" smtClean="0">
+                              <a:latin typeface="Cambria Math" panose="02040503050406030204" pitchFamily="18" charset="0"/>
+                            </a:rPr>
+                          </m:ctrlPr>
+                        </m:fPr>
+                        <m:num>
+                          <m:r>
+                            <a:rPr lang="es-MX" sz="1400" b="0" i="1" smtClean="0">
+                              <a:latin typeface="Cambria Math" panose="02040503050406030204" pitchFamily="18" charset="0"/>
+                            </a:rPr>
+                            <m:t>1</m:t>
+                          </m:r>
+                        </m:num>
+                        <m:den>
+                          <m:r>
+                            <a:rPr lang="es-MX" sz="1400" b="0" i="1" smtClean="0">
+                              <a:latin typeface="Cambria Math" panose="02040503050406030204" pitchFamily="18" charset="0"/>
+                            </a:rPr>
+                            <m:t>8</m:t>
+                          </m:r>
+                        </m:den>
+                      </m:f>
+                    </m:oMath>
+                  </m:oMathPara>
+                </a14:m>
+                <a:endParaRPr lang="es-MX" sz="1400" dirty="0">
+                  <a:latin typeface="Google Sans" pitchFamily="2" charset="0"/>
+                  <a:ea typeface="Google Sans" pitchFamily="2" charset="0"/>
+                  <a:cs typeface="Google Sans" pitchFamily="2" charset="0"/>
+                </a:endParaRPr>
+              </a:p>
+            </p:txBody>
+          </p:sp>
+        </mc:Choice>
+        <mc:Fallback>
+          <p:sp>
+            <p:nvSpPr>
+              <p:cNvPr id="35" name="CuadroTexto 34">
+                <a:extLst>
+                  <a:ext uri="{FF2B5EF4-FFF2-40B4-BE49-F238E27FC236}">
+                    <a16:creationId xmlns:a16="http://schemas.microsoft.com/office/drawing/2014/main" id="{7256DEA9-CD56-CA3A-4B54-8D0AE627359D}"/>
+                  </a:ext>
+                </a:extLst>
+              </p:cNvPr>
+              <p:cNvSpPr txBox="1">
+                <a:spLocks noRot="1" noChangeAspect="1" noMove="1" noResize="1" noEditPoints="1" noAdjustHandles="1" noChangeArrowheads="1" noChangeShapeType="1" noTextEdit="1"/>
+              </p:cNvSpPr>
+              <p:nvPr/>
+            </p:nvSpPr>
+            <p:spPr>
+              <a:xfrm>
+                <a:off x="2397211" y="3024274"/>
+                <a:ext cx="302967" cy="404726"/>
+              </a:xfrm>
+              <a:prstGeom prst="rect">
+                <a:avLst/>
+              </a:prstGeom>
+              <a:blipFill>
+                <a:blip r:embed="rId3"/>
+                <a:stretch>
+                  <a:fillRect b="-11940"/>
+                </a:stretch>
+              </a:blipFill>
+            </p:spPr>
+            <p:txBody>
+              <a:bodyPr/>
+              <a:lstStyle/>
+              <a:p>
+                <a:r>
+                  <a:rPr lang="es-MX">
+                    <a:noFill/>
+                  </a:rPr>
+                  <a:t> </a:t>
+                </a:r>
+              </a:p>
+            </p:txBody>
+          </p:sp>
+        </mc:Fallback>
+      </mc:AlternateContent>
+      <mc:AlternateContent xmlns:mc="http://schemas.openxmlformats.org/markup-compatibility/2006">
+        <mc:Choice xmlns:a14="http://schemas.microsoft.com/office/drawing/2010/main" Requires="a14">
+          <p:sp>
+            <p:nvSpPr>
+              <p:cNvPr id="38" name="CuadroTexto 37">
+                <a:extLst>
+                  <a:ext uri="{FF2B5EF4-FFF2-40B4-BE49-F238E27FC236}">
+                    <a16:creationId xmlns:a16="http://schemas.microsoft.com/office/drawing/2014/main" id="{F58B9D4E-073D-A0EB-5292-4706D3A431C4}"/>
+                  </a:ext>
+                </a:extLst>
+              </p:cNvPr>
+              <p:cNvSpPr txBox="1"/>
+              <p:nvPr/>
+            </p:nvSpPr>
+            <p:spPr>
+              <a:xfrm>
+                <a:off x="2397210" y="3578050"/>
+                <a:ext cx="302967" cy="404726"/>
+              </a:xfrm>
+              <a:prstGeom prst="rect">
+                <a:avLst/>
+              </a:prstGeom>
+              <a:noFill/>
+            </p:spPr>
+            <p:txBody>
+              <a:bodyPr wrap="square" lIns="0" tIns="0" rIns="0" bIns="0" rtlCol="0">
+                <a:spAutoFit/>
+              </a:bodyPr>
+              <a:lstStyle/>
+              <a:p>
+                <a:pPr/>
+                <a14:m>
+                  <m:oMathPara xmlns:m="http://schemas.openxmlformats.org/officeDocument/2006/math">
+                    <m:oMathParaPr>
+                      <m:jc m:val="centerGroup"/>
+                    </m:oMathParaPr>
+                    <m:oMath xmlns:m="http://schemas.openxmlformats.org/officeDocument/2006/math">
+                      <m:f>
+                        <m:fPr>
+                          <m:ctrlPr>
+                            <a:rPr lang="es-MX" sz="1400" b="0" i="1" smtClean="0">
+                              <a:latin typeface="Cambria Math" panose="02040503050406030204" pitchFamily="18" charset="0"/>
+                            </a:rPr>
+                          </m:ctrlPr>
+                        </m:fPr>
+                        <m:num>
+                          <m:r>
+                            <a:rPr lang="es-MX" sz="1400" b="0" i="1" smtClean="0">
+                              <a:latin typeface="Cambria Math" panose="02040503050406030204" pitchFamily="18" charset="0"/>
+                            </a:rPr>
+                            <m:t>1</m:t>
+                          </m:r>
+                        </m:num>
+                        <m:den>
+                          <m:r>
+                            <a:rPr lang="es-MX" sz="1400" b="0" i="1" smtClean="0">
+                              <a:latin typeface="Cambria Math" panose="02040503050406030204" pitchFamily="18" charset="0"/>
+                            </a:rPr>
+                            <m:t>8</m:t>
+                          </m:r>
+                        </m:den>
+                      </m:f>
+                    </m:oMath>
+                  </m:oMathPara>
+                </a14:m>
+                <a:endParaRPr lang="es-MX" sz="1400" dirty="0">
+                  <a:latin typeface="Google Sans" pitchFamily="2" charset="0"/>
+                  <a:ea typeface="Google Sans" pitchFamily="2" charset="0"/>
+                  <a:cs typeface="Google Sans" pitchFamily="2" charset="0"/>
+                </a:endParaRPr>
+              </a:p>
+            </p:txBody>
+          </p:sp>
+        </mc:Choice>
+        <mc:Fallback>
+          <p:sp>
+            <p:nvSpPr>
+              <p:cNvPr id="38" name="CuadroTexto 37">
+                <a:extLst>
+                  <a:ext uri="{FF2B5EF4-FFF2-40B4-BE49-F238E27FC236}">
+                    <a16:creationId xmlns:a16="http://schemas.microsoft.com/office/drawing/2014/main" id="{F58B9D4E-073D-A0EB-5292-4706D3A431C4}"/>
+                  </a:ext>
+                </a:extLst>
+              </p:cNvPr>
+              <p:cNvSpPr txBox="1">
+                <a:spLocks noRot="1" noChangeAspect="1" noMove="1" noResize="1" noEditPoints="1" noAdjustHandles="1" noChangeArrowheads="1" noChangeShapeType="1" noTextEdit="1"/>
+              </p:cNvSpPr>
+              <p:nvPr/>
+            </p:nvSpPr>
+            <p:spPr>
+              <a:xfrm>
+                <a:off x="2397210" y="3578050"/>
+                <a:ext cx="302967" cy="404726"/>
+              </a:xfrm>
+              <a:prstGeom prst="rect">
+                <a:avLst/>
+              </a:prstGeom>
+              <a:blipFill>
+                <a:blip r:embed="rId3"/>
+                <a:stretch>
+                  <a:fillRect b="-13636"/>
+                </a:stretch>
+              </a:blipFill>
+            </p:spPr>
+            <p:txBody>
+              <a:bodyPr/>
+              <a:lstStyle/>
+              <a:p>
+                <a:r>
+                  <a:rPr lang="es-MX">
+                    <a:noFill/>
+                  </a:rPr>
+                  <a:t> </a:t>
+                </a:r>
+              </a:p>
+            </p:txBody>
+          </p:sp>
+        </mc:Fallback>
+      </mc:AlternateContent>
+      <mc:AlternateContent xmlns:mc="http://schemas.openxmlformats.org/markup-compatibility/2006">
+        <mc:Choice xmlns:a14="http://schemas.microsoft.com/office/drawing/2010/main" Requires="a14">
+          <p:sp>
+            <p:nvSpPr>
+              <p:cNvPr id="41" name="CuadroTexto 40">
+                <a:extLst>
+                  <a:ext uri="{FF2B5EF4-FFF2-40B4-BE49-F238E27FC236}">
+                    <a16:creationId xmlns:a16="http://schemas.microsoft.com/office/drawing/2014/main" id="{246DD2E8-F49F-BBC3-7FFF-7F8F8CA0EC06}"/>
+                  </a:ext>
+                </a:extLst>
+              </p:cNvPr>
+              <p:cNvSpPr txBox="1"/>
+              <p:nvPr/>
+            </p:nvSpPr>
+            <p:spPr>
+              <a:xfrm>
+                <a:off x="2397210" y="4131826"/>
+                <a:ext cx="302967" cy="404726"/>
+              </a:xfrm>
+              <a:prstGeom prst="rect">
+                <a:avLst/>
+              </a:prstGeom>
+              <a:noFill/>
+            </p:spPr>
+            <p:txBody>
+              <a:bodyPr wrap="square" lIns="0" tIns="0" rIns="0" bIns="0" rtlCol="0">
+                <a:spAutoFit/>
+              </a:bodyPr>
+              <a:lstStyle/>
+              <a:p>
+                <a:pPr/>
+                <a14:m>
+                  <m:oMathPara xmlns:m="http://schemas.openxmlformats.org/officeDocument/2006/math">
+                    <m:oMathParaPr>
+                      <m:jc m:val="centerGroup"/>
+                    </m:oMathParaPr>
+                    <m:oMath xmlns:m="http://schemas.openxmlformats.org/officeDocument/2006/math">
+                      <m:f>
+                        <m:fPr>
+                          <m:ctrlPr>
+                            <a:rPr lang="es-MX" sz="1400" b="0" i="1" smtClean="0">
+                              <a:latin typeface="Cambria Math" panose="02040503050406030204" pitchFamily="18" charset="0"/>
+                            </a:rPr>
+                          </m:ctrlPr>
+                        </m:fPr>
+                        <m:num>
+                          <m:r>
+                            <a:rPr lang="es-MX" sz="1400" b="0" i="1" smtClean="0">
+                              <a:latin typeface="Cambria Math" panose="02040503050406030204" pitchFamily="18" charset="0"/>
+                            </a:rPr>
+                            <m:t>1</m:t>
+                          </m:r>
+                        </m:num>
+                        <m:den>
+                          <m:r>
+                            <a:rPr lang="es-MX" sz="1400" b="0" i="1" smtClean="0">
+                              <a:latin typeface="Cambria Math" panose="02040503050406030204" pitchFamily="18" charset="0"/>
+                            </a:rPr>
+                            <m:t>8</m:t>
+                          </m:r>
+                        </m:den>
+                      </m:f>
+                    </m:oMath>
+                  </m:oMathPara>
+                </a14:m>
+                <a:endParaRPr lang="es-MX" sz="1400" dirty="0">
+                  <a:latin typeface="Google Sans" pitchFamily="2" charset="0"/>
+                  <a:ea typeface="Google Sans" pitchFamily="2" charset="0"/>
+                  <a:cs typeface="Google Sans" pitchFamily="2" charset="0"/>
+                </a:endParaRPr>
+              </a:p>
+            </p:txBody>
+          </p:sp>
+        </mc:Choice>
+        <mc:Fallback>
+          <p:sp>
+            <p:nvSpPr>
+              <p:cNvPr id="41" name="CuadroTexto 40">
+                <a:extLst>
+                  <a:ext uri="{FF2B5EF4-FFF2-40B4-BE49-F238E27FC236}">
+                    <a16:creationId xmlns:a16="http://schemas.microsoft.com/office/drawing/2014/main" id="{246DD2E8-F49F-BBC3-7FFF-7F8F8CA0EC06}"/>
+                  </a:ext>
+                </a:extLst>
+              </p:cNvPr>
+              <p:cNvSpPr txBox="1">
+                <a:spLocks noRot="1" noChangeAspect="1" noMove="1" noResize="1" noEditPoints="1" noAdjustHandles="1" noChangeArrowheads="1" noChangeShapeType="1" noTextEdit="1"/>
+              </p:cNvSpPr>
+              <p:nvPr/>
+            </p:nvSpPr>
+            <p:spPr>
+              <a:xfrm>
+                <a:off x="2397210" y="4131826"/>
+                <a:ext cx="302967" cy="404726"/>
+              </a:xfrm>
+              <a:prstGeom prst="rect">
+                <a:avLst/>
+              </a:prstGeom>
+              <a:blipFill>
+                <a:blip r:embed="rId3"/>
+                <a:stretch>
+                  <a:fillRect b="-13636"/>
+                </a:stretch>
+              </a:blipFill>
+            </p:spPr>
+            <p:txBody>
+              <a:bodyPr/>
+              <a:lstStyle/>
+              <a:p>
+                <a:r>
+                  <a:rPr lang="es-MX">
+                    <a:noFill/>
+                  </a:rPr>
+                  <a:t> </a:t>
+                </a:r>
+              </a:p>
+            </p:txBody>
+          </p:sp>
+        </mc:Fallback>
+      </mc:AlternateContent>
+      <mc:AlternateContent xmlns:mc="http://schemas.openxmlformats.org/markup-compatibility/2006">
+        <mc:Choice xmlns:a14="http://schemas.microsoft.com/office/drawing/2010/main" Requires="a14">
+          <p:sp>
+            <p:nvSpPr>
+              <p:cNvPr id="43" name="CuadroTexto 42">
+                <a:extLst>
+                  <a:ext uri="{FF2B5EF4-FFF2-40B4-BE49-F238E27FC236}">
+                    <a16:creationId xmlns:a16="http://schemas.microsoft.com/office/drawing/2014/main" id="{815B751F-977C-9583-C574-FFB10E98907D}"/>
+                  </a:ext>
+                </a:extLst>
+              </p:cNvPr>
+              <p:cNvSpPr txBox="1"/>
+              <p:nvPr/>
+            </p:nvSpPr>
+            <p:spPr>
+              <a:xfrm>
+                <a:off x="2393745" y="4685602"/>
+                <a:ext cx="302967" cy="404726"/>
+              </a:xfrm>
+              <a:prstGeom prst="rect">
+                <a:avLst/>
+              </a:prstGeom>
+              <a:noFill/>
+            </p:spPr>
+            <p:txBody>
+              <a:bodyPr wrap="square" lIns="0" tIns="0" rIns="0" bIns="0" rtlCol="0">
+                <a:spAutoFit/>
+              </a:bodyPr>
+              <a:lstStyle/>
+              <a:p>
+                <a:pPr/>
+                <a14:m>
+                  <m:oMathPara xmlns:m="http://schemas.openxmlformats.org/officeDocument/2006/math">
+                    <m:oMathParaPr>
+                      <m:jc m:val="centerGroup"/>
+                    </m:oMathParaPr>
+                    <m:oMath xmlns:m="http://schemas.openxmlformats.org/officeDocument/2006/math">
+                      <m:f>
+                        <m:fPr>
+                          <m:ctrlPr>
+                            <a:rPr lang="es-MX" sz="1400" b="0" i="1" smtClean="0">
+                              <a:latin typeface="Cambria Math" panose="02040503050406030204" pitchFamily="18" charset="0"/>
+                            </a:rPr>
+                          </m:ctrlPr>
+                        </m:fPr>
+                        <m:num>
+                          <m:r>
+                            <a:rPr lang="es-MX" sz="1400" b="0" i="1" smtClean="0">
+                              <a:latin typeface="Cambria Math" panose="02040503050406030204" pitchFamily="18" charset="0"/>
+                            </a:rPr>
+                            <m:t>1</m:t>
+                          </m:r>
+                        </m:num>
+                        <m:den>
+                          <m:r>
+                            <a:rPr lang="es-MX" sz="1400" b="0" i="1" smtClean="0">
+                              <a:latin typeface="Cambria Math" panose="02040503050406030204" pitchFamily="18" charset="0"/>
+                            </a:rPr>
+                            <m:t>8</m:t>
+                          </m:r>
+                        </m:den>
+                      </m:f>
+                    </m:oMath>
+                  </m:oMathPara>
+                </a14:m>
+                <a:endParaRPr lang="es-MX" sz="1400" dirty="0">
+                  <a:latin typeface="Google Sans" pitchFamily="2" charset="0"/>
+                  <a:ea typeface="Google Sans" pitchFamily="2" charset="0"/>
+                  <a:cs typeface="Google Sans" pitchFamily="2" charset="0"/>
+                </a:endParaRPr>
+              </a:p>
+            </p:txBody>
+          </p:sp>
+        </mc:Choice>
+        <mc:Fallback>
+          <p:sp>
+            <p:nvSpPr>
+              <p:cNvPr id="43" name="CuadroTexto 42">
+                <a:extLst>
+                  <a:ext uri="{FF2B5EF4-FFF2-40B4-BE49-F238E27FC236}">
+                    <a16:creationId xmlns:a16="http://schemas.microsoft.com/office/drawing/2014/main" id="{815B751F-977C-9583-C574-FFB10E98907D}"/>
+                  </a:ext>
+                </a:extLst>
+              </p:cNvPr>
+              <p:cNvSpPr txBox="1">
+                <a:spLocks noRot="1" noChangeAspect="1" noMove="1" noResize="1" noEditPoints="1" noAdjustHandles="1" noChangeArrowheads="1" noChangeShapeType="1" noTextEdit="1"/>
+              </p:cNvSpPr>
+              <p:nvPr/>
+            </p:nvSpPr>
+            <p:spPr>
+              <a:xfrm>
+                <a:off x="2393745" y="4685602"/>
+                <a:ext cx="302967" cy="404726"/>
+              </a:xfrm>
+              <a:prstGeom prst="rect">
+                <a:avLst/>
+              </a:prstGeom>
+              <a:blipFill>
+                <a:blip r:embed="rId4"/>
+                <a:stretch>
+                  <a:fillRect t="-1515" b="-13636"/>
+                </a:stretch>
+              </a:blipFill>
+            </p:spPr>
+            <p:txBody>
+              <a:bodyPr/>
+              <a:lstStyle/>
+              <a:p>
+                <a:r>
+                  <a:rPr lang="es-MX">
+                    <a:noFill/>
+                  </a:rPr>
+                  <a:t> </a:t>
+                </a:r>
+              </a:p>
+            </p:txBody>
+          </p:sp>
+        </mc:Fallback>
+      </mc:AlternateContent>
+      <mc:AlternateContent xmlns:mc="http://schemas.openxmlformats.org/markup-compatibility/2006">
+        <mc:Choice xmlns:a14="http://schemas.microsoft.com/office/drawing/2010/main" Requires="a14">
+          <p:sp>
+            <p:nvSpPr>
+              <p:cNvPr id="45" name="CuadroTexto 44">
+                <a:extLst>
+                  <a:ext uri="{FF2B5EF4-FFF2-40B4-BE49-F238E27FC236}">
+                    <a16:creationId xmlns:a16="http://schemas.microsoft.com/office/drawing/2014/main" id="{16D88B1C-3659-A34B-8046-8366AAAF2B7C}"/>
+                  </a:ext>
+                </a:extLst>
+              </p:cNvPr>
+              <p:cNvSpPr txBox="1"/>
+              <p:nvPr/>
+            </p:nvSpPr>
+            <p:spPr>
+              <a:xfrm>
+                <a:off x="2393744" y="5212245"/>
+                <a:ext cx="302967" cy="404726"/>
+              </a:xfrm>
+              <a:prstGeom prst="rect">
+                <a:avLst/>
+              </a:prstGeom>
+              <a:noFill/>
+            </p:spPr>
+            <p:txBody>
+              <a:bodyPr wrap="square" lIns="0" tIns="0" rIns="0" bIns="0" rtlCol="0">
+                <a:spAutoFit/>
+              </a:bodyPr>
+              <a:lstStyle/>
+              <a:p>
+                <a:pPr/>
+                <a14:m>
+                  <m:oMathPara xmlns:m="http://schemas.openxmlformats.org/officeDocument/2006/math">
+                    <m:oMathParaPr>
+                      <m:jc m:val="centerGroup"/>
+                    </m:oMathParaPr>
+                    <m:oMath xmlns:m="http://schemas.openxmlformats.org/officeDocument/2006/math">
+                      <m:f>
+                        <m:fPr>
+                          <m:ctrlPr>
+                            <a:rPr lang="es-MX" sz="1400" b="0" i="1" smtClean="0">
+                              <a:latin typeface="Cambria Math" panose="02040503050406030204" pitchFamily="18" charset="0"/>
+                            </a:rPr>
+                          </m:ctrlPr>
+                        </m:fPr>
+                        <m:num>
+                          <m:r>
+                            <a:rPr lang="es-MX" sz="1400" b="0" i="1" smtClean="0">
+                              <a:latin typeface="Cambria Math" panose="02040503050406030204" pitchFamily="18" charset="0"/>
+                            </a:rPr>
+                            <m:t>1</m:t>
+                          </m:r>
+                        </m:num>
+                        <m:den>
+                          <m:r>
+                            <a:rPr lang="es-MX" sz="1400" b="0" i="1" smtClean="0">
+                              <a:latin typeface="Cambria Math" panose="02040503050406030204" pitchFamily="18" charset="0"/>
+                            </a:rPr>
+                            <m:t>8</m:t>
+                          </m:r>
+                        </m:den>
+                      </m:f>
+                    </m:oMath>
+                  </m:oMathPara>
+                </a14:m>
+                <a:endParaRPr lang="es-MX" sz="1400" dirty="0">
+                  <a:latin typeface="Google Sans" pitchFamily="2" charset="0"/>
+                  <a:ea typeface="Google Sans" pitchFamily="2" charset="0"/>
+                  <a:cs typeface="Google Sans" pitchFamily="2" charset="0"/>
+                </a:endParaRPr>
+              </a:p>
+            </p:txBody>
+          </p:sp>
+        </mc:Choice>
+        <mc:Fallback>
+          <p:sp>
+            <p:nvSpPr>
+              <p:cNvPr id="45" name="CuadroTexto 44">
+                <a:extLst>
+                  <a:ext uri="{FF2B5EF4-FFF2-40B4-BE49-F238E27FC236}">
+                    <a16:creationId xmlns:a16="http://schemas.microsoft.com/office/drawing/2014/main" id="{16D88B1C-3659-A34B-8046-8366AAAF2B7C}"/>
+                  </a:ext>
+                </a:extLst>
+              </p:cNvPr>
+              <p:cNvSpPr txBox="1">
+                <a:spLocks noRot="1" noChangeAspect="1" noMove="1" noResize="1" noEditPoints="1" noAdjustHandles="1" noChangeArrowheads="1" noChangeShapeType="1" noTextEdit="1"/>
+              </p:cNvSpPr>
+              <p:nvPr/>
+            </p:nvSpPr>
+            <p:spPr>
+              <a:xfrm>
+                <a:off x="2393744" y="5212245"/>
+                <a:ext cx="302967" cy="404726"/>
+              </a:xfrm>
+              <a:prstGeom prst="rect">
+                <a:avLst/>
+              </a:prstGeom>
+              <a:blipFill>
+                <a:blip r:embed="rId5"/>
+                <a:stretch>
+                  <a:fillRect b="-13636"/>
+                </a:stretch>
+              </a:blipFill>
+            </p:spPr>
+            <p:txBody>
+              <a:bodyPr/>
+              <a:lstStyle/>
+              <a:p>
+                <a:r>
+                  <a:rPr lang="es-MX">
+                    <a:noFill/>
+                  </a:rPr>
+                  <a:t> </a:t>
+                </a:r>
+              </a:p>
+            </p:txBody>
+          </p:sp>
+        </mc:Fallback>
+      </mc:AlternateContent>
+      <mc:AlternateContent xmlns:mc="http://schemas.openxmlformats.org/markup-compatibility/2006">
+        <mc:Choice xmlns:a14="http://schemas.microsoft.com/office/drawing/2010/main" Requires="a14">
+          <p:sp>
+            <p:nvSpPr>
+              <p:cNvPr id="47" name="CuadroTexto 46">
+                <a:extLst>
+                  <a:ext uri="{FF2B5EF4-FFF2-40B4-BE49-F238E27FC236}">
+                    <a16:creationId xmlns:a16="http://schemas.microsoft.com/office/drawing/2014/main" id="{893017E7-3AA0-4A05-FFDA-5D8AFB531A05}"/>
+                  </a:ext>
+                </a:extLst>
+              </p:cNvPr>
+              <p:cNvSpPr txBox="1"/>
+              <p:nvPr/>
+            </p:nvSpPr>
+            <p:spPr>
+              <a:xfrm>
+                <a:off x="2393743" y="5741670"/>
+                <a:ext cx="302967" cy="404726"/>
+              </a:xfrm>
+              <a:prstGeom prst="rect">
+                <a:avLst/>
+              </a:prstGeom>
+              <a:noFill/>
+            </p:spPr>
+            <p:txBody>
+              <a:bodyPr wrap="square" lIns="0" tIns="0" rIns="0" bIns="0" rtlCol="0">
+                <a:spAutoFit/>
+              </a:bodyPr>
+              <a:lstStyle/>
+              <a:p>
+                <a:pPr/>
+                <a14:m>
+                  <m:oMathPara xmlns:m="http://schemas.openxmlformats.org/officeDocument/2006/math">
+                    <m:oMathParaPr>
+                      <m:jc m:val="centerGroup"/>
+                    </m:oMathParaPr>
+                    <m:oMath xmlns:m="http://schemas.openxmlformats.org/officeDocument/2006/math">
+                      <m:f>
+                        <m:fPr>
+                          <m:ctrlPr>
+                            <a:rPr lang="es-MX" sz="1400" b="0" i="1" smtClean="0">
+                              <a:latin typeface="Cambria Math" panose="02040503050406030204" pitchFamily="18" charset="0"/>
+                            </a:rPr>
+                          </m:ctrlPr>
+                        </m:fPr>
+                        <m:num>
+                          <m:r>
+                            <a:rPr lang="es-MX" sz="1400" b="0" i="1" smtClean="0">
+                              <a:latin typeface="Cambria Math" panose="02040503050406030204" pitchFamily="18" charset="0"/>
+                            </a:rPr>
+                            <m:t>1</m:t>
+                          </m:r>
+                        </m:num>
+                        <m:den>
+                          <m:r>
+                            <a:rPr lang="es-MX" sz="1400" b="0" i="1" smtClean="0">
+                              <a:latin typeface="Cambria Math" panose="02040503050406030204" pitchFamily="18" charset="0"/>
+                            </a:rPr>
+                            <m:t>8</m:t>
+                          </m:r>
+                        </m:den>
+                      </m:f>
+                    </m:oMath>
+                  </m:oMathPara>
+                </a14:m>
+                <a:endParaRPr lang="es-MX" sz="1400" dirty="0">
+                  <a:latin typeface="Google Sans" pitchFamily="2" charset="0"/>
+                  <a:ea typeface="Google Sans" pitchFamily="2" charset="0"/>
+                  <a:cs typeface="Google Sans" pitchFamily="2" charset="0"/>
+                </a:endParaRPr>
+              </a:p>
+            </p:txBody>
+          </p:sp>
+        </mc:Choice>
+        <mc:Fallback>
+          <p:sp>
+            <p:nvSpPr>
+              <p:cNvPr id="47" name="CuadroTexto 46">
+                <a:extLst>
+                  <a:ext uri="{FF2B5EF4-FFF2-40B4-BE49-F238E27FC236}">
+                    <a16:creationId xmlns:a16="http://schemas.microsoft.com/office/drawing/2014/main" id="{893017E7-3AA0-4A05-FFDA-5D8AFB531A05}"/>
+                  </a:ext>
+                </a:extLst>
+              </p:cNvPr>
+              <p:cNvSpPr txBox="1">
+                <a:spLocks noRot="1" noChangeAspect="1" noMove="1" noResize="1" noEditPoints="1" noAdjustHandles="1" noChangeArrowheads="1" noChangeShapeType="1" noTextEdit="1"/>
+              </p:cNvSpPr>
+              <p:nvPr/>
+            </p:nvSpPr>
+            <p:spPr>
+              <a:xfrm>
+                <a:off x="2393743" y="5741670"/>
+                <a:ext cx="302967" cy="404726"/>
+              </a:xfrm>
+              <a:prstGeom prst="rect">
+                <a:avLst/>
+              </a:prstGeom>
+              <a:blipFill>
+                <a:blip r:embed="rId5"/>
+                <a:stretch>
+                  <a:fillRect b="-13636"/>
+                </a:stretch>
+              </a:blipFill>
+            </p:spPr>
+            <p:txBody>
+              <a:bodyPr/>
+              <a:lstStyle/>
+              <a:p>
+                <a:r>
+                  <a:rPr lang="es-MX">
+                    <a:noFill/>
+                  </a:rPr>
+                  <a:t> </a:t>
+                </a:r>
+              </a:p>
+            </p:txBody>
+          </p:sp>
+        </mc:Fallback>
+      </mc:AlternateContent>
+      <mc:AlternateContent xmlns:mc="http://schemas.openxmlformats.org/markup-compatibility/2006">
+        <mc:Choice xmlns:a14="http://schemas.microsoft.com/office/drawing/2010/main" Requires="a14">
+          <p:sp>
+            <p:nvSpPr>
+              <p:cNvPr id="50" name="CuadroTexto 49">
+                <a:extLst>
+                  <a:ext uri="{FF2B5EF4-FFF2-40B4-BE49-F238E27FC236}">
+                    <a16:creationId xmlns:a16="http://schemas.microsoft.com/office/drawing/2014/main" id="{1AF5B410-DB5A-44DA-6309-9B460EFB17C5}"/>
+                  </a:ext>
+                </a:extLst>
+              </p:cNvPr>
+              <p:cNvSpPr txBox="1"/>
+              <p:nvPr/>
+            </p:nvSpPr>
+            <p:spPr>
+              <a:xfrm>
+                <a:off x="2393742" y="6268313"/>
+                <a:ext cx="302967" cy="404726"/>
+              </a:xfrm>
+              <a:prstGeom prst="rect">
+                <a:avLst/>
+              </a:prstGeom>
+              <a:noFill/>
+            </p:spPr>
+            <p:txBody>
+              <a:bodyPr wrap="square" lIns="0" tIns="0" rIns="0" bIns="0" rtlCol="0">
+                <a:spAutoFit/>
+              </a:bodyPr>
+              <a:lstStyle/>
+              <a:p>
+                <a:pPr/>
+                <a14:m>
+                  <m:oMathPara xmlns:m="http://schemas.openxmlformats.org/officeDocument/2006/math">
+                    <m:oMathParaPr>
+                      <m:jc m:val="centerGroup"/>
+                    </m:oMathParaPr>
+                    <m:oMath xmlns:m="http://schemas.openxmlformats.org/officeDocument/2006/math">
+                      <m:f>
+                        <m:fPr>
+                          <m:ctrlPr>
+                            <a:rPr lang="es-MX" sz="1400" b="0" i="1" smtClean="0">
+                              <a:latin typeface="Cambria Math" panose="02040503050406030204" pitchFamily="18" charset="0"/>
+                            </a:rPr>
+                          </m:ctrlPr>
+                        </m:fPr>
+                        <m:num>
+                          <m:r>
+                            <a:rPr lang="es-MX" sz="1400" b="0" i="1" smtClean="0">
+                              <a:latin typeface="Cambria Math" panose="02040503050406030204" pitchFamily="18" charset="0"/>
+                            </a:rPr>
+                            <m:t>1</m:t>
+                          </m:r>
+                        </m:num>
+                        <m:den>
+                          <m:r>
+                            <a:rPr lang="es-MX" sz="1400" b="0" i="1" smtClean="0">
+                              <a:latin typeface="Cambria Math" panose="02040503050406030204" pitchFamily="18" charset="0"/>
+                            </a:rPr>
+                            <m:t>8</m:t>
+                          </m:r>
+                        </m:den>
+                      </m:f>
+                    </m:oMath>
+                  </m:oMathPara>
+                </a14:m>
+                <a:endParaRPr lang="es-MX" sz="1400" dirty="0">
+                  <a:latin typeface="Google Sans" pitchFamily="2" charset="0"/>
+                  <a:ea typeface="Google Sans" pitchFamily="2" charset="0"/>
+                  <a:cs typeface="Google Sans" pitchFamily="2" charset="0"/>
+                </a:endParaRPr>
+              </a:p>
+            </p:txBody>
+          </p:sp>
+        </mc:Choice>
+        <mc:Fallback>
+          <p:sp>
+            <p:nvSpPr>
+              <p:cNvPr id="50" name="CuadroTexto 49">
+                <a:extLst>
+                  <a:ext uri="{FF2B5EF4-FFF2-40B4-BE49-F238E27FC236}">
+                    <a16:creationId xmlns:a16="http://schemas.microsoft.com/office/drawing/2014/main" id="{1AF5B410-DB5A-44DA-6309-9B460EFB17C5}"/>
+                  </a:ext>
+                </a:extLst>
+              </p:cNvPr>
+              <p:cNvSpPr txBox="1">
+                <a:spLocks noRot="1" noChangeAspect="1" noMove="1" noResize="1" noEditPoints="1" noAdjustHandles="1" noChangeArrowheads="1" noChangeShapeType="1" noTextEdit="1"/>
+              </p:cNvSpPr>
+              <p:nvPr/>
+            </p:nvSpPr>
+            <p:spPr>
+              <a:xfrm>
+                <a:off x="2393742" y="6268313"/>
+                <a:ext cx="302967" cy="404726"/>
+              </a:xfrm>
+              <a:prstGeom prst="rect">
+                <a:avLst/>
+              </a:prstGeom>
+              <a:blipFill>
+                <a:blip r:embed="rId5"/>
+                <a:stretch>
+                  <a:fillRect b="-11940"/>
+                </a:stretch>
+              </a:blipFill>
+            </p:spPr>
+            <p:txBody>
+              <a:bodyPr/>
+              <a:lstStyle/>
+              <a:p>
+                <a:r>
+                  <a:rPr lang="es-MX">
+                    <a:noFill/>
+                  </a:rPr>
+                  <a:t> </a:t>
+                </a:r>
+              </a:p>
+            </p:txBody>
+          </p:sp>
+        </mc:Fallback>
+      </mc:AlternateContent>
+      <p:sp>
+        <p:nvSpPr>
+          <p:cNvPr id="52" name="CuadroTexto 51">
+            <a:extLst>
+              <a:ext uri="{FF2B5EF4-FFF2-40B4-BE49-F238E27FC236}">
+                <a16:creationId xmlns:a16="http://schemas.microsoft.com/office/drawing/2014/main" id="{18154373-B9BB-6475-BF80-BC56606A7FEA}"/>
+              </a:ext>
+            </a:extLst>
+          </p:cNvPr>
+          <p:cNvSpPr txBox="1"/>
+          <p:nvPr/>
+        </p:nvSpPr>
+        <p:spPr>
+          <a:xfrm>
+            <a:off x="1996735" y="2018614"/>
+            <a:ext cx="1112226" cy="307777"/>
+          </a:xfrm>
+          <a:prstGeom prst="rect">
+            <a:avLst/>
+          </a:prstGeom>
+          <a:noFill/>
+          <a:ln w="38100">
+            <a:noFill/>
+          </a:ln>
+        </p:spPr>
+        <p:txBody>
+          <a:bodyPr wrap="square" rtlCol="0">
+            <a:spAutoFit/>
+          </a:bodyPr>
+          <a:lstStyle/>
+          <a:p>
+            <a:r>
+              <a:rPr lang="es-MX" sz="1400" dirty="0" err="1">
+                <a:latin typeface="Google Sans" pitchFamily="2" charset="0"/>
+                <a:ea typeface="Google Sans" pitchFamily="2" charset="0"/>
+                <a:cs typeface="Google Sans" pitchFamily="2" charset="0"/>
+              </a:rPr>
+              <a:t>Probability</a:t>
+            </a:r>
+            <a:endParaRPr lang="es-MX" sz="1400" dirty="0">
+              <a:latin typeface="Google Sans" pitchFamily="2" charset="0"/>
+              <a:ea typeface="Google Sans" pitchFamily="2" charset="0"/>
+              <a:cs typeface="Google Sans" pitchFamily="2" charset="0"/>
+            </a:endParaRPr>
+          </a:p>
+        </p:txBody>
+      </p:sp>
+    </p:spTree>
+    <p:extLst>
+      <p:ext uri="{BB962C8B-B14F-4D97-AF65-F5344CB8AC3E}">
+        <p14:creationId xmlns:p14="http://schemas.microsoft.com/office/powerpoint/2010/main" val="1379895765"/>
       </p:ext>
     </p:extLst>
   </p:cSld>

--- a/genetic.pptx
+++ b/genetic.pptx
@@ -4,6 +4,9 @@
   <p:sldMasterIdLst>
     <p:sldMasterId id="2147483648" r:id="rId1"/>
   </p:sldMasterIdLst>
+  <p:notesMasterIdLst>
+    <p:notesMasterId r:id="rId5"/>
+  </p:notesMasterIdLst>
   <p:sldIdLst>
     <p:sldId id="257" r:id="rId2"/>
     <p:sldId id="258" r:id="rId3"/>
@@ -114,7 +117,7 @@
             <a:srgbClr val="A4A3A4"/>
           </p15:clr>
         </p15:guide>
-        <p15:guide id="2" pos="3840" userDrawn="1">
+        <p15:guide id="2" pos="3816" userDrawn="1">
           <p15:clr>
             <a:srgbClr val="A4A3A4"/>
           </p15:clr>
@@ -123,6 +126,439 @@
     </p:ext>
   </p:extLst>
 </p:presentation>
+</file>
+
+<file path=ppt/notesMasters/notesMaster1.xml><?xml version="1.0" encoding="utf-8"?>
+<p:notesMaster xmlns:a="http://schemas.openxmlformats.org/drawingml/2006/main" xmlns:r="http://schemas.openxmlformats.org/officeDocument/2006/relationships" xmlns:p="http://schemas.openxmlformats.org/presentationml/2006/main">
+  <p:cSld>
+    <p:bg>
+      <p:bgRef idx="1001">
+        <a:schemeClr val="bg1"/>
+      </p:bgRef>
+    </p:bg>
+    <p:spTree>
+      <p:nvGrpSpPr>
+        <p:cNvPr id="1" name=""/>
+        <p:cNvGrpSpPr/>
+        <p:nvPr/>
+      </p:nvGrpSpPr>
+      <p:grpSpPr>
+        <a:xfrm>
+          <a:off x="0" y="0"/>
+          <a:ext cx="0" cy="0"/>
+          <a:chOff x="0" y="0"/>
+          <a:chExt cx="0" cy="0"/>
+        </a:xfrm>
+      </p:grpSpPr>
+      <p:sp>
+        <p:nvSpPr>
+          <p:cNvPr id="2" name="Marcador de encabezado 1"/>
+          <p:cNvSpPr>
+            <a:spLocks noGrp="1"/>
+          </p:cNvSpPr>
+          <p:nvPr>
+            <p:ph type="hdr" sz="quarter"/>
+          </p:nvPr>
+        </p:nvSpPr>
+        <p:spPr>
+          <a:xfrm>
+            <a:off x="0" y="0"/>
+            <a:ext cx="2971800" cy="458788"/>
+          </a:xfrm>
+          <a:prstGeom prst="rect">
+            <a:avLst/>
+          </a:prstGeom>
+        </p:spPr>
+        <p:txBody>
+          <a:bodyPr vert="horz" lIns="91440" tIns="45720" rIns="91440" bIns="45720" rtlCol="0"/>
+          <a:lstStyle>
+            <a:lvl1pPr algn="l">
+              <a:defRPr sz="1200"/>
+            </a:lvl1pPr>
+          </a:lstStyle>
+          <a:p>
+            <a:endParaRPr lang="es-MX"/>
+          </a:p>
+        </p:txBody>
+      </p:sp>
+      <p:sp>
+        <p:nvSpPr>
+          <p:cNvPr id="3" name="Marcador de fecha 2"/>
+          <p:cNvSpPr>
+            <a:spLocks noGrp="1"/>
+          </p:cNvSpPr>
+          <p:nvPr>
+            <p:ph type="dt" idx="1"/>
+          </p:nvPr>
+        </p:nvSpPr>
+        <p:spPr>
+          <a:xfrm>
+            <a:off x="3884613" y="0"/>
+            <a:ext cx="2971800" cy="458788"/>
+          </a:xfrm>
+          <a:prstGeom prst="rect">
+            <a:avLst/>
+          </a:prstGeom>
+        </p:spPr>
+        <p:txBody>
+          <a:bodyPr vert="horz" lIns="91440" tIns="45720" rIns="91440" bIns="45720" rtlCol="0"/>
+          <a:lstStyle>
+            <a:lvl1pPr algn="r">
+              <a:defRPr sz="1200"/>
+            </a:lvl1pPr>
+          </a:lstStyle>
+          <a:p>
+            <a:fld id="{09C9DEB3-05B4-47A2-A6EC-36F09112C753}" type="datetimeFigureOut">
+              <a:rPr lang="es-MX" smtClean="0"/>
+              <a:t>20/06/2026</a:t>
+            </a:fld>
+            <a:endParaRPr lang="es-MX"/>
+          </a:p>
+        </p:txBody>
+      </p:sp>
+      <p:sp>
+        <p:nvSpPr>
+          <p:cNvPr id="4" name="Marcador de imagen de diapositiva 3"/>
+          <p:cNvSpPr>
+            <a:spLocks noGrp="1" noRot="1" noChangeAspect="1"/>
+          </p:cNvSpPr>
+          <p:nvPr>
+            <p:ph type="sldImg" idx="2"/>
+          </p:nvPr>
+        </p:nvSpPr>
+        <p:spPr>
+          <a:xfrm>
+            <a:off x="685800" y="1143000"/>
+            <a:ext cx="5486400" cy="3086100"/>
+          </a:xfrm>
+          <a:prstGeom prst="rect">
+            <a:avLst/>
+          </a:prstGeom>
+          <a:noFill/>
+          <a:ln w="12700">
+            <a:solidFill>
+              <a:prstClr val="black"/>
+            </a:solidFill>
+          </a:ln>
+        </p:spPr>
+        <p:txBody>
+          <a:bodyPr vert="horz" lIns="91440" tIns="45720" rIns="91440" bIns="45720" rtlCol="0" anchor="ctr"/>
+          <a:lstStyle/>
+          <a:p>
+            <a:endParaRPr lang="es-MX"/>
+          </a:p>
+        </p:txBody>
+      </p:sp>
+      <p:sp>
+        <p:nvSpPr>
+          <p:cNvPr id="5" name="Marcador de notas 4"/>
+          <p:cNvSpPr>
+            <a:spLocks noGrp="1"/>
+          </p:cNvSpPr>
+          <p:nvPr>
+            <p:ph type="body" sz="quarter" idx="3"/>
+          </p:nvPr>
+        </p:nvSpPr>
+        <p:spPr>
+          <a:xfrm>
+            <a:off x="685800" y="4400550"/>
+            <a:ext cx="5486400" cy="3600450"/>
+          </a:xfrm>
+          <a:prstGeom prst="rect">
+            <a:avLst/>
+          </a:prstGeom>
+        </p:spPr>
+        <p:txBody>
+          <a:bodyPr vert="horz" lIns="91440" tIns="45720" rIns="91440" bIns="45720" rtlCol="0"/>
+          <a:lstStyle/>
+          <a:p>
+            <a:pPr lvl="0"/>
+            <a:r>
+              <a:rPr lang="es-MX"/>
+              <a:t>Haga clic para modificar los estilos de texto del patrón</a:t>
+            </a:r>
+          </a:p>
+          <a:p>
+            <a:pPr lvl="1"/>
+            <a:r>
+              <a:rPr lang="es-MX"/>
+              <a:t>Segundo nivel</a:t>
+            </a:r>
+          </a:p>
+          <a:p>
+            <a:pPr lvl="2"/>
+            <a:r>
+              <a:rPr lang="es-MX"/>
+              <a:t>Tercer nivel</a:t>
+            </a:r>
+          </a:p>
+          <a:p>
+            <a:pPr lvl="3"/>
+            <a:r>
+              <a:rPr lang="es-MX"/>
+              <a:t>Cuarto nivel</a:t>
+            </a:r>
+          </a:p>
+          <a:p>
+            <a:pPr lvl="4"/>
+            <a:r>
+              <a:rPr lang="es-MX"/>
+              <a:t>Quinto nivel</a:t>
+            </a:r>
+          </a:p>
+        </p:txBody>
+      </p:sp>
+      <p:sp>
+        <p:nvSpPr>
+          <p:cNvPr id="6" name="Marcador de pie de página 5"/>
+          <p:cNvSpPr>
+            <a:spLocks noGrp="1"/>
+          </p:cNvSpPr>
+          <p:nvPr>
+            <p:ph type="ftr" sz="quarter" idx="4"/>
+          </p:nvPr>
+        </p:nvSpPr>
+        <p:spPr>
+          <a:xfrm>
+            <a:off x="0" y="8685213"/>
+            <a:ext cx="2971800" cy="458787"/>
+          </a:xfrm>
+          <a:prstGeom prst="rect">
+            <a:avLst/>
+          </a:prstGeom>
+        </p:spPr>
+        <p:txBody>
+          <a:bodyPr vert="horz" lIns="91440" tIns="45720" rIns="91440" bIns="45720" rtlCol="0" anchor="b"/>
+          <a:lstStyle>
+            <a:lvl1pPr algn="l">
+              <a:defRPr sz="1200"/>
+            </a:lvl1pPr>
+          </a:lstStyle>
+          <a:p>
+            <a:endParaRPr lang="es-MX"/>
+          </a:p>
+        </p:txBody>
+      </p:sp>
+      <p:sp>
+        <p:nvSpPr>
+          <p:cNvPr id="7" name="Marcador de número de diapositiva 6"/>
+          <p:cNvSpPr>
+            <a:spLocks noGrp="1"/>
+          </p:cNvSpPr>
+          <p:nvPr>
+            <p:ph type="sldNum" sz="quarter" idx="5"/>
+          </p:nvPr>
+        </p:nvSpPr>
+        <p:spPr>
+          <a:xfrm>
+            <a:off x="3884613" y="8685213"/>
+            <a:ext cx="2971800" cy="458787"/>
+          </a:xfrm>
+          <a:prstGeom prst="rect">
+            <a:avLst/>
+          </a:prstGeom>
+        </p:spPr>
+        <p:txBody>
+          <a:bodyPr vert="horz" lIns="91440" tIns="45720" rIns="91440" bIns="45720" rtlCol="0" anchor="b"/>
+          <a:lstStyle>
+            <a:lvl1pPr algn="r">
+              <a:defRPr sz="1200"/>
+            </a:lvl1pPr>
+          </a:lstStyle>
+          <a:p>
+            <a:fld id="{E950F6B6-6AD7-4DC2-A041-BB75EB3B6EDF}" type="slidenum">
+              <a:rPr lang="es-MX" smtClean="0"/>
+              <a:t>‹Nº›</a:t>
+            </a:fld>
+            <a:endParaRPr lang="es-MX"/>
+          </a:p>
+        </p:txBody>
+      </p:sp>
+    </p:spTree>
+    <p:extLst>
+      <p:ext uri="{BB962C8B-B14F-4D97-AF65-F5344CB8AC3E}">
+        <p14:creationId xmlns:p14="http://schemas.microsoft.com/office/powerpoint/2010/main" val="1651397521"/>
+      </p:ext>
+    </p:extLst>
+  </p:cSld>
+  <p:clrMap bg1="lt1" tx1="dk1" bg2="lt2" tx2="dk2" accent1="accent1" accent2="accent2" accent3="accent3" accent4="accent4" accent5="accent5" accent6="accent6" hlink="hlink" folHlink="folHlink"/>
+  <p:notesStyle>
+    <a:lvl1pPr marL="0" algn="l" defTabSz="914400" rtl="0" eaLnBrk="1" latinLnBrk="0" hangingPunct="1">
+      <a:defRPr sz="1200" kern="1200">
+        <a:solidFill>
+          <a:schemeClr val="tx1"/>
+        </a:solidFill>
+        <a:latin typeface="+mn-lt"/>
+        <a:ea typeface="+mn-ea"/>
+        <a:cs typeface="+mn-cs"/>
+      </a:defRPr>
+    </a:lvl1pPr>
+    <a:lvl2pPr marL="457200" algn="l" defTabSz="914400" rtl="0" eaLnBrk="1" latinLnBrk="0" hangingPunct="1">
+      <a:defRPr sz="1200" kern="1200">
+        <a:solidFill>
+          <a:schemeClr val="tx1"/>
+        </a:solidFill>
+        <a:latin typeface="+mn-lt"/>
+        <a:ea typeface="+mn-ea"/>
+        <a:cs typeface="+mn-cs"/>
+      </a:defRPr>
+    </a:lvl2pPr>
+    <a:lvl3pPr marL="914400" algn="l" defTabSz="914400" rtl="0" eaLnBrk="1" latinLnBrk="0" hangingPunct="1">
+      <a:defRPr sz="1200" kern="1200">
+        <a:solidFill>
+          <a:schemeClr val="tx1"/>
+        </a:solidFill>
+        <a:latin typeface="+mn-lt"/>
+        <a:ea typeface="+mn-ea"/>
+        <a:cs typeface="+mn-cs"/>
+      </a:defRPr>
+    </a:lvl3pPr>
+    <a:lvl4pPr marL="1371600" algn="l" defTabSz="914400" rtl="0" eaLnBrk="1" latinLnBrk="0" hangingPunct="1">
+      <a:defRPr sz="1200" kern="1200">
+        <a:solidFill>
+          <a:schemeClr val="tx1"/>
+        </a:solidFill>
+        <a:latin typeface="+mn-lt"/>
+        <a:ea typeface="+mn-ea"/>
+        <a:cs typeface="+mn-cs"/>
+      </a:defRPr>
+    </a:lvl4pPr>
+    <a:lvl5pPr marL="1828800" algn="l" defTabSz="914400" rtl="0" eaLnBrk="1" latinLnBrk="0" hangingPunct="1">
+      <a:defRPr sz="1200" kern="1200">
+        <a:solidFill>
+          <a:schemeClr val="tx1"/>
+        </a:solidFill>
+        <a:latin typeface="+mn-lt"/>
+        <a:ea typeface="+mn-ea"/>
+        <a:cs typeface="+mn-cs"/>
+      </a:defRPr>
+    </a:lvl5pPr>
+    <a:lvl6pPr marL="2286000" algn="l" defTabSz="914400" rtl="0" eaLnBrk="1" latinLnBrk="0" hangingPunct="1">
+      <a:defRPr sz="1200" kern="1200">
+        <a:solidFill>
+          <a:schemeClr val="tx1"/>
+        </a:solidFill>
+        <a:latin typeface="+mn-lt"/>
+        <a:ea typeface="+mn-ea"/>
+        <a:cs typeface="+mn-cs"/>
+      </a:defRPr>
+    </a:lvl6pPr>
+    <a:lvl7pPr marL="2743200" algn="l" defTabSz="914400" rtl="0" eaLnBrk="1" latinLnBrk="0" hangingPunct="1">
+      <a:defRPr sz="1200" kern="1200">
+        <a:solidFill>
+          <a:schemeClr val="tx1"/>
+        </a:solidFill>
+        <a:latin typeface="+mn-lt"/>
+        <a:ea typeface="+mn-ea"/>
+        <a:cs typeface="+mn-cs"/>
+      </a:defRPr>
+    </a:lvl7pPr>
+    <a:lvl8pPr marL="3200400" algn="l" defTabSz="914400" rtl="0" eaLnBrk="1" latinLnBrk="0" hangingPunct="1">
+      <a:defRPr sz="1200" kern="1200">
+        <a:solidFill>
+          <a:schemeClr val="tx1"/>
+        </a:solidFill>
+        <a:latin typeface="+mn-lt"/>
+        <a:ea typeface="+mn-ea"/>
+        <a:cs typeface="+mn-cs"/>
+      </a:defRPr>
+    </a:lvl8pPr>
+    <a:lvl9pPr marL="3657600" algn="l" defTabSz="914400" rtl="0" eaLnBrk="1" latinLnBrk="0" hangingPunct="1">
+      <a:defRPr sz="1200" kern="1200">
+        <a:solidFill>
+          <a:schemeClr val="tx1"/>
+        </a:solidFill>
+        <a:latin typeface="+mn-lt"/>
+        <a:ea typeface="+mn-ea"/>
+        <a:cs typeface="+mn-cs"/>
+      </a:defRPr>
+    </a:lvl9pPr>
+  </p:notesStyle>
+</p:notesMaster>
+</file>
+
+<file path=ppt/notesSlides/notesSlide1.xml><?xml version="1.0" encoding="utf-8"?>
+<p:notes xmlns:a="http://schemas.openxmlformats.org/drawingml/2006/main" xmlns:r="http://schemas.openxmlformats.org/officeDocument/2006/relationships" xmlns:p="http://schemas.openxmlformats.org/presentationml/2006/main">
+  <p:cSld>
+    <p:spTree>
+      <p:nvGrpSpPr>
+        <p:cNvPr id="1" name=""/>
+        <p:cNvGrpSpPr/>
+        <p:nvPr/>
+      </p:nvGrpSpPr>
+      <p:grpSpPr>
+        <a:xfrm>
+          <a:off x="0" y="0"/>
+          <a:ext cx="0" cy="0"/>
+          <a:chOff x="0" y="0"/>
+          <a:chExt cx="0" cy="0"/>
+        </a:xfrm>
+      </p:grpSpPr>
+      <p:sp>
+        <p:nvSpPr>
+          <p:cNvPr id="2" name="Marcador de imagen de diapositiva 1"/>
+          <p:cNvSpPr>
+            <a:spLocks noGrp="1" noRot="1" noChangeAspect="1"/>
+          </p:cNvSpPr>
+          <p:nvPr>
+            <p:ph type="sldImg"/>
+          </p:nvPr>
+        </p:nvSpPr>
+        <p:spPr/>
+      </p:sp>
+      <p:sp>
+        <p:nvSpPr>
+          <p:cNvPr id="3" name="Marcador de notas 2"/>
+          <p:cNvSpPr>
+            <a:spLocks noGrp="1"/>
+          </p:cNvSpPr>
+          <p:nvPr>
+            <p:ph type="body" idx="1"/>
+          </p:nvPr>
+        </p:nvSpPr>
+        <p:spPr/>
+        <p:txBody>
+          <a:bodyPr/>
+          <a:lstStyle/>
+          <a:p>
+            <a:endParaRPr lang="es-MX" dirty="0"/>
+          </a:p>
+        </p:txBody>
+      </p:sp>
+      <p:sp>
+        <p:nvSpPr>
+          <p:cNvPr id="4" name="Marcador de número de diapositiva 3"/>
+          <p:cNvSpPr>
+            <a:spLocks noGrp="1"/>
+          </p:cNvSpPr>
+          <p:nvPr>
+            <p:ph type="sldNum" sz="quarter" idx="5"/>
+          </p:nvPr>
+        </p:nvSpPr>
+        <p:spPr/>
+        <p:txBody>
+          <a:bodyPr/>
+          <a:lstStyle/>
+          <a:p>
+            <a:fld id="{E950F6B6-6AD7-4DC2-A041-BB75EB3B6EDF}" type="slidenum">
+              <a:rPr lang="es-MX" smtClean="0"/>
+              <a:t>3</a:t>
+            </a:fld>
+            <a:endParaRPr lang="es-MX"/>
+          </a:p>
+        </p:txBody>
+      </p:sp>
+    </p:spTree>
+    <p:extLst>
+      <p:ext uri="{BB962C8B-B14F-4D97-AF65-F5344CB8AC3E}">
+        <p14:creationId xmlns:p14="http://schemas.microsoft.com/office/powerpoint/2010/main" val="3423701056"/>
+      </p:ext>
+    </p:extLst>
+  </p:cSld>
+  <p:clrMapOvr>
+    <a:masterClrMapping/>
+  </p:clrMapOvr>
+</p:notes>
 </file>
 
 <file path=ppt/slideLayouts/slideLayout1.xml><?xml version="1.0" encoding="utf-8"?>
@@ -9312,7 +9748,7 @@
         </p:nvSpPr>
         <p:spPr>
           <a:xfrm>
-            <a:off x="794398" y="711604"/>
+            <a:off x="499779" y="507288"/>
             <a:ext cx="4036978" cy="646331"/>
           </a:xfrm>
           <a:prstGeom prst="rect">
@@ -9345,12 +9781,1788 @@
           </a:p>
         </p:txBody>
       </p:sp>
+      <p:grpSp>
+        <p:nvGrpSpPr>
+          <p:cNvPr id="104" name="Grupo 103">
+            <a:extLst>
+              <a:ext uri="{FF2B5EF4-FFF2-40B4-BE49-F238E27FC236}">
+                <a16:creationId xmlns:a16="http://schemas.microsoft.com/office/drawing/2014/main" id="{05ED2B8F-16C8-F469-AD3F-AC17C2B1CB13}"/>
+              </a:ext>
+            </a:extLst>
+          </p:cNvPr>
+          <p:cNvGrpSpPr/>
+          <p:nvPr/>
+        </p:nvGrpSpPr>
+        <p:grpSpPr>
+          <a:xfrm>
+            <a:off x="418644" y="1397968"/>
+            <a:ext cx="4440326" cy="5177315"/>
+            <a:chOff x="457200" y="1626568"/>
+            <a:chExt cx="4440326" cy="5177315"/>
+          </a:xfrm>
+        </p:grpSpPr>
+        <p:sp>
+          <p:nvSpPr>
+            <p:cNvPr id="78" name="CuadroTexto 77">
+              <a:extLst>
+                <a:ext uri="{FF2B5EF4-FFF2-40B4-BE49-F238E27FC236}">
+                  <a16:creationId xmlns:a16="http://schemas.microsoft.com/office/drawing/2014/main" id="{369C6102-5E73-E89B-2B9D-83CCD324B045}"/>
+                </a:ext>
+              </a:extLst>
+            </p:cNvPr>
+            <p:cNvSpPr txBox="1"/>
+            <p:nvPr/>
+          </p:nvSpPr>
+          <p:spPr>
+            <a:xfrm>
+              <a:off x="457200" y="2333685"/>
+              <a:ext cx="3392424" cy="4470198"/>
+            </a:xfrm>
+            <a:prstGeom prst="rect">
+              <a:avLst/>
+            </a:prstGeom>
+            <a:noFill/>
+            <a:ln w="38100">
+              <a:noFill/>
+            </a:ln>
+          </p:spPr>
+          <p:txBody>
+            <a:bodyPr wrap="square" rtlCol="0">
+              <a:spAutoFit/>
+            </a:bodyPr>
+            <a:lstStyle/>
+            <a:p>
+              <a:pPr>
+                <a:lnSpc>
+                  <a:spcPct val="150000"/>
+                </a:lnSpc>
+              </a:pPr>
+              <a:r>
+                <a:rPr lang="es-MX" sz="2400" b="1" dirty="0">
+                  <a:solidFill>
+                    <a:schemeClr val="bg1">
+                      <a:lumMod val="65000"/>
+                    </a:schemeClr>
+                  </a:solidFill>
+                  <a:latin typeface="Google Sans" pitchFamily="2" charset="0"/>
+                  <a:ea typeface="Google Sans" pitchFamily="2" charset="0"/>
+                  <a:cs typeface="Google Sans" pitchFamily="2" charset="0"/>
+                </a:rPr>
+                <a:t>EKTTNMF     (0.92)</a:t>
+              </a:r>
+            </a:p>
+            <a:p>
+              <a:pPr>
+                <a:lnSpc>
+                  <a:spcPct val="150000"/>
+                </a:lnSpc>
+              </a:pPr>
+              <a:r>
+                <a:rPr lang="es-MX" sz="2400" b="1" dirty="0">
+                  <a:solidFill>
+                    <a:schemeClr val="bg1">
+                      <a:lumMod val="65000"/>
+                    </a:schemeClr>
+                  </a:solidFill>
+                  <a:latin typeface="Google Sans" pitchFamily="2" charset="0"/>
+                  <a:ea typeface="Google Sans" pitchFamily="2" charset="0"/>
+                  <a:cs typeface="Google Sans" pitchFamily="2" charset="0"/>
+                </a:rPr>
+                <a:t>HKVMRAT    (0.31)</a:t>
+              </a:r>
+            </a:p>
+            <a:p>
+              <a:pPr>
+                <a:lnSpc>
+                  <a:spcPct val="150000"/>
+                </a:lnSpc>
+              </a:pPr>
+              <a:r>
+                <a:rPr lang="es-MX" sz="2400" b="1" dirty="0">
+                  <a:solidFill>
+                    <a:schemeClr val="bg1">
+                      <a:lumMod val="65000"/>
+                    </a:schemeClr>
+                  </a:solidFill>
+                  <a:latin typeface="Google Sans" pitchFamily="2" charset="0"/>
+                  <a:ea typeface="Google Sans" pitchFamily="2" charset="0"/>
+                  <a:cs typeface="Google Sans" pitchFamily="2" charset="0"/>
+                </a:rPr>
+                <a:t>MMQYQEY  (0.45)</a:t>
+              </a:r>
+            </a:p>
+            <a:p>
+              <a:pPr>
+                <a:lnSpc>
+                  <a:spcPct val="150000"/>
+                </a:lnSpc>
+              </a:pPr>
+              <a:r>
+                <a:rPr lang="es-MX" sz="2400" b="1" dirty="0">
+                  <a:solidFill>
+                    <a:schemeClr val="bg1">
+                      <a:lumMod val="65000"/>
+                    </a:schemeClr>
+                  </a:solidFill>
+                  <a:latin typeface="Google Sans" pitchFamily="2" charset="0"/>
+                  <a:ea typeface="Google Sans" pitchFamily="2" charset="0"/>
+                  <a:cs typeface="Google Sans" pitchFamily="2" charset="0"/>
+                </a:rPr>
+                <a:t>MICRHPM   (0.99)</a:t>
+              </a:r>
+            </a:p>
+            <a:p>
+              <a:pPr>
+                <a:lnSpc>
+                  <a:spcPct val="150000"/>
+                </a:lnSpc>
+              </a:pPr>
+              <a:r>
+                <a:rPr lang="es-MX" sz="2400" b="1" dirty="0">
+                  <a:solidFill>
+                    <a:schemeClr val="bg1">
+                      <a:lumMod val="65000"/>
+                    </a:schemeClr>
+                  </a:solidFill>
+                  <a:latin typeface="Google Sans" pitchFamily="2" charset="0"/>
+                  <a:ea typeface="Google Sans" pitchFamily="2" charset="0"/>
+                  <a:cs typeface="Google Sans" pitchFamily="2" charset="0"/>
+                </a:rPr>
+                <a:t>CQRRCEW   (0.12)</a:t>
+              </a:r>
+            </a:p>
+            <a:p>
+              <a:pPr>
+                <a:lnSpc>
+                  <a:spcPct val="150000"/>
+                </a:lnSpc>
+              </a:pPr>
+              <a:r>
+                <a:rPr lang="es-MX" sz="2400" b="1" dirty="0">
+                  <a:solidFill>
+                    <a:schemeClr val="bg1">
+                      <a:lumMod val="65000"/>
+                    </a:schemeClr>
+                  </a:solidFill>
+                  <a:latin typeface="Google Sans" pitchFamily="2" charset="0"/>
+                  <a:ea typeface="Google Sans" pitchFamily="2" charset="0"/>
+                  <a:cs typeface="Google Sans" pitchFamily="2" charset="0"/>
+                </a:rPr>
+                <a:t>NQTSCSL    (0.92)</a:t>
+              </a:r>
+            </a:p>
+            <a:p>
+              <a:pPr>
+                <a:lnSpc>
+                  <a:spcPct val="150000"/>
+                </a:lnSpc>
+              </a:pPr>
+              <a:r>
+                <a:rPr lang="es-MX" sz="2400" b="1" dirty="0">
+                  <a:solidFill>
+                    <a:schemeClr val="bg1">
+                      <a:lumMod val="65000"/>
+                    </a:schemeClr>
+                  </a:solidFill>
+                  <a:latin typeface="Google Sans" pitchFamily="2" charset="0"/>
+                  <a:ea typeface="Google Sans" pitchFamily="2" charset="0"/>
+                  <a:cs typeface="Google Sans" pitchFamily="2" charset="0"/>
+                </a:rPr>
+                <a:t>TKHNYCN   (0.03)</a:t>
+              </a:r>
+            </a:p>
+            <a:p>
+              <a:pPr>
+                <a:lnSpc>
+                  <a:spcPct val="150000"/>
+                </a:lnSpc>
+              </a:pPr>
+              <a:r>
+                <a:rPr lang="es-MX" sz="2400" b="1" dirty="0">
+                  <a:solidFill>
+                    <a:schemeClr val="bg1">
+                      <a:lumMod val="65000"/>
+                    </a:schemeClr>
+                  </a:solidFill>
+                  <a:latin typeface="Google Sans" pitchFamily="2" charset="0"/>
+                  <a:ea typeface="Google Sans" pitchFamily="2" charset="0"/>
+                  <a:cs typeface="Google Sans" pitchFamily="2" charset="0"/>
+                </a:rPr>
+                <a:t>RDVEKFA    (0.23)</a:t>
+              </a:r>
+            </a:p>
+          </p:txBody>
+        </p:sp>
+        <p:sp>
+          <p:nvSpPr>
+            <p:cNvPr id="21" name="CuadroTexto 20">
+              <a:extLst>
+                <a:ext uri="{FF2B5EF4-FFF2-40B4-BE49-F238E27FC236}">
+                  <a16:creationId xmlns:a16="http://schemas.microsoft.com/office/drawing/2014/main" id="{F58CE01E-35C2-2C32-E1D8-BB2133C2C92D}"/>
+                </a:ext>
+              </a:extLst>
+            </p:cNvPr>
+            <p:cNvSpPr txBox="1"/>
+            <p:nvPr/>
+          </p:nvSpPr>
+          <p:spPr>
+            <a:xfrm>
+              <a:off x="547924" y="1626568"/>
+              <a:ext cx="2229704" cy="707117"/>
+            </a:xfrm>
+            <a:prstGeom prst="rect">
+              <a:avLst/>
+            </a:prstGeom>
+            <a:noFill/>
+            <a:ln w="38100">
+              <a:noFill/>
+            </a:ln>
+          </p:spPr>
+          <p:txBody>
+            <a:bodyPr wrap="square" rtlCol="0">
+              <a:spAutoFit/>
+            </a:bodyPr>
+            <a:lstStyle/>
+            <a:p>
+              <a:pPr>
+                <a:lnSpc>
+                  <a:spcPct val="150000"/>
+                </a:lnSpc>
+              </a:pPr>
+              <a:r>
+                <a:rPr lang="es-MX" sz="1400" dirty="0" err="1">
+                  <a:latin typeface="Google Sans" pitchFamily="2" charset="0"/>
+                  <a:ea typeface="Google Sans" pitchFamily="2" charset="0"/>
+                  <a:cs typeface="Google Sans" pitchFamily="2" charset="0"/>
+                </a:rPr>
+                <a:t>Population</a:t>
+              </a:r>
+              <a:r>
+                <a:rPr lang="es-MX" sz="1400" dirty="0">
+                  <a:latin typeface="Google Sans" pitchFamily="2" charset="0"/>
+                  <a:ea typeface="Google Sans" pitchFamily="2" charset="0"/>
+                  <a:cs typeface="Google Sans" pitchFamily="2" charset="0"/>
+                </a:rPr>
+                <a:t> </a:t>
+              </a:r>
+            </a:p>
+            <a:p>
+              <a:pPr>
+                <a:lnSpc>
+                  <a:spcPct val="150000"/>
+                </a:lnSpc>
+              </a:pPr>
+              <a:r>
+                <a:rPr lang="es-MX" sz="1400" dirty="0">
+                  <a:latin typeface="Google Sans" pitchFamily="2" charset="0"/>
+                  <a:ea typeface="Google Sans" pitchFamily="2" charset="0"/>
+                  <a:cs typeface="Google Sans" pitchFamily="2" charset="0"/>
+                </a:rPr>
+                <a:t>(N </a:t>
+              </a:r>
+              <a:r>
+                <a:rPr lang="es-MX" sz="1400" dirty="0" err="1">
+                  <a:latin typeface="Google Sans" pitchFamily="2" charset="0"/>
+                  <a:ea typeface="Google Sans" pitchFamily="2" charset="0"/>
+                  <a:cs typeface="Google Sans" pitchFamily="2" charset="0"/>
+                </a:rPr>
+                <a:t>individuals</a:t>
+              </a:r>
+              <a:r>
+                <a:rPr lang="es-MX" sz="1400" dirty="0">
+                  <a:latin typeface="Google Sans" pitchFamily="2" charset="0"/>
+                  <a:ea typeface="Google Sans" pitchFamily="2" charset="0"/>
+                  <a:cs typeface="Google Sans" pitchFamily="2" charset="0"/>
+                </a:rPr>
+                <a:t>)</a:t>
+              </a:r>
+            </a:p>
+          </p:txBody>
+        </p:sp>
+        <p:grpSp>
+          <p:nvGrpSpPr>
+            <p:cNvPr id="55" name="Grupo 54">
+              <a:extLst>
+                <a:ext uri="{FF2B5EF4-FFF2-40B4-BE49-F238E27FC236}">
+                  <a16:creationId xmlns:a16="http://schemas.microsoft.com/office/drawing/2014/main" id="{A6964E72-7645-A4E8-A651-26CCC653C5DF}"/>
+                </a:ext>
+              </a:extLst>
+            </p:cNvPr>
+            <p:cNvGrpSpPr/>
+            <p:nvPr/>
+          </p:nvGrpSpPr>
+          <p:grpSpPr>
+            <a:xfrm>
+              <a:off x="3696405" y="2467513"/>
+              <a:ext cx="306437" cy="4202541"/>
+              <a:chOff x="2393742" y="2470498"/>
+              <a:chExt cx="306437" cy="4202541"/>
+            </a:xfrm>
+          </p:grpSpPr>
+          <mc:AlternateContent xmlns:mc="http://schemas.openxmlformats.org/markup-compatibility/2006">
+            <mc:Choice xmlns:a14="http://schemas.microsoft.com/office/drawing/2010/main" Requires="a14">
+              <p:sp>
+                <p:nvSpPr>
+                  <p:cNvPr id="26" name="CuadroTexto 25">
+                    <a:extLst>
+                      <a:ext uri="{FF2B5EF4-FFF2-40B4-BE49-F238E27FC236}">
+                        <a16:creationId xmlns:a16="http://schemas.microsoft.com/office/drawing/2014/main" id="{5B144BDD-95F8-8C66-A01F-D70991D4E611}"/>
+                      </a:ext>
+                    </a:extLst>
+                  </p:cNvPr>
+                  <p:cNvSpPr txBox="1"/>
+                  <p:nvPr/>
+                </p:nvSpPr>
+                <p:spPr>
+                  <a:xfrm>
+                    <a:off x="2397212" y="2470498"/>
+                    <a:ext cx="302967" cy="404726"/>
+                  </a:xfrm>
+                  <a:prstGeom prst="rect">
+                    <a:avLst/>
+                  </a:prstGeom>
+                  <a:noFill/>
+                </p:spPr>
+                <p:txBody>
+                  <a:bodyPr wrap="square" lIns="0" tIns="0" rIns="0" bIns="0" rtlCol="0">
+                    <a:spAutoFit/>
+                  </a:bodyPr>
+                  <a:lstStyle/>
+                  <a:p>
+                    <a:pPr/>
+                    <a14:m>
+                      <m:oMathPara xmlns:m="http://schemas.openxmlformats.org/officeDocument/2006/math">
+                        <m:oMathParaPr>
+                          <m:jc m:val="centerGroup"/>
+                        </m:oMathParaPr>
+                        <m:oMath xmlns:m="http://schemas.openxmlformats.org/officeDocument/2006/math">
+                          <m:f>
+                            <m:fPr>
+                              <m:ctrlPr>
+                                <a:rPr lang="es-MX" sz="1400" b="0" i="1" smtClean="0">
+                                  <a:solidFill>
+                                    <a:schemeClr val="bg2">
+                                      <a:lumMod val="50000"/>
+                                    </a:schemeClr>
+                                  </a:solidFill>
+                                  <a:latin typeface="Cambria Math" panose="02040503050406030204" pitchFamily="18" charset="0"/>
+                                </a:rPr>
+                              </m:ctrlPr>
+                            </m:fPr>
+                            <m:num>
+                              <m:r>
+                                <a:rPr lang="es-MX" sz="1400" b="0" i="1" smtClean="0">
+                                  <a:solidFill>
+                                    <a:schemeClr val="bg2">
+                                      <a:lumMod val="50000"/>
+                                    </a:schemeClr>
+                                  </a:solidFill>
+                                  <a:latin typeface="Cambria Math" panose="02040503050406030204" pitchFamily="18" charset="0"/>
+                                </a:rPr>
+                                <m:t>1</m:t>
+                              </m:r>
+                            </m:num>
+                            <m:den>
+                              <m:r>
+                                <a:rPr lang="es-MX" sz="1400" b="0" i="1" smtClean="0">
+                                  <a:solidFill>
+                                    <a:schemeClr val="bg2">
+                                      <a:lumMod val="50000"/>
+                                    </a:schemeClr>
+                                  </a:solidFill>
+                                  <a:latin typeface="Cambria Math" panose="02040503050406030204" pitchFamily="18" charset="0"/>
+                                </a:rPr>
+                                <m:t>8</m:t>
+                              </m:r>
+                            </m:den>
+                          </m:f>
+                        </m:oMath>
+                      </m:oMathPara>
+                    </a14:m>
+                    <a:endParaRPr lang="es-MX" sz="1400" dirty="0">
+                      <a:solidFill>
+                        <a:schemeClr val="bg2">
+                          <a:lumMod val="50000"/>
+                        </a:schemeClr>
+                      </a:solidFill>
+                      <a:latin typeface="Google Sans" pitchFamily="2" charset="0"/>
+                      <a:ea typeface="Google Sans" pitchFamily="2" charset="0"/>
+                      <a:cs typeface="Google Sans" pitchFamily="2" charset="0"/>
+                    </a:endParaRPr>
+                  </a:p>
+                </p:txBody>
+              </p:sp>
+            </mc:Choice>
+            <mc:Fallback>
+              <p:sp>
+                <p:nvSpPr>
+                  <p:cNvPr id="26" name="CuadroTexto 25">
+                    <a:extLst>
+                      <a:ext uri="{FF2B5EF4-FFF2-40B4-BE49-F238E27FC236}">
+                        <a16:creationId xmlns:a16="http://schemas.microsoft.com/office/drawing/2014/main" id="{5B144BDD-95F8-8C66-A01F-D70991D4E611}"/>
+                      </a:ext>
+                    </a:extLst>
+                  </p:cNvPr>
+                  <p:cNvSpPr txBox="1">
+                    <a:spLocks noRot="1" noChangeAspect="1" noMove="1" noResize="1" noEditPoints="1" noAdjustHandles="1" noChangeArrowheads="1" noChangeShapeType="1" noTextEdit="1"/>
+                  </p:cNvSpPr>
+                  <p:nvPr/>
+                </p:nvSpPr>
+                <p:spPr>
+                  <a:xfrm>
+                    <a:off x="2397212" y="2470498"/>
+                    <a:ext cx="302967" cy="404726"/>
+                  </a:xfrm>
+                  <a:prstGeom prst="rect">
+                    <a:avLst/>
+                  </a:prstGeom>
+                  <a:blipFill>
+                    <a:blip r:embed="rId3"/>
+                    <a:stretch>
+                      <a:fillRect b="-11940"/>
+                    </a:stretch>
+                  </a:blipFill>
+                </p:spPr>
+                <p:txBody>
+                  <a:bodyPr/>
+                  <a:lstStyle/>
+                  <a:p>
+                    <a:r>
+                      <a:rPr lang="es-MX">
+                        <a:noFill/>
+                      </a:rPr>
+                      <a:t> </a:t>
+                    </a:r>
+                  </a:p>
+                </p:txBody>
+              </p:sp>
+            </mc:Fallback>
+          </mc:AlternateContent>
+          <mc:AlternateContent xmlns:mc="http://schemas.openxmlformats.org/markup-compatibility/2006">
+            <mc:Choice xmlns:a14="http://schemas.microsoft.com/office/drawing/2010/main" Requires="a14">
+              <p:sp>
+                <p:nvSpPr>
+                  <p:cNvPr id="35" name="CuadroTexto 34">
+                    <a:extLst>
+                      <a:ext uri="{FF2B5EF4-FFF2-40B4-BE49-F238E27FC236}">
+                        <a16:creationId xmlns:a16="http://schemas.microsoft.com/office/drawing/2014/main" id="{7256DEA9-CD56-CA3A-4B54-8D0AE627359D}"/>
+                      </a:ext>
+                    </a:extLst>
+                  </p:cNvPr>
+                  <p:cNvSpPr txBox="1"/>
+                  <p:nvPr/>
+                </p:nvSpPr>
+                <p:spPr>
+                  <a:xfrm>
+                    <a:off x="2397211" y="3024274"/>
+                    <a:ext cx="302967" cy="404726"/>
+                  </a:xfrm>
+                  <a:prstGeom prst="rect">
+                    <a:avLst/>
+                  </a:prstGeom>
+                  <a:noFill/>
+                </p:spPr>
+                <p:txBody>
+                  <a:bodyPr wrap="square" lIns="0" tIns="0" rIns="0" bIns="0" rtlCol="0">
+                    <a:spAutoFit/>
+                  </a:bodyPr>
+                  <a:lstStyle/>
+                  <a:p>
+                    <a:pPr/>
+                    <a14:m>
+                      <m:oMathPara xmlns:m="http://schemas.openxmlformats.org/officeDocument/2006/math">
+                        <m:oMathParaPr>
+                          <m:jc m:val="centerGroup"/>
+                        </m:oMathParaPr>
+                        <m:oMath xmlns:m="http://schemas.openxmlformats.org/officeDocument/2006/math">
+                          <m:f>
+                            <m:fPr>
+                              <m:ctrlPr>
+                                <a:rPr lang="es-MX" sz="1400" b="0" i="1" smtClean="0">
+                                  <a:solidFill>
+                                    <a:schemeClr val="bg2">
+                                      <a:lumMod val="50000"/>
+                                    </a:schemeClr>
+                                  </a:solidFill>
+                                  <a:latin typeface="Cambria Math" panose="02040503050406030204" pitchFamily="18" charset="0"/>
+                                </a:rPr>
+                              </m:ctrlPr>
+                            </m:fPr>
+                            <m:num>
+                              <m:r>
+                                <a:rPr lang="es-MX" sz="1400" b="0" i="1" smtClean="0">
+                                  <a:solidFill>
+                                    <a:schemeClr val="bg2">
+                                      <a:lumMod val="50000"/>
+                                    </a:schemeClr>
+                                  </a:solidFill>
+                                  <a:latin typeface="Cambria Math" panose="02040503050406030204" pitchFamily="18" charset="0"/>
+                                </a:rPr>
+                                <m:t>1</m:t>
+                              </m:r>
+                            </m:num>
+                            <m:den>
+                              <m:r>
+                                <a:rPr lang="es-MX" sz="1400" b="0" i="1" smtClean="0">
+                                  <a:solidFill>
+                                    <a:schemeClr val="bg2">
+                                      <a:lumMod val="50000"/>
+                                    </a:schemeClr>
+                                  </a:solidFill>
+                                  <a:latin typeface="Cambria Math" panose="02040503050406030204" pitchFamily="18" charset="0"/>
+                                </a:rPr>
+                                <m:t>8</m:t>
+                              </m:r>
+                            </m:den>
+                          </m:f>
+                        </m:oMath>
+                      </m:oMathPara>
+                    </a14:m>
+                    <a:endParaRPr lang="es-MX" sz="1400" dirty="0">
+                      <a:solidFill>
+                        <a:schemeClr val="bg2">
+                          <a:lumMod val="50000"/>
+                        </a:schemeClr>
+                      </a:solidFill>
+                      <a:latin typeface="Google Sans" pitchFamily="2" charset="0"/>
+                      <a:ea typeface="Google Sans" pitchFamily="2" charset="0"/>
+                      <a:cs typeface="Google Sans" pitchFamily="2" charset="0"/>
+                    </a:endParaRPr>
+                  </a:p>
+                </p:txBody>
+              </p:sp>
+            </mc:Choice>
+            <mc:Fallback>
+              <p:sp>
+                <p:nvSpPr>
+                  <p:cNvPr id="35" name="CuadroTexto 34">
+                    <a:extLst>
+                      <a:ext uri="{FF2B5EF4-FFF2-40B4-BE49-F238E27FC236}">
+                        <a16:creationId xmlns:a16="http://schemas.microsoft.com/office/drawing/2014/main" id="{7256DEA9-CD56-CA3A-4B54-8D0AE627359D}"/>
+                      </a:ext>
+                    </a:extLst>
+                  </p:cNvPr>
+                  <p:cNvSpPr txBox="1">
+                    <a:spLocks noRot="1" noChangeAspect="1" noMove="1" noResize="1" noEditPoints="1" noAdjustHandles="1" noChangeArrowheads="1" noChangeShapeType="1" noTextEdit="1"/>
+                  </p:cNvSpPr>
+                  <p:nvPr/>
+                </p:nvSpPr>
+                <p:spPr>
+                  <a:xfrm>
+                    <a:off x="2397211" y="3024274"/>
+                    <a:ext cx="302967" cy="404726"/>
+                  </a:xfrm>
+                  <a:prstGeom prst="rect">
+                    <a:avLst/>
+                  </a:prstGeom>
+                  <a:blipFill>
+                    <a:blip r:embed="rId3"/>
+                    <a:stretch>
+                      <a:fillRect b="-11940"/>
+                    </a:stretch>
+                  </a:blipFill>
+                </p:spPr>
+                <p:txBody>
+                  <a:bodyPr/>
+                  <a:lstStyle/>
+                  <a:p>
+                    <a:r>
+                      <a:rPr lang="es-MX">
+                        <a:noFill/>
+                      </a:rPr>
+                      <a:t> </a:t>
+                    </a:r>
+                  </a:p>
+                </p:txBody>
+              </p:sp>
+            </mc:Fallback>
+          </mc:AlternateContent>
+          <mc:AlternateContent xmlns:mc="http://schemas.openxmlformats.org/markup-compatibility/2006">
+            <mc:Choice xmlns:a14="http://schemas.microsoft.com/office/drawing/2010/main" Requires="a14">
+              <p:sp>
+                <p:nvSpPr>
+                  <p:cNvPr id="38" name="CuadroTexto 37">
+                    <a:extLst>
+                      <a:ext uri="{FF2B5EF4-FFF2-40B4-BE49-F238E27FC236}">
+                        <a16:creationId xmlns:a16="http://schemas.microsoft.com/office/drawing/2014/main" id="{F58B9D4E-073D-A0EB-5292-4706D3A431C4}"/>
+                      </a:ext>
+                    </a:extLst>
+                  </p:cNvPr>
+                  <p:cNvSpPr txBox="1"/>
+                  <p:nvPr/>
+                </p:nvSpPr>
+                <p:spPr>
+                  <a:xfrm>
+                    <a:off x="2397210" y="3578050"/>
+                    <a:ext cx="302967" cy="404726"/>
+                  </a:xfrm>
+                  <a:prstGeom prst="rect">
+                    <a:avLst/>
+                  </a:prstGeom>
+                  <a:noFill/>
+                </p:spPr>
+                <p:txBody>
+                  <a:bodyPr wrap="square" lIns="0" tIns="0" rIns="0" bIns="0" rtlCol="0">
+                    <a:spAutoFit/>
+                  </a:bodyPr>
+                  <a:lstStyle/>
+                  <a:p>
+                    <a:pPr/>
+                    <a14:m>
+                      <m:oMathPara xmlns:m="http://schemas.openxmlformats.org/officeDocument/2006/math">
+                        <m:oMathParaPr>
+                          <m:jc m:val="centerGroup"/>
+                        </m:oMathParaPr>
+                        <m:oMath xmlns:m="http://schemas.openxmlformats.org/officeDocument/2006/math">
+                          <m:f>
+                            <m:fPr>
+                              <m:ctrlPr>
+                                <a:rPr lang="es-MX" sz="1400" b="0" i="1" smtClean="0">
+                                  <a:solidFill>
+                                    <a:schemeClr val="bg2">
+                                      <a:lumMod val="50000"/>
+                                    </a:schemeClr>
+                                  </a:solidFill>
+                                  <a:latin typeface="Cambria Math" panose="02040503050406030204" pitchFamily="18" charset="0"/>
+                                </a:rPr>
+                              </m:ctrlPr>
+                            </m:fPr>
+                            <m:num>
+                              <m:r>
+                                <a:rPr lang="es-MX" sz="1400" b="0" i="1" smtClean="0">
+                                  <a:solidFill>
+                                    <a:schemeClr val="bg2">
+                                      <a:lumMod val="50000"/>
+                                    </a:schemeClr>
+                                  </a:solidFill>
+                                  <a:latin typeface="Cambria Math" panose="02040503050406030204" pitchFamily="18" charset="0"/>
+                                </a:rPr>
+                                <m:t>1</m:t>
+                              </m:r>
+                            </m:num>
+                            <m:den>
+                              <m:r>
+                                <a:rPr lang="es-MX" sz="1400" b="0" i="1" smtClean="0">
+                                  <a:solidFill>
+                                    <a:schemeClr val="bg2">
+                                      <a:lumMod val="50000"/>
+                                    </a:schemeClr>
+                                  </a:solidFill>
+                                  <a:latin typeface="Cambria Math" panose="02040503050406030204" pitchFamily="18" charset="0"/>
+                                </a:rPr>
+                                <m:t>8</m:t>
+                              </m:r>
+                            </m:den>
+                          </m:f>
+                        </m:oMath>
+                      </m:oMathPara>
+                    </a14:m>
+                    <a:endParaRPr lang="es-MX" sz="1400" dirty="0">
+                      <a:solidFill>
+                        <a:schemeClr val="bg2">
+                          <a:lumMod val="50000"/>
+                        </a:schemeClr>
+                      </a:solidFill>
+                      <a:latin typeface="Google Sans" pitchFamily="2" charset="0"/>
+                      <a:ea typeface="Google Sans" pitchFamily="2" charset="0"/>
+                      <a:cs typeface="Google Sans" pitchFamily="2" charset="0"/>
+                    </a:endParaRPr>
+                  </a:p>
+                </p:txBody>
+              </p:sp>
+            </mc:Choice>
+            <mc:Fallback>
+              <p:sp>
+                <p:nvSpPr>
+                  <p:cNvPr id="38" name="CuadroTexto 37">
+                    <a:extLst>
+                      <a:ext uri="{FF2B5EF4-FFF2-40B4-BE49-F238E27FC236}">
+                        <a16:creationId xmlns:a16="http://schemas.microsoft.com/office/drawing/2014/main" id="{F58B9D4E-073D-A0EB-5292-4706D3A431C4}"/>
+                      </a:ext>
+                    </a:extLst>
+                  </p:cNvPr>
+                  <p:cNvSpPr txBox="1">
+                    <a:spLocks noRot="1" noChangeAspect="1" noMove="1" noResize="1" noEditPoints="1" noAdjustHandles="1" noChangeArrowheads="1" noChangeShapeType="1" noTextEdit="1"/>
+                  </p:cNvSpPr>
+                  <p:nvPr/>
+                </p:nvSpPr>
+                <p:spPr>
+                  <a:xfrm>
+                    <a:off x="2397210" y="3578050"/>
+                    <a:ext cx="302967" cy="404726"/>
+                  </a:xfrm>
+                  <a:prstGeom prst="rect">
+                    <a:avLst/>
+                  </a:prstGeom>
+                  <a:blipFill>
+                    <a:blip r:embed="rId3"/>
+                    <a:stretch>
+                      <a:fillRect b="-13636"/>
+                    </a:stretch>
+                  </a:blipFill>
+                </p:spPr>
+                <p:txBody>
+                  <a:bodyPr/>
+                  <a:lstStyle/>
+                  <a:p>
+                    <a:r>
+                      <a:rPr lang="es-MX">
+                        <a:noFill/>
+                      </a:rPr>
+                      <a:t> </a:t>
+                    </a:r>
+                  </a:p>
+                </p:txBody>
+              </p:sp>
+            </mc:Fallback>
+          </mc:AlternateContent>
+          <mc:AlternateContent xmlns:mc="http://schemas.openxmlformats.org/markup-compatibility/2006">
+            <mc:Choice xmlns:a14="http://schemas.microsoft.com/office/drawing/2010/main" Requires="a14">
+              <p:sp>
+                <p:nvSpPr>
+                  <p:cNvPr id="41" name="CuadroTexto 40">
+                    <a:extLst>
+                      <a:ext uri="{FF2B5EF4-FFF2-40B4-BE49-F238E27FC236}">
+                        <a16:creationId xmlns:a16="http://schemas.microsoft.com/office/drawing/2014/main" id="{246DD2E8-F49F-BBC3-7FFF-7F8F8CA0EC06}"/>
+                      </a:ext>
+                    </a:extLst>
+                  </p:cNvPr>
+                  <p:cNvSpPr txBox="1"/>
+                  <p:nvPr/>
+                </p:nvSpPr>
+                <p:spPr>
+                  <a:xfrm>
+                    <a:off x="2397210" y="4131826"/>
+                    <a:ext cx="302967" cy="404726"/>
+                  </a:xfrm>
+                  <a:prstGeom prst="rect">
+                    <a:avLst/>
+                  </a:prstGeom>
+                  <a:noFill/>
+                </p:spPr>
+                <p:txBody>
+                  <a:bodyPr wrap="square" lIns="0" tIns="0" rIns="0" bIns="0" rtlCol="0">
+                    <a:spAutoFit/>
+                  </a:bodyPr>
+                  <a:lstStyle/>
+                  <a:p>
+                    <a:pPr/>
+                    <a14:m>
+                      <m:oMathPara xmlns:m="http://schemas.openxmlformats.org/officeDocument/2006/math">
+                        <m:oMathParaPr>
+                          <m:jc m:val="centerGroup"/>
+                        </m:oMathParaPr>
+                        <m:oMath xmlns:m="http://schemas.openxmlformats.org/officeDocument/2006/math">
+                          <m:f>
+                            <m:fPr>
+                              <m:ctrlPr>
+                                <a:rPr lang="es-MX" sz="1400" b="0" i="1" smtClean="0">
+                                  <a:solidFill>
+                                    <a:schemeClr val="bg2">
+                                      <a:lumMod val="50000"/>
+                                    </a:schemeClr>
+                                  </a:solidFill>
+                                  <a:latin typeface="Cambria Math" panose="02040503050406030204" pitchFamily="18" charset="0"/>
+                                </a:rPr>
+                              </m:ctrlPr>
+                            </m:fPr>
+                            <m:num>
+                              <m:r>
+                                <a:rPr lang="es-MX" sz="1400" b="0" i="1" smtClean="0">
+                                  <a:solidFill>
+                                    <a:schemeClr val="bg2">
+                                      <a:lumMod val="50000"/>
+                                    </a:schemeClr>
+                                  </a:solidFill>
+                                  <a:latin typeface="Cambria Math" panose="02040503050406030204" pitchFamily="18" charset="0"/>
+                                </a:rPr>
+                                <m:t>1</m:t>
+                              </m:r>
+                            </m:num>
+                            <m:den>
+                              <m:r>
+                                <a:rPr lang="es-MX" sz="1400" b="0" i="1" smtClean="0">
+                                  <a:solidFill>
+                                    <a:schemeClr val="bg2">
+                                      <a:lumMod val="50000"/>
+                                    </a:schemeClr>
+                                  </a:solidFill>
+                                  <a:latin typeface="Cambria Math" panose="02040503050406030204" pitchFamily="18" charset="0"/>
+                                </a:rPr>
+                                <m:t>8</m:t>
+                              </m:r>
+                            </m:den>
+                          </m:f>
+                        </m:oMath>
+                      </m:oMathPara>
+                    </a14:m>
+                    <a:endParaRPr lang="es-MX" sz="1400" dirty="0">
+                      <a:solidFill>
+                        <a:schemeClr val="bg2">
+                          <a:lumMod val="50000"/>
+                        </a:schemeClr>
+                      </a:solidFill>
+                      <a:latin typeface="Google Sans" pitchFamily="2" charset="0"/>
+                      <a:ea typeface="Google Sans" pitchFamily="2" charset="0"/>
+                      <a:cs typeface="Google Sans" pitchFamily="2" charset="0"/>
+                    </a:endParaRPr>
+                  </a:p>
+                </p:txBody>
+              </p:sp>
+            </mc:Choice>
+            <mc:Fallback>
+              <p:sp>
+                <p:nvSpPr>
+                  <p:cNvPr id="41" name="CuadroTexto 40">
+                    <a:extLst>
+                      <a:ext uri="{FF2B5EF4-FFF2-40B4-BE49-F238E27FC236}">
+                        <a16:creationId xmlns:a16="http://schemas.microsoft.com/office/drawing/2014/main" id="{246DD2E8-F49F-BBC3-7FFF-7F8F8CA0EC06}"/>
+                      </a:ext>
+                    </a:extLst>
+                  </p:cNvPr>
+                  <p:cNvSpPr txBox="1">
+                    <a:spLocks noRot="1" noChangeAspect="1" noMove="1" noResize="1" noEditPoints="1" noAdjustHandles="1" noChangeArrowheads="1" noChangeShapeType="1" noTextEdit="1"/>
+                  </p:cNvSpPr>
+                  <p:nvPr/>
+                </p:nvSpPr>
+                <p:spPr>
+                  <a:xfrm>
+                    <a:off x="2397210" y="4131826"/>
+                    <a:ext cx="302967" cy="404726"/>
+                  </a:xfrm>
+                  <a:prstGeom prst="rect">
+                    <a:avLst/>
+                  </a:prstGeom>
+                  <a:blipFill>
+                    <a:blip r:embed="rId3"/>
+                    <a:stretch>
+                      <a:fillRect b="-13636"/>
+                    </a:stretch>
+                  </a:blipFill>
+                </p:spPr>
+                <p:txBody>
+                  <a:bodyPr/>
+                  <a:lstStyle/>
+                  <a:p>
+                    <a:r>
+                      <a:rPr lang="es-MX">
+                        <a:noFill/>
+                      </a:rPr>
+                      <a:t> </a:t>
+                    </a:r>
+                  </a:p>
+                </p:txBody>
+              </p:sp>
+            </mc:Fallback>
+          </mc:AlternateContent>
+          <mc:AlternateContent xmlns:mc="http://schemas.openxmlformats.org/markup-compatibility/2006">
+            <mc:Choice xmlns:a14="http://schemas.microsoft.com/office/drawing/2010/main" Requires="a14">
+              <p:sp>
+                <p:nvSpPr>
+                  <p:cNvPr id="43" name="CuadroTexto 42">
+                    <a:extLst>
+                      <a:ext uri="{FF2B5EF4-FFF2-40B4-BE49-F238E27FC236}">
+                        <a16:creationId xmlns:a16="http://schemas.microsoft.com/office/drawing/2014/main" id="{815B751F-977C-9583-C574-FFB10E98907D}"/>
+                      </a:ext>
+                    </a:extLst>
+                  </p:cNvPr>
+                  <p:cNvSpPr txBox="1"/>
+                  <p:nvPr/>
+                </p:nvSpPr>
+                <p:spPr>
+                  <a:xfrm>
+                    <a:off x="2393745" y="4685602"/>
+                    <a:ext cx="302967" cy="404726"/>
+                  </a:xfrm>
+                  <a:prstGeom prst="rect">
+                    <a:avLst/>
+                  </a:prstGeom>
+                  <a:noFill/>
+                </p:spPr>
+                <p:txBody>
+                  <a:bodyPr wrap="square" lIns="0" tIns="0" rIns="0" bIns="0" rtlCol="0">
+                    <a:spAutoFit/>
+                  </a:bodyPr>
+                  <a:lstStyle/>
+                  <a:p>
+                    <a:pPr/>
+                    <a14:m>
+                      <m:oMathPara xmlns:m="http://schemas.openxmlformats.org/officeDocument/2006/math">
+                        <m:oMathParaPr>
+                          <m:jc m:val="centerGroup"/>
+                        </m:oMathParaPr>
+                        <m:oMath xmlns:m="http://schemas.openxmlformats.org/officeDocument/2006/math">
+                          <m:f>
+                            <m:fPr>
+                              <m:ctrlPr>
+                                <a:rPr lang="es-MX" sz="1400" b="0" i="1" smtClean="0">
+                                  <a:solidFill>
+                                    <a:schemeClr val="bg2">
+                                      <a:lumMod val="50000"/>
+                                    </a:schemeClr>
+                                  </a:solidFill>
+                                  <a:latin typeface="Cambria Math" panose="02040503050406030204" pitchFamily="18" charset="0"/>
+                                </a:rPr>
+                              </m:ctrlPr>
+                            </m:fPr>
+                            <m:num>
+                              <m:r>
+                                <a:rPr lang="es-MX" sz="1400" b="0" i="1" smtClean="0">
+                                  <a:solidFill>
+                                    <a:schemeClr val="bg2">
+                                      <a:lumMod val="50000"/>
+                                    </a:schemeClr>
+                                  </a:solidFill>
+                                  <a:latin typeface="Cambria Math" panose="02040503050406030204" pitchFamily="18" charset="0"/>
+                                </a:rPr>
+                                <m:t>1</m:t>
+                              </m:r>
+                            </m:num>
+                            <m:den>
+                              <m:r>
+                                <a:rPr lang="es-MX" sz="1400" b="0" i="1" smtClean="0">
+                                  <a:solidFill>
+                                    <a:schemeClr val="bg2">
+                                      <a:lumMod val="50000"/>
+                                    </a:schemeClr>
+                                  </a:solidFill>
+                                  <a:latin typeface="Cambria Math" panose="02040503050406030204" pitchFamily="18" charset="0"/>
+                                </a:rPr>
+                                <m:t>8</m:t>
+                              </m:r>
+                            </m:den>
+                          </m:f>
+                        </m:oMath>
+                      </m:oMathPara>
+                    </a14:m>
+                    <a:endParaRPr lang="es-MX" sz="1400" dirty="0">
+                      <a:solidFill>
+                        <a:schemeClr val="bg2">
+                          <a:lumMod val="50000"/>
+                        </a:schemeClr>
+                      </a:solidFill>
+                      <a:latin typeface="Google Sans" pitchFamily="2" charset="0"/>
+                      <a:ea typeface="Google Sans" pitchFamily="2" charset="0"/>
+                      <a:cs typeface="Google Sans" pitchFamily="2" charset="0"/>
+                    </a:endParaRPr>
+                  </a:p>
+                </p:txBody>
+              </p:sp>
+            </mc:Choice>
+            <mc:Fallback>
+              <p:sp>
+                <p:nvSpPr>
+                  <p:cNvPr id="43" name="CuadroTexto 42">
+                    <a:extLst>
+                      <a:ext uri="{FF2B5EF4-FFF2-40B4-BE49-F238E27FC236}">
+                        <a16:creationId xmlns:a16="http://schemas.microsoft.com/office/drawing/2014/main" id="{815B751F-977C-9583-C574-FFB10E98907D}"/>
+                      </a:ext>
+                    </a:extLst>
+                  </p:cNvPr>
+                  <p:cNvSpPr txBox="1">
+                    <a:spLocks noRot="1" noChangeAspect="1" noMove="1" noResize="1" noEditPoints="1" noAdjustHandles="1" noChangeArrowheads="1" noChangeShapeType="1" noTextEdit="1"/>
+                  </p:cNvSpPr>
+                  <p:nvPr/>
+                </p:nvSpPr>
+                <p:spPr>
+                  <a:xfrm>
+                    <a:off x="2393745" y="4685602"/>
+                    <a:ext cx="302967" cy="404726"/>
+                  </a:xfrm>
+                  <a:prstGeom prst="rect">
+                    <a:avLst/>
+                  </a:prstGeom>
+                  <a:blipFill>
+                    <a:blip r:embed="rId4"/>
+                    <a:stretch>
+                      <a:fillRect t="-1515" b="-13636"/>
+                    </a:stretch>
+                  </a:blipFill>
+                </p:spPr>
+                <p:txBody>
+                  <a:bodyPr/>
+                  <a:lstStyle/>
+                  <a:p>
+                    <a:r>
+                      <a:rPr lang="es-MX">
+                        <a:noFill/>
+                      </a:rPr>
+                      <a:t> </a:t>
+                    </a:r>
+                  </a:p>
+                </p:txBody>
+              </p:sp>
+            </mc:Fallback>
+          </mc:AlternateContent>
+          <mc:AlternateContent xmlns:mc="http://schemas.openxmlformats.org/markup-compatibility/2006">
+            <mc:Choice xmlns:a14="http://schemas.microsoft.com/office/drawing/2010/main" Requires="a14">
+              <p:sp>
+                <p:nvSpPr>
+                  <p:cNvPr id="45" name="CuadroTexto 44">
+                    <a:extLst>
+                      <a:ext uri="{FF2B5EF4-FFF2-40B4-BE49-F238E27FC236}">
+                        <a16:creationId xmlns:a16="http://schemas.microsoft.com/office/drawing/2014/main" id="{16D88B1C-3659-A34B-8046-8366AAAF2B7C}"/>
+                      </a:ext>
+                    </a:extLst>
+                  </p:cNvPr>
+                  <p:cNvSpPr txBox="1"/>
+                  <p:nvPr/>
+                </p:nvSpPr>
+                <p:spPr>
+                  <a:xfrm>
+                    <a:off x="2393744" y="5212245"/>
+                    <a:ext cx="302967" cy="404726"/>
+                  </a:xfrm>
+                  <a:prstGeom prst="rect">
+                    <a:avLst/>
+                  </a:prstGeom>
+                  <a:noFill/>
+                </p:spPr>
+                <p:txBody>
+                  <a:bodyPr wrap="square" lIns="0" tIns="0" rIns="0" bIns="0" rtlCol="0">
+                    <a:spAutoFit/>
+                  </a:bodyPr>
+                  <a:lstStyle/>
+                  <a:p>
+                    <a:pPr/>
+                    <a14:m>
+                      <m:oMathPara xmlns:m="http://schemas.openxmlformats.org/officeDocument/2006/math">
+                        <m:oMathParaPr>
+                          <m:jc m:val="centerGroup"/>
+                        </m:oMathParaPr>
+                        <m:oMath xmlns:m="http://schemas.openxmlformats.org/officeDocument/2006/math">
+                          <m:f>
+                            <m:fPr>
+                              <m:ctrlPr>
+                                <a:rPr lang="es-MX" sz="1400" b="0" i="1" smtClean="0">
+                                  <a:solidFill>
+                                    <a:schemeClr val="bg2">
+                                      <a:lumMod val="50000"/>
+                                    </a:schemeClr>
+                                  </a:solidFill>
+                                  <a:latin typeface="Cambria Math" panose="02040503050406030204" pitchFamily="18" charset="0"/>
+                                </a:rPr>
+                              </m:ctrlPr>
+                            </m:fPr>
+                            <m:num>
+                              <m:r>
+                                <a:rPr lang="es-MX" sz="1400" b="0" i="1" smtClean="0">
+                                  <a:solidFill>
+                                    <a:schemeClr val="bg2">
+                                      <a:lumMod val="50000"/>
+                                    </a:schemeClr>
+                                  </a:solidFill>
+                                  <a:latin typeface="Cambria Math" panose="02040503050406030204" pitchFamily="18" charset="0"/>
+                                </a:rPr>
+                                <m:t>1</m:t>
+                              </m:r>
+                            </m:num>
+                            <m:den>
+                              <m:r>
+                                <a:rPr lang="es-MX" sz="1400" b="0" i="1" smtClean="0">
+                                  <a:solidFill>
+                                    <a:schemeClr val="bg2">
+                                      <a:lumMod val="50000"/>
+                                    </a:schemeClr>
+                                  </a:solidFill>
+                                  <a:latin typeface="Cambria Math" panose="02040503050406030204" pitchFamily="18" charset="0"/>
+                                </a:rPr>
+                                <m:t>8</m:t>
+                              </m:r>
+                            </m:den>
+                          </m:f>
+                        </m:oMath>
+                      </m:oMathPara>
+                    </a14:m>
+                    <a:endParaRPr lang="es-MX" sz="1400" dirty="0">
+                      <a:solidFill>
+                        <a:schemeClr val="bg2">
+                          <a:lumMod val="50000"/>
+                        </a:schemeClr>
+                      </a:solidFill>
+                      <a:latin typeface="Google Sans" pitchFamily="2" charset="0"/>
+                      <a:ea typeface="Google Sans" pitchFamily="2" charset="0"/>
+                      <a:cs typeface="Google Sans" pitchFamily="2" charset="0"/>
+                    </a:endParaRPr>
+                  </a:p>
+                </p:txBody>
+              </p:sp>
+            </mc:Choice>
+            <mc:Fallback>
+              <p:sp>
+                <p:nvSpPr>
+                  <p:cNvPr id="45" name="CuadroTexto 44">
+                    <a:extLst>
+                      <a:ext uri="{FF2B5EF4-FFF2-40B4-BE49-F238E27FC236}">
+                        <a16:creationId xmlns:a16="http://schemas.microsoft.com/office/drawing/2014/main" id="{16D88B1C-3659-A34B-8046-8366AAAF2B7C}"/>
+                      </a:ext>
+                    </a:extLst>
+                  </p:cNvPr>
+                  <p:cNvSpPr txBox="1">
+                    <a:spLocks noRot="1" noChangeAspect="1" noMove="1" noResize="1" noEditPoints="1" noAdjustHandles="1" noChangeArrowheads="1" noChangeShapeType="1" noTextEdit="1"/>
+                  </p:cNvSpPr>
+                  <p:nvPr/>
+                </p:nvSpPr>
+                <p:spPr>
+                  <a:xfrm>
+                    <a:off x="2393744" y="5212245"/>
+                    <a:ext cx="302967" cy="404726"/>
+                  </a:xfrm>
+                  <a:prstGeom prst="rect">
+                    <a:avLst/>
+                  </a:prstGeom>
+                  <a:blipFill>
+                    <a:blip r:embed="rId5"/>
+                    <a:stretch>
+                      <a:fillRect b="-13636"/>
+                    </a:stretch>
+                  </a:blipFill>
+                </p:spPr>
+                <p:txBody>
+                  <a:bodyPr/>
+                  <a:lstStyle/>
+                  <a:p>
+                    <a:r>
+                      <a:rPr lang="es-MX">
+                        <a:noFill/>
+                      </a:rPr>
+                      <a:t> </a:t>
+                    </a:r>
+                  </a:p>
+                </p:txBody>
+              </p:sp>
+            </mc:Fallback>
+          </mc:AlternateContent>
+          <mc:AlternateContent xmlns:mc="http://schemas.openxmlformats.org/markup-compatibility/2006">
+            <mc:Choice xmlns:a14="http://schemas.microsoft.com/office/drawing/2010/main" Requires="a14">
+              <p:sp>
+                <p:nvSpPr>
+                  <p:cNvPr id="47" name="CuadroTexto 46">
+                    <a:extLst>
+                      <a:ext uri="{FF2B5EF4-FFF2-40B4-BE49-F238E27FC236}">
+                        <a16:creationId xmlns:a16="http://schemas.microsoft.com/office/drawing/2014/main" id="{893017E7-3AA0-4A05-FFDA-5D8AFB531A05}"/>
+                      </a:ext>
+                    </a:extLst>
+                  </p:cNvPr>
+                  <p:cNvSpPr txBox="1"/>
+                  <p:nvPr/>
+                </p:nvSpPr>
+                <p:spPr>
+                  <a:xfrm>
+                    <a:off x="2393743" y="5741670"/>
+                    <a:ext cx="302967" cy="404726"/>
+                  </a:xfrm>
+                  <a:prstGeom prst="rect">
+                    <a:avLst/>
+                  </a:prstGeom>
+                  <a:noFill/>
+                </p:spPr>
+                <p:txBody>
+                  <a:bodyPr wrap="square" lIns="0" tIns="0" rIns="0" bIns="0" rtlCol="0">
+                    <a:spAutoFit/>
+                  </a:bodyPr>
+                  <a:lstStyle/>
+                  <a:p>
+                    <a:pPr/>
+                    <a14:m>
+                      <m:oMathPara xmlns:m="http://schemas.openxmlformats.org/officeDocument/2006/math">
+                        <m:oMathParaPr>
+                          <m:jc m:val="centerGroup"/>
+                        </m:oMathParaPr>
+                        <m:oMath xmlns:m="http://schemas.openxmlformats.org/officeDocument/2006/math">
+                          <m:f>
+                            <m:fPr>
+                              <m:ctrlPr>
+                                <a:rPr lang="es-MX" sz="1400" b="0" i="1" smtClean="0">
+                                  <a:solidFill>
+                                    <a:schemeClr val="bg2">
+                                      <a:lumMod val="50000"/>
+                                    </a:schemeClr>
+                                  </a:solidFill>
+                                  <a:latin typeface="Cambria Math" panose="02040503050406030204" pitchFamily="18" charset="0"/>
+                                </a:rPr>
+                              </m:ctrlPr>
+                            </m:fPr>
+                            <m:num>
+                              <m:r>
+                                <a:rPr lang="es-MX" sz="1400" b="0" i="1" smtClean="0">
+                                  <a:solidFill>
+                                    <a:schemeClr val="bg2">
+                                      <a:lumMod val="50000"/>
+                                    </a:schemeClr>
+                                  </a:solidFill>
+                                  <a:latin typeface="Cambria Math" panose="02040503050406030204" pitchFamily="18" charset="0"/>
+                                </a:rPr>
+                                <m:t>1</m:t>
+                              </m:r>
+                            </m:num>
+                            <m:den>
+                              <m:r>
+                                <a:rPr lang="es-MX" sz="1400" b="0" i="1" smtClean="0">
+                                  <a:solidFill>
+                                    <a:schemeClr val="bg2">
+                                      <a:lumMod val="50000"/>
+                                    </a:schemeClr>
+                                  </a:solidFill>
+                                  <a:latin typeface="Cambria Math" panose="02040503050406030204" pitchFamily="18" charset="0"/>
+                                </a:rPr>
+                                <m:t>8</m:t>
+                              </m:r>
+                            </m:den>
+                          </m:f>
+                        </m:oMath>
+                      </m:oMathPara>
+                    </a14:m>
+                    <a:endParaRPr lang="es-MX" sz="1400" dirty="0">
+                      <a:solidFill>
+                        <a:schemeClr val="bg2">
+                          <a:lumMod val="50000"/>
+                        </a:schemeClr>
+                      </a:solidFill>
+                      <a:latin typeface="Google Sans" pitchFamily="2" charset="0"/>
+                      <a:ea typeface="Google Sans" pitchFamily="2" charset="0"/>
+                      <a:cs typeface="Google Sans" pitchFamily="2" charset="0"/>
+                    </a:endParaRPr>
+                  </a:p>
+                </p:txBody>
+              </p:sp>
+            </mc:Choice>
+            <mc:Fallback>
+              <p:sp>
+                <p:nvSpPr>
+                  <p:cNvPr id="47" name="CuadroTexto 46">
+                    <a:extLst>
+                      <a:ext uri="{FF2B5EF4-FFF2-40B4-BE49-F238E27FC236}">
+                        <a16:creationId xmlns:a16="http://schemas.microsoft.com/office/drawing/2014/main" id="{893017E7-3AA0-4A05-FFDA-5D8AFB531A05}"/>
+                      </a:ext>
+                    </a:extLst>
+                  </p:cNvPr>
+                  <p:cNvSpPr txBox="1">
+                    <a:spLocks noRot="1" noChangeAspect="1" noMove="1" noResize="1" noEditPoints="1" noAdjustHandles="1" noChangeArrowheads="1" noChangeShapeType="1" noTextEdit="1"/>
+                  </p:cNvSpPr>
+                  <p:nvPr/>
+                </p:nvSpPr>
+                <p:spPr>
+                  <a:xfrm>
+                    <a:off x="2393743" y="5741670"/>
+                    <a:ext cx="302967" cy="404726"/>
+                  </a:xfrm>
+                  <a:prstGeom prst="rect">
+                    <a:avLst/>
+                  </a:prstGeom>
+                  <a:blipFill>
+                    <a:blip r:embed="rId5"/>
+                    <a:stretch>
+                      <a:fillRect b="-13636"/>
+                    </a:stretch>
+                  </a:blipFill>
+                </p:spPr>
+                <p:txBody>
+                  <a:bodyPr/>
+                  <a:lstStyle/>
+                  <a:p>
+                    <a:r>
+                      <a:rPr lang="es-MX">
+                        <a:noFill/>
+                      </a:rPr>
+                      <a:t> </a:t>
+                    </a:r>
+                  </a:p>
+                </p:txBody>
+              </p:sp>
+            </mc:Fallback>
+          </mc:AlternateContent>
+          <mc:AlternateContent xmlns:mc="http://schemas.openxmlformats.org/markup-compatibility/2006">
+            <mc:Choice xmlns:a14="http://schemas.microsoft.com/office/drawing/2010/main" Requires="a14">
+              <p:sp>
+                <p:nvSpPr>
+                  <p:cNvPr id="50" name="CuadroTexto 49">
+                    <a:extLst>
+                      <a:ext uri="{FF2B5EF4-FFF2-40B4-BE49-F238E27FC236}">
+                        <a16:creationId xmlns:a16="http://schemas.microsoft.com/office/drawing/2014/main" id="{1AF5B410-DB5A-44DA-6309-9B460EFB17C5}"/>
+                      </a:ext>
+                    </a:extLst>
+                  </p:cNvPr>
+                  <p:cNvSpPr txBox="1"/>
+                  <p:nvPr/>
+                </p:nvSpPr>
+                <p:spPr>
+                  <a:xfrm>
+                    <a:off x="2393742" y="6268313"/>
+                    <a:ext cx="302967" cy="404726"/>
+                  </a:xfrm>
+                  <a:prstGeom prst="rect">
+                    <a:avLst/>
+                  </a:prstGeom>
+                  <a:noFill/>
+                </p:spPr>
+                <p:txBody>
+                  <a:bodyPr wrap="square" lIns="0" tIns="0" rIns="0" bIns="0" rtlCol="0">
+                    <a:spAutoFit/>
+                  </a:bodyPr>
+                  <a:lstStyle/>
+                  <a:p>
+                    <a:pPr/>
+                    <a14:m>
+                      <m:oMathPara xmlns:m="http://schemas.openxmlformats.org/officeDocument/2006/math">
+                        <m:oMathParaPr>
+                          <m:jc m:val="centerGroup"/>
+                        </m:oMathParaPr>
+                        <m:oMath xmlns:m="http://schemas.openxmlformats.org/officeDocument/2006/math">
+                          <m:f>
+                            <m:fPr>
+                              <m:ctrlPr>
+                                <a:rPr lang="es-MX" sz="1400" b="0" i="1" smtClean="0">
+                                  <a:solidFill>
+                                    <a:schemeClr val="bg2">
+                                      <a:lumMod val="50000"/>
+                                    </a:schemeClr>
+                                  </a:solidFill>
+                                  <a:latin typeface="Cambria Math" panose="02040503050406030204" pitchFamily="18" charset="0"/>
+                                </a:rPr>
+                              </m:ctrlPr>
+                            </m:fPr>
+                            <m:num>
+                              <m:r>
+                                <a:rPr lang="es-MX" sz="1400" b="0" i="1" smtClean="0">
+                                  <a:solidFill>
+                                    <a:schemeClr val="bg2">
+                                      <a:lumMod val="50000"/>
+                                    </a:schemeClr>
+                                  </a:solidFill>
+                                  <a:latin typeface="Cambria Math" panose="02040503050406030204" pitchFamily="18" charset="0"/>
+                                </a:rPr>
+                                <m:t>1</m:t>
+                              </m:r>
+                            </m:num>
+                            <m:den>
+                              <m:r>
+                                <a:rPr lang="es-MX" sz="1400" b="0" i="1" smtClean="0">
+                                  <a:solidFill>
+                                    <a:schemeClr val="bg2">
+                                      <a:lumMod val="50000"/>
+                                    </a:schemeClr>
+                                  </a:solidFill>
+                                  <a:latin typeface="Cambria Math" panose="02040503050406030204" pitchFamily="18" charset="0"/>
+                                </a:rPr>
+                                <m:t>8</m:t>
+                              </m:r>
+                            </m:den>
+                          </m:f>
+                        </m:oMath>
+                      </m:oMathPara>
+                    </a14:m>
+                    <a:endParaRPr lang="es-MX" sz="1400" dirty="0">
+                      <a:solidFill>
+                        <a:schemeClr val="bg2">
+                          <a:lumMod val="50000"/>
+                        </a:schemeClr>
+                      </a:solidFill>
+                      <a:latin typeface="Google Sans" pitchFamily="2" charset="0"/>
+                      <a:ea typeface="Google Sans" pitchFamily="2" charset="0"/>
+                      <a:cs typeface="Google Sans" pitchFamily="2" charset="0"/>
+                    </a:endParaRPr>
+                  </a:p>
+                </p:txBody>
+              </p:sp>
+            </mc:Choice>
+            <mc:Fallback>
+              <p:sp>
+                <p:nvSpPr>
+                  <p:cNvPr id="50" name="CuadroTexto 49">
+                    <a:extLst>
+                      <a:ext uri="{FF2B5EF4-FFF2-40B4-BE49-F238E27FC236}">
+                        <a16:creationId xmlns:a16="http://schemas.microsoft.com/office/drawing/2014/main" id="{1AF5B410-DB5A-44DA-6309-9B460EFB17C5}"/>
+                      </a:ext>
+                    </a:extLst>
+                  </p:cNvPr>
+                  <p:cNvSpPr txBox="1">
+                    <a:spLocks noRot="1" noChangeAspect="1" noMove="1" noResize="1" noEditPoints="1" noAdjustHandles="1" noChangeArrowheads="1" noChangeShapeType="1" noTextEdit="1"/>
+                  </p:cNvSpPr>
+                  <p:nvPr/>
+                </p:nvSpPr>
+                <p:spPr>
+                  <a:xfrm>
+                    <a:off x="2393742" y="6268313"/>
+                    <a:ext cx="302967" cy="404726"/>
+                  </a:xfrm>
+                  <a:prstGeom prst="rect">
+                    <a:avLst/>
+                  </a:prstGeom>
+                  <a:blipFill>
+                    <a:blip r:embed="rId5"/>
+                    <a:stretch>
+                      <a:fillRect b="-11940"/>
+                    </a:stretch>
+                  </a:blipFill>
+                </p:spPr>
+                <p:txBody>
+                  <a:bodyPr/>
+                  <a:lstStyle/>
+                  <a:p>
+                    <a:r>
+                      <a:rPr lang="es-MX">
+                        <a:noFill/>
+                      </a:rPr>
+                      <a:t> </a:t>
+                    </a:r>
+                  </a:p>
+                </p:txBody>
+              </p:sp>
+            </mc:Fallback>
+          </mc:AlternateContent>
+        </p:grpSp>
+        <p:grpSp>
+          <p:nvGrpSpPr>
+            <p:cNvPr id="57" name="Grupo 56">
+              <a:extLst>
+                <a:ext uri="{FF2B5EF4-FFF2-40B4-BE49-F238E27FC236}">
+                  <a16:creationId xmlns:a16="http://schemas.microsoft.com/office/drawing/2014/main" id="{3937CF2B-07B1-FDE4-4387-915D0D41CBD6}"/>
+                </a:ext>
+              </a:extLst>
+            </p:cNvPr>
+            <p:cNvGrpSpPr/>
+            <p:nvPr/>
+          </p:nvGrpSpPr>
+          <p:grpSpPr>
+            <a:xfrm>
+              <a:off x="3419541" y="1719132"/>
+              <a:ext cx="1477985" cy="461024"/>
+              <a:chOff x="1996735" y="1941990"/>
+              <a:chExt cx="1477985" cy="461024"/>
+            </a:xfrm>
+          </p:grpSpPr>
+          <mc:AlternateContent xmlns:mc="http://schemas.openxmlformats.org/markup-compatibility/2006">
+            <mc:Choice xmlns:a14="http://schemas.microsoft.com/office/drawing/2010/main" Requires="a14">
+              <p:sp>
+                <p:nvSpPr>
+                  <p:cNvPr id="24" name="CuadroTexto 23">
+                    <a:extLst>
+                      <a:ext uri="{FF2B5EF4-FFF2-40B4-BE49-F238E27FC236}">
+                        <a16:creationId xmlns:a16="http://schemas.microsoft.com/office/drawing/2014/main" id="{CE8D7B1D-EDDA-4947-1631-156B47BC6AA7}"/>
+                      </a:ext>
+                    </a:extLst>
+                  </p:cNvPr>
+                  <p:cNvSpPr txBox="1"/>
+                  <p:nvPr/>
+                </p:nvSpPr>
+                <p:spPr>
+                  <a:xfrm flipH="1">
+                    <a:off x="2953126" y="1941990"/>
+                    <a:ext cx="521594" cy="461024"/>
+                  </a:xfrm>
+                  <a:prstGeom prst="rect">
+                    <a:avLst/>
+                  </a:prstGeom>
+                  <a:noFill/>
+                </p:spPr>
+                <p:txBody>
+                  <a:bodyPr wrap="square" lIns="0" tIns="0" rIns="0" bIns="0" rtlCol="0">
+                    <a:spAutoFit/>
+                  </a:bodyPr>
+                  <a:lstStyle/>
+                  <a:p>
+                    <a:pPr/>
+                    <a14:m>
+                      <m:oMathPara xmlns:m="http://schemas.openxmlformats.org/officeDocument/2006/math">
+                        <m:oMathParaPr>
+                          <m:jc m:val="centerGroup"/>
+                        </m:oMathParaPr>
+                        <m:oMath xmlns:m="http://schemas.openxmlformats.org/officeDocument/2006/math">
+                          <m:f>
+                            <m:fPr>
+                              <m:ctrlPr>
+                                <a:rPr lang="es-MX" sz="1600" b="0" i="1" smtClean="0">
+                                  <a:latin typeface="Cambria Math" panose="02040503050406030204" pitchFamily="18" charset="0"/>
+                                </a:rPr>
+                              </m:ctrlPr>
+                            </m:fPr>
+                            <m:num>
+                              <m:r>
+                                <a:rPr lang="es-MX" sz="1600" b="0" i="1" smtClean="0">
+                                  <a:latin typeface="Cambria Math" panose="02040503050406030204" pitchFamily="18" charset="0"/>
+                                </a:rPr>
+                                <m:t>1</m:t>
+                              </m:r>
+                            </m:num>
+                            <m:den>
+                              <m:r>
+                                <a:rPr lang="es-MX" sz="1600" b="0" i="1" smtClean="0">
+                                  <a:latin typeface="Cambria Math" panose="02040503050406030204" pitchFamily="18" charset="0"/>
+                                </a:rPr>
+                                <m:t>𝑁</m:t>
+                              </m:r>
+                            </m:den>
+                          </m:f>
+                        </m:oMath>
+                      </m:oMathPara>
+                    </a14:m>
+                    <a:endParaRPr lang="es-MX" sz="1600" dirty="0">
+                      <a:latin typeface="Google Sans" pitchFamily="2" charset="0"/>
+                      <a:ea typeface="Google Sans" pitchFamily="2" charset="0"/>
+                      <a:cs typeface="Google Sans" pitchFamily="2" charset="0"/>
+                    </a:endParaRPr>
+                  </a:p>
+                </p:txBody>
+              </p:sp>
+            </mc:Choice>
+            <mc:Fallback>
+              <p:sp>
+                <p:nvSpPr>
+                  <p:cNvPr id="24" name="CuadroTexto 23">
+                    <a:extLst>
+                      <a:ext uri="{FF2B5EF4-FFF2-40B4-BE49-F238E27FC236}">
+                        <a16:creationId xmlns:a16="http://schemas.microsoft.com/office/drawing/2014/main" id="{CE8D7B1D-EDDA-4947-1631-156B47BC6AA7}"/>
+                      </a:ext>
+                    </a:extLst>
+                  </p:cNvPr>
+                  <p:cNvSpPr txBox="1">
+                    <a:spLocks noRot="1" noChangeAspect="1" noMove="1" noResize="1" noEditPoints="1" noAdjustHandles="1" noChangeArrowheads="1" noChangeShapeType="1" noTextEdit="1"/>
+                  </p:cNvSpPr>
+                  <p:nvPr/>
+                </p:nvSpPr>
+                <p:spPr>
+                  <a:xfrm flipH="1">
+                    <a:off x="2953126" y="1941990"/>
+                    <a:ext cx="521594" cy="461024"/>
+                  </a:xfrm>
+                  <a:prstGeom prst="rect">
+                    <a:avLst/>
+                  </a:prstGeom>
+                  <a:blipFill>
+                    <a:blip r:embed="rId6"/>
+                    <a:stretch>
+                      <a:fillRect/>
+                    </a:stretch>
+                  </a:blipFill>
+                </p:spPr>
+                <p:txBody>
+                  <a:bodyPr/>
+                  <a:lstStyle/>
+                  <a:p>
+                    <a:r>
+                      <a:rPr lang="es-MX">
+                        <a:noFill/>
+                      </a:rPr>
+                      <a:t> </a:t>
+                    </a:r>
+                  </a:p>
+                </p:txBody>
+              </p:sp>
+            </mc:Fallback>
+          </mc:AlternateContent>
+          <p:sp>
+            <p:nvSpPr>
+              <p:cNvPr id="52" name="CuadroTexto 51">
+                <a:extLst>
+                  <a:ext uri="{FF2B5EF4-FFF2-40B4-BE49-F238E27FC236}">
+                    <a16:creationId xmlns:a16="http://schemas.microsoft.com/office/drawing/2014/main" id="{18154373-B9BB-6475-BF80-BC56606A7FEA}"/>
+                  </a:ext>
+                </a:extLst>
+              </p:cNvPr>
+              <p:cNvSpPr txBox="1"/>
+              <p:nvPr/>
+            </p:nvSpPr>
+            <p:spPr>
+              <a:xfrm>
+                <a:off x="1996735" y="2018614"/>
+                <a:ext cx="1112226" cy="307777"/>
+              </a:xfrm>
+              <a:prstGeom prst="rect">
+                <a:avLst/>
+              </a:prstGeom>
+              <a:noFill/>
+              <a:ln w="38100">
+                <a:noFill/>
+              </a:ln>
+            </p:spPr>
+            <p:txBody>
+              <a:bodyPr wrap="square" rtlCol="0">
+                <a:spAutoFit/>
+              </a:bodyPr>
+              <a:lstStyle/>
+              <a:p>
+                <a:r>
+                  <a:rPr lang="es-MX" sz="1400" dirty="0" err="1">
+                    <a:latin typeface="Google Sans" pitchFamily="2" charset="0"/>
+                    <a:ea typeface="Google Sans" pitchFamily="2" charset="0"/>
+                    <a:cs typeface="Google Sans" pitchFamily="2" charset="0"/>
+                  </a:rPr>
+                  <a:t>Probability</a:t>
+                </a:r>
+                <a:endParaRPr lang="es-MX" sz="1400" dirty="0">
+                  <a:latin typeface="Google Sans" pitchFamily="2" charset="0"/>
+                  <a:ea typeface="Google Sans" pitchFamily="2" charset="0"/>
+                  <a:cs typeface="Google Sans" pitchFamily="2" charset="0"/>
+                </a:endParaRPr>
+              </a:p>
+            </p:txBody>
+          </p:sp>
+        </p:grpSp>
+        <p:sp>
+          <p:nvSpPr>
+            <p:cNvPr id="61" name="CuadroTexto 60">
+              <a:extLst>
+                <a:ext uri="{FF2B5EF4-FFF2-40B4-BE49-F238E27FC236}">
+                  <a16:creationId xmlns:a16="http://schemas.microsoft.com/office/drawing/2014/main" id="{E94B7EBD-5A51-E54C-B39B-006370F8C5B6}"/>
+                </a:ext>
+              </a:extLst>
+            </p:cNvPr>
+            <p:cNvSpPr txBox="1"/>
+            <p:nvPr/>
+          </p:nvSpPr>
+          <p:spPr>
+            <a:xfrm>
+              <a:off x="2322261" y="1857593"/>
+              <a:ext cx="1015299" cy="307777"/>
+            </a:xfrm>
+            <a:prstGeom prst="rect">
+              <a:avLst/>
+            </a:prstGeom>
+            <a:noFill/>
+            <a:ln w="38100">
+              <a:noFill/>
+            </a:ln>
+          </p:spPr>
+          <p:txBody>
+            <a:bodyPr wrap="square" rtlCol="0">
+              <a:spAutoFit/>
+            </a:bodyPr>
+            <a:lstStyle/>
+            <a:p>
+              <a:r>
+                <a:rPr lang="es-MX" sz="1400" dirty="0">
+                  <a:latin typeface="Google Sans" pitchFamily="2" charset="0"/>
+                  <a:ea typeface="Google Sans" pitchFamily="2" charset="0"/>
+                  <a:cs typeface="Google Sans" pitchFamily="2" charset="0"/>
+                </a:rPr>
+                <a:t>Fitness</a:t>
+              </a:r>
+            </a:p>
+          </p:txBody>
+        </p:sp>
+      </p:grpSp>
+      <p:pic>
+        <p:nvPicPr>
+          <p:cNvPr id="74" name="Imagen 73">
+            <a:extLst>
+              <a:ext uri="{FF2B5EF4-FFF2-40B4-BE49-F238E27FC236}">
+                <a16:creationId xmlns:a16="http://schemas.microsoft.com/office/drawing/2014/main" id="{F0855ED6-BF5C-4B21-5738-8D2CF0C38CB3}"/>
+              </a:ext>
+            </a:extLst>
+          </p:cNvPr>
+          <p:cNvPicPr>
+            <a:picLocks noChangeAspect="1"/>
+          </p:cNvPicPr>
+          <p:nvPr/>
+        </p:nvPicPr>
+        <p:blipFill>
+          <a:blip r:embed="rId7">
+            <a:extLst>
+              <a:ext uri="{28A0092B-C50C-407E-A947-70E740481C1C}">
+                <a14:useLocalDpi xmlns:a14="http://schemas.microsoft.com/office/drawing/2010/main" val="0"/>
+              </a:ext>
+            </a:extLst>
+          </a:blip>
+          <a:stretch>
+            <a:fillRect/>
+          </a:stretch>
+        </p:blipFill>
+        <p:spPr>
+          <a:xfrm>
+            <a:off x="3999372" y="4430957"/>
+            <a:ext cx="471181" cy="475488"/>
+          </a:xfrm>
+          <a:prstGeom prst="rect">
+            <a:avLst/>
+          </a:prstGeom>
+        </p:spPr>
+      </p:pic>
+      <p:cxnSp>
+        <p:nvCxnSpPr>
+          <p:cNvPr id="79" name="Conector: curvado 78">
+            <a:extLst>
+              <a:ext uri="{FF2B5EF4-FFF2-40B4-BE49-F238E27FC236}">
+                <a16:creationId xmlns:a16="http://schemas.microsoft.com/office/drawing/2014/main" id="{9B01C97E-D04B-7684-ADC4-3F8EFA52CAB3}"/>
+              </a:ext>
+            </a:extLst>
+          </p:cNvPr>
+          <p:cNvCxnSpPr>
+            <a:cxnSpLocks/>
+            <a:stCxn id="74" idx="3"/>
+            <a:endCxn id="84" idx="1"/>
+          </p:cNvCxnSpPr>
+          <p:nvPr/>
+        </p:nvCxnSpPr>
+        <p:spPr>
+          <a:xfrm flipV="1">
+            <a:off x="4470553" y="2210668"/>
+            <a:ext cx="3301847" cy="2458033"/>
+          </a:xfrm>
+          <a:prstGeom prst="curvedConnector3">
+            <a:avLst/>
+          </a:prstGeom>
+          <a:ln>
+            <a:tailEnd type="triangle"/>
+          </a:ln>
+        </p:spPr>
+        <p:style>
+          <a:lnRef idx="2">
+            <a:schemeClr val="accent6"/>
+          </a:lnRef>
+          <a:fillRef idx="0">
+            <a:schemeClr val="accent6"/>
+          </a:fillRef>
+          <a:effectRef idx="1">
+            <a:schemeClr val="accent6"/>
+          </a:effectRef>
+          <a:fontRef idx="minor">
+            <a:schemeClr val="tx1"/>
+          </a:fontRef>
+        </p:style>
+      </p:cxnSp>
+      <p:pic>
+        <p:nvPicPr>
+          <p:cNvPr id="76" name="Imagen 75">
+            <a:extLst>
+              <a:ext uri="{FF2B5EF4-FFF2-40B4-BE49-F238E27FC236}">
+                <a16:creationId xmlns:a16="http://schemas.microsoft.com/office/drawing/2014/main" id="{75002360-34E4-7181-71A8-E01315FE87D5}"/>
+              </a:ext>
+            </a:extLst>
+          </p:cNvPr>
+          <p:cNvPicPr>
+            <a:picLocks noChangeAspect="1"/>
+          </p:cNvPicPr>
+          <p:nvPr/>
+        </p:nvPicPr>
+        <p:blipFill>
+          <a:blip r:embed="rId7">
+            <a:extLst>
+              <a:ext uri="{28A0092B-C50C-407E-A947-70E740481C1C}">
+                <a14:useLocalDpi xmlns:a14="http://schemas.microsoft.com/office/drawing/2010/main" val="0"/>
+              </a:ext>
+            </a:extLst>
+          </a:blip>
+          <a:stretch>
+            <a:fillRect/>
+          </a:stretch>
+        </p:blipFill>
+        <p:spPr>
+          <a:xfrm>
+            <a:off x="3937098" y="5440240"/>
+            <a:ext cx="471181" cy="475488"/>
+          </a:xfrm>
+          <a:prstGeom prst="rect">
+            <a:avLst/>
+          </a:prstGeom>
+        </p:spPr>
+      </p:pic>
       <p:sp>
         <p:nvSpPr>
-          <p:cNvPr id="78" name="CuadroTexto 77">
+          <p:cNvPr id="54" name="CuadroTexto 53">
             <a:extLst>
               <a:ext uri="{FF2B5EF4-FFF2-40B4-BE49-F238E27FC236}">
-                <a16:creationId xmlns:a16="http://schemas.microsoft.com/office/drawing/2014/main" id="{369C6102-5E73-E89B-2B9D-83CCD324B045}"/>
+                <a16:creationId xmlns:a16="http://schemas.microsoft.com/office/drawing/2014/main" id="{01CCC9B8-9646-C0D8-5A32-FA6A957C0900}"/>
               </a:ext>
             </a:extLst>
           </p:cNvPr>
@@ -9359,19 +11571,16 @@
         </p:nvSpPr>
         <p:spPr>
           <a:xfrm>
-            <a:off x="457200" y="2333685"/>
-            <a:ext cx="1825105" cy="4470198"/>
+            <a:off x="5462636" y="3351933"/>
+            <a:ext cx="1784138" cy="1298241"/>
           </a:xfrm>
           <a:prstGeom prst="rect">
             <a:avLst/>
           </a:prstGeom>
           <a:noFill/>
-          <a:ln w="38100">
-            <a:noFill/>
-          </a:ln>
         </p:spPr>
         <p:txBody>
-          <a:bodyPr wrap="square" rtlCol="0">
+          <a:bodyPr wrap="square">
             <a:spAutoFit/>
           </a:bodyPr>
           <a:lstStyle/>
@@ -9382,167 +11591,133 @@
               </a:lnSpc>
             </a:pPr>
             <a:r>
-              <a:rPr lang="es-MX" sz="2400" b="1" dirty="0">
-                <a:solidFill>
-                  <a:schemeClr val="bg1">
-                    <a:lumMod val="65000"/>
-                  </a:schemeClr>
-                </a:solidFill>
+              <a:rPr lang="es-MX" dirty="0" err="1">
                 <a:latin typeface="Google Sans" pitchFamily="2" charset="0"/>
                 <a:ea typeface="Google Sans" pitchFamily="2" charset="0"/>
                 <a:cs typeface="Google Sans" pitchFamily="2" charset="0"/>
               </a:rPr>
-              <a:t>EKTTNMF</a:t>
+              <a:t>we</a:t>
             </a:r>
-          </a:p>
-          <a:p>
-            <a:pPr>
-              <a:lnSpc>
-                <a:spcPct val="150000"/>
-              </a:lnSpc>
-            </a:pPr>
             <a:r>
-              <a:rPr lang="es-MX" sz="2400" b="1" dirty="0">
-                <a:solidFill>
-                  <a:schemeClr val="bg1">
-                    <a:lumMod val="65000"/>
-                  </a:schemeClr>
-                </a:solidFill>
+              <a:rPr lang="es-MX" dirty="0">
                 <a:latin typeface="Google Sans" pitchFamily="2" charset="0"/>
                 <a:ea typeface="Google Sans" pitchFamily="2" charset="0"/>
                 <a:cs typeface="Google Sans" pitchFamily="2" charset="0"/>
               </a:rPr>
-              <a:t>HKVMRAT</a:t>
+              <a:t> </a:t>
             </a:r>
-          </a:p>
-          <a:p>
-            <a:pPr>
-              <a:lnSpc>
-                <a:spcPct val="150000"/>
-              </a:lnSpc>
-            </a:pPr>
             <a:r>
-              <a:rPr lang="es-MX" sz="2400" b="1" dirty="0">
-                <a:solidFill>
-                  <a:schemeClr val="bg1">
-                    <a:lumMod val="65000"/>
-                  </a:schemeClr>
-                </a:solidFill>
+              <a:rPr lang="es-MX" dirty="0" err="1">
                 <a:latin typeface="Google Sans" pitchFamily="2" charset="0"/>
                 <a:ea typeface="Google Sans" pitchFamily="2" charset="0"/>
                 <a:cs typeface="Google Sans" pitchFamily="2" charset="0"/>
               </a:rPr>
-              <a:t>MMQYQEY</a:t>
+              <a:t>randomly</a:t>
             </a:r>
-          </a:p>
-          <a:p>
-            <a:pPr>
-              <a:lnSpc>
-                <a:spcPct val="150000"/>
-              </a:lnSpc>
-            </a:pPr>
             <a:r>
-              <a:rPr lang="es-MX" sz="2400" b="1" dirty="0">
-                <a:solidFill>
-                  <a:schemeClr val="bg1">
-                    <a:lumMod val="65000"/>
-                  </a:schemeClr>
-                </a:solidFill>
+              <a:rPr lang="es-MX" dirty="0">
                 <a:latin typeface="Google Sans" pitchFamily="2" charset="0"/>
                 <a:ea typeface="Google Sans" pitchFamily="2" charset="0"/>
                 <a:cs typeface="Google Sans" pitchFamily="2" charset="0"/>
               </a:rPr>
-              <a:t>MICRHPM</a:t>
+              <a:t> </a:t>
             </a:r>
-          </a:p>
-          <a:p>
-            <a:pPr>
-              <a:lnSpc>
-                <a:spcPct val="150000"/>
-              </a:lnSpc>
-            </a:pPr>
             <a:r>
-              <a:rPr lang="es-MX" sz="2400" b="1" dirty="0">
-                <a:solidFill>
-                  <a:schemeClr val="bg1">
-                    <a:lumMod val="65000"/>
-                  </a:schemeClr>
-                </a:solidFill>
+              <a:rPr lang="es-MX" dirty="0" err="1">
                 <a:latin typeface="Google Sans" pitchFamily="2" charset="0"/>
                 <a:ea typeface="Google Sans" pitchFamily="2" charset="0"/>
                 <a:cs typeface="Google Sans" pitchFamily="2" charset="0"/>
               </a:rPr>
-              <a:t>CQRRCEW</a:t>
+              <a:t>selected</a:t>
             </a:r>
-          </a:p>
-          <a:p>
-            <a:pPr>
-              <a:lnSpc>
-                <a:spcPct val="150000"/>
-              </a:lnSpc>
-            </a:pPr>
             <a:r>
-              <a:rPr lang="es-MX" sz="2400" b="1" dirty="0">
-                <a:solidFill>
-                  <a:schemeClr val="bg1">
-                    <a:lumMod val="65000"/>
-                  </a:schemeClr>
-                </a:solidFill>
+              <a:rPr lang="es-MX" dirty="0">
                 <a:latin typeface="Google Sans" pitchFamily="2" charset="0"/>
                 <a:ea typeface="Google Sans" pitchFamily="2" charset="0"/>
                 <a:cs typeface="Google Sans" pitchFamily="2" charset="0"/>
               </a:rPr>
-              <a:t>NQTSCSL</a:t>
+              <a:t> </a:t>
             </a:r>
-          </a:p>
-          <a:p>
-            <a:pPr>
-              <a:lnSpc>
-                <a:spcPct val="150000"/>
-              </a:lnSpc>
-            </a:pPr>
             <a:r>
-              <a:rPr lang="es-MX" sz="2400" b="1" dirty="0">
-                <a:solidFill>
-                  <a:schemeClr val="bg1">
-                    <a:lumMod val="65000"/>
-                  </a:schemeClr>
-                </a:solidFill>
+              <a:rPr lang="es-MX" dirty="0" err="1">
                 <a:latin typeface="Google Sans" pitchFamily="2" charset="0"/>
                 <a:ea typeface="Google Sans" pitchFamily="2" charset="0"/>
                 <a:cs typeface="Google Sans" pitchFamily="2" charset="0"/>
               </a:rPr>
-              <a:t>TKHNYCN</a:t>
+              <a:t>two</a:t>
             </a:r>
-          </a:p>
-          <a:p>
-            <a:pPr>
-              <a:lnSpc>
-                <a:spcPct val="150000"/>
-              </a:lnSpc>
-            </a:pPr>
             <a:r>
-              <a:rPr lang="es-MX" sz="2400" b="1" dirty="0">
-                <a:solidFill>
-                  <a:schemeClr val="bg1">
-                    <a:lumMod val="65000"/>
-                  </a:schemeClr>
-                </a:solidFill>
+              <a:rPr lang="es-MX" dirty="0">
                 <a:latin typeface="Google Sans" pitchFamily="2" charset="0"/>
                 <a:ea typeface="Google Sans" pitchFamily="2" charset="0"/>
                 <a:cs typeface="Google Sans" pitchFamily="2" charset="0"/>
               </a:rPr>
-              <a:t>RDVEKFA</a:t>
+              <a:t> </a:t>
             </a:r>
+            <a:r>
+              <a:rPr lang="es-MX" dirty="0" err="1">
+                <a:latin typeface="Google Sans" pitchFamily="2" charset="0"/>
+                <a:ea typeface="Google Sans" pitchFamily="2" charset="0"/>
+                <a:cs typeface="Google Sans" pitchFamily="2" charset="0"/>
+              </a:rPr>
+              <a:t>individuals</a:t>
+            </a:r>
+            <a:endParaRPr lang="es-MX" dirty="0">
+              <a:latin typeface="Google Sans" pitchFamily="2" charset="0"/>
+              <a:ea typeface="Google Sans" pitchFamily="2" charset="0"/>
+              <a:cs typeface="Google Sans" pitchFamily="2" charset="0"/>
+            </a:endParaRPr>
           </a:p>
         </p:txBody>
       </p:sp>
+      <p:cxnSp>
+        <p:nvCxnSpPr>
+          <p:cNvPr id="80" name="Conector: curvado 79">
+            <a:extLst>
+              <a:ext uri="{FF2B5EF4-FFF2-40B4-BE49-F238E27FC236}">
+                <a16:creationId xmlns:a16="http://schemas.microsoft.com/office/drawing/2014/main" id="{3FFB77DD-41CB-4CF1-EB94-EC3570B960B4}"/>
+              </a:ext>
+            </a:extLst>
+          </p:cNvPr>
+          <p:cNvCxnSpPr>
+            <a:cxnSpLocks/>
+            <a:endCxn id="87" idx="1"/>
+          </p:cNvCxnSpPr>
+          <p:nvPr/>
+        </p:nvCxnSpPr>
+        <p:spPr>
+          <a:xfrm flipV="1">
+            <a:off x="4282249" y="3388836"/>
+            <a:ext cx="3490151" cy="2323612"/>
+          </a:xfrm>
+          <a:prstGeom prst="curvedConnector3">
+            <a:avLst/>
+          </a:prstGeom>
+          <a:ln>
+            <a:tailEnd type="triangle"/>
+          </a:ln>
+        </p:spPr>
+        <p:style>
+          <a:lnRef idx="2">
+            <a:schemeClr val="accent6"/>
+          </a:lnRef>
+          <a:fillRef idx="0">
+            <a:schemeClr val="accent6"/>
+          </a:fillRef>
+          <a:effectRef idx="1">
+            <a:schemeClr val="accent6"/>
+          </a:effectRef>
+          <a:fontRef idx="minor">
+            <a:schemeClr val="tx1"/>
+          </a:fontRef>
+        </p:style>
+      </p:cxnSp>
       <p:sp>
         <p:nvSpPr>
-          <p:cNvPr id="21" name="CuadroTexto 20">
+          <p:cNvPr id="84" name="CuadroTexto 83">
             <a:extLst>
               <a:ext uri="{FF2B5EF4-FFF2-40B4-BE49-F238E27FC236}">
-                <a16:creationId xmlns:a16="http://schemas.microsoft.com/office/drawing/2014/main" id="{F58CE01E-35C2-2C32-E1D8-BB2133C2C92D}"/>
+                <a16:creationId xmlns:a16="http://schemas.microsoft.com/office/drawing/2014/main" id="{8BB8AD0C-892F-8102-3F9C-2BE25B3F1E4E}"/>
               </a:ext>
             </a:extLst>
           </p:cNvPr>
@@ -9551,1116 +11726,42 @@
         </p:nvSpPr>
         <p:spPr>
           <a:xfrm>
-            <a:off x="457200" y="1618504"/>
-            <a:ext cx="1838228" cy="400110"/>
+            <a:off x="7772400" y="1977046"/>
+            <a:ext cx="2201418" cy="467244"/>
           </a:xfrm>
           <a:prstGeom prst="rect">
             <a:avLst/>
           </a:prstGeom>
           <a:noFill/>
-          <a:ln w="38100">
-            <a:noFill/>
-          </a:ln>
         </p:spPr>
         <p:txBody>
-          <a:bodyPr wrap="square" rtlCol="0">
+          <a:bodyPr wrap="square">
             <a:spAutoFit/>
           </a:bodyPr>
           <a:lstStyle/>
           <a:p>
+            <a:pPr>
+              <a:lnSpc>
+                <a:spcPct val="150000"/>
+              </a:lnSpc>
+            </a:pPr>
             <a:r>
-              <a:rPr lang="es-MX" sz="2000" b="1" dirty="0" err="1">
+              <a:rPr lang="es-MX" sz="1800" b="1" dirty="0">
                 <a:latin typeface="Google Sans" pitchFamily="2" charset="0"/>
                 <a:ea typeface="Google Sans" pitchFamily="2" charset="0"/>
                 <a:cs typeface="Google Sans" pitchFamily="2" charset="0"/>
               </a:rPr>
-              <a:t>Population</a:t>
+              <a:t>CQRRCEW   (0.12)</a:t>
             </a:r>
-            <a:endParaRPr lang="es-MX" sz="2000" b="1" dirty="0">
-              <a:latin typeface="Google Sans" pitchFamily="2" charset="0"/>
-              <a:ea typeface="Google Sans" pitchFamily="2" charset="0"/>
-              <a:cs typeface="Google Sans" pitchFamily="2" charset="0"/>
-            </a:endParaRPr>
           </a:p>
         </p:txBody>
       </p:sp>
-      <mc:AlternateContent xmlns:mc="http://schemas.openxmlformats.org/markup-compatibility/2006">
-        <mc:Choice xmlns:a14="http://schemas.microsoft.com/office/drawing/2010/main" Requires="a14">
-          <p:sp>
-            <p:nvSpPr>
-              <p:cNvPr id="24" name="CuadroTexto 23">
-                <a:extLst>
-                  <a:ext uri="{FF2B5EF4-FFF2-40B4-BE49-F238E27FC236}">
-                    <a16:creationId xmlns:a16="http://schemas.microsoft.com/office/drawing/2014/main" id="{CE8D7B1D-EDDA-4947-1631-156B47BC6AA7}"/>
-                  </a:ext>
-                </a:extLst>
-              </p:cNvPr>
-              <p:cNvSpPr txBox="1"/>
-              <p:nvPr/>
-            </p:nvSpPr>
-            <p:spPr>
-              <a:xfrm flipH="1">
-                <a:off x="2953126" y="1941990"/>
-                <a:ext cx="521594" cy="461024"/>
-              </a:xfrm>
-              <a:prstGeom prst="rect">
-                <a:avLst/>
-              </a:prstGeom>
-              <a:noFill/>
-            </p:spPr>
-            <p:txBody>
-              <a:bodyPr wrap="square" lIns="0" tIns="0" rIns="0" bIns="0" rtlCol="0">
-                <a:spAutoFit/>
-              </a:bodyPr>
-              <a:lstStyle/>
-              <a:p>
-                <a:pPr/>
-                <a14:m>
-                  <m:oMathPara xmlns:m="http://schemas.openxmlformats.org/officeDocument/2006/math">
-                    <m:oMathParaPr>
-                      <m:jc m:val="centerGroup"/>
-                    </m:oMathParaPr>
-                    <m:oMath xmlns:m="http://schemas.openxmlformats.org/officeDocument/2006/math">
-                      <m:f>
-                        <m:fPr>
-                          <m:ctrlPr>
-                            <a:rPr lang="es-MX" sz="1600" b="0" i="1" smtClean="0">
-                              <a:latin typeface="Cambria Math" panose="02040503050406030204" pitchFamily="18" charset="0"/>
-                            </a:rPr>
-                          </m:ctrlPr>
-                        </m:fPr>
-                        <m:num>
-                          <m:r>
-                            <a:rPr lang="es-MX" sz="1600" b="0" i="1" smtClean="0">
-                              <a:latin typeface="Cambria Math" panose="02040503050406030204" pitchFamily="18" charset="0"/>
-                            </a:rPr>
-                            <m:t>1</m:t>
-                          </m:r>
-                        </m:num>
-                        <m:den>
-                          <m:r>
-                            <a:rPr lang="es-MX" sz="1600" b="0" i="1" smtClean="0">
-                              <a:latin typeface="Cambria Math" panose="02040503050406030204" pitchFamily="18" charset="0"/>
-                            </a:rPr>
-                            <m:t>𝑁</m:t>
-                          </m:r>
-                        </m:den>
-                      </m:f>
-                    </m:oMath>
-                  </m:oMathPara>
-                </a14:m>
-                <a:endParaRPr lang="es-MX" sz="1600" dirty="0">
-                  <a:latin typeface="Google Sans" pitchFamily="2" charset="0"/>
-                  <a:ea typeface="Google Sans" pitchFamily="2" charset="0"/>
-                  <a:cs typeface="Google Sans" pitchFamily="2" charset="0"/>
-                </a:endParaRPr>
-              </a:p>
-            </p:txBody>
-          </p:sp>
-        </mc:Choice>
-        <mc:Fallback>
-          <p:sp>
-            <p:nvSpPr>
-              <p:cNvPr id="24" name="CuadroTexto 23">
-                <a:extLst>
-                  <a:ext uri="{FF2B5EF4-FFF2-40B4-BE49-F238E27FC236}">
-                    <a16:creationId xmlns:a16="http://schemas.microsoft.com/office/drawing/2014/main" id="{CE8D7B1D-EDDA-4947-1631-156B47BC6AA7}"/>
-                  </a:ext>
-                </a:extLst>
-              </p:cNvPr>
-              <p:cNvSpPr txBox="1">
-                <a:spLocks noRot="1" noChangeAspect="1" noMove="1" noResize="1" noEditPoints="1" noAdjustHandles="1" noChangeArrowheads="1" noChangeShapeType="1" noTextEdit="1"/>
-              </p:cNvSpPr>
-              <p:nvPr/>
-            </p:nvSpPr>
-            <p:spPr>
-              <a:xfrm flipH="1">
-                <a:off x="2953126" y="1941990"/>
-                <a:ext cx="521594" cy="461024"/>
-              </a:xfrm>
-              <a:prstGeom prst="rect">
-                <a:avLst/>
-              </a:prstGeom>
-              <a:blipFill>
-                <a:blip r:embed="rId2"/>
-                <a:stretch>
-                  <a:fillRect/>
-                </a:stretch>
-              </a:blipFill>
-            </p:spPr>
-            <p:txBody>
-              <a:bodyPr/>
-              <a:lstStyle/>
-              <a:p>
-                <a:r>
-                  <a:rPr lang="es-MX">
-                    <a:noFill/>
-                  </a:rPr>
-                  <a:t> </a:t>
-                </a:r>
-              </a:p>
-            </p:txBody>
-          </p:sp>
-        </mc:Fallback>
-      </mc:AlternateContent>
-      <mc:AlternateContent xmlns:mc="http://schemas.openxmlformats.org/markup-compatibility/2006">
-        <mc:Choice xmlns:a14="http://schemas.microsoft.com/office/drawing/2010/main" Requires="a14">
-          <p:sp>
-            <p:nvSpPr>
-              <p:cNvPr id="26" name="CuadroTexto 25">
-                <a:extLst>
-                  <a:ext uri="{FF2B5EF4-FFF2-40B4-BE49-F238E27FC236}">
-                    <a16:creationId xmlns:a16="http://schemas.microsoft.com/office/drawing/2014/main" id="{5B144BDD-95F8-8C66-A01F-D70991D4E611}"/>
-                  </a:ext>
-                </a:extLst>
-              </p:cNvPr>
-              <p:cNvSpPr txBox="1"/>
-              <p:nvPr/>
-            </p:nvSpPr>
-            <p:spPr>
-              <a:xfrm>
-                <a:off x="2397212" y="2470498"/>
-                <a:ext cx="302967" cy="404726"/>
-              </a:xfrm>
-              <a:prstGeom prst="rect">
-                <a:avLst/>
-              </a:prstGeom>
-              <a:noFill/>
-            </p:spPr>
-            <p:txBody>
-              <a:bodyPr wrap="square" lIns="0" tIns="0" rIns="0" bIns="0" rtlCol="0">
-                <a:spAutoFit/>
-              </a:bodyPr>
-              <a:lstStyle/>
-              <a:p>
-                <a:pPr/>
-                <a14:m>
-                  <m:oMathPara xmlns:m="http://schemas.openxmlformats.org/officeDocument/2006/math">
-                    <m:oMathParaPr>
-                      <m:jc m:val="centerGroup"/>
-                    </m:oMathParaPr>
-                    <m:oMath xmlns:m="http://schemas.openxmlformats.org/officeDocument/2006/math">
-                      <m:f>
-                        <m:fPr>
-                          <m:ctrlPr>
-                            <a:rPr lang="es-MX" sz="1400" b="0" i="1" smtClean="0">
-                              <a:latin typeface="Cambria Math" panose="02040503050406030204" pitchFamily="18" charset="0"/>
-                            </a:rPr>
-                          </m:ctrlPr>
-                        </m:fPr>
-                        <m:num>
-                          <m:r>
-                            <a:rPr lang="es-MX" sz="1400" b="0" i="1" smtClean="0">
-                              <a:latin typeface="Cambria Math" panose="02040503050406030204" pitchFamily="18" charset="0"/>
-                            </a:rPr>
-                            <m:t>1</m:t>
-                          </m:r>
-                        </m:num>
-                        <m:den>
-                          <m:r>
-                            <a:rPr lang="es-MX" sz="1400" b="0" i="1" smtClean="0">
-                              <a:latin typeface="Cambria Math" panose="02040503050406030204" pitchFamily="18" charset="0"/>
-                            </a:rPr>
-                            <m:t>8</m:t>
-                          </m:r>
-                        </m:den>
-                      </m:f>
-                    </m:oMath>
-                  </m:oMathPara>
-                </a14:m>
-                <a:endParaRPr lang="es-MX" sz="1400" dirty="0">
-                  <a:latin typeface="Google Sans" pitchFamily="2" charset="0"/>
-                  <a:ea typeface="Google Sans" pitchFamily="2" charset="0"/>
-                  <a:cs typeface="Google Sans" pitchFamily="2" charset="0"/>
-                </a:endParaRPr>
-              </a:p>
-            </p:txBody>
-          </p:sp>
-        </mc:Choice>
-        <mc:Fallback>
-          <p:sp>
-            <p:nvSpPr>
-              <p:cNvPr id="26" name="CuadroTexto 25">
-                <a:extLst>
-                  <a:ext uri="{FF2B5EF4-FFF2-40B4-BE49-F238E27FC236}">
-                    <a16:creationId xmlns:a16="http://schemas.microsoft.com/office/drawing/2014/main" id="{5B144BDD-95F8-8C66-A01F-D70991D4E611}"/>
-                  </a:ext>
-                </a:extLst>
-              </p:cNvPr>
-              <p:cNvSpPr txBox="1">
-                <a:spLocks noRot="1" noChangeAspect="1" noMove="1" noResize="1" noEditPoints="1" noAdjustHandles="1" noChangeArrowheads="1" noChangeShapeType="1" noTextEdit="1"/>
-              </p:cNvSpPr>
-              <p:nvPr/>
-            </p:nvSpPr>
-            <p:spPr>
-              <a:xfrm>
-                <a:off x="2397212" y="2470498"/>
-                <a:ext cx="302967" cy="404726"/>
-              </a:xfrm>
-              <a:prstGeom prst="rect">
-                <a:avLst/>
-              </a:prstGeom>
-              <a:blipFill>
-                <a:blip r:embed="rId3"/>
-                <a:stretch>
-                  <a:fillRect b="-11940"/>
-                </a:stretch>
-              </a:blipFill>
-            </p:spPr>
-            <p:txBody>
-              <a:bodyPr/>
-              <a:lstStyle/>
-              <a:p>
-                <a:r>
-                  <a:rPr lang="es-MX">
-                    <a:noFill/>
-                  </a:rPr>
-                  <a:t> </a:t>
-                </a:r>
-              </a:p>
-            </p:txBody>
-          </p:sp>
-        </mc:Fallback>
-      </mc:AlternateContent>
-      <mc:AlternateContent xmlns:mc="http://schemas.openxmlformats.org/markup-compatibility/2006">
-        <mc:Choice xmlns:a14="http://schemas.microsoft.com/office/drawing/2010/main" Requires="a14">
-          <p:sp>
-            <p:nvSpPr>
-              <p:cNvPr id="35" name="CuadroTexto 34">
-                <a:extLst>
-                  <a:ext uri="{FF2B5EF4-FFF2-40B4-BE49-F238E27FC236}">
-                    <a16:creationId xmlns:a16="http://schemas.microsoft.com/office/drawing/2014/main" id="{7256DEA9-CD56-CA3A-4B54-8D0AE627359D}"/>
-                  </a:ext>
-                </a:extLst>
-              </p:cNvPr>
-              <p:cNvSpPr txBox="1"/>
-              <p:nvPr/>
-            </p:nvSpPr>
-            <p:spPr>
-              <a:xfrm>
-                <a:off x="2397211" y="3024274"/>
-                <a:ext cx="302967" cy="404726"/>
-              </a:xfrm>
-              <a:prstGeom prst="rect">
-                <a:avLst/>
-              </a:prstGeom>
-              <a:noFill/>
-            </p:spPr>
-            <p:txBody>
-              <a:bodyPr wrap="square" lIns="0" tIns="0" rIns="0" bIns="0" rtlCol="0">
-                <a:spAutoFit/>
-              </a:bodyPr>
-              <a:lstStyle/>
-              <a:p>
-                <a:pPr/>
-                <a14:m>
-                  <m:oMathPara xmlns:m="http://schemas.openxmlformats.org/officeDocument/2006/math">
-                    <m:oMathParaPr>
-                      <m:jc m:val="centerGroup"/>
-                    </m:oMathParaPr>
-                    <m:oMath xmlns:m="http://schemas.openxmlformats.org/officeDocument/2006/math">
-                      <m:f>
-                        <m:fPr>
-                          <m:ctrlPr>
-                            <a:rPr lang="es-MX" sz="1400" b="0" i="1" smtClean="0">
-                              <a:latin typeface="Cambria Math" panose="02040503050406030204" pitchFamily="18" charset="0"/>
-                            </a:rPr>
-                          </m:ctrlPr>
-                        </m:fPr>
-                        <m:num>
-                          <m:r>
-                            <a:rPr lang="es-MX" sz="1400" b="0" i="1" smtClean="0">
-                              <a:latin typeface="Cambria Math" panose="02040503050406030204" pitchFamily="18" charset="0"/>
-                            </a:rPr>
-                            <m:t>1</m:t>
-                          </m:r>
-                        </m:num>
-                        <m:den>
-                          <m:r>
-                            <a:rPr lang="es-MX" sz="1400" b="0" i="1" smtClean="0">
-                              <a:latin typeface="Cambria Math" panose="02040503050406030204" pitchFamily="18" charset="0"/>
-                            </a:rPr>
-                            <m:t>8</m:t>
-                          </m:r>
-                        </m:den>
-                      </m:f>
-                    </m:oMath>
-                  </m:oMathPara>
-                </a14:m>
-                <a:endParaRPr lang="es-MX" sz="1400" dirty="0">
-                  <a:latin typeface="Google Sans" pitchFamily="2" charset="0"/>
-                  <a:ea typeface="Google Sans" pitchFamily="2" charset="0"/>
-                  <a:cs typeface="Google Sans" pitchFamily="2" charset="0"/>
-                </a:endParaRPr>
-              </a:p>
-            </p:txBody>
-          </p:sp>
-        </mc:Choice>
-        <mc:Fallback>
-          <p:sp>
-            <p:nvSpPr>
-              <p:cNvPr id="35" name="CuadroTexto 34">
-                <a:extLst>
-                  <a:ext uri="{FF2B5EF4-FFF2-40B4-BE49-F238E27FC236}">
-                    <a16:creationId xmlns:a16="http://schemas.microsoft.com/office/drawing/2014/main" id="{7256DEA9-CD56-CA3A-4B54-8D0AE627359D}"/>
-                  </a:ext>
-                </a:extLst>
-              </p:cNvPr>
-              <p:cNvSpPr txBox="1">
-                <a:spLocks noRot="1" noChangeAspect="1" noMove="1" noResize="1" noEditPoints="1" noAdjustHandles="1" noChangeArrowheads="1" noChangeShapeType="1" noTextEdit="1"/>
-              </p:cNvSpPr>
-              <p:nvPr/>
-            </p:nvSpPr>
-            <p:spPr>
-              <a:xfrm>
-                <a:off x="2397211" y="3024274"/>
-                <a:ext cx="302967" cy="404726"/>
-              </a:xfrm>
-              <a:prstGeom prst="rect">
-                <a:avLst/>
-              </a:prstGeom>
-              <a:blipFill>
-                <a:blip r:embed="rId3"/>
-                <a:stretch>
-                  <a:fillRect b="-11940"/>
-                </a:stretch>
-              </a:blipFill>
-            </p:spPr>
-            <p:txBody>
-              <a:bodyPr/>
-              <a:lstStyle/>
-              <a:p>
-                <a:r>
-                  <a:rPr lang="es-MX">
-                    <a:noFill/>
-                  </a:rPr>
-                  <a:t> </a:t>
-                </a:r>
-              </a:p>
-            </p:txBody>
-          </p:sp>
-        </mc:Fallback>
-      </mc:AlternateContent>
-      <mc:AlternateContent xmlns:mc="http://schemas.openxmlformats.org/markup-compatibility/2006">
-        <mc:Choice xmlns:a14="http://schemas.microsoft.com/office/drawing/2010/main" Requires="a14">
-          <p:sp>
-            <p:nvSpPr>
-              <p:cNvPr id="38" name="CuadroTexto 37">
-                <a:extLst>
-                  <a:ext uri="{FF2B5EF4-FFF2-40B4-BE49-F238E27FC236}">
-                    <a16:creationId xmlns:a16="http://schemas.microsoft.com/office/drawing/2014/main" id="{F58B9D4E-073D-A0EB-5292-4706D3A431C4}"/>
-                  </a:ext>
-                </a:extLst>
-              </p:cNvPr>
-              <p:cNvSpPr txBox="1"/>
-              <p:nvPr/>
-            </p:nvSpPr>
-            <p:spPr>
-              <a:xfrm>
-                <a:off x="2397210" y="3578050"/>
-                <a:ext cx="302967" cy="404726"/>
-              </a:xfrm>
-              <a:prstGeom prst="rect">
-                <a:avLst/>
-              </a:prstGeom>
-              <a:noFill/>
-            </p:spPr>
-            <p:txBody>
-              <a:bodyPr wrap="square" lIns="0" tIns="0" rIns="0" bIns="0" rtlCol="0">
-                <a:spAutoFit/>
-              </a:bodyPr>
-              <a:lstStyle/>
-              <a:p>
-                <a:pPr/>
-                <a14:m>
-                  <m:oMathPara xmlns:m="http://schemas.openxmlformats.org/officeDocument/2006/math">
-                    <m:oMathParaPr>
-                      <m:jc m:val="centerGroup"/>
-                    </m:oMathParaPr>
-                    <m:oMath xmlns:m="http://schemas.openxmlformats.org/officeDocument/2006/math">
-                      <m:f>
-                        <m:fPr>
-                          <m:ctrlPr>
-                            <a:rPr lang="es-MX" sz="1400" b="0" i="1" smtClean="0">
-                              <a:latin typeface="Cambria Math" panose="02040503050406030204" pitchFamily="18" charset="0"/>
-                            </a:rPr>
-                          </m:ctrlPr>
-                        </m:fPr>
-                        <m:num>
-                          <m:r>
-                            <a:rPr lang="es-MX" sz="1400" b="0" i="1" smtClean="0">
-                              <a:latin typeface="Cambria Math" panose="02040503050406030204" pitchFamily="18" charset="0"/>
-                            </a:rPr>
-                            <m:t>1</m:t>
-                          </m:r>
-                        </m:num>
-                        <m:den>
-                          <m:r>
-                            <a:rPr lang="es-MX" sz="1400" b="0" i="1" smtClean="0">
-                              <a:latin typeface="Cambria Math" panose="02040503050406030204" pitchFamily="18" charset="0"/>
-                            </a:rPr>
-                            <m:t>8</m:t>
-                          </m:r>
-                        </m:den>
-                      </m:f>
-                    </m:oMath>
-                  </m:oMathPara>
-                </a14:m>
-                <a:endParaRPr lang="es-MX" sz="1400" dirty="0">
-                  <a:latin typeface="Google Sans" pitchFamily="2" charset="0"/>
-                  <a:ea typeface="Google Sans" pitchFamily="2" charset="0"/>
-                  <a:cs typeface="Google Sans" pitchFamily="2" charset="0"/>
-                </a:endParaRPr>
-              </a:p>
-            </p:txBody>
-          </p:sp>
-        </mc:Choice>
-        <mc:Fallback>
-          <p:sp>
-            <p:nvSpPr>
-              <p:cNvPr id="38" name="CuadroTexto 37">
-                <a:extLst>
-                  <a:ext uri="{FF2B5EF4-FFF2-40B4-BE49-F238E27FC236}">
-                    <a16:creationId xmlns:a16="http://schemas.microsoft.com/office/drawing/2014/main" id="{F58B9D4E-073D-A0EB-5292-4706D3A431C4}"/>
-                  </a:ext>
-                </a:extLst>
-              </p:cNvPr>
-              <p:cNvSpPr txBox="1">
-                <a:spLocks noRot="1" noChangeAspect="1" noMove="1" noResize="1" noEditPoints="1" noAdjustHandles="1" noChangeArrowheads="1" noChangeShapeType="1" noTextEdit="1"/>
-              </p:cNvSpPr>
-              <p:nvPr/>
-            </p:nvSpPr>
-            <p:spPr>
-              <a:xfrm>
-                <a:off x="2397210" y="3578050"/>
-                <a:ext cx="302967" cy="404726"/>
-              </a:xfrm>
-              <a:prstGeom prst="rect">
-                <a:avLst/>
-              </a:prstGeom>
-              <a:blipFill>
-                <a:blip r:embed="rId3"/>
-                <a:stretch>
-                  <a:fillRect b="-13636"/>
-                </a:stretch>
-              </a:blipFill>
-            </p:spPr>
-            <p:txBody>
-              <a:bodyPr/>
-              <a:lstStyle/>
-              <a:p>
-                <a:r>
-                  <a:rPr lang="es-MX">
-                    <a:noFill/>
-                  </a:rPr>
-                  <a:t> </a:t>
-                </a:r>
-              </a:p>
-            </p:txBody>
-          </p:sp>
-        </mc:Fallback>
-      </mc:AlternateContent>
-      <mc:AlternateContent xmlns:mc="http://schemas.openxmlformats.org/markup-compatibility/2006">
-        <mc:Choice xmlns:a14="http://schemas.microsoft.com/office/drawing/2010/main" Requires="a14">
-          <p:sp>
-            <p:nvSpPr>
-              <p:cNvPr id="41" name="CuadroTexto 40">
-                <a:extLst>
-                  <a:ext uri="{FF2B5EF4-FFF2-40B4-BE49-F238E27FC236}">
-                    <a16:creationId xmlns:a16="http://schemas.microsoft.com/office/drawing/2014/main" id="{246DD2E8-F49F-BBC3-7FFF-7F8F8CA0EC06}"/>
-                  </a:ext>
-                </a:extLst>
-              </p:cNvPr>
-              <p:cNvSpPr txBox="1"/>
-              <p:nvPr/>
-            </p:nvSpPr>
-            <p:spPr>
-              <a:xfrm>
-                <a:off x="2397210" y="4131826"/>
-                <a:ext cx="302967" cy="404726"/>
-              </a:xfrm>
-              <a:prstGeom prst="rect">
-                <a:avLst/>
-              </a:prstGeom>
-              <a:noFill/>
-            </p:spPr>
-            <p:txBody>
-              <a:bodyPr wrap="square" lIns="0" tIns="0" rIns="0" bIns="0" rtlCol="0">
-                <a:spAutoFit/>
-              </a:bodyPr>
-              <a:lstStyle/>
-              <a:p>
-                <a:pPr/>
-                <a14:m>
-                  <m:oMathPara xmlns:m="http://schemas.openxmlformats.org/officeDocument/2006/math">
-                    <m:oMathParaPr>
-                      <m:jc m:val="centerGroup"/>
-                    </m:oMathParaPr>
-                    <m:oMath xmlns:m="http://schemas.openxmlformats.org/officeDocument/2006/math">
-                      <m:f>
-                        <m:fPr>
-                          <m:ctrlPr>
-                            <a:rPr lang="es-MX" sz="1400" b="0" i="1" smtClean="0">
-                              <a:latin typeface="Cambria Math" panose="02040503050406030204" pitchFamily="18" charset="0"/>
-                            </a:rPr>
-                          </m:ctrlPr>
-                        </m:fPr>
-                        <m:num>
-                          <m:r>
-                            <a:rPr lang="es-MX" sz="1400" b="0" i="1" smtClean="0">
-                              <a:latin typeface="Cambria Math" panose="02040503050406030204" pitchFamily="18" charset="0"/>
-                            </a:rPr>
-                            <m:t>1</m:t>
-                          </m:r>
-                        </m:num>
-                        <m:den>
-                          <m:r>
-                            <a:rPr lang="es-MX" sz="1400" b="0" i="1" smtClean="0">
-                              <a:latin typeface="Cambria Math" panose="02040503050406030204" pitchFamily="18" charset="0"/>
-                            </a:rPr>
-                            <m:t>8</m:t>
-                          </m:r>
-                        </m:den>
-                      </m:f>
-                    </m:oMath>
-                  </m:oMathPara>
-                </a14:m>
-                <a:endParaRPr lang="es-MX" sz="1400" dirty="0">
-                  <a:latin typeface="Google Sans" pitchFamily="2" charset="0"/>
-                  <a:ea typeface="Google Sans" pitchFamily="2" charset="0"/>
-                  <a:cs typeface="Google Sans" pitchFamily="2" charset="0"/>
-                </a:endParaRPr>
-              </a:p>
-            </p:txBody>
-          </p:sp>
-        </mc:Choice>
-        <mc:Fallback>
-          <p:sp>
-            <p:nvSpPr>
-              <p:cNvPr id="41" name="CuadroTexto 40">
-                <a:extLst>
-                  <a:ext uri="{FF2B5EF4-FFF2-40B4-BE49-F238E27FC236}">
-                    <a16:creationId xmlns:a16="http://schemas.microsoft.com/office/drawing/2014/main" id="{246DD2E8-F49F-BBC3-7FFF-7F8F8CA0EC06}"/>
-                  </a:ext>
-                </a:extLst>
-              </p:cNvPr>
-              <p:cNvSpPr txBox="1">
-                <a:spLocks noRot="1" noChangeAspect="1" noMove="1" noResize="1" noEditPoints="1" noAdjustHandles="1" noChangeArrowheads="1" noChangeShapeType="1" noTextEdit="1"/>
-              </p:cNvSpPr>
-              <p:nvPr/>
-            </p:nvSpPr>
-            <p:spPr>
-              <a:xfrm>
-                <a:off x="2397210" y="4131826"/>
-                <a:ext cx="302967" cy="404726"/>
-              </a:xfrm>
-              <a:prstGeom prst="rect">
-                <a:avLst/>
-              </a:prstGeom>
-              <a:blipFill>
-                <a:blip r:embed="rId3"/>
-                <a:stretch>
-                  <a:fillRect b="-13636"/>
-                </a:stretch>
-              </a:blipFill>
-            </p:spPr>
-            <p:txBody>
-              <a:bodyPr/>
-              <a:lstStyle/>
-              <a:p>
-                <a:r>
-                  <a:rPr lang="es-MX">
-                    <a:noFill/>
-                  </a:rPr>
-                  <a:t> </a:t>
-                </a:r>
-              </a:p>
-            </p:txBody>
-          </p:sp>
-        </mc:Fallback>
-      </mc:AlternateContent>
-      <mc:AlternateContent xmlns:mc="http://schemas.openxmlformats.org/markup-compatibility/2006">
-        <mc:Choice xmlns:a14="http://schemas.microsoft.com/office/drawing/2010/main" Requires="a14">
-          <p:sp>
-            <p:nvSpPr>
-              <p:cNvPr id="43" name="CuadroTexto 42">
-                <a:extLst>
-                  <a:ext uri="{FF2B5EF4-FFF2-40B4-BE49-F238E27FC236}">
-                    <a16:creationId xmlns:a16="http://schemas.microsoft.com/office/drawing/2014/main" id="{815B751F-977C-9583-C574-FFB10E98907D}"/>
-                  </a:ext>
-                </a:extLst>
-              </p:cNvPr>
-              <p:cNvSpPr txBox="1"/>
-              <p:nvPr/>
-            </p:nvSpPr>
-            <p:spPr>
-              <a:xfrm>
-                <a:off x="2393745" y="4685602"/>
-                <a:ext cx="302967" cy="404726"/>
-              </a:xfrm>
-              <a:prstGeom prst="rect">
-                <a:avLst/>
-              </a:prstGeom>
-              <a:noFill/>
-            </p:spPr>
-            <p:txBody>
-              <a:bodyPr wrap="square" lIns="0" tIns="0" rIns="0" bIns="0" rtlCol="0">
-                <a:spAutoFit/>
-              </a:bodyPr>
-              <a:lstStyle/>
-              <a:p>
-                <a:pPr/>
-                <a14:m>
-                  <m:oMathPara xmlns:m="http://schemas.openxmlformats.org/officeDocument/2006/math">
-                    <m:oMathParaPr>
-                      <m:jc m:val="centerGroup"/>
-                    </m:oMathParaPr>
-                    <m:oMath xmlns:m="http://schemas.openxmlformats.org/officeDocument/2006/math">
-                      <m:f>
-                        <m:fPr>
-                          <m:ctrlPr>
-                            <a:rPr lang="es-MX" sz="1400" b="0" i="1" smtClean="0">
-                              <a:latin typeface="Cambria Math" panose="02040503050406030204" pitchFamily="18" charset="0"/>
-                            </a:rPr>
-                          </m:ctrlPr>
-                        </m:fPr>
-                        <m:num>
-                          <m:r>
-                            <a:rPr lang="es-MX" sz="1400" b="0" i="1" smtClean="0">
-                              <a:latin typeface="Cambria Math" panose="02040503050406030204" pitchFamily="18" charset="0"/>
-                            </a:rPr>
-                            <m:t>1</m:t>
-                          </m:r>
-                        </m:num>
-                        <m:den>
-                          <m:r>
-                            <a:rPr lang="es-MX" sz="1400" b="0" i="1" smtClean="0">
-                              <a:latin typeface="Cambria Math" panose="02040503050406030204" pitchFamily="18" charset="0"/>
-                            </a:rPr>
-                            <m:t>8</m:t>
-                          </m:r>
-                        </m:den>
-                      </m:f>
-                    </m:oMath>
-                  </m:oMathPara>
-                </a14:m>
-                <a:endParaRPr lang="es-MX" sz="1400" dirty="0">
-                  <a:latin typeface="Google Sans" pitchFamily="2" charset="0"/>
-                  <a:ea typeface="Google Sans" pitchFamily="2" charset="0"/>
-                  <a:cs typeface="Google Sans" pitchFamily="2" charset="0"/>
-                </a:endParaRPr>
-              </a:p>
-            </p:txBody>
-          </p:sp>
-        </mc:Choice>
-        <mc:Fallback>
-          <p:sp>
-            <p:nvSpPr>
-              <p:cNvPr id="43" name="CuadroTexto 42">
-                <a:extLst>
-                  <a:ext uri="{FF2B5EF4-FFF2-40B4-BE49-F238E27FC236}">
-                    <a16:creationId xmlns:a16="http://schemas.microsoft.com/office/drawing/2014/main" id="{815B751F-977C-9583-C574-FFB10E98907D}"/>
-                  </a:ext>
-                </a:extLst>
-              </p:cNvPr>
-              <p:cNvSpPr txBox="1">
-                <a:spLocks noRot="1" noChangeAspect="1" noMove="1" noResize="1" noEditPoints="1" noAdjustHandles="1" noChangeArrowheads="1" noChangeShapeType="1" noTextEdit="1"/>
-              </p:cNvSpPr>
-              <p:nvPr/>
-            </p:nvSpPr>
-            <p:spPr>
-              <a:xfrm>
-                <a:off x="2393745" y="4685602"/>
-                <a:ext cx="302967" cy="404726"/>
-              </a:xfrm>
-              <a:prstGeom prst="rect">
-                <a:avLst/>
-              </a:prstGeom>
-              <a:blipFill>
-                <a:blip r:embed="rId4"/>
-                <a:stretch>
-                  <a:fillRect t="-1515" b="-13636"/>
-                </a:stretch>
-              </a:blipFill>
-            </p:spPr>
-            <p:txBody>
-              <a:bodyPr/>
-              <a:lstStyle/>
-              <a:p>
-                <a:r>
-                  <a:rPr lang="es-MX">
-                    <a:noFill/>
-                  </a:rPr>
-                  <a:t> </a:t>
-                </a:r>
-              </a:p>
-            </p:txBody>
-          </p:sp>
-        </mc:Fallback>
-      </mc:AlternateContent>
-      <mc:AlternateContent xmlns:mc="http://schemas.openxmlformats.org/markup-compatibility/2006">
-        <mc:Choice xmlns:a14="http://schemas.microsoft.com/office/drawing/2010/main" Requires="a14">
-          <p:sp>
-            <p:nvSpPr>
-              <p:cNvPr id="45" name="CuadroTexto 44">
-                <a:extLst>
-                  <a:ext uri="{FF2B5EF4-FFF2-40B4-BE49-F238E27FC236}">
-                    <a16:creationId xmlns:a16="http://schemas.microsoft.com/office/drawing/2014/main" id="{16D88B1C-3659-A34B-8046-8366AAAF2B7C}"/>
-                  </a:ext>
-                </a:extLst>
-              </p:cNvPr>
-              <p:cNvSpPr txBox="1"/>
-              <p:nvPr/>
-            </p:nvSpPr>
-            <p:spPr>
-              <a:xfrm>
-                <a:off x="2393744" y="5212245"/>
-                <a:ext cx="302967" cy="404726"/>
-              </a:xfrm>
-              <a:prstGeom prst="rect">
-                <a:avLst/>
-              </a:prstGeom>
-              <a:noFill/>
-            </p:spPr>
-            <p:txBody>
-              <a:bodyPr wrap="square" lIns="0" tIns="0" rIns="0" bIns="0" rtlCol="0">
-                <a:spAutoFit/>
-              </a:bodyPr>
-              <a:lstStyle/>
-              <a:p>
-                <a:pPr/>
-                <a14:m>
-                  <m:oMathPara xmlns:m="http://schemas.openxmlformats.org/officeDocument/2006/math">
-                    <m:oMathParaPr>
-                      <m:jc m:val="centerGroup"/>
-                    </m:oMathParaPr>
-                    <m:oMath xmlns:m="http://schemas.openxmlformats.org/officeDocument/2006/math">
-                      <m:f>
-                        <m:fPr>
-                          <m:ctrlPr>
-                            <a:rPr lang="es-MX" sz="1400" b="0" i="1" smtClean="0">
-                              <a:latin typeface="Cambria Math" panose="02040503050406030204" pitchFamily="18" charset="0"/>
-                            </a:rPr>
-                          </m:ctrlPr>
-                        </m:fPr>
-                        <m:num>
-                          <m:r>
-                            <a:rPr lang="es-MX" sz="1400" b="0" i="1" smtClean="0">
-                              <a:latin typeface="Cambria Math" panose="02040503050406030204" pitchFamily="18" charset="0"/>
-                            </a:rPr>
-                            <m:t>1</m:t>
-                          </m:r>
-                        </m:num>
-                        <m:den>
-                          <m:r>
-                            <a:rPr lang="es-MX" sz="1400" b="0" i="1" smtClean="0">
-                              <a:latin typeface="Cambria Math" panose="02040503050406030204" pitchFamily="18" charset="0"/>
-                            </a:rPr>
-                            <m:t>8</m:t>
-                          </m:r>
-                        </m:den>
-                      </m:f>
-                    </m:oMath>
-                  </m:oMathPara>
-                </a14:m>
-                <a:endParaRPr lang="es-MX" sz="1400" dirty="0">
-                  <a:latin typeface="Google Sans" pitchFamily="2" charset="0"/>
-                  <a:ea typeface="Google Sans" pitchFamily="2" charset="0"/>
-                  <a:cs typeface="Google Sans" pitchFamily="2" charset="0"/>
-                </a:endParaRPr>
-              </a:p>
-            </p:txBody>
-          </p:sp>
-        </mc:Choice>
-        <mc:Fallback>
-          <p:sp>
-            <p:nvSpPr>
-              <p:cNvPr id="45" name="CuadroTexto 44">
-                <a:extLst>
-                  <a:ext uri="{FF2B5EF4-FFF2-40B4-BE49-F238E27FC236}">
-                    <a16:creationId xmlns:a16="http://schemas.microsoft.com/office/drawing/2014/main" id="{16D88B1C-3659-A34B-8046-8366AAAF2B7C}"/>
-                  </a:ext>
-                </a:extLst>
-              </p:cNvPr>
-              <p:cNvSpPr txBox="1">
-                <a:spLocks noRot="1" noChangeAspect="1" noMove="1" noResize="1" noEditPoints="1" noAdjustHandles="1" noChangeArrowheads="1" noChangeShapeType="1" noTextEdit="1"/>
-              </p:cNvSpPr>
-              <p:nvPr/>
-            </p:nvSpPr>
-            <p:spPr>
-              <a:xfrm>
-                <a:off x="2393744" y="5212245"/>
-                <a:ext cx="302967" cy="404726"/>
-              </a:xfrm>
-              <a:prstGeom prst="rect">
-                <a:avLst/>
-              </a:prstGeom>
-              <a:blipFill>
-                <a:blip r:embed="rId5"/>
-                <a:stretch>
-                  <a:fillRect b="-13636"/>
-                </a:stretch>
-              </a:blipFill>
-            </p:spPr>
-            <p:txBody>
-              <a:bodyPr/>
-              <a:lstStyle/>
-              <a:p>
-                <a:r>
-                  <a:rPr lang="es-MX">
-                    <a:noFill/>
-                  </a:rPr>
-                  <a:t> </a:t>
-                </a:r>
-              </a:p>
-            </p:txBody>
-          </p:sp>
-        </mc:Fallback>
-      </mc:AlternateContent>
-      <mc:AlternateContent xmlns:mc="http://schemas.openxmlformats.org/markup-compatibility/2006">
-        <mc:Choice xmlns:a14="http://schemas.microsoft.com/office/drawing/2010/main" Requires="a14">
-          <p:sp>
-            <p:nvSpPr>
-              <p:cNvPr id="47" name="CuadroTexto 46">
-                <a:extLst>
-                  <a:ext uri="{FF2B5EF4-FFF2-40B4-BE49-F238E27FC236}">
-                    <a16:creationId xmlns:a16="http://schemas.microsoft.com/office/drawing/2014/main" id="{893017E7-3AA0-4A05-FFDA-5D8AFB531A05}"/>
-                  </a:ext>
-                </a:extLst>
-              </p:cNvPr>
-              <p:cNvSpPr txBox="1"/>
-              <p:nvPr/>
-            </p:nvSpPr>
-            <p:spPr>
-              <a:xfrm>
-                <a:off x="2393743" y="5741670"/>
-                <a:ext cx="302967" cy="404726"/>
-              </a:xfrm>
-              <a:prstGeom prst="rect">
-                <a:avLst/>
-              </a:prstGeom>
-              <a:noFill/>
-            </p:spPr>
-            <p:txBody>
-              <a:bodyPr wrap="square" lIns="0" tIns="0" rIns="0" bIns="0" rtlCol="0">
-                <a:spAutoFit/>
-              </a:bodyPr>
-              <a:lstStyle/>
-              <a:p>
-                <a:pPr/>
-                <a14:m>
-                  <m:oMathPara xmlns:m="http://schemas.openxmlformats.org/officeDocument/2006/math">
-                    <m:oMathParaPr>
-                      <m:jc m:val="centerGroup"/>
-                    </m:oMathParaPr>
-                    <m:oMath xmlns:m="http://schemas.openxmlformats.org/officeDocument/2006/math">
-                      <m:f>
-                        <m:fPr>
-                          <m:ctrlPr>
-                            <a:rPr lang="es-MX" sz="1400" b="0" i="1" smtClean="0">
-                              <a:latin typeface="Cambria Math" panose="02040503050406030204" pitchFamily="18" charset="0"/>
-                            </a:rPr>
-                          </m:ctrlPr>
-                        </m:fPr>
-                        <m:num>
-                          <m:r>
-                            <a:rPr lang="es-MX" sz="1400" b="0" i="1" smtClean="0">
-                              <a:latin typeface="Cambria Math" panose="02040503050406030204" pitchFamily="18" charset="0"/>
-                            </a:rPr>
-                            <m:t>1</m:t>
-                          </m:r>
-                        </m:num>
-                        <m:den>
-                          <m:r>
-                            <a:rPr lang="es-MX" sz="1400" b="0" i="1" smtClean="0">
-                              <a:latin typeface="Cambria Math" panose="02040503050406030204" pitchFamily="18" charset="0"/>
-                            </a:rPr>
-                            <m:t>8</m:t>
-                          </m:r>
-                        </m:den>
-                      </m:f>
-                    </m:oMath>
-                  </m:oMathPara>
-                </a14:m>
-                <a:endParaRPr lang="es-MX" sz="1400" dirty="0">
-                  <a:latin typeface="Google Sans" pitchFamily="2" charset="0"/>
-                  <a:ea typeface="Google Sans" pitchFamily="2" charset="0"/>
-                  <a:cs typeface="Google Sans" pitchFamily="2" charset="0"/>
-                </a:endParaRPr>
-              </a:p>
-            </p:txBody>
-          </p:sp>
-        </mc:Choice>
-        <mc:Fallback>
-          <p:sp>
-            <p:nvSpPr>
-              <p:cNvPr id="47" name="CuadroTexto 46">
-                <a:extLst>
-                  <a:ext uri="{FF2B5EF4-FFF2-40B4-BE49-F238E27FC236}">
-                    <a16:creationId xmlns:a16="http://schemas.microsoft.com/office/drawing/2014/main" id="{893017E7-3AA0-4A05-FFDA-5D8AFB531A05}"/>
-                  </a:ext>
-                </a:extLst>
-              </p:cNvPr>
-              <p:cNvSpPr txBox="1">
-                <a:spLocks noRot="1" noChangeAspect="1" noMove="1" noResize="1" noEditPoints="1" noAdjustHandles="1" noChangeArrowheads="1" noChangeShapeType="1" noTextEdit="1"/>
-              </p:cNvSpPr>
-              <p:nvPr/>
-            </p:nvSpPr>
-            <p:spPr>
-              <a:xfrm>
-                <a:off x="2393743" y="5741670"/>
-                <a:ext cx="302967" cy="404726"/>
-              </a:xfrm>
-              <a:prstGeom prst="rect">
-                <a:avLst/>
-              </a:prstGeom>
-              <a:blipFill>
-                <a:blip r:embed="rId5"/>
-                <a:stretch>
-                  <a:fillRect b="-13636"/>
-                </a:stretch>
-              </a:blipFill>
-            </p:spPr>
-            <p:txBody>
-              <a:bodyPr/>
-              <a:lstStyle/>
-              <a:p>
-                <a:r>
-                  <a:rPr lang="es-MX">
-                    <a:noFill/>
-                  </a:rPr>
-                  <a:t> </a:t>
-                </a:r>
-              </a:p>
-            </p:txBody>
-          </p:sp>
-        </mc:Fallback>
-      </mc:AlternateContent>
-      <mc:AlternateContent xmlns:mc="http://schemas.openxmlformats.org/markup-compatibility/2006">
-        <mc:Choice xmlns:a14="http://schemas.microsoft.com/office/drawing/2010/main" Requires="a14">
-          <p:sp>
-            <p:nvSpPr>
-              <p:cNvPr id="50" name="CuadroTexto 49">
-                <a:extLst>
-                  <a:ext uri="{FF2B5EF4-FFF2-40B4-BE49-F238E27FC236}">
-                    <a16:creationId xmlns:a16="http://schemas.microsoft.com/office/drawing/2014/main" id="{1AF5B410-DB5A-44DA-6309-9B460EFB17C5}"/>
-                  </a:ext>
-                </a:extLst>
-              </p:cNvPr>
-              <p:cNvSpPr txBox="1"/>
-              <p:nvPr/>
-            </p:nvSpPr>
-            <p:spPr>
-              <a:xfrm>
-                <a:off x="2393742" y="6268313"/>
-                <a:ext cx="302967" cy="404726"/>
-              </a:xfrm>
-              <a:prstGeom prst="rect">
-                <a:avLst/>
-              </a:prstGeom>
-              <a:noFill/>
-            </p:spPr>
-            <p:txBody>
-              <a:bodyPr wrap="square" lIns="0" tIns="0" rIns="0" bIns="0" rtlCol="0">
-                <a:spAutoFit/>
-              </a:bodyPr>
-              <a:lstStyle/>
-              <a:p>
-                <a:pPr/>
-                <a14:m>
-                  <m:oMathPara xmlns:m="http://schemas.openxmlformats.org/officeDocument/2006/math">
-                    <m:oMathParaPr>
-                      <m:jc m:val="centerGroup"/>
-                    </m:oMathParaPr>
-                    <m:oMath xmlns:m="http://schemas.openxmlformats.org/officeDocument/2006/math">
-                      <m:f>
-                        <m:fPr>
-                          <m:ctrlPr>
-                            <a:rPr lang="es-MX" sz="1400" b="0" i="1" smtClean="0">
-                              <a:latin typeface="Cambria Math" panose="02040503050406030204" pitchFamily="18" charset="0"/>
-                            </a:rPr>
-                          </m:ctrlPr>
-                        </m:fPr>
-                        <m:num>
-                          <m:r>
-                            <a:rPr lang="es-MX" sz="1400" b="0" i="1" smtClean="0">
-                              <a:latin typeface="Cambria Math" panose="02040503050406030204" pitchFamily="18" charset="0"/>
-                            </a:rPr>
-                            <m:t>1</m:t>
-                          </m:r>
-                        </m:num>
-                        <m:den>
-                          <m:r>
-                            <a:rPr lang="es-MX" sz="1400" b="0" i="1" smtClean="0">
-                              <a:latin typeface="Cambria Math" panose="02040503050406030204" pitchFamily="18" charset="0"/>
-                            </a:rPr>
-                            <m:t>8</m:t>
-                          </m:r>
-                        </m:den>
-                      </m:f>
-                    </m:oMath>
-                  </m:oMathPara>
-                </a14:m>
-                <a:endParaRPr lang="es-MX" sz="1400" dirty="0">
-                  <a:latin typeface="Google Sans" pitchFamily="2" charset="0"/>
-                  <a:ea typeface="Google Sans" pitchFamily="2" charset="0"/>
-                  <a:cs typeface="Google Sans" pitchFamily="2" charset="0"/>
-                </a:endParaRPr>
-              </a:p>
-            </p:txBody>
-          </p:sp>
-        </mc:Choice>
-        <mc:Fallback>
-          <p:sp>
-            <p:nvSpPr>
-              <p:cNvPr id="50" name="CuadroTexto 49">
-                <a:extLst>
-                  <a:ext uri="{FF2B5EF4-FFF2-40B4-BE49-F238E27FC236}">
-                    <a16:creationId xmlns:a16="http://schemas.microsoft.com/office/drawing/2014/main" id="{1AF5B410-DB5A-44DA-6309-9B460EFB17C5}"/>
-                  </a:ext>
-                </a:extLst>
-              </p:cNvPr>
-              <p:cNvSpPr txBox="1">
-                <a:spLocks noRot="1" noChangeAspect="1" noMove="1" noResize="1" noEditPoints="1" noAdjustHandles="1" noChangeArrowheads="1" noChangeShapeType="1" noTextEdit="1"/>
-              </p:cNvSpPr>
-              <p:nvPr/>
-            </p:nvSpPr>
-            <p:spPr>
-              <a:xfrm>
-                <a:off x="2393742" y="6268313"/>
-                <a:ext cx="302967" cy="404726"/>
-              </a:xfrm>
-              <a:prstGeom prst="rect">
-                <a:avLst/>
-              </a:prstGeom>
-              <a:blipFill>
-                <a:blip r:embed="rId5"/>
-                <a:stretch>
-                  <a:fillRect b="-11940"/>
-                </a:stretch>
-              </a:blipFill>
-            </p:spPr>
-            <p:txBody>
-              <a:bodyPr/>
-              <a:lstStyle/>
-              <a:p>
-                <a:r>
-                  <a:rPr lang="es-MX">
-                    <a:noFill/>
-                  </a:rPr>
-                  <a:t> </a:t>
-                </a:r>
-              </a:p>
-            </p:txBody>
-          </p:sp>
-        </mc:Fallback>
-      </mc:AlternateContent>
       <p:sp>
         <p:nvSpPr>
-          <p:cNvPr id="52" name="CuadroTexto 51">
+          <p:cNvPr id="87" name="CuadroTexto 86">
             <a:extLst>
               <a:ext uri="{FF2B5EF4-FFF2-40B4-BE49-F238E27FC236}">
-                <a16:creationId xmlns:a16="http://schemas.microsoft.com/office/drawing/2014/main" id="{18154373-B9BB-6475-BF80-BC56606A7FEA}"/>
+                <a16:creationId xmlns:a16="http://schemas.microsoft.com/office/drawing/2014/main" id="{981EE2AB-197D-5B9A-719C-007D655DAE04}"/>
               </a:ext>
             </a:extLst>
           </p:cNvPr>
@@ -10669,39 +11770,192 @@
         </p:nvSpPr>
         <p:spPr>
           <a:xfrm>
-            <a:off x="1996735" y="2018614"/>
-            <a:ext cx="1112226" cy="307777"/>
+            <a:off x="7772400" y="3155214"/>
+            <a:ext cx="2201418" cy="467244"/>
           </a:xfrm>
           <a:prstGeom prst="rect">
             <a:avLst/>
           </a:prstGeom>
           <a:noFill/>
-          <a:ln w="38100">
-            <a:noFill/>
-          </a:ln>
         </p:spPr>
         <p:txBody>
-          <a:bodyPr wrap="square" rtlCol="0">
+          <a:bodyPr wrap="square">
             <a:spAutoFit/>
           </a:bodyPr>
           <a:lstStyle/>
           <a:p>
+            <a:pPr>
+              <a:lnSpc>
+                <a:spcPct val="150000"/>
+              </a:lnSpc>
+            </a:pPr>
             <a:r>
-              <a:rPr lang="es-MX" sz="1400" dirty="0" err="1">
+              <a:rPr lang="es-MX" sz="1800" b="1" dirty="0">
                 <a:latin typeface="Google Sans" pitchFamily="2" charset="0"/>
                 <a:ea typeface="Google Sans" pitchFamily="2" charset="0"/>
                 <a:cs typeface="Google Sans" pitchFamily="2" charset="0"/>
               </a:rPr>
-              <a:t>Probability</a:t>
+              <a:t>TKHNYCN   (0.03)</a:t>
             </a:r>
-            <a:endParaRPr lang="es-MX" sz="1400" dirty="0">
-              <a:latin typeface="Google Sans" pitchFamily="2" charset="0"/>
-              <a:ea typeface="Google Sans" pitchFamily="2" charset="0"/>
-              <a:cs typeface="Google Sans" pitchFamily="2" charset="0"/>
-            </a:endParaRPr>
           </a:p>
         </p:txBody>
       </p:sp>
+      <p:sp>
+        <p:nvSpPr>
+          <p:cNvPr id="90" name="CuadroTexto 89">
+            <a:extLst>
+              <a:ext uri="{FF2B5EF4-FFF2-40B4-BE49-F238E27FC236}">
+                <a16:creationId xmlns:a16="http://schemas.microsoft.com/office/drawing/2014/main" id="{2F854855-154A-8F58-78F8-99DFC8A19039}"/>
+              </a:ext>
+            </a:extLst>
+          </p:cNvPr>
+          <p:cNvSpPr txBox="1"/>
+          <p:nvPr/>
+        </p:nvSpPr>
+        <p:spPr>
+          <a:xfrm>
+            <a:off x="8505286" y="2687573"/>
+            <a:ext cx="1047907" cy="369332"/>
+          </a:xfrm>
+          <a:prstGeom prst="rect">
+            <a:avLst/>
+          </a:prstGeom>
+          <a:noFill/>
+        </p:spPr>
+        <p:txBody>
+          <a:bodyPr wrap="square">
+            <a:spAutoFit/>
+          </a:bodyPr>
+          <a:lstStyle/>
+          <a:p>
+            <a:r>
+              <a:rPr lang="es-MX" sz="1800" b="1" dirty="0">
+                <a:latin typeface="Google Sans" pitchFamily="2" charset="0"/>
+                <a:ea typeface="Google Sans" pitchFamily="2" charset="0"/>
+                <a:cs typeface="Google Sans" pitchFamily="2" charset="0"/>
+              </a:rPr>
+              <a:t>vs</a:t>
+            </a:r>
+            <a:endParaRPr lang="es-MX" dirty="0"/>
+          </a:p>
+        </p:txBody>
+      </p:sp>
+      <p:grpSp>
+        <p:nvGrpSpPr>
+          <p:cNvPr id="103" name="Grupo 102">
+            <a:extLst>
+              <a:ext uri="{FF2B5EF4-FFF2-40B4-BE49-F238E27FC236}">
+                <a16:creationId xmlns:a16="http://schemas.microsoft.com/office/drawing/2014/main" id="{A928E54E-473E-83EA-33F0-25A2533CF923}"/>
+              </a:ext>
+            </a:extLst>
+          </p:cNvPr>
+          <p:cNvGrpSpPr/>
+          <p:nvPr/>
+        </p:nvGrpSpPr>
+        <p:grpSpPr>
+          <a:xfrm>
+            <a:off x="8688166" y="3465804"/>
+            <a:ext cx="3486912" cy="3486912"/>
+            <a:chOff x="7044589" y="3536620"/>
+            <a:chExt cx="3486912" cy="3486912"/>
+          </a:xfrm>
+        </p:grpSpPr>
+        <p:pic>
+          <p:nvPicPr>
+            <p:cNvPr id="100" name="Gráfico 99" descr="Star con relleno sólido">
+              <a:extLst>
+                <a:ext uri="{FF2B5EF4-FFF2-40B4-BE49-F238E27FC236}">
+                  <a16:creationId xmlns:a16="http://schemas.microsoft.com/office/drawing/2014/main" id="{94697A5D-0F3A-F584-29F4-D92A1F1493B6}"/>
+                </a:ext>
+              </a:extLst>
+            </p:cNvPr>
+            <p:cNvPicPr>
+              <a:picLocks noChangeAspect="1"/>
+            </p:cNvPicPr>
+            <p:nvPr/>
+          </p:nvPicPr>
+          <p:blipFill>
+            <a:blip>
+              <a:extLst>
+                <a:ext uri="{96DAC541-7B7A-43D3-8B79-37D633B846F1}">
+                  <asvg:svgBlip xmlns:asvg="http://schemas.microsoft.com/office/drawing/2016/SVG/main" r:embed="rId8"/>
+                </a:ext>
+              </a:extLst>
+            </a:blip>
+            <a:stretch>
+              <a:fillRect/>
+            </a:stretch>
+          </p:blipFill>
+          <p:spPr>
+            <a:xfrm>
+              <a:off x="7044589" y="3536620"/>
+              <a:ext cx="3486912" cy="3486912"/>
+            </a:xfrm>
+            <a:prstGeom prst="rect">
+              <a:avLst/>
+            </a:prstGeom>
+          </p:spPr>
+        </p:pic>
+        <p:sp>
+          <p:nvSpPr>
+            <p:cNvPr id="98" name="CuadroTexto 97">
+              <a:extLst>
+                <a:ext uri="{FF2B5EF4-FFF2-40B4-BE49-F238E27FC236}">
+                  <a16:creationId xmlns:a16="http://schemas.microsoft.com/office/drawing/2014/main" id="{6D552397-5E7B-FEA5-2B57-B68C2995E5B9}"/>
+                </a:ext>
+              </a:extLst>
+            </p:cNvPr>
+            <p:cNvSpPr txBox="1"/>
+            <p:nvPr/>
+          </p:nvSpPr>
+          <p:spPr>
+            <a:xfrm>
+              <a:off x="7942225" y="4673487"/>
+              <a:ext cx="1691640" cy="1432187"/>
+            </a:xfrm>
+            <a:prstGeom prst="rect">
+              <a:avLst/>
+            </a:prstGeom>
+            <a:noFill/>
+          </p:spPr>
+          <p:txBody>
+            <a:bodyPr wrap="square">
+              <a:spAutoFit/>
+            </a:bodyPr>
+            <a:lstStyle/>
+            <a:p>
+              <a:pPr algn="ctr">
+                <a:lnSpc>
+                  <a:spcPct val="150000"/>
+                </a:lnSpc>
+              </a:pPr>
+              <a:r>
+                <a:rPr lang="es-MX" sz="2000" b="1" dirty="0">
+                  <a:latin typeface="Google Sans" pitchFamily="2" charset="0"/>
+                  <a:ea typeface="Google Sans" pitchFamily="2" charset="0"/>
+                  <a:cs typeface="Google Sans" pitchFamily="2" charset="0"/>
+                </a:rPr>
+                <a:t>WINNER</a:t>
+              </a:r>
+            </a:p>
+            <a:p>
+              <a:pPr algn="ctr">
+                <a:lnSpc>
+                  <a:spcPct val="150000"/>
+                </a:lnSpc>
+              </a:pPr>
+              <a:r>
+                <a:rPr lang="es-MX" sz="2000" b="1" dirty="0">
+                  <a:latin typeface="Google Sans" pitchFamily="2" charset="0"/>
+                  <a:ea typeface="Google Sans" pitchFamily="2" charset="0"/>
+                  <a:cs typeface="Google Sans" pitchFamily="2" charset="0"/>
+                </a:rPr>
+                <a:t>CQRRCEW   (0.12)</a:t>
+              </a:r>
+            </a:p>
+          </p:txBody>
+        </p:sp>
+      </p:grpSp>
     </p:spTree>
     <p:extLst>
       <p:ext uri="{BB962C8B-B14F-4D97-AF65-F5344CB8AC3E}">
@@ -11028,4 +12282,319 @@
     </a:ext>
   </a:extLst>
 </a:theme>
+</file>
+
+<file path=ppt/theme/theme2.xml><?xml version="1.0" encoding="utf-8"?>
+<a:theme xmlns:a="http://schemas.openxmlformats.org/drawingml/2006/main" name="Tema de Office">
+  <a:themeElements>
+    <a:clrScheme name="Office">
+      <a:dk1>
+        <a:sysClr val="windowText" lastClr="000000"/>
+      </a:dk1>
+      <a:lt1>
+        <a:sysClr val="window" lastClr="FFFFFF"/>
+      </a:lt1>
+      <a:dk2>
+        <a:srgbClr val="0E2841"/>
+      </a:dk2>
+      <a:lt2>
+        <a:srgbClr val="E8E8E8"/>
+      </a:lt2>
+      <a:accent1>
+        <a:srgbClr val="156082"/>
+      </a:accent1>
+      <a:accent2>
+        <a:srgbClr val="E97132"/>
+      </a:accent2>
+      <a:accent3>
+        <a:srgbClr val="196B24"/>
+      </a:accent3>
+      <a:accent4>
+        <a:srgbClr val="0F9ED5"/>
+      </a:accent4>
+      <a:accent5>
+        <a:srgbClr val="A02B93"/>
+      </a:accent5>
+      <a:accent6>
+        <a:srgbClr val="4EA72E"/>
+      </a:accent6>
+      <a:hlink>
+        <a:srgbClr val="467886"/>
+      </a:hlink>
+      <a:folHlink>
+        <a:srgbClr val="96607D"/>
+      </a:folHlink>
+    </a:clrScheme>
+    <a:fontScheme name="Office">
+      <a:majorFont>
+        <a:latin typeface="Aptos Display" panose="02110004020202020204"/>
+        <a:ea typeface=""/>
+        <a:cs typeface=""/>
+        <a:font script="Jpan" typeface="游ゴシック Light"/>
+        <a:font script="Hang" typeface="맑은 고딕"/>
+        <a:font script="Hans" typeface="等线 Light"/>
+        <a:font script="Hant" typeface="新細明體"/>
+        <a:font script="Arab" typeface="Times New Roman"/>
+        <a:font script="Hebr" typeface="Times New Roman"/>
+        <a:font script="Thai" typeface="Angsana New"/>
+        <a:font script="Ethi" typeface="Nyala"/>
+        <a:font script="Beng" typeface="Vrinda"/>
+        <a:font script="Gujr" typeface="Shruti"/>
+        <a:font script="Khmr" typeface="MoolBoran"/>
+        <a:font script="Knda" typeface="Tunga"/>
+        <a:font script="Guru" typeface="Raavi"/>
+        <a:font script="Cans" typeface="Euphemia"/>
+        <a:font script="Cher" typeface="Plantagenet Cherokee"/>
+        <a:font script="Yiii" typeface="Microsoft Yi Baiti"/>
+        <a:font script="Tibt" typeface="Microsoft Himalaya"/>
+        <a:font script="Thaa" typeface="MV Boli"/>
+        <a:font script="Deva" typeface="Mangal"/>
+        <a:font script="Telu" typeface="Gautami"/>
+        <a:font script="Taml" typeface="Latha"/>
+        <a:font script="Syrc" typeface="Estrangelo Edessa"/>
+        <a:font script="Orya" typeface="Kalinga"/>
+        <a:font script="Mlym" typeface="Kartika"/>
+        <a:font script="Laoo" typeface="DokChampa"/>
+        <a:font script="Sinh" typeface="Iskoola Pota"/>
+        <a:font script="Mong" typeface="Mongolian Baiti"/>
+        <a:font script="Viet" typeface="Times New Roman"/>
+        <a:font script="Uigh" typeface="Microsoft Uighur"/>
+        <a:font script="Geor" typeface="Sylfaen"/>
+        <a:font script="Armn" typeface="Arial"/>
+        <a:font script="Bugi" typeface="Leelawadee UI"/>
+        <a:font script="Bopo" typeface="Microsoft JhengHei"/>
+        <a:font script="Java" typeface="Javanese Text"/>
+        <a:font script="Lisu" typeface="Segoe UI"/>
+        <a:font script="Mymr" typeface="Myanmar Text"/>
+        <a:font script="Nkoo" typeface="Ebrima"/>
+        <a:font script="Olck" typeface="Nirmala UI"/>
+        <a:font script="Osma" typeface="Ebrima"/>
+        <a:font script="Phag" typeface="Phagspa"/>
+        <a:font script="Syrn" typeface="Estrangelo Edessa"/>
+        <a:font script="Syrj" typeface="Estrangelo Edessa"/>
+        <a:font script="Syre" typeface="Estrangelo Edessa"/>
+        <a:font script="Sora" typeface="Nirmala UI"/>
+        <a:font script="Tale" typeface="Microsoft Tai Le"/>
+        <a:font script="Talu" typeface="Microsoft New Tai Lue"/>
+        <a:font script="Tfng" typeface="Ebrima"/>
+      </a:majorFont>
+      <a:minorFont>
+        <a:latin typeface="Aptos" panose="02110004020202020204"/>
+        <a:ea typeface=""/>
+        <a:cs typeface=""/>
+        <a:font script="Jpan" typeface="游ゴシック"/>
+        <a:font script="Hang" typeface="맑은 고딕"/>
+        <a:font script="Hans" typeface="等线"/>
+        <a:font script="Hant" typeface="新細明體"/>
+        <a:font script="Arab" typeface="Arial"/>
+        <a:font script="Hebr" typeface="Arial"/>
+        <a:font script="Thai" typeface="Cordia New"/>
+        <a:font script="Ethi" typeface="Nyala"/>
+        <a:font script="Beng" typeface="Vrinda"/>
+        <a:font script="Gujr" typeface="Shruti"/>
+        <a:font script="Khmr" typeface="DaunPenh"/>
+        <a:font script="Knda" typeface="Tunga"/>
+        <a:font script="Guru" typeface="Raavi"/>
+        <a:font script="Cans" typeface="Euphemia"/>
+        <a:font script="Cher" typeface="Plantagenet Cherokee"/>
+        <a:font script="Yiii" typeface="Microsoft Yi Baiti"/>
+        <a:font script="Tibt" typeface="Microsoft Himalaya"/>
+        <a:font script="Thaa" typeface="MV Boli"/>
+        <a:font script="Deva" typeface="Mangal"/>
+        <a:font script="Telu" typeface="Gautami"/>
+        <a:font script="Taml" typeface="Latha"/>
+        <a:font script="Syrc" typeface="Estrangelo Edessa"/>
+        <a:font script="Orya" typeface="Kalinga"/>
+        <a:font script="Mlym" typeface="Kartika"/>
+        <a:font script="Laoo" typeface="DokChampa"/>
+        <a:font script="Sinh" typeface="Iskoola Pota"/>
+        <a:font script="Mong" typeface="Mongolian Baiti"/>
+        <a:font script="Viet" typeface="Arial"/>
+        <a:font script="Uigh" typeface="Microsoft Uighur"/>
+        <a:font script="Geor" typeface="Sylfaen"/>
+        <a:font script="Armn" typeface="Arial"/>
+        <a:font script="Bugi" typeface="Leelawadee UI"/>
+        <a:font script="Bopo" typeface="Microsoft JhengHei"/>
+        <a:font script="Java" typeface="Javanese Text"/>
+        <a:font script="Lisu" typeface="Segoe UI"/>
+        <a:font script="Mymr" typeface="Myanmar Text"/>
+        <a:font script="Nkoo" typeface="Ebrima"/>
+        <a:font script="Olck" typeface="Nirmala UI"/>
+        <a:font script="Osma" typeface="Ebrima"/>
+        <a:font script="Phag" typeface="Phagspa"/>
+        <a:font script="Syrn" typeface="Estrangelo Edessa"/>
+        <a:font script="Syrj" typeface="Estrangelo Edessa"/>
+        <a:font script="Syre" typeface="Estrangelo Edessa"/>
+        <a:font script="Sora" typeface="Nirmala UI"/>
+        <a:font script="Tale" typeface="Microsoft Tai Le"/>
+        <a:font script="Talu" typeface="Microsoft New Tai Lue"/>
+        <a:font script="Tfng" typeface="Ebrima"/>
+      </a:minorFont>
+    </a:fontScheme>
+    <a:fmtScheme name="Office">
+      <a:fillStyleLst>
+        <a:solidFill>
+          <a:schemeClr val="phClr"/>
+        </a:solidFill>
+        <a:gradFill rotWithShape="1">
+          <a:gsLst>
+            <a:gs pos="0">
+              <a:schemeClr val="phClr">
+                <a:lumMod val="110000"/>
+                <a:satMod val="105000"/>
+                <a:tint val="67000"/>
+              </a:schemeClr>
+            </a:gs>
+            <a:gs pos="50000">
+              <a:schemeClr val="phClr">
+                <a:lumMod val="105000"/>
+                <a:satMod val="103000"/>
+                <a:tint val="73000"/>
+              </a:schemeClr>
+            </a:gs>
+            <a:gs pos="100000">
+              <a:schemeClr val="phClr">
+                <a:lumMod val="105000"/>
+                <a:satMod val="109000"/>
+                <a:tint val="81000"/>
+              </a:schemeClr>
+            </a:gs>
+          </a:gsLst>
+          <a:lin ang="5400000" scaled="0"/>
+        </a:gradFill>
+        <a:gradFill rotWithShape="1">
+          <a:gsLst>
+            <a:gs pos="0">
+              <a:schemeClr val="phClr">
+                <a:satMod val="103000"/>
+                <a:lumMod val="102000"/>
+                <a:tint val="94000"/>
+              </a:schemeClr>
+            </a:gs>
+            <a:gs pos="50000">
+              <a:schemeClr val="phClr">
+                <a:satMod val="110000"/>
+                <a:lumMod val="100000"/>
+                <a:shade val="100000"/>
+              </a:schemeClr>
+            </a:gs>
+            <a:gs pos="100000">
+              <a:schemeClr val="phClr">
+                <a:lumMod val="99000"/>
+                <a:satMod val="120000"/>
+                <a:shade val="78000"/>
+              </a:schemeClr>
+            </a:gs>
+          </a:gsLst>
+          <a:lin ang="5400000" scaled="0"/>
+        </a:gradFill>
+      </a:fillStyleLst>
+      <a:lnStyleLst>
+        <a:ln w="12700" cap="flat" cmpd="sng" algn="ctr">
+          <a:solidFill>
+            <a:schemeClr val="phClr"/>
+          </a:solidFill>
+          <a:prstDash val="solid"/>
+          <a:miter lim="800000"/>
+        </a:ln>
+        <a:ln w="19050" cap="flat" cmpd="sng" algn="ctr">
+          <a:solidFill>
+            <a:schemeClr val="phClr"/>
+          </a:solidFill>
+          <a:prstDash val="solid"/>
+          <a:miter lim="800000"/>
+        </a:ln>
+        <a:ln w="25400" cap="flat" cmpd="sng" algn="ctr">
+          <a:solidFill>
+            <a:schemeClr val="phClr"/>
+          </a:solidFill>
+          <a:prstDash val="solid"/>
+          <a:miter lim="800000"/>
+        </a:ln>
+      </a:lnStyleLst>
+      <a:effectStyleLst>
+        <a:effectStyle>
+          <a:effectLst/>
+        </a:effectStyle>
+        <a:effectStyle>
+          <a:effectLst/>
+        </a:effectStyle>
+        <a:effectStyle>
+          <a:effectLst>
+            <a:outerShdw blurRad="57150" dist="19050" dir="5400000" algn="ctr" rotWithShape="0">
+              <a:srgbClr val="000000">
+                <a:alpha val="63000"/>
+              </a:srgbClr>
+            </a:outerShdw>
+          </a:effectLst>
+        </a:effectStyle>
+      </a:effectStyleLst>
+      <a:bgFillStyleLst>
+        <a:solidFill>
+          <a:schemeClr val="phClr"/>
+        </a:solidFill>
+        <a:solidFill>
+          <a:schemeClr val="phClr">
+            <a:tint val="95000"/>
+            <a:satMod val="170000"/>
+          </a:schemeClr>
+        </a:solidFill>
+        <a:gradFill rotWithShape="1">
+          <a:gsLst>
+            <a:gs pos="0">
+              <a:schemeClr val="phClr">
+                <a:tint val="93000"/>
+                <a:satMod val="150000"/>
+                <a:shade val="98000"/>
+                <a:lumMod val="102000"/>
+              </a:schemeClr>
+            </a:gs>
+            <a:gs pos="50000">
+              <a:schemeClr val="phClr">
+                <a:tint val="98000"/>
+                <a:satMod val="130000"/>
+                <a:shade val="90000"/>
+                <a:lumMod val="103000"/>
+              </a:schemeClr>
+            </a:gs>
+            <a:gs pos="100000">
+              <a:schemeClr val="phClr">
+                <a:shade val="63000"/>
+                <a:satMod val="120000"/>
+              </a:schemeClr>
+            </a:gs>
+          </a:gsLst>
+          <a:lin ang="5400000" scaled="0"/>
+        </a:gradFill>
+      </a:bgFillStyleLst>
+    </a:fmtScheme>
+  </a:themeElements>
+  <a:objectDefaults>
+    <a:lnDef>
+      <a:spPr/>
+      <a:bodyPr/>
+      <a:lstStyle/>
+      <a:style>
+        <a:lnRef idx="2">
+          <a:schemeClr val="accent1"/>
+        </a:lnRef>
+        <a:fillRef idx="0">
+          <a:schemeClr val="accent1"/>
+        </a:fillRef>
+        <a:effectRef idx="1">
+          <a:schemeClr val="accent1"/>
+        </a:effectRef>
+        <a:fontRef idx="minor">
+          <a:schemeClr val="tx1"/>
+        </a:fontRef>
+      </a:style>
+    </a:lnDef>
+  </a:objectDefaults>
+  <a:extraClrSchemeLst/>
+  <a:extLst>
+    <a:ext uri="{05A4C25C-085E-4340-85A3-A5531E510DB2}">
+      <thm15:themeFamily xmlns:thm15="http://schemas.microsoft.com/office/thememl/2012/main" name="Office Theme" id="{2E142A2C-CD16-42D6-873A-C26D2A0506FA}" vid="{1BDDFF52-6CD6-40A5-AB3C-68EB2F1E4D0A}"/>
+    </a:ext>
+  </a:extLst>
+</a:theme>
 </file>
--- a/genetic.pptx
+++ b/genetic.pptx
@@ -5,12 +5,13 @@
     <p:sldMasterId id="2147483648" r:id="rId1"/>
   </p:sldMasterIdLst>
   <p:notesMasterIdLst>
-    <p:notesMasterId r:id="rId5"/>
+    <p:notesMasterId r:id="rId6"/>
   </p:notesMasterIdLst>
   <p:sldIdLst>
     <p:sldId id="257" r:id="rId2"/>
     <p:sldId id="258" r:id="rId3"/>
     <p:sldId id="259" r:id="rId4"/>
+    <p:sldId id="260" r:id="rId5"/>
   </p:sldIdLst>
   <p:sldSz cx="12192000" cy="6858000"/>
   <p:notesSz cx="6858000" cy="9144000"/>
@@ -11969,6 +11970,2127 @@
 </p:sld>
 </file>
 
+<file path=ppt/slides/slide4.xml><?xml version="1.0" encoding="utf-8"?>
+<p:sld xmlns:a="http://schemas.openxmlformats.org/drawingml/2006/main" xmlns:r="http://schemas.openxmlformats.org/officeDocument/2006/relationships" xmlns:p="http://schemas.openxmlformats.org/presentationml/2006/main">
+  <p:cSld>
+    <p:spTree>
+      <p:nvGrpSpPr>
+        <p:cNvPr id="1" name="">
+          <a:extLst>
+            <a:ext uri="{FF2B5EF4-FFF2-40B4-BE49-F238E27FC236}">
+              <a16:creationId xmlns:a16="http://schemas.microsoft.com/office/drawing/2014/main" id="{7081DFC9-B4A2-AD6B-D532-6F9612F0D60C}"/>
+            </a:ext>
+          </a:extLst>
+        </p:cNvPr>
+        <p:cNvGrpSpPr/>
+        <p:nvPr/>
+      </p:nvGrpSpPr>
+      <p:grpSpPr>
+        <a:xfrm>
+          <a:off x="0" y="0"/>
+          <a:ext cx="0" cy="0"/>
+          <a:chOff x="0" y="0"/>
+          <a:chExt cx="0" cy="0"/>
+        </a:xfrm>
+      </p:grpSpPr>
+      <p:grpSp>
+        <p:nvGrpSpPr>
+          <p:cNvPr id="17" name="Grupo 16">
+            <a:extLst>
+              <a:ext uri="{FF2B5EF4-FFF2-40B4-BE49-F238E27FC236}">
+                <a16:creationId xmlns:a16="http://schemas.microsoft.com/office/drawing/2014/main" id="{761CCACB-D011-7823-52C4-16F4596CC7B9}"/>
+              </a:ext>
+            </a:extLst>
+          </p:cNvPr>
+          <p:cNvGrpSpPr/>
+          <p:nvPr/>
+        </p:nvGrpSpPr>
+        <p:grpSpPr>
+          <a:xfrm>
+            <a:off x="1986499" y="235799"/>
+            <a:ext cx="2101472" cy="923330"/>
+            <a:chOff x="1007488" y="382104"/>
+            <a:chExt cx="2707622" cy="1337081"/>
+          </a:xfrm>
+        </p:grpSpPr>
+        <p:pic>
+          <p:nvPicPr>
+            <p:cNvPr id="5" name="Imagen 4">
+              <a:extLst>
+                <a:ext uri="{FF2B5EF4-FFF2-40B4-BE49-F238E27FC236}">
+                  <a16:creationId xmlns:a16="http://schemas.microsoft.com/office/drawing/2014/main" id="{5D451D7B-2318-04DC-9595-4BEE6A03CD82}"/>
+                </a:ext>
+              </a:extLst>
+            </p:cNvPr>
+            <p:cNvPicPr>
+              <a:picLocks noChangeAspect="1"/>
+            </p:cNvPicPr>
+            <p:nvPr/>
+          </p:nvPicPr>
+          <p:blipFill>
+            <a:blip r:embed="rId2">
+              <a:extLst>
+                <a:ext uri="{28A0092B-C50C-407E-A947-70E740481C1C}">
+                  <a14:useLocalDpi xmlns:a14="http://schemas.microsoft.com/office/drawing/2010/main" val="0"/>
+                </a:ext>
+              </a:extLst>
+            </a:blip>
+            <a:stretch>
+              <a:fillRect/>
+            </a:stretch>
+          </p:blipFill>
+          <p:spPr>
+            <a:xfrm>
+              <a:off x="1007488" y="447505"/>
+              <a:ext cx="956674" cy="1123764"/>
+            </a:xfrm>
+            <a:prstGeom prst="rect">
+              <a:avLst/>
+            </a:prstGeom>
+          </p:spPr>
+        </p:pic>
+        <p:pic>
+          <p:nvPicPr>
+            <p:cNvPr id="3" name="Imagen 2">
+              <a:extLst>
+                <a:ext uri="{FF2B5EF4-FFF2-40B4-BE49-F238E27FC236}">
+                  <a16:creationId xmlns:a16="http://schemas.microsoft.com/office/drawing/2014/main" id="{D0875CB1-E964-A327-CE87-222ED3F9A69C}"/>
+                </a:ext>
+              </a:extLst>
+            </p:cNvPr>
+            <p:cNvPicPr>
+              <a:picLocks noChangeAspect="1"/>
+            </p:cNvPicPr>
+            <p:nvPr/>
+          </p:nvPicPr>
+          <p:blipFill>
+            <a:blip r:embed="rId3"/>
+            <a:stretch>
+              <a:fillRect/>
+            </a:stretch>
+          </p:blipFill>
+          <p:spPr>
+            <a:xfrm>
+              <a:off x="2881975" y="382104"/>
+              <a:ext cx="833135" cy="1123764"/>
+            </a:xfrm>
+            <a:prstGeom prst="rect">
+              <a:avLst/>
+            </a:prstGeom>
+          </p:spPr>
+        </p:pic>
+        <p:sp>
+          <p:nvSpPr>
+            <p:cNvPr id="6" name="CuadroTexto 5">
+              <a:extLst>
+                <a:ext uri="{FF2B5EF4-FFF2-40B4-BE49-F238E27FC236}">
+                  <a16:creationId xmlns:a16="http://schemas.microsoft.com/office/drawing/2014/main" id="{C9DD9E61-FDF2-5264-8133-FB34C8252492}"/>
+                </a:ext>
+              </a:extLst>
+            </p:cNvPr>
+            <p:cNvSpPr txBox="1"/>
+            <p:nvPr/>
+          </p:nvSpPr>
+          <p:spPr>
+            <a:xfrm flipH="1">
+              <a:off x="2057398" y="382104"/>
+              <a:ext cx="1024129" cy="1337081"/>
+            </a:xfrm>
+            <a:prstGeom prst="rect">
+              <a:avLst/>
+            </a:prstGeom>
+            <a:noFill/>
+          </p:spPr>
+          <p:txBody>
+            <a:bodyPr wrap="square" rtlCol="0">
+              <a:spAutoFit/>
+            </a:bodyPr>
+            <a:lstStyle/>
+            <a:p>
+              <a:r>
+                <a:rPr lang="es-MX" sz="5400" dirty="0"/>
+                <a:t>+</a:t>
+              </a:r>
+              <a:endParaRPr lang="es-MX" sz="1200" dirty="0"/>
+            </a:p>
+          </p:txBody>
+        </p:sp>
+      </p:grpSp>
+      <p:grpSp>
+        <p:nvGrpSpPr>
+          <p:cNvPr id="16" name="Grupo 15">
+            <a:extLst>
+              <a:ext uri="{FF2B5EF4-FFF2-40B4-BE49-F238E27FC236}">
+                <a16:creationId xmlns:a16="http://schemas.microsoft.com/office/drawing/2014/main" id="{1D1833B8-2FA1-5273-784C-9C910799A7CC}"/>
+              </a:ext>
+            </a:extLst>
+          </p:cNvPr>
+          <p:cNvGrpSpPr/>
+          <p:nvPr/>
+        </p:nvGrpSpPr>
+        <p:grpSpPr>
+          <a:xfrm>
+            <a:off x="7791822" y="162145"/>
+            <a:ext cx="2084045" cy="923330"/>
+            <a:chOff x="7426979" y="370940"/>
+            <a:chExt cx="2707622" cy="1200327"/>
+          </a:xfrm>
+        </p:grpSpPr>
+        <p:pic>
+          <p:nvPicPr>
+            <p:cNvPr id="8" name="Imagen 7">
+              <a:extLst>
+                <a:ext uri="{FF2B5EF4-FFF2-40B4-BE49-F238E27FC236}">
+                  <a16:creationId xmlns:a16="http://schemas.microsoft.com/office/drawing/2014/main" id="{D038BB3C-F1EE-0BCC-699D-2530F7AB7A3D}"/>
+                </a:ext>
+              </a:extLst>
+            </p:cNvPr>
+            <p:cNvPicPr>
+              <a:picLocks noChangeAspect="1"/>
+            </p:cNvPicPr>
+            <p:nvPr/>
+          </p:nvPicPr>
+          <p:blipFill>
+            <a:blip r:embed="rId3"/>
+            <a:stretch>
+              <a:fillRect/>
+            </a:stretch>
+          </p:blipFill>
+          <p:spPr>
+            <a:xfrm>
+              <a:off x="9301466" y="370940"/>
+              <a:ext cx="833135" cy="1123764"/>
+            </a:xfrm>
+            <a:prstGeom prst="rect">
+              <a:avLst/>
+            </a:prstGeom>
+          </p:spPr>
+        </p:pic>
+        <p:pic>
+          <p:nvPicPr>
+            <p:cNvPr id="10" name="Imagen 9">
+              <a:extLst>
+                <a:ext uri="{FF2B5EF4-FFF2-40B4-BE49-F238E27FC236}">
+                  <a16:creationId xmlns:a16="http://schemas.microsoft.com/office/drawing/2014/main" id="{365F01D5-2525-C5F0-F1CE-74580156B466}"/>
+                </a:ext>
+              </a:extLst>
+            </p:cNvPr>
+            <p:cNvPicPr>
+              <a:picLocks noChangeAspect="1"/>
+            </p:cNvPicPr>
+            <p:nvPr/>
+          </p:nvPicPr>
+          <p:blipFill>
+            <a:blip r:embed="rId2">
+              <a:extLst>
+                <a:ext uri="{28A0092B-C50C-407E-A947-70E740481C1C}">
+                  <a14:useLocalDpi xmlns:a14="http://schemas.microsoft.com/office/drawing/2010/main" val="0"/>
+                </a:ext>
+              </a:extLst>
+            </a:blip>
+            <a:stretch>
+              <a:fillRect/>
+            </a:stretch>
+          </p:blipFill>
+          <p:spPr>
+            <a:xfrm>
+              <a:off x="7426979" y="436341"/>
+              <a:ext cx="956674" cy="1123764"/>
+            </a:xfrm>
+            <a:prstGeom prst="rect">
+              <a:avLst/>
+            </a:prstGeom>
+          </p:spPr>
+        </p:pic>
+        <p:sp>
+          <p:nvSpPr>
+            <p:cNvPr id="13" name="CuadroTexto 12">
+              <a:extLst>
+                <a:ext uri="{FF2B5EF4-FFF2-40B4-BE49-F238E27FC236}">
+                  <a16:creationId xmlns:a16="http://schemas.microsoft.com/office/drawing/2014/main" id="{6416CEE3-ABD7-92EB-26BA-EF5E135037F4}"/>
+                </a:ext>
+              </a:extLst>
+            </p:cNvPr>
+            <p:cNvSpPr txBox="1"/>
+            <p:nvPr/>
+          </p:nvSpPr>
+          <p:spPr>
+            <a:xfrm flipH="1">
+              <a:off x="8476890" y="370940"/>
+              <a:ext cx="1024129" cy="1200327"/>
+            </a:xfrm>
+            <a:prstGeom prst="rect">
+              <a:avLst/>
+            </a:prstGeom>
+            <a:noFill/>
+          </p:spPr>
+          <p:txBody>
+            <a:bodyPr wrap="square" rtlCol="0">
+              <a:spAutoFit/>
+            </a:bodyPr>
+            <a:lstStyle/>
+            <a:p>
+              <a:r>
+                <a:rPr lang="es-MX" sz="5400" dirty="0"/>
+                <a:t>,</a:t>
+              </a:r>
+              <a:endParaRPr lang="es-MX" sz="1200" dirty="0"/>
+            </a:p>
+          </p:txBody>
+        </p:sp>
+      </p:grpSp>
+      <p:grpSp>
+        <p:nvGrpSpPr>
+          <p:cNvPr id="37" name="Grupo 36">
+            <a:extLst>
+              <a:ext uri="{FF2B5EF4-FFF2-40B4-BE49-F238E27FC236}">
+                <a16:creationId xmlns:a16="http://schemas.microsoft.com/office/drawing/2014/main" id="{7DD1A837-72F0-CAC2-D32D-8174311C21D8}"/>
+              </a:ext>
+            </a:extLst>
+          </p:cNvPr>
+          <p:cNvGrpSpPr/>
+          <p:nvPr/>
+        </p:nvGrpSpPr>
+        <p:grpSpPr>
+          <a:xfrm>
+            <a:off x="998941" y="1524983"/>
+            <a:ext cx="4187525" cy="2492734"/>
+            <a:chOff x="899531" y="1779610"/>
+            <a:chExt cx="4187525" cy="2492734"/>
+          </a:xfrm>
+        </p:grpSpPr>
+        <p:sp>
+          <p:nvSpPr>
+            <p:cNvPr id="19" name="CuadroTexto 18">
+              <a:extLst>
+                <a:ext uri="{FF2B5EF4-FFF2-40B4-BE49-F238E27FC236}">
+                  <a16:creationId xmlns:a16="http://schemas.microsoft.com/office/drawing/2014/main" id="{BE0E7A92-E95F-7DA3-6789-71B7F6A00B7F}"/>
+                </a:ext>
+              </a:extLst>
+            </p:cNvPr>
+            <p:cNvSpPr txBox="1"/>
+            <p:nvPr/>
+          </p:nvSpPr>
+          <p:spPr>
+            <a:xfrm>
+              <a:off x="899531" y="1779610"/>
+              <a:ext cx="2038294" cy="2492414"/>
+            </a:xfrm>
+            <a:prstGeom prst="rect">
+              <a:avLst/>
+            </a:prstGeom>
+            <a:noFill/>
+            <a:ln w="38100">
+              <a:noFill/>
+            </a:ln>
+          </p:spPr>
+          <p:txBody>
+            <a:bodyPr wrap="square" rtlCol="0">
+              <a:spAutoFit/>
+            </a:bodyPr>
+            <a:lstStyle/>
+            <a:p>
+              <a:pPr>
+                <a:lnSpc>
+                  <a:spcPct val="150000"/>
+                </a:lnSpc>
+              </a:pPr>
+              <a:r>
+                <a:rPr lang="es-MX" sz="1050" b="1" dirty="0">
+                  <a:solidFill>
+                    <a:srgbClr val="B2D838"/>
+                  </a:solidFill>
+                  <a:latin typeface="Google Sans" pitchFamily="2" charset="0"/>
+                  <a:ea typeface="Google Sans" pitchFamily="2" charset="0"/>
+                  <a:cs typeface="Google Sans" pitchFamily="2" charset="0"/>
+                </a:rPr>
+                <a:t>SRLNMHHVNNQD   (0.18)</a:t>
+              </a:r>
+            </a:p>
+            <a:p>
+              <a:pPr>
+                <a:lnSpc>
+                  <a:spcPct val="150000"/>
+                </a:lnSpc>
+              </a:pPr>
+              <a:r>
+                <a:rPr lang="es-MX" sz="1050" b="1" dirty="0">
+                  <a:solidFill>
+                    <a:srgbClr val="B2D838"/>
+                  </a:solidFill>
+                  <a:latin typeface="Google Sans" pitchFamily="2" charset="0"/>
+                  <a:ea typeface="Google Sans" pitchFamily="2" charset="0"/>
+                  <a:cs typeface="Google Sans" pitchFamily="2" charset="0"/>
+                </a:rPr>
+                <a:t>DEIFMSVMIHIK   (0.03)</a:t>
+              </a:r>
+            </a:p>
+            <a:p>
+              <a:pPr>
+                <a:lnSpc>
+                  <a:spcPct val="150000"/>
+                </a:lnSpc>
+              </a:pPr>
+              <a:r>
+                <a:rPr lang="es-MX" sz="1050" b="1" dirty="0">
+                  <a:solidFill>
+                    <a:srgbClr val="B2D838"/>
+                  </a:solidFill>
+                  <a:latin typeface="Google Sans" pitchFamily="2" charset="0"/>
+                  <a:ea typeface="Google Sans" pitchFamily="2" charset="0"/>
+                  <a:cs typeface="Google Sans" pitchFamily="2" charset="0"/>
+                </a:rPr>
+                <a:t>MDKSYDMGNKIA   (0.27)</a:t>
+              </a:r>
+            </a:p>
+            <a:p>
+              <a:pPr>
+                <a:lnSpc>
+                  <a:spcPct val="150000"/>
+                </a:lnSpc>
+              </a:pPr>
+              <a:r>
+                <a:rPr lang="es-MX" sz="1050" b="1" dirty="0">
+                  <a:solidFill>
+                    <a:srgbClr val="B2D838"/>
+                  </a:solidFill>
+                  <a:latin typeface="Google Sans" pitchFamily="2" charset="0"/>
+                  <a:ea typeface="Google Sans" pitchFamily="2" charset="0"/>
+                  <a:cs typeface="Google Sans" pitchFamily="2" charset="0"/>
+                </a:rPr>
+                <a:t>HIYRCIDRETGW   (0.11)</a:t>
+              </a:r>
+            </a:p>
+            <a:p>
+              <a:pPr>
+                <a:lnSpc>
+                  <a:spcPct val="150000"/>
+                </a:lnSpc>
+              </a:pPr>
+              <a:r>
+                <a:rPr lang="es-MX" sz="1050" b="1" dirty="0">
+                  <a:solidFill>
+                    <a:srgbClr val="B2D838"/>
+                  </a:solidFill>
+                  <a:latin typeface="Google Sans" pitchFamily="2" charset="0"/>
+                  <a:ea typeface="Google Sans" pitchFamily="2" charset="0"/>
+                  <a:cs typeface="Google Sans" pitchFamily="2" charset="0"/>
+                </a:rPr>
+                <a:t>TRIFKHAKPCMY   (0.64)</a:t>
+              </a:r>
+            </a:p>
+            <a:p>
+              <a:pPr>
+                <a:lnSpc>
+                  <a:spcPct val="150000"/>
+                </a:lnSpc>
+              </a:pPr>
+              <a:r>
+                <a:rPr lang="es-MX" sz="1050" b="1" dirty="0">
+                  <a:solidFill>
+                    <a:srgbClr val="B2D838"/>
+                  </a:solidFill>
+                  <a:latin typeface="Google Sans" pitchFamily="2" charset="0"/>
+                  <a:ea typeface="Google Sans" pitchFamily="2" charset="0"/>
+                  <a:cs typeface="Google Sans" pitchFamily="2" charset="0"/>
+                </a:rPr>
+                <a:t>QRHNGFWHADPP   (0.09)</a:t>
+              </a:r>
+            </a:p>
+            <a:p>
+              <a:pPr>
+                <a:lnSpc>
+                  <a:spcPct val="150000"/>
+                </a:lnSpc>
+              </a:pPr>
+              <a:r>
+                <a:rPr lang="es-MX" sz="1050" b="1" dirty="0">
+                  <a:solidFill>
+                    <a:srgbClr val="B2D838"/>
+                  </a:solidFill>
+                  <a:latin typeface="Google Sans" pitchFamily="2" charset="0"/>
+                  <a:ea typeface="Google Sans" pitchFamily="2" charset="0"/>
+                  <a:cs typeface="Google Sans" pitchFamily="2" charset="0"/>
+                </a:rPr>
+                <a:t>PMFGWFPGSWME   (0.22)</a:t>
+              </a:r>
+            </a:p>
+            <a:p>
+              <a:pPr>
+                <a:lnSpc>
+                  <a:spcPct val="150000"/>
+                </a:lnSpc>
+              </a:pPr>
+              <a:r>
+                <a:rPr lang="es-MX" sz="1050" b="1" dirty="0">
+                  <a:solidFill>
+                    <a:srgbClr val="B2D838"/>
+                  </a:solidFill>
+                  <a:latin typeface="Google Sans" pitchFamily="2" charset="0"/>
+                  <a:ea typeface="Google Sans" pitchFamily="2" charset="0"/>
+                  <a:cs typeface="Google Sans" pitchFamily="2" charset="0"/>
+                </a:rPr>
+                <a:t>ERQRLMSFQDHS   (0.05)</a:t>
+              </a:r>
+            </a:p>
+            <a:p>
+              <a:pPr>
+                <a:lnSpc>
+                  <a:spcPct val="150000"/>
+                </a:lnSpc>
+              </a:pPr>
+              <a:r>
+                <a:rPr lang="es-MX" sz="1050" b="1" dirty="0">
+                  <a:solidFill>
+                    <a:srgbClr val="B2D838"/>
+                  </a:solidFill>
+                  <a:latin typeface="Google Sans" pitchFamily="2" charset="0"/>
+                  <a:ea typeface="Google Sans" pitchFamily="2" charset="0"/>
+                  <a:cs typeface="Google Sans" pitchFamily="2" charset="0"/>
+                </a:rPr>
+                <a:t>LYVDTDQEKTDR   (0.31)</a:t>
+              </a:r>
+            </a:p>
+            <a:p>
+              <a:pPr>
+                <a:lnSpc>
+                  <a:spcPct val="150000"/>
+                </a:lnSpc>
+              </a:pPr>
+              <a:r>
+                <a:rPr lang="es-MX" sz="1050" b="1" dirty="0">
+                  <a:solidFill>
+                    <a:srgbClr val="B2D838"/>
+                  </a:solidFill>
+                  <a:latin typeface="Google Sans" pitchFamily="2" charset="0"/>
+                  <a:ea typeface="Google Sans" pitchFamily="2" charset="0"/>
+                  <a:cs typeface="Google Sans" pitchFamily="2" charset="0"/>
+                </a:rPr>
+                <a:t>FQDQPAYNRKRG   (0.14)</a:t>
+              </a:r>
+              <a:endParaRPr lang="es-MX" sz="1050" b="1" dirty="0">
+                <a:solidFill>
+                  <a:schemeClr val="accent6">
+                    <a:lumMod val="75000"/>
+                  </a:schemeClr>
+                </a:solidFill>
+                <a:latin typeface="Google Sans" pitchFamily="2" charset="0"/>
+                <a:ea typeface="Google Sans" pitchFamily="2" charset="0"/>
+                <a:cs typeface="Google Sans" pitchFamily="2" charset="0"/>
+              </a:endParaRPr>
+            </a:p>
+          </p:txBody>
+        </p:sp>
+        <p:sp>
+          <p:nvSpPr>
+            <p:cNvPr id="21" name="CuadroTexto 20">
+              <a:extLst>
+                <a:ext uri="{FF2B5EF4-FFF2-40B4-BE49-F238E27FC236}">
+                  <a16:creationId xmlns:a16="http://schemas.microsoft.com/office/drawing/2014/main" id="{D3F56B06-CA54-4C96-0D1E-78D8C8AA8EBC}"/>
+                </a:ext>
+              </a:extLst>
+            </p:cNvPr>
+            <p:cNvSpPr txBox="1"/>
+            <p:nvPr/>
+          </p:nvSpPr>
+          <p:spPr>
+            <a:xfrm>
+              <a:off x="3048762" y="1779610"/>
+              <a:ext cx="2038294" cy="2492734"/>
+            </a:xfrm>
+            <a:prstGeom prst="rect">
+              <a:avLst/>
+            </a:prstGeom>
+            <a:noFill/>
+          </p:spPr>
+          <p:txBody>
+            <a:bodyPr wrap="square">
+              <a:spAutoFit/>
+            </a:bodyPr>
+            <a:lstStyle/>
+            <a:p>
+              <a:pPr>
+                <a:lnSpc>
+                  <a:spcPct val="150000"/>
+                </a:lnSpc>
+              </a:pPr>
+              <a:r>
+                <a:rPr lang="es-MX" sz="1050" b="1" dirty="0">
+                  <a:solidFill>
+                    <a:schemeClr val="accent6">
+                      <a:lumMod val="75000"/>
+                    </a:schemeClr>
+                  </a:solidFill>
+                  <a:latin typeface="Google Sans" pitchFamily="2" charset="0"/>
+                  <a:ea typeface="Google Sans" pitchFamily="2" charset="0"/>
+                  <a:cs typeface="Google Sans" pitchFamily="2" charset="0"/>
+                </a:rPr>
+                <a:t>NMNEFIREAGML   (0.15)</a:t>
+              </a:r>
+            </a:p>
+            <a:p>
+              <a:pPr>
+                <a:lnSpc>
+                  <a:spcPct val="150000"/>
+                </a:lnSpc>
+              </a:pPr>
+              <a:r>
+                <a:rPr lang="es-MX" sz="1050" b="1" dirty="0">
+                  <a:solidFill>
+                    <a:schemeClr val="accent6">
+                      <a:lumMod val="75000"/>
+                    </a:schemeClr>
+                  </a:solidFill>
+                  <a:latin typeface="Google Sans" pitchFamily="2" charset="0"/>
+                  <a:ea typeface="Google Sans" pitchFamily="2" charset="0"/>
+                  <a:cs typeface="Google Sans" pitchFamily="2" charset="0"/>
+                </a:rPr>
+                <a:t>IIAWLMQLPGYI   (0.33)</a:t>
+              </a:r>
+            </a:p>
+            <a:p>
+              <a:pPr>
+                <a:lnSpc>
+                  <a:spcPct val="150000"/>
+                </a:lnSpc>
+              </a:pPr>
+              <a:r>
+                <a:rPr lang="es-MX" sz="1050" b="1" dirty="0">
+                  <a:solidFill>
+                    <a:schemeClr val="accent6">
+                      <a:lumMod val="75000"/>
+                    </a:schemeClr>
+                  </a:solidFill>
+                  <a:latin typeface="Google Sans" pitchFamily="2" charset="0"/>
+                  <a:ea typeface="Google Sans" pitchFamily="2" charset="0"/>
+                  <a:cs typeface="Google Sans" pitchFamily="2" charset="0"/>
+                </a:rPr>
+                <a:t>TRGSDIEICPQR   (0.08)</a:t>
+              </a:r>
+            </a:p>
+            <a:p>
+              <a:pPr>
+                <a:lnSpc>
+                  <a:spcPct val="150000"/>
+                </a:lnSpc>
+              </a:pPr>
+              <a:r>
+                <a:rPr lang="es-MX" sz="1050" b="1" dirty="0">
+                  <a:solidFill>
+                    <a:schemeClr val="accent6">
+                      <a:lumMod val="75000"/>
+                    </a:schemeClr>
+                  </a:solidFill>
+                  <a:latin typeface="Google Sans" pitchFamily="2" charset="0"/>
+                  <a:ea typeface="Google Sans" pitchFamily="2" charset="0"/>
+                  <a:cs typeface="Google Sans" pitchFamily="2" charset="0"/>
+                </a:rPr>
+                <a:t>ESANVTICPQTP   (0.24)</a:t>
+              </a:r>
+            </a:p>
+            <a:p>
+              <a:pPr>
+                <a:lnSpc>
+                  <a:spcPct val="150000"/>
+                </a:lnSpc>
+              </a:pPr>
+              <a:r>
+                <a:rPr lang="es-MX" sz="1050" b="1" dirty="0">
+                  <a:solidFill>
+                    <a:schemeClr val="accent6">
+                      <a:lumMod val="75000"/>
+                    </a:schemeClr>
+                  </a:solidFill>
+                  <a:latin typeface="Google Sans" pitchFamily="2" charset="0"/>
+                  <a:ea typeface="Google Sans" pitchFamily="2" charset="0"/>
+                  <a:cs typeface="Google Sans" pitchFamily="2" charset="0"/>
+                </a:rPr>
+                <a:t>WDIINCFVVYFL   (0.17)</a:t>
+              </a:r>
+            </a:p>
+            <a:p>
+              <a:pPr>
+                <a:lnSpc>
+                  <a:spcPct val="150000"/>
+                </a:lnSpc>
+              </a:pPr>
+              <a:r>
+                <a:rPr lang="es-MX" sz="1050" b="1" dirty="0">
+                  <a:solidFill>
+                    <a:schemeClr val="accent6">
+                      <a:lumMod val="75000"/>
+                    </a:schemeClr>
+                  </a:solidFill>
+                  <a:latin typeface="Google Sans" pitchFamily="2" charset="0"/>
+                  <a:ea typeface="Google Sans" pitchFamily="2" charset="0"/>
+                  <a:cs typeface="Google Sans" pitchFamily="2" charset="0"/>
+                </a:rPr>
+                <a:t>LSCKHNYWIGHF   (0.04)</a:t>
+              </a:r>
+            </a:p>
+            <a:p>
+              <a:pPr>
+                <a:lnSpc>
+                  <a:spcPct val="150000"/>
+                </a:lnSpc>
+              </a:pPr>
+              <a:r>
+                <a:rPr lang="es-MX" sz="1050" b="1" dirty="0">
+                  <a:solidFill>
+                    <a:schemeClr val="accent6">
+                      <a:lumMod val="75000"/>
+                    </a:schemeClr>
+                  </a:solidFill>
+                  <a:latin typeface="Google Sans" pitchFamily="2" charset="0"/>
+                  <a:ea typeface="Google Sans" pitchFamily="2" charset="0"/>
+                  <a:cs typeface="Google Sans" pitchFamily="2" charset="0"/>
+                </a:rPr>
+                <a:t>RMKMYCKLKLGQ   (0.29)</a:t>
+              </a:r>
+            </a:p>
+            <a:p>
+              <a:pPr>
+                <a:lnSpc>
+                  <a:spcPct val="150000"/>
+                </a:lnSpc>
+              </a:pPr>
+              <a:r>
+                <a:rPr lang="es-MX" sz="1050" b="1" dirty="0">
+                  <a:solidFill>
+                    <a:schemeClr val="accent6">
+                      <a:lumMod val="75000"/>
+                    </a:schemeClr>
+                  </a:solidFill>
+                  <a:latin typeface="Google Sans" pitchFamily="2" charset="0"/>
+                  <a:ea typeface="Google Sans" pitchFamily="2" charset="0"/>
+                  <a:cs typeface="Google Sans" pitchFamily="2" charset="0"/>
+                </a:rPr>
+                <a:t>GQHEKRCNAHHS   (0.13)</a:t>
+              </a:r>
+            </a:p>
+            <a:p>
+              <a:pPr>
+                <a:lnSpc>
+                  <a:spcPct val="150000"/>
+                </a:lnSpc>
+              </a:pPr>
+              <a:r>
+                <a:rPr lang="es-MX" sz="1050" b="1" dirty="0">
+                  <a:solidFill>
+                    <a:schemeClr val="accent6">
+                      <a:lumMod val="75000"/>
+                    </a:schemeClr>
+                  </a:solidFill>
+                  <a:latin typeface="Google Sans" pitchFamily="2" charset="0"/>
+                  <a:ea typeface="Google Sans" pitchFamily="2" charset="0"/>
+                  <a:cs typeface="Google Sans" pitchFamily="2" charset="0"/>
+                </a:rPr>
+                <a:t>AGQKAQDCRRPG   (0.09)</a:t>
+              </a:r>
+            </a:p>
+            <a:p>
+              <a:pPr>
+                <a:lnSpc>
+                  <a:spcPct val="150000"/>
+                </a:lnSpc>
+              </a:pPr>
+              <a:r>
+                <a:rPr lang="es-MX" sz="1050" b="1" dirty="0">
+                  <a:solidFill>
+                    <a:schemeClr val="accent6">
+                      <a:lumMod val="75000"/>
+                    </a:schemeClr>
+                  </a:solidFill>
+                  <a:latin typeface="Google Sans" pitchFamily="2" charset="0"/>
+                  <a:ea typeface="Google Sans" pitchFamily="2" charset="0"/>
+                  <a:cs typeface="Google Sans" pitchFamily="2" charset="0"/>
+                </a:rPr>
+                <a:t>DLCDEYHDTHRC   (0.36)</a:t>
+              </a:r>
+              <a:endParaRPr lang="es-MX" sz="1050" dirty="0"/>
+            </a:p>
+          </p:txBody>
+        </p:sp>
+      </p:grpSp>
+      <p:grpSp>
+        <p:nvGrpSpPr>
+          <p:cNvPr id="38" name="Grupo 37">
+            <a:extLst>
+              <a:ext uri="{FF2B5EF4-FFF2-40B4-BE49-F238E27FC236}">
+                <a16:creationId xmlns:a16="http://schemas.microsoft.com/office/drawing/2014/main" id="{1986167B-4A1D-A9DD-1C59-9B592AA5E5FD}"/>
+              </a:ext>
+            </a:extLst>
+          </p:cNvPr>
+          <p:cNvGrpSpPr/>
+          <p:nvPr/>
+        </p:nvGrpSpPr>
+        <p:grpSpPr>
+          <a:xfrm>
+            <a:off x="7005534" y="1491552"/>
+            <a:ext cx="4187525" cy="2492734"/>
+            <a:chOff x="6968099" y="1712554"/>
+            <a:chExt cx="4187525" cy="2492734"/>
+          </a:xfrm>
+        </p:grpSpPr>
+        <p:sp>
+          <p:nvSpPr>
+            <p:cNvPr id="23" name="CuadroTexto 22">
+              <a:extLst>
+                <a:ext uri="{FF2B5EF4-FFF2-40B4-BE49-F238E27FC236}">
+                  <a16:creationId xmlns:a16="http://schemas.microsoft.com/office/drawing/2014/main" id="{5AB2538E-A12F-4B8C-864C-3EC807A3238D}"/>
+                </a:ext>
+              </a:extLst>
+            </p:cNvPr>
+            <p:cNvSpPr txBox="1"/>
+            <p:nvPr/>
+          </p:nvSpPr>
+          <p:spPr>
+            <a:xfrm>
+              <a:off x="6968099" y="1712554"/>
+              <a:ext cx="2038294" cy="2492414"/>
+            </a:xfrm>
+            <a:prstGeom prst="rect">
+              <a:avLst/>
+            </a:prstGeom>
+            <a:noFill/>
+            <a:ln w="38100">
+              <a:noFill/>
+            </a:ln>
+          </p:spPr>
+          <p:txBody>
+            <a:bodyPr wrap="square" rtlCol="0">
+              <a:spAutoFit/>
+            </a:bodyPr>
+            <a:lstStyle/>
+            <a:p>
+              <a:pPr>
+                <a:lnSpc>
+                  <a:spcPct val="150000"/>
+                </a:lnSpc>
+              </a:pPr>
+              <a:r>
+                <a:rPr lang="es-MX" sz="1050" b="1" dirty="0">
+                  <a:solidFill>
+                    <a:srgbClr val="B2D838"/>
+                  </a:solidFill>
+                  <a:latin typeface="Google Sans" pitchFamily="2" charset="0"/>
+                  <a:ea typeface="Google Sans" pitchFamily="2" charset="0"/>
+                  <a:cs typeface="Google Sans" pitchFamily="2" charset="0"/>
+                </a:rPr>
+                <a:t>SRLNMHHVNNQD   (0.18)</a:t>
+              </a:r>
+            </a:p>
+            <a:p>
+              <a:pPr>
+                <a:lnSpc>
+                  <a:spcPct val="150000"/>
+                </a:lnSpc>
+              </a:pPr>
+              <a:r>
+                <a:rPr lang="es-MX" sz="1050" b="1" dirty="0">
+                  <a:solidFill>
+                    <a:srgbClr val="B2D838"/>
+                  </a:solidFill>
+                  <a:latin typeface="Google Sans" pitchFamily="2" charset="0"/>
+                  <a:ea typeface="Google Sans" pitchFamily="2" charset="0"/>
+                  <a:cs typeface="Google Sans" pitchFamily="2" charset="0"/>
+                </a:rPr>
+                <a:t>DEIFMSVMIHIK   (0.03)</a:t>
+              </a:r>
+            </a:p>
+            <a:p>
+              <a:pPr>
+                <a:lnSpc>
+                  <a:spcPct val="150000"/>
+                </a:lnSpc>
+              </a:pPr>
+              <a:r>
+                <a:rPr lang="es-MX" sz="1050" b="1" dirty="0">
+                  <a:solidFill>
+                    <a:srgbClr val="B2D838"/>
+                  </a:solidFill>
+                  <a:latin typeface="Google Sans" pitchFamily="2" charset="0"/>
+                  <a:ea typeface="Google Sans" pitchFamily="2" charset="0"/>
+                  <a:cs typeface="Google Sans" pitchFamily="2" charset="0"/>
+                </a:rPr>
+                <a:t>MDKSYDMGNKIA   (0.27)</a:t>
+              </a:r>
+            </a:p>
+            <a:p>
+              <a:pPr>
+                <a:lnSpc>
+                  <a:spcPct val="150000"/>
+                </a:lnSpc>
+              </a:pPr>
+              <a:r>
+                <a:rPr lang="es-MX" sz="1050" b="1" dirty="0">
+                  <a:solidFill>
+                    <a:srgbClr val="B2D838"/>
+                  </a:solidFill>
+                  <a:latin typeface="Google Sans" pitchFamily="2" charset="0"/>
+                  <a:ea typeface="Google Sans" pitchFamily="2" charset="0"/>
+                  <a:cs typeface="Google Sans" pitchFamily="2" charset="0"/>
+                </a:rPr>
+                <a:t>HIYRCIDRETGW   (0.11)</a:t>
+              </a:r>
+            </a:p>
+            <a:p>
+              <a:pPr>
+                <a:lnSpc>
+                  <a:spcPct val="150000"/>
+                </a:lnSpc>
+              </a:pPr>
+              <a:r>
+                <a:rPr lang="es-MX" sz="1050" b="1" dirty="0">
+                  <a:solidFill>
+                    <a:srgbClr val="B2D838"/>
+                  </a:solidFill>
+                  <a:latin typeface="Google Sans" pitchFamily="2" charset="0"/>
+                  <a:ea typeface="Google Sans" pitchFamily="2" charset="0"/>
+                  <a:cs typeface="Google Sans" pitchFamily="2" charset="0"/>
+                </a:rPr>
+                <a:t>TRIFKHAKPCMY   (0.64)</a:t>
+              </a:r>
+            </a:p>
+            <a:p>
+              <a:pPr>
+                <a:lnSpc>
+                  <a:spcPct val="150000"/>
+                </a:lnSpc>
+              </a:pPr>
+              <a:r>
+                <a:rPr lang="es-MX" sz="1050" b="1" dirty="0">
+                  <a:solidFill>
+                    <a:srgbClr val="B2D838"/>
+                  </a:solidFill>
+                  <a:latin typeface="Google Sans" pitchFamily="2" charset="0"/>
+                  <a:ea typeface="Google Sans" pitchFamily="2" charset="0"/>
+                  <a:cs typeface="Google Sans" pitchFamily="2" charset="0"/>
+                </a:rPr>
+                <a:t>QRHNGFWHADPP   (0.09)</a:t>
+              </a:r>
+            </a:p>
+            <a:p>
+              <a:pPr>
+                <a:lnSpc>
+                  <a:spcPct val="150000"/>
+                </a:lnSpc>
+              </a:pPr>
+              <a:r>
+                <a:rPr lang="es-MX" sz="1050" b="1" dirty="0">
+                  <a:solidFill>
+                    <a:srgbClr val="B2D838"/>
+                  </a:solidFill>
+                  <a:latin typeface="Google Sans" pitchFamily="2" charset="0"/>
+                  <a:ea typeface="Google Sans" pitchFamily="2" charset="0"/>
+                  <a:cs typeface="Google Sans" pitchFamily="2" charset="0"/>
+                </a:rPr>
+                <a:t>PMFGWFPGSWME   (0.22)</a:t>
+              </a:r>
+            </a:p>
+            <a:p>
+              <a:pPr>
+                <a:lnSpc>
+                  <a:spcPct val="150000"/>
+                </a:lnSpc>
+              </a:pPr>
+              <a:r>
+                <a:rPr lang="es-MX" sz="1050" b="1" dirty="0">
+                  <a:solidFill>
+                    <a:srgbClr val="B2D838"/>
+                  </a:solidFill>
+                  <a:latin typeface="Google Sans" pitchFamily="2" charset="0"/>
+                  <a:ea typeface="Google Sans" pitchFamily="2" charset="0"/>
+                  <a:cs typeface="Google Sans" pitchFamily="2" charset="0"/>
+                </a:rPr>
+                <a:t>ERQRLMSFQDHS   (0.05)</a:t>
+              </a:r>
+            </a:p>
+            <a:p>
+              <a:pPr>
+                <a:lnSpc>
+                  <a:spcPct val="150000"/>
+                </a:lnSpc>
+              </a:pPr>
+              <a:r>
+                <a:rPr lang="es-MX" sz="1050" b="1" dirty="0">
+                  <a:solidFill>
+                    <a:srgbClr val="B2D838"/>
+                  </a:solidFill>
+                  <a:latin typeface="Google Sans" pitchFamily="2" charset="0"/>
+                  <a:ea typeface="Google Sans" pitchFamily="2" charset="0"/>
+                  <a:cs typeface="Google Sans" pitchFamily="2" charset="0"/>
+                </a:rPr>
+                <a:t>LYVDTDQEKTDR   (0.31)</a:t>
+              </a:r>
+            </a:p>
+            <a:p>
+              <a:pPr>
+                <a:lnSpc>
+                  <a:spcPct val="150000"/>
+                </a:lnSpc>
+              </a:pPr>
+              <a:r>
+                <a:rPr lang="es-MX" sz="1050" b="1" dirty="0">
+                  <a:solidFill>
+                    <a:srgbClr val="B2D838"/>
+                  </a:solidFill>
+                  <a:latin typeface="Google Sans" pitchFamily="2" charset="0"/>
+                  <a:ea typeface="Google Sans" pitchFamily="2" charset="0"/>
+                  <a:cs typeface="Google Sans" pitchFamily="2" charset="0"/>
+                </a:rPr>
+                <a:t>FQDQPAYNRKRG   (0.14)</a:t>
+              </a:r>
+              <a:endParaRPr lang="es-MX" sz="1050" b="1" dirty="0">
+                <a:solidFill>
+                  <a:schemeClr val="accent6">
+                    <a:lumMod val="75000"/>
+                  </a:schemeClr>
+                </a:solidFill>
+                <a:latin typeface="Google Sans" pitchFamily="2" charset="0"/>
+                <a:ea typeface="Google Sans" pitchFamily="2" charset="0"/>
+                <a:cs typeface="Google Sans" pitchFamily="2" charset="0"/>
+              </a:endParaRPr>
+            </a:p>
+          </p:txBody>
+        </p:sp>
+        <p:sp>
+          <p:nvSpPr>
+            <p:cNvPr id="25" name="CuadroTexto 24">
+              <a:extLst>
+                <a:ext uri="{FF2B5EF4-FFF2-40B4-BE49-F238E27FC236}">
+                  <a16:creationId xmlns:a16="http://schemas.microsoft.com/office/drawing/2014/main" id="{556C6013-D4E0-B28A-81D1-D83C6A5560AA}"/>
+                </a:ext>
+              </a:extLst>
+            </p:cNvPr>
+            <p:cNvSpPr txBox="1"/>
+            <p:nvPr/>
+          </p:nvSpPr>
+          <p:spPr>
+            <a:xfrm>
+              <a:off x="9117330" y="1712554"/>
+              <a:ext cx="2038294" cy="2492734"/>
+            </a:xfrm>
+            <a:prstGeom prst="rect">
+              <a:avLst/>
+            </a:prstGeom>
+            <a:noFill/>
+          </p:spPr>
+          <p:txBody>
+            <a:bodyPr wrap="square">
+              <a:spAutoFit/>
+            </a:bodyPr>
+            <a:lstStyle/>
+            <a:p>
+              <a:pPr>
+                <a:lnSpc>
+                  <a:spcPct val="150000"/>
+                </a:lnSpc>
+              </a:pPr>
+              <a:r>
+                <a:rPr lang="es-MX" sz="1050" b="1" dirty="0">
+                  <a:solidFill>
+                    <a:schemeClr val="accent6">
+                      <a:lumMod val="75000"/>
+                    </a:schemeClr>
+                  </a:solidFill>
+                  <a:latin typeface="Google Sans" pitchFamily="2" charset="0"/>
+                  <a:ea typeface="Google Sans" pitchFamily="2" charset="0"/>
+                  <a:cs typeface="Google Sans" pitchFamily="2" charset="0"/>
+                </a:rPr>
+                <a:t>NMNEFIREAGML   (0.15)</a:t>
+              </a:r>
+            </a:p>
+            <a:p>
+              <a:pPr>
+                <a:lnSpc>
+                  <a:spcPct val="150000"/>
+                </a:lnSpc>
+              </a:pPr>
+              <a:r>
+                <a:rPr lang="es-MX" sz="1050" b="1" dirty="0">
+                  <a:solidFill>
+                    <a:schemeClr val="accent6">
+                      <a:lumMod val="75000"/>
+                    </a:schemeClr>
+                  </a:solidFill>
+                  <a:latin typeface="Google Sans" pitchFamily="2" charset="0"/>
+                  <a:ea typeface="Google Sans" pitchFamily="2" charset="0"/>
+                  <a:cs typeface="Google Sans" pitchFamily="2" charset="0"/>
+                </a:rPr>
+                <a:t>IIAWLMQLPGYI   (0.33)</a:t>
+              </a:r>
+            </a:p>
+            <a:p>
+              <a:pPr>
+                <a:lnSpc>
+                  <a:spcPct val="150000"/>
+                </a:lnSpc>
+              </a:pPr>
+              <a:r>
+                <a:rPr lang="es-MX" sz="1050" b="1" dirty="0">
+                  <a:solidFill>
+                    <a:schemeClr val="accent6">
+                      <a:lumMod val="75000"/>
+                    </a:schemeClr>
+                  </a:solidFill>
+                  <a:latin typeface="Google Sans" pitchFamily="2" charset="0"/>
+                  <a:ea typeface="Google Sans" pitchFamily="2" charset="0"/>
+                  <a:cs typeface="Google Sans" pitchFamily="2" charset="0"/>
+                </a:rPr>
+                <a:t>TRGSDIEICPQR   (0.08)</a:t>
+              </a:r>
+            </a:p>
+            <a:p>
+              <a:pPr>
+                <a:lnSpc>
+                  <a:spcPct val="150000"/>
+                </a:lnSpc>
+              </a:pPr>
+              <a:r>
+                <a:rPr lang="es-MX" sz="1050" b="1" dirty="0">
+                  <a:solidFill>
+                    <a:schemeClr val="accent6">
+                      <a:lumMod val="75000"/>
+                    </a:schemeClr>
+                  </a:solidFill>
+                  <a:latin typeface="Google Sans" pitchFamily="2" charset="0"/>
+                  <a:ea typeface="Google Sans" pitchFamily="2" charset="0"/>
+                  <a:cs typeface="Google Sans" pitchFamily="2" charset="0"/>
+                </a:rPr>
+                <a:t>ESANVTICPQTP   (0.24)</a:t>
+              </a:r>
+            </a:p>
+            <a:p>
+              <a:pPr>
+                <a:lnSpc>
+                  <a:spcPct val="150000"/>
+                </a:lnSpc>
+              </a:pPr>
+              <a:r>
+                <a:rPr lang="es-MX" sz="1050" b="1" dirty="0">
+                  <a:solidFill>
+                    <a:schemeClr val="accent6">
+                      <a:lumMod val="75000"/>
+                    </a:schemeClr>
+                  </a:solidFill>
+                  <a:latin typeface="Google Sans" pitchFamily="2" charset="0"/>
+                  <a:ea typeface="Google Sans" pitchFamily="2" charset="0"/>
+                  <a:cs typeface="Google Sans" pitchFamily="2" charset="0"/>
+                </a:rPr>
+                <a:t>WDIINCFVVYFL   (0.17)</a:t>
+              </a:r>
+            </a:p>
+            <a:p>
+              <a:pPr>
+                <a:lnSpc>
+                  <a:spcPct val="150000"/>
+                </a:lnSpc>
+              </a:pPr>
+              <a:r>
+                <a:rPr lang="es-MX" sz="1050" b="1" dirty="0">
+                  <a:solidFill>
+                    <a:schemeClr val="accent6">
+                      <a:lumMod val="75000"/>
+                    </a:schemeClr>
+                  </a:solidFill>
+                  <a:latin typeface="Google Sans" pitchFamily="2" charset="0"/>
+                  <a:ea typeface="Google Sans" pitchFamily="2" charset="0"/>
+                  <a:cs typeface="Google Sans" pitchFamily="2" charset="0"/>
+                </a:rPr>
+                <a:t>LSCKHNYWIGHF   (0.04)</a:t>
+              </a:r>
+            </a:p>
+            <a:p>
+              <a:pPr>
+                <a:lnSpc>
+                  <a:spcPct val="150000"/>
+                </a:lnSpc>
+              </a:pPr>
+              <a:r>
+                <a:rPr lang="es-MX" sz="1050" b="1" dirty="0">
+                  <a:solidFill>
+                    <a:schemeClr val="accent6">
+                      <a:lumMod val="75000"/>
+                    </a:schemeClr>
+                  </a:solidFill>
+                  <a:latin typeface="Google Sans" pitchFamily="2" charset="0"/>
+                  <a:ea typeface="Google Sans" pitchFamily="2" charset="0"/>
+                  <a:cs typeface="Google Sans" pitchFamily="2" charset="0"/>
+                </a:rPr>
+                <a:t>RMKMYCKLKLGQ   (0.29)</a:t>
+              </a:r>
+            </a:p>
+            <a:p>
+              <a:pPr>
+                <a:lnSpc>
+                  <a:spcPct val="150000"/>
+                </a:lnSpc>
+              </a:pPr>
+              <a:r>
+                <a:rPr lang="es-MX" sz="1050" b="1" dirty="0">
+                  <a:solidFill>
+                    <a:schemeClr val="accent6">
+                      <a:lumMod val="75000"/>
+                    </a:schemeClr>
+                  </a:solidFill>
+                  <a:latin typeface="Google Sans" pitchFamily="2" charset="0"/>
+                  <a:ea typeface="Google Sans" pitchFamily="2" charset="0"/>
+                  <a:cs typeface="Google Sans" pitchFamily="2" charset="0"/>
+                </a:rPr>
+                <a:t>GQHEKRCNAHHS   (0.13)</a:t>
+              </a:r>
+            </a:p>
+            <a:p>
+              <a:pPr>
+                <a:lnSpc>
+                  <a:spcPct val="150000"/>
+                </a:lnSpc>
+              </a:pPr>
+              <a:r>
+                <a:rPr lang="es-MX" sz="1050" b="1" dirty="0">
+                  <a:solidFill>
+                    <a:schemeClr val="accent6">
+                      <a:lumMod val="75000"/>
+                    </a:schemeClr>
+                  </a:solidFill>
+                  <a:latin typeface="Google Sans" pitchFamily="2" charset="0"/>
+                  <a:ea typeface="Google Sans" pitchFamily="2" charset="0"/>
+                  <a:cs typeface="Google Sans" pitchFamily="2" charset="0"/>
+                </a:rPr>
+                <a:t>AGQKAQDCRRPG   (0.09)</a:t>
+              </a:r>
+            </a:p>
+            <a:p>
+              <a:pPr>
+                <a:lnSpc>
+                  <a:spcPct val="150000"/>
+                </a:lnSpc>
+              </a:pPr>
+              <a:r>
+                <a:rPr lang="es-MX" sz="1050" b="1" dirty="0">
+                  <a:solidFill>
+                    <a:schemeClr val="accent6">
+                      <a:lumMod val="75000"/>
+                    </a:schemeClr>
+                  </a:solidFill>
+                  <a:latin typeface="Google Sans" pitchFamily="2" charset="0"/>
+                  <a:ea typeface="Google Sans" pitchFamily="2" charset="0"/>
+                  <a:cs typeface="Google Sans" pitchFamily="2" charset="0"/>
+                </a:rPr>
+                <a:t>DLCDEYHDTHRC   (0.36)</a:t>
+              </a:r>
+              <a:endParaRPr lang="es-MX" sz="1050" dirty="0"/>
+            </a:p>
+          </p:txBody>
+        </p:sp>
+      </p:grpSp>
+      <p:grpSp>
+        <p:nvGrpSpPr>
+          <p:cNvPr id="32" name="Grupo 31">
+            <a:extLst>
+              <a:ext uri="{FF2B5EF4-FFF2-40B4-BE49-F238E27FC236}">
+                <a16:creationId xmlns:a16="http://schemas.microsoft.com/office/drawing/2014/main" id="{16ED1BBF-EA40-1785-AB65-B8952C9CBADA}"/>
+              </a:ext>
+            </a:extLst>
+          </p:cNvPr>
+          <p:cNvGrpSpPr/>
+          <p:nvPr/>
+        </p:nvGrpSpPr>
+        <p:grpSpPr>
+          <a:xfrm>
+            <a:off x="487587" y="4599010"/>
+            <a:ext cx="5608413" cy="1789721"/>
+            <a:chOff x="449487" y="4707888"/>
+            <a:chExt cx="5608413" cy="1789721"/>
+          </a:xfrm>
+        </p:grpSpPr>
+        <p:sp>
+          <p:nvSpPr>
+            <p:cNvPr id="29" name="CuadroTexto 28">
+              <a:extLst>
+                <a:ext uri="{FF2B5EF4-FFF2-40B4-BE49-F238E27FC236}">
+                  <a16:creationId xmlns:a16="http://schemas.microsoft.com/office/drawing/2014/main" id="{5FAE489F-C10F-9381-A75D-1906FEAF3B45}"/>
+                </a:ext>
+              </a:extLst>
+            </p:cNvPr>
+            <p:cNvSpPr txBox="1"/>
+            <p:nvPr/>
+          </p:nvSpPr>
+          <p:spPr>
+            <a:xfrm>
+              <a:off x="449487" y="4707888"/>
+              <a:ext cx="2488338" cy="1789721"/>
+            </a:xfrm>
+            <a:prstGeom prst="rect">
+              <a:avLst/>
+            </a:prstGeom>
+            <a:noFill/>
+          </p:spPr>
+          <p:txBody>
+            <a:bodyPr wrap="square">
+              <a:spAutoFit/>
+            </a:bodyPr>
+            <a:lstStyle/>
+            <a:p>
+              <a:pPr>
+                <a:lnSpc>
+                  <a:spcPct val="150000"/>
+                </a:lnSpc>
+              </a:pPr>
+              <a:r>
+                <a:rPr lang="es-MX" sz="1500" b="1" dirty="0">
+                  <a:solidFill>
+                    <a:schemeClr val="accent2">
+                      <a:lumMod val="75000"/>
+                    </a:schemeClr>
+                  </a:solidFill>
+                  <a:latin typeface="Google Sans" pitchFamily="2" charset="0"/>
+                  <a:ea typeface="Google Sans" pitchFamily="2" charset="0"/>
+                  <a:cs typeface="Google Sans" pitchFamily="2" charset="0"/>
+                </a:rPr>
+                <a:t>TRIFKHAKPCMY (0.64)</a:t>
+              </a:r>
+            </a:p>
+            <a:p>
+              <a:pPr>
+                <a:lnSpc>
+                  <a:spcPct val="150000"/>
+                </a:lnSpc>
+              </a:pPr>
+              <a:r>
+                <a:rPr lang="es-MX" sz="1500" b="1" dirty="0">
+                  <a:solidFill>
+                    <a:schemeClr val="accent2">
+                      <a:lumMod val="75000"/>
+                    </a:schemeClr>
+                  </a:solidFill>
+                  <a:latin typeface="Google Sans" pitchFamily="2" charset="0"/>
+                  <a:ea typeface="Google Sans" pitchFamily="2" charset="0"/>
+                  <a:cs typeface="Google Sans" pitchFamily="2" charset="0"/>
+                </a:rPr>
+                <a:t>DLCDEYHDTHRC (0.36)</a:t>
+              </a:r>
+            </a:p>
+            <a:p>
+              <a:pPr>
+                <a:lnSpc>
+                  <a:spcPct val="150000"/>
+                </a:lnSpc>
+              </a:pPr>
+              <a:r>
+                <a:rPr lang="es-MX" sz="1500" b="1" dirty="0">
+                  <a:solidFill>
+                    <a:schemeClr val="accent2">
+                      <a:lumMod val="75000"/>
+                    </a:schemeClr>
+                  </a:solidFill>
+                  <a:latin typeface="Google Sans" pitchFamily="2" charset="0"/>
+                  <a:ea typeface="Google Sans" pitchFamily="2" charset="0"/>
+                  <a:cs typeface="Google Sans" pitchFamily="2" charset="0"/>
+                </a:rPr>
+                <a:t>IIAWLMQLPGYI (0.33)</a:t>
+              </a:r>
+            </a:p>
+            <a:p>
+              <a:pPr>
+                <a:lnSpc>
+                  <a:spcPct val="150000"/>
+                </a:lnSpc>
+              </a:pPr>
+              <a:r>
+                <a:rPr lang="es-MX" sz="1500" b="1" dirty="0">
+                  <a:solidFill>
+                    <a:schemeClr val="accent2">
+                      <a:lumMod val="75000"/>
+                    </a:schemeClr>
+                  </a:solidFill>
+                  <a:latin typeface="Google Sans" pitchFamily="2" charset="0"/>
+                  <a:ea typeface="Google Sans" pitchFamily="2" charset="0"/>
+                  <a:cs typeface="Google Sans" pitchFamily="2" charset="0"/>
+                </a:rPr>
+                <a:t>LYVDTDQEKTDR (0.31)</a:t>
+              </a:r>
+            </a:p>
+            <a:p>
+              <a:pPr>
+                <a:lnSpc>
+                  <a:spcPct val="150000"/>
+                </a:lnSpc>
+              </a:pPr>
+              <a:r>
+                <a:rPr lang="es-MX" sz="1500" b="1" dirty="0">
+                  <a:solidFill>
+                    <a:schemeClr val="accent2">
+                      <a:lumMod val="75000"/>
+                    </a:schemeClr>
+                  </a:solidFill>
+                  <a:latin typeface="Google Sans" pitchFamily="2" charset="0"/>
+                  <a:ea typeface="Google Sans" pitchFamily="2" charset="0"/>
+                  <a:cs typeface="Google Sans" pitchFamily="2" charset="0"/>
+                </a:rPr>
+                <a:t>RMKMYCKLKLGQ (0.29)</a:t>
+              </a:r>
+            </a:p>
+          </p:txBody>
+        </p:sp>
+        <p:sp>
+          <p:nvSpPr>
+            <p:cNvPr id="31" name="CuadroTexto 30">
+              <a:extLst>
+                <a:ext uri="{FF2B5EF4-FFF2-40B4-BE49-F238E27FC236}">
+                  <a16:creationId xmlns:a16="http://schemas.microsoft.com/office/drawing/2014/main" id="{0C041B19-5E4D-2C9B-9AF1-324436820168}"/>
+                </a:ext>
+              </a:extLst>
+            </p:cNvPr>
+            <p:cNvSpPr txBox="1"/>
+            <p:nvPr/>
+          </p:nvSpPr>
+          <p:spPr>
+            <a:xfrm>
+              <a:off x="3351276" y="4707888"/>
+              <a:ext cx="2706624" cy="1789721"/>
+            </a:xfrm>
+            <a:prstGeom prst="rect">
+              <a:avLst/>
+            </a:prstGeom>
+            <a:noFill/>
+          </p:spPr>
+          <p:txBody>
+            <a:bodyPr wrap="square">
+              <a:spAutoFit/>
+            </a:bodyPr>
+            <a:lstStyle/>
+            <a:p>
+              <a:pPr>
+                <a:lnSpc>
+                  <a:spcPct val="150000"/>
+                </a:lnSpc>
+              </a:pPr>
+              <a:r>
+                <a:rPr lang="es-MX" sz="1500" b="1" dirty="0">
+                  <a:solidFill>
+                    <a:schemeClr val="accent2">
+                      <a:lumMod val="75000"/>
+                    </a:schemeClr>
+                  </a:solidFill>
+                  <a:latin typeface="Google Sans" pitchFamily="2" charset="0"/>
+                  <a:ea typeface="Google Sans" pitchFamily="2" charset="0"/>
+                  <a:cs typeface="Google Sans" pitchFamily="2" charset="0"/>
+                </a:rPr>
+                <a:t>MDKSYDMGNKIA (0.27)</a:t>
+              </a:r>
+            </a:p>
+            <a:p>
+              <a:pPr>
+                <a:lnSpc>
+                  <a:spcPct val="150000"/>
+                </a:lnSpc>
+              </a:pPr>
+              <a:r>
+                <a:rPr lang="es-MX" sz="1500" b="1" dirty="0">
+                  <a:solidFill>
+                    <a:schemeClr val="accent2">
+                      <a:lumMod val="75000"/>
+                    </a:schemeClr>
+                  </a:solidFill>
+                  <a:latin typeface="Google Sans" pitchFamily="2" charset="0"/>
+                  <a:ea typeface="Google Sans" pitchFamily="2" charset="0"/>
+                  <a:cs typeface="Google Sans" pitchFamily="2" charset="0"/>
+                </a:rPr>
+                <a:t>ESANVTICPQTP (0.24)</a:t>
+              </a:r>
+            </a:p>
+            <a:p>
+              <a:pPr>
+                <a:lnSpc>
+                  <a:spcPct val="150000"/>
+                </a:lnSpc>
+              </a:pPr>
+              <a:r>
+                <a:rPr lang="es-MX" sz="1500" b="1" dirty="0">
+                  <a:solidFill>
+                    <a:schemeClr val="accent2">
+                      <a:lumMod val="75000"/>
+                    </a:schemeClr>
+                  </a:solidFill>
+                  <a:latin typeface="Google Sans" pitchFamily="2" charset="0"/>
+                  <a:ea typeface="Google Sans" pitchFamily="2" charset="0"/>
+                  <a:cs typeface="Google Sans" pitchFamily="2" charset="0"/>
+                </a:rPr>
+                <a:t>PMFGWFPGSWME (0.22)</a:t>
+              </a:r>
+            </a:p>
+            <a:p>
+              <a:pPr>
+                <a:lnSpc>
+                  <a:spcPct val="150000"/>
+                </a:lnSpc>
+              </a:pPr>
+              <a:r>
+                <a:rPr lang="es-MX" sz="1500" b="1" dirty="0">
+                  <a:solidFill>
+                    <a:schemeClr val="accent2">
+                      <a:lumMod val="75000"/>
+                    </a:schemeClr>
+                  </a:solidFill>
+                  <a:latin typeface="Google Sans" pitchFamily="2" charset="0"/>
+                  <a:ea typeface="Google Sans" pitchFamily="2" charset="0"/>
+                  <a:cs typeface="Google Sans" pitchFamily="2" charset="0"/>
+                </a:rPr>
+                <a:t>SRLNMHHVNNQD (0.18)</a:t>
+              </a:r>
+            </a:p>
+            <a:p>
+              <a:pPr>
+                <a:lnSpc>
+                  <a:spcPct val="150000"/>
+                </a:lnSpc>
+              </a:pPr>
+              <a:r>
+                <a:rPr lang="es-MX" sz="1500" b="1" dirty="0">
+                  <a:solidFill>
+                    <a:schemeClr val="accent2">
+                      <a:lumMod val="75000"/>
+                    </a:schemeClr>
+                  </a:solidFill>
+                  <a:latin typeface="Google Sans" pitchFamily="2" charset="0"/>
+                  <a:ea typeface="Google Sans" pitchFamily="2" charset="0"/>
+                  <a:cs typeface="Google Sans" pitchFamily="2" charset="0"/>
+                </a:rPr>
+                <a:t>WDIINCFVVYFL (0.17)</a:t>
+              </a:r>
+            </a:p>
+          </p:txBody>
+        </p:sp>
+      </p:grpSp>
+      <p:sp>
+        <p:nvSpPr>
+          <p:cNvPr id="34" name="CuadroTexto 33">
+            <a:extLst>
+              <a:ext uri="{FF2B5EF4-FFF2-40B4-BE49-F238E27FC236}">
+                <a16:creationId xmlns:a16="http://schemas.microsoft.com/office/drawing/2014/main" id="{3D043568-0EA4-815A-EEEE-56B5D7F8E2BE}"/>
+              </a:ext>
+            </a:extLst>
+          </p:cNvPr>
+          <p:cNvSpPr txBox="1"/>
+          <p:nvPr/>
+        </p:nvSpPr>
+        <p:spPr>
+          <a:xfrm>
+            <a:off x="6758406" y="4599010"/>
+            <a:ext cx="2488339" cy="1789721"/>
+          </a:xfrm>
+          <a:prstGeom prst="rect">
+            <a:avLst/>
+          </a:prstGeom>
+          <a:noFill/>
+        </p:spPr>
+        <p:txBody>
+          <a:bodyPr wrap="square">
+            <a:spAutoFit/>
+          </a:bodyPr>
+          <a:lstStyle/>
+          <a:p>
+            <a:pPr>
+              <a:lnSpc>
+                <a:spcPct val="150000"/>
+              </a:lnSpc>
+            </a:pPr>
+            <a:r>
+              <a:rPr lang="es-MX" sz="1500" b="1" dirty="0">
+                <a:solidFill>
+                  <a:schemeClr val="accent2">
+                    <a:lumMod val="75000"/>
+                  </a:schemeClr>
+                </a:solidFill>
+                <a:latin typeface="Google Sans" pitchFamily="2" charset="0"/>
+                <a:ea typeface="Google Sans" pitchFamily="2" charset="0"/>
+                <a:cs typeface="Google Sans" pitchFamily="2" charset="0"/>
+              </a:rPr>
+              <a:t>NMNEFIREAGML   (0.15)</a:t>
+            </a:r>
+          </a:p>
+          <a:p>
+            <a:pPr>
+              <a:lnSpc>
+                <a:spcPct val="150000"/>
+              </a:lnSpc>
+            </a:pPr>
+            <a:r>
+              <a:rPr lang="es-MX" sz="1500" b="1" dirty="0">
+                <a:solidFill>
+                  <a:schemeClr val="accent2">
+                    <a:lumMod val="75000"/>
+                  </a:schemeClr>
+                </a:solidFill>
+                <a:latin typeface="Google Sans" pitchFamily="2" charset="0"/>
+                <a:ea typeface="Google Sans" pitchFamily="2" charset="0"/>
+                <a:cs typeface="Google Sans" pitchFamily="2" charset="0"/>
+              </a:rPr>
+              <a:t>IIAWLMQLPGYI   (0.33)</a:t>
+            </a:r>
+          </a:p>
+          <a:p>
+            <a:pPr>
+              <a:lnSpc>
+                <a:spcPct val="150000"/>
+              </a:lnSpc>
+            </a:pPr>
+            <a:r>
+              <a:rPr lang="es-MX" sz="1500" b="1" dirty="0">
+                <a:solidFill>
+                  <a:schemeClr val="accent2">
+                    <a:lumMod val="75000"/>
+                  </a:schemeClr>
+                </a:solidFill>
+                <a:latin typeface="Google Sans" pitchFamily="2" charset="0"/>
+                <a:ea typeface="Google Sans" pitchFamily="2" charset="0"/>
+                <a:cs typeface="Google Sans" pitchFamily="2" charset="0"/>
+              </a:rPr>
+              <a:t>TRGSDIEICPQR   (0.08)</a:t>
+            </a:r>
+          </a:p>
+          <a:p>
+            <a:pPr>
+              <a:lnSpc>
+                <a:spcPct val="150000"/>
+              </a:lnSpc>
+            </a:pPr>
+            <a:r>
+              <a:rPr lang="es-MX" sz="1500" b="1" dirty="0">
+                <a:solidFill>
+                  <a:schemeClr val="accent2">
+                    <a:lumMod val="75000"/>
+                  </a:schemeClr>
+                </a:solidFill>
+                <a:latin typeface="Google Sans" pitchFamily="2" charset="0"/>
+                <a:ea typeface="Google Sans" pitchFamily="2" charset="0"/>
+                <a:cs typeface="Google Sans" pitchFamily="2" charset="0"/>
+              </a:rPr>
+              <a:t>ESANVTICPQTP   (0.24)</a:t>
+            </a:r>
+          </a:p>
+          <a:p>
+            <a:pPr>
+              <a:lnSpc>
+                <a:spcPct val="150000"/>
+              </a:lnSpc>
+            </a:pPr>
+            <a:r>
+              <a:rPr lang="es-MX" sz="1500" b="1" dirty="0">
+                <a:solidFill>
+                  <a:schemeClr val="accent2">
+                    <a:lumMod val="75000"/>
+                  </a:schemeClr>
+                </a:solidFill>
+                <a:latin typeface="Google Sans" pitchFamily="2" charset="0"/>
+                <a:ea typeface="Google Sans" pitchFamily="2" charset="0"/>
+                <a:cs typeface="Google Sans" pitchFamily="2" charset="0"/>
+              </a:rPr>
+              <a:t>WDIINCFVVYFL   (0.17)</a:t>
+            </a:r>
+          </a:p>
+        </p:txBody>
+      </p:sp>
+      <p:sp>
+        <p:nvSpPr>
+          <p:cNvPr id="36" name="CuadroTexto 35">
+            <a:extLst>
+              <a:ext uri="{FF2B5EF4-FFF2-40B4-BE49-F238E27FC236}">
+                <a16:creationId xmlns:a16="http://schemas.microsoft.com/office/drawing/2014/main" id="{2C72C849-7A0E-79DD-F6BD-F5A0D1D0747B}"/>
+              </a:ext>
+            </a:extLst>
+          </p:cNvPr>
+          <p:cNvSpPr txBox="1"/>
+          <p:nvPr/>
+        </p:nvSpPr>
+        <p:spPr>
+          <a:xfrm>
+            <a:off x="9252895" y="4598561"/>
+            <a:ext cx="2625161" cy="1790170"/>
+          </a:xfrm>
+          <a:prstGeom prst="rect">
+            <a:avLst/>
+          </a:prstGeom>
+          <a:noFill/>
+        </p:spPr>
+        <p:txBody>
+          <a:bodyPr wrap="square">
+            <a:spAutoFit/>
+          </a:bodyPr>
+          <a:lstStyle/>
+          <a:p>
+            <a:pPr>
+              <a:lnSpc>
+                <a:spcPct val="150000"/>
+              </a:lnSpc>
+            </a:pPr>
+            <a:r>
+              <a:rPr lang="es-MX" sz="1500" b="1" dirty="0">
+                <a:solidFill>
+                  <a:schemeClr val="accent2">
+                    <a:lumMod val="75000"/>
+                  </a:schemeClr>
+                </a:solidFill>
+                <a:latin typeface="Google Sans" pitchFamily="2" charset="0"/>
+                <a:ea typeface="Google Sans" pitchFamily="2" charset="0"/>
+                <a:cs typeface="Google Sans" pitchFamily="2" charset="0"/>
+              </a:rPr>
+              <a:t>LSCKHNYWIGHF   (0.04)</a:t>
+            </a:r>
+          </a:p>
+          <a:p>
+            <a:pPr>
+              <a:lnSpc>
+                <a:spcPct val="150000"/>
+              </a:lnSpc>
+            </a:pPr>
+            <a:r>
+              <a:rPr lang="es-MX" sz="1500" b="1" dirty="0">
+                <a:solidFill>
+                  <a:schemeClr val="accent2">
+                    <a:lumMod val="75000"/>
+                  </a:schemeClr>
+                </a:solidFill>
+                <a:latin typeface="Google Sans" pitchFamily="2" charset="0"/>
+                <a:ea typeface="Google Sans" pitchFamily="2" charset="0"/>
+                <a:cs typeface="Google Sans" pitchFamily="2" charset="0"/>
+              </a:rPr>
+              <a:t>RMKMYCKLKLGQ   (0.29)</a:t>
+            </a:r>
+          </a:p>
+          <a:p>
+            <a:pPr>
+              <a:lnSpc>
+                <a:spcPct val="150000"/>
+              </a:lnSpc>
+            </a:pPr>
+            <a:r>
+              <a:rPr lang="es-MX" sz="1500" b="1" dirty="0">
+                <a:solidFill>
+                  <a:schemeClr val="accent2">
+                    <a:lumMod val="75000"/>
+                  </a:schemeClr>
+                </a:solidFill>
+                <a:latin typeface="Google Sans" pitchFamily="2" charset="0"/>
+                <a:ea typeface="Google Sans" pitchFamily="2" charset="0"/>
+                <a:cs typeface="Google Sans" pitchFamily="2" charset="0"/>
+              </a:rPr>
+              <a:t>GQHEKRCNAHHS   (0.13)</a:t>
+            </a:r>
+          </a:p>
+          <a:p>
+            <a:pPr>
+              <a:lnSpc>
+                <a:spcPct val="150000"/>
+              </a:lnSpc>
+            </a:pPr>
+            <a:r>
+              <a:rPr lang="es-MX" sz="1500" b="1" dirty="0">
+                <a:solidFill>
+                  <a:schemeClr val="accent2">
+                    <a:lumMod val="75000"/>
+                  </a:schemeClr>
+                </a:solidFill>
+                <a:latin typeface="Google Sans" pitchFamily="2" charset="0"/>
+                <a:ea typeface="Google Sans" pitchFamily="2" charset="0"/>
+                <a:cs typeface="Google Sans" pitchFamily="2" charset="0"/>
+              </a:rPr>
+              <a:t>AGQKAQDCRRPG   (0.09)</a:t>
+            </a:r>
+          </a:p>
+          <a:p>
+            <a:pPr>
+              <a:lnSpc>
+                <a:spcPct val="150000"/>
+              </a:lnSpc>
+            </a:pPr>
+            <a:r>
+              <a:rPr lang="es-MX" sz="1500" b="1" dirty="0">
+                <a:solidFill>
+                  <a:schemeClr val="accent2">
+                    <a:lumMod val="75000"/>
+                  </a:schemeClr>
+                </a:solidFill>
+                <a:latin typeface="Google Sans" pitchFamily="2" charset="0"/>
+                <a:ea typeface="Google Sans" pitchFamily="2" charset="0"/>
+                <a:cs typeface="Google Sans" pitchFamily="2" charset="0"/>
+              </a:rPr>
+              <a:t>DLCDEYHDTHRC   (0.36)</a:t>
+            </a:r>
+            <a:endParaRPr lang="es-MX" sz="1500" dirty="0">
+              <a:solidFill>
+                <a:schemeClr val="accent2">
+                  <a:lumMod val="75000"/>
+                </a:schemeClr>
+              </a:solidFill>
+            </a:endParaRPr>
+          </a:p>
+        </p:txBody>
+      </p:sp>
+      <p:grpSp>
+        <p:nvGrpSpPr>
+          <p:cNvPr id="47" name="Grupo 46">
+            <a:extLst>
+              <a:ext uri="{FF2B5EF4-FFF2-40B4-BE49-F238E27FC236}">
+                <a16:creationId xmlns:a16="http://schemas.microsoft.com/office/drawing/2014/main" id="{DF198B5F-5E17-C89F-138E-B41A3BB78B26}"/>
+              </a:ext>
+            </a:extLst>
+          </p:cNvPr>
+          <p:cNvGrpSpPr/>
+          <p:nvPr/>
+        </p:nvGrpSpPr>
+        <p:grpSpPr>
+          <a:xfrm>
+            <a:off x="998941" y="1099905"/>
+            <a:ext cx="9924604" cy="373032"/>
+            <a:chOff x="998941" y="1543685"/>
+            <a:chExt cx="9924604" cy="373032"/>
+          </a:xfrm>
+        </p:grpSpPr>
+        <p:sp>
+          <p:nvSpPr>
+            <p:cNvPr id="40" name="CuadroTexto 39">
+              <a:extLst>
+                <a:ext uri="{FF2B5EF4-FFF2-40B4-BE49-F238E27FC236}">
+                  <a16:creationId xmlns:a16="http://schemas.microsoft.com/office/drawing/2014/main" id="{09A11E8C-9980-D0EC-845D-57C5400B9E57}"/>
+                </a:ext>
+              </a:extLst>
+            </p:cNvPr>
+            <p:cNvSpPr txBox="1"/>
+            <p:nvPr/>
+          </p:nvSpPr>
+          <p:spPr>
+            <a:xfrm>
+              <a:off x="998941" y="1608940"/>
+              <a:ext cx="1575081" cy="307777"/>
+            </a:xfrm>
+            <a:prstGeom prst="rect">
+              <a:avLst/>
+            </a:prstGeom>
+            <a:noFill/>
+            <a:ln w="38100">
+              <a:noFill/>
+            </a:ln>
+          </p:spPr>
+          <p:txBody>
+            <a:bodyPr wrap="square" rtlCol="0">
+              <a:spAutoFit/>
+            </a:bodyPr>
+            <a:lstStyle/>
+            <a:p>
+              <a:r>
+                <a:rPr lang="es-MX" sz="1400" dirty="0">
+                  <a:solidFill>
+                    <a:schemeClr val="bg2">
+                      <a:lumMod val="50000"/>
+                    </a:schemeClr>
+                  </a:solidFill>
+                  <a:latin typeface="Google Sans" pitchFamily="2" charset="0"/>
+                  <a:ea typeface="Google Sans" pitchFamily="2" charset="0"/>
+                  <a:cs typeface="Google Sans" pitchFamily="2" charset="0"/>
+                </a:rPr>
+                <a:t>Parent (Fitness)</a:t>
+              </a:r>
+            </a:p>
+          </p:txBody>
+        </p:sp>
+        <p:sp>
+          <p:nvSpPr>
+            <p:cNvPr id="42" name="CuadroTexto 41">
+              <a:extLst>
+                <a:ext uri="{FF2B5EF4-FFF2-40B4-BE49-F238E27FC236}">
+                  <a16:creationId xmlns:a16="http://schemas.microsoft.com/office/drawing/2014/main" id="{B19844DE-C7A1-8A26-50ED-664CFCB39113}"/>
+                </a:ext>
+              </a:extLst>
+            </p:cNvPr>
+            <p:cNvSpPr txBox="1"/>
+            <p:nvPr/>
+          </p:nvSpPr>
+          <p:spPr>
+            <a:xfrm>
+              <a:off x="3208933" y="1578513"/>
+              <a:ext cx="1575081" cy="307777"/>
+            </a:xfrm>
+            <a:prstGeom prst="rect">
+              <a:avLst/>
+            </a:prstGeom>
+            <a:noFill/>
+            <a:ln w="38100">
+              <a:noFill/>
+            </a:ln>
+          </p:spPr>
+          <p:txBody>
+            <a:bodyPr wrap="square" rtlCol="0">
+              <a:spAutoFit/>
+            </a:bodyPr>
+            <a:lstStyle/>
+            <a:p>
+              <a:r>
+                <a:rPr lang="es-MX" sz="1400" dirty="0">
+                  <a:solidFill>
+                    <a:schemeClr val="bg2">
+                      <a:lumMod val="50000"/>
+                    </a:schemeClr>
+                  </a:solidFill>
+                  <a:latin typeface="Google Sans" pitchFamily="2" charset="0"/>
+                  <a:ea typeface="Google Sans" pitchFamily="2" charset="0"/>
+                  <a:cs typeface="Google Sans" pitchFamily="2" charset="0"/>
+                </a:rPr>
+                <a:t>Child (Fitness)</a:t>
+              </a:r>
+            </a:p>
+          </p:txBody>
+        </p:sp>
+        <p:sp>
+          <p:nvSpPr>
+            <p:cNvPr id="44" name="CuadroTexto 43">
+              <a:extLst>
+                <a:ext uri="{FF2B5EF4-FFF2-40B4-BE49-F238E27FC236}">
+                  <a16:creationId xmlns:a16="http://schemas.microsoft.com/office/drawing/2014/main" id="{205A1065-DB9D-1EAB-BD16-FD829B445B33}"/>
+                </a:ext>
+              </a:extLst>
+            </p:cNvPr>
+            <p:cNvSpPr txBox="1"/>
+            <p:nvPr/>
+          </p:nvSpPr>
+          <p:spPr>
+            <a:xfrm>
+              <a:off x="7138472" y="1574112"/>
+              <a:ext cx="1575081" cy="307777"/>
+            </a:xfrm>
+            <a:prstGeom prst="rect">
+              <a:avLst/>
+            </a:prstGeom>
+            <a:noFill/>
+            <a:ln w="38100">
+              <a:noFill/>
+            </a:ln>
+          </p:spPr>
+          <p:txBody>
+            <a:bodyPr wrap="square" rtlCol="0">
+              <a:spAutoFit/>
+            </a:bodyPr>
+            <a:lstStyle/>
+            <a:p>
+              <a:r>
+                <a:rPr lang="es-MX" sz="1400" dirty="0">
+                  <a:solidFill>
+                    <a:schemeClr val="bg2">
+                      <a:lumMod val="50000"/>
+                    </a:schemeClr>
+                  </a:solidFill>
+                  <a:latin typeface="Google Sans" pitchFamily="2" charset="0"/>
+                  <a:ea typeface="Google Sans" pitchFamily="2" charset="0"/>
+                  <a:cs typeface="Google Sans" pitchFamily="2" charset="0"/>
+                </a:rPr>
+                <a:t>Parent (Fitness)</a:t>
+              </a:r>
+            </a:p>
+          </p:txBody>
+        </p:sp>
+        <p:sp>
+          <p:nvSpPr>
+            <p:cNvPr id="46" name="CuadroTexto 45">
+              <a:extLst>
+                <a:ext uri="{FF2B5EF4-FFF2-40B4-BE49-F238E27FC236}">
+                  <a16:creationId xmlns:a16="http://schemas.microsoft.com/office/drawing/2014/main" id="{582DC542-8270-A160-2B79-1678E9BA6448}"/>
+                </a:ext>
+              </a:extLst>
+            </p:cNvPr>
+            <p:cNvSpPr txBox="1"/>
+            <p:nvPr/>
+          </p:nvSpPr>
+          <p:spPr>
+            <a:xfrm>
+              <a:off x="9348464" y="1543685"/>
+              <a:ext cx="1575081" cy="307777"/>
+            </a:xfrm>
+            <a:prstGeom prst="rect">
+              <a:avLst/>
+            </a:prstGeom>
+            <a:noFill/>
+            <a:ln w="38100">
+              <a:noFill/>
+            </a:ln>
+          </p:spPr>
+          <p:txBody>
+            <a:bodyPr wrap="square" rtlCol="0">
+              <a:spAutoFit/>
+            </a:bodyPr>
+            <a:lstStyle/>
+            <a:p>
+              <a:r>
+                <a:rPr lang="es-MX" sz="1400" dirty="0">
+                  <a:solidFill>
+                    <a:schemeClr val="bg2">
+                      <a:lumMod val="50000"/>
+                    </a:schemeClr>
+                  </a:solidFill>
+                  <a:latin typeface="Google Sans" pitchFamily="2" charset="0"/>
+                  <a:ea typeface="Google Sans" pitchFamily="2" charset="0"/>
+                  <a:cs typeface="Google Sans" pitchFamily="2" charset="0"/>
+                </a:rPr>
+                <a:t>Child (Fitness)</a:t>
+              </a:r>
+            </a:p>
+          </p:txBody>
+        </p:sp>
+      </p:grpSp>
+      <p:sp>
+        <p:nvSpPr>
+          <p:cNvPr id="54" name="CuadroTexto 53">
+            <a:extLst>
+              <a:ext uri="{FF2B5EF4-FFF2-40B4-BE49-F238E27FC236}">
+                <a16:creationId xmlns:a16="http://schemas.microsoft.com/office/drawing/2014/main" id="{B4BA8705-C3F6-1357-667B-31EAB1AAF717}"/>
+              </a:ext>
+            </a:extLst>
+          </p:cNvPr>
+          <p:cNvSpPr txBox="1"/>
+          <p:nvPr/>
+        </p:nvSpPr>
+        <p:spPr>
+          <a:xfrm>
+            <a:off x="2357751" y="4183058"/>
+            <a:ext cx="1575081" cy="307777"/>
+          </a:xfrm>
+          <a:prstGeom prst="rect">
+            <a:avLst/>
+          </a:prstGeom>
+          <a:noFill/>
+          <a:ln w="38100">
+            <a:noFill/>
+          </a:ln>
+        </p:spPr>
+        <p:txBody>
+          <a:bodyPr wrap="square" rtlCol="0">
+            <a:spAutoFit/>
+          </a:bodyPr>
+          <a:lstStyle/>
+          <a:p>
+            <a:r>
+              <a:rPr lang="es-MX" sz="1400" dirty="0">
+                <a:solidFill>
+                  <a:schemeClr val="bg2">
+                    <a:lumMod val="50000"/>
+                  </a:schemeClr>
+                </a:solidFill>
+                <a:latin typeface="Google Sans" pitchFamily="2" charset="0"/>
+                <a:ea typeface="Google Sans" pitchFamily="2" charset="0"/>
+                <a:cs typeface="Google Sans" pitchFamily="2" charset="0"/>
+              </a:rPr>
+              <a:t>Next </a:t>
+            </a:r>
+            <a:r>
+              <a:rPr lang="es-MX" sz="1400" dirty="0" err="1">
+                <a:solidFill>
+                  <a:schemeClr val="bg2">
+                    <a:lumMod val="50000"/>
+                  </a:schemeClr>
+                </a:solidFill>
+                <a:latin typeface="Google Sans" pitchFamily="2" charset="0"/>
+                <a:ea typeface="Google Sans" pitchFamily="2" charset="0"/>
+                <a:cs typeface="Google Sans" pitchFamily="2" charset="0"/>
+              </a:rPr>
+              <a:t>Generation</a:t>
+            </a:r>
+            <a:endParaRPr lang="es-MX" sz="1400" dirty="0">
+              <a:solidFill>
+                <a:schemeClr val="bg2">
+                  <a:lumMod val="50000"/>
+                </a:schemeClr>
+              </a:solidFill>
+              <a:latin typeface="Google Sans" pitchFamily="2" charset="0"/>
+              <a:ea typeface="Google Sans" pitchFamily="2" charset="0"/>
+              <a:cs typeface="Google Sans" pitchFamily="2" charset="0"/>
+            </a:endParaRPr>
+          </a:p>
+        </p:txBody>
+      </p:sp>
+      <p:sp>
+        <p:nvSpPr>
+          <p:cNvPr id="56" name="CuadroTexto 55">
+            <a:extLst>
+              <a:ext uri="{FF2B5EF4-FFF2-40B4-BE49-F238E27FC236}">
+                <a16:creationId xmlns:a16="http://schemas.microsoft.com/office/drawing/2014/main" id="{D2D3D9BC-6D38-1BE9-61E4-EDFED8CD49EC}"/>
+              </a:ext>
+            </a:extLst>
+          </p:cNvPr>
+          <p:cNvSpPr txBox="1"/>
+          <p:nvPr/>
+        </p:nvSpPr>
+        <p:spPr>
+          <a:xfrm>
+            <a:off x="8447066" y="4183057"/>
+            <a:ext cx="1575081" cy="307777"/>
+          </a:xfrm>
+          <a:prstGeom prst="rect">
+            <a:avLst/>
+          </a:prstGeom>
+          <a:noFill/>
+          <a:ln w="38100">
+            <a:noFill/>
+          </a:ln>
+        </p:spPr>
+        <p:txBody>
+          <a:bodyPr wrap="square" rtlCol="0">
+            <a:spAutoFit/>
+          </a:bodyPr>
+          <a:lstStyle/>
+          <a:p>
+            <a:r>
+              <a:rPr lang="es-MX" sz="1400" dirty="0">
+                <a:solidFill>
+                  <a:schemeClr val="bg2">
+                    <a:lumMod val="50000"/>
+                  </a:schemeClr>
+                </a:solidFill>
+                <a:latin typeface="Google Sans" pitchFamily="2" charset="0"/>
+                <a:ea typeface="Google Sans" pitchFamily="2" charset="0"/>
+                <a:cs typeface="Google Sans" pitchFamily="2" charset="0"/>
+              </a:rPr>
+              <a:t>Next </a:t>
+            </a:r>
+            <a:r>
+              <a:rPr lang="es-MX" sz="1400" dirty="0" err="1">
+                <a:solidFill>
+                  <a:schemeClr val="bg2">
+                    <a:lumMod val="50000"/>
+                  </a:schemeClr>
+                </a:solidFill>
+                <a:latin typeface="Google Sans" pitchFamily="2" charset="0"/>
+                <a:ea typeface="Google Sans" pitchFamily="2" charset="0"/>
+                <a:cs typeface="Google Sans" pitchFamily="2" charset="0"/>
+              </a:rPr>
+              <a:t>Generation</a:t>
+            </a:r>
+            <a:endParaRPr lang="es-MX" sz="1400" dirty="0">
+              <a:solidFill>
+                <a:schemeClr val="bg2">
+                  <a:lumMod val="50000"/>
+                </a:schemeClr>
+              </a:solidFill>
+              <a:latin typeface="Google Sans" pitchFamily="2" charset="0"/>
+              <a:ea typeface="Google Sans" pitchFamily="2" charset="0"/>
+              <a:cs typeface="Google Sans" pitchFamily="2" charset="0"/>
+            </a:endParaRPr>
+          </a:p>
+        </p:txBody>
+      </p:sp>
+    </p:spTree>
+    <p:extLst>
+      <p:ext uri="{BB962C8B-B14F-4D97-AF65-F5344CB8AC3E}">
+        <p14:creationId xmlns:p14="http://schemas.microsoft.com/office/powerpoint/2010/main" val="3109139190"/>
+      </p:ext>
+    </p:extLst>
+  </p:cSld>
+  <p:clrMapOvr>
+    <a:masterClrMapping/>
+  </p:clrMapOvr>
+</p:sld>
+</file>
+
 <file path=ppt/theme/theme1.xml><?xml version="1.0" encoding="utf-8"?>
 <a:theme xmlns:a="http://schemas.openxmlformats.org/drawingml/2006/main" name="Tema de Office">
   <a:themeElements>

--- a/genetic.pptx
+++ b/genetic.pptx
@@ -211,7 +211,7 @@
           <a:p>
             <a:fld id="{09C9DEB3-05B4-47A2-A6EC-36F09112C753}" type="datetimeFigureOut">
               <a:rPr lang="es-MX" smtClean="0"/>
-              <a:t>20/06/2026</a:t>
+              <a:t>21/06/2026</a:t>
             </a:fld>
             <a:endParaRPr lang="es-MX"/>
           </a:p>
@@ -709,7 +709,7 @@
           <a:p>
             <a:fld id="{E2E481A2-B0EF-4591-851B-7BBB222CCEEE}" type="datetimeFigureOut">
               <a:rPr lang="es-MX" smtClean="0"/>
-              <a:t>20/06/2026</a:t>
+              <a:t>21/06/2026</a:t>
             </a:fld>
             <a:endParaRPr lang="es-MX"/>
           </a:p>
@@ -907,7 +907,7 @@
           <a:p>
             <a:fld id="{E2E481A2-B0EF-4591-851B-7BBB222CCEEE}" type="datetimeFigureOut">
               <a:rPr lang="es-MX" smtClean="0"/>
-              <a:t>20/06/2026</a:t>
+              <a:t>21/06/2026</a:t>
             </a:fld>
             <a:endParaRPr lang="es-MX"/>
           </a:p>
@@ -1115,7 +1115,7 @@
           <a:p>
             <a:fld id="{E2E481A2-B0EF-4591-851B-7BBB222CCEEE}" type="datetimeFigureOut">
               <a:rPr lang="es-MX" smtClean="0"/>
-              <a:t>20/06/2026</a:t>
+              <a:t>21/06/2026</a:t>
             </a:fld>
             <a:endParaRPr lang="es-MX"/>
           </a:p>
@@ -1313,7 +1313,7 @@
           <a:p>
             <a:fld id="{E2E481A2-B0EF-4591-851B-7BBB222CCEEE}" type="datetimeFigureOut">
               <a:rPr lang="es-MX" smtClean="0"/>
-              <a:t>20/06/2026</a:t>
+              <a:t>21/06/2026</a:t>
             </a:fld>
             <a:endParaRPr lang="es-MX"/>
           </a:p>
@@ -1588,7 +1588,7 @@
           <a:p>
             <a:fld id="{E2E481A2-B0EF-4591-851B-7BBB222CCEEE}" type="datetimeFigureOut">
               <a:rPr lang="es-MX" smtClean="0"/>
-              <a:t>20/06/2026</a:t>
+              <a:t>21/06/2026</a:t>
             </a:fld>
             <a:endParaRPr lang="es-MX"/>
           </a:p>
@@ -1853,7 +1853,7 @@
           <a:p>
             <a:fld id="{E2E481A2-B0EF-4591-851B-7BBB222CCEEE}" type="datetimeFigureOut">
               <a:rPr lang="es-MX" smtClean="0"/>
-              <a:t>20/06/2026</a:t>
+              <a:t>21/06/2026</a:t>
             </a:fld>
             <a:endParaRPr lang="es-MX"/>
           </a:p>
@@ -2265,7 +2265,7 @@
           <a:p>
             <a:fld id="{E2E481A2-B0EF-4591-851B-7BBB222CCEEE}" type="datetimeFigureOut">
               <a:rPr lang="es-MX" smtClean="0"/>
-              <a:t>20/06/2026</a:t>
+              <a:t>21/06/2026</a:t>
             </a:fld>
             <a:endParaRPr lang="es-MX"/>
           </a:p>
@@ -2406,7 +2406,7 @@
           <a:p>
             <a:fld id="{E2E481A2-B0EF-4591-851B-7BBB222CCEEE}" type="datetimeFigureOut">
               <a:rPr lang="es-MX" smtClean="0"/>
-              <a:t>20/06/2026</a:t>
+              <a:t>21/06/2026</a:t>
             </a:fld>
             <a:endParaRPr lang="es-MX"/>
           </a:p>
@@ -2519,7 +2519,7 @@
           <a:p>
             <a:fld id="{E2E481A2-B0EF-4591-851B-7BBB222CCEEE}" type="datetimeFigureOut">
               <a:rPr lang="es-MX" smtClean="0"/>
-              <a:t>20/06/2026</a:t>
+              <a:t>21/06/2026</a:t>
             </a:fld>
             <a:endParaRPr lang="es-MX"/>
           </a:p>
@@ -2830,7 +2830,7 @@
           <a:p>
             <a:fld id="{E2E481A2-B0EF-4591-851B-7BBB222CCEEE}" type="datetimeFigureOut">
               <a:rPr lang="es-MX" smtClean="0"/>
-              <a:t>20/06/2026</a:t>
+              <a:t>21/06/2026</a:t>
             </a:fld>
             <a:endParaRPr lang="es-MX"/>
           </a:p>
@@ -3118,7 +3118,7 @@
           <a:p>
             <a:fld id="{E2E481A2-B0EF-4591-851B-7BBB222CCEEE}" type="datetimeFigureOut">
               <a:rPr lang="es-MX" smtClean="0"/>
-              <a:t>20/06/2026</a:t>
+              <a:t>21/06/2026</a:t>
             </a:fld>
             <a:endParaRPr lang="es-MX"/>
           </a:p>
@@ -3359,7 +3359,7 @@
           <a:p>
             <a:fld id="{E2E481A2-B0EF-4591-851B-7BBB222CCEEE}" type="datetimeFigureOut">
               <a:rPr lang="es-MX" smtClean="0"/>
-              <a:t>20/06/2026</a:t>
+              <a:t>21/06/2026</a:t>
             </a:fld>
             <a:endParaRPr lang="es-MX"/>
           </a:p>
@@ -4072,8 +4072,8 @@
               <a:chExt cx="2150713" cy="523917"/>
             </a:xfrm>
           </p:grpSpPr>
-          <mc:AlternateContent xmlns:mc="http://schemas.openxmlformats.org/markup-compatibility/2006">
-            <mc:Choice xmlns:a14="http://schemas.microsoft.com/office/drawing/2010/main" Requires="a14">
+          <mc:AlternateContent xmlns:mc="http://schemas.openxmlformats.org/markup-compatibility/2006" xmlns:a14="http://schemas.microsoft.com/office/drawing/2010/main">
+            <mc:Choice Requires="a14">
               <p:sp>
                 <p:nvSpPr>
                   <p:cNvPr id="102" name="CuadroTexto 101">
@@ -4102,6 +4102,7 @@
                   </a:bodyPr>
                   <a:lstStyle/>
                   <a:p>
+                    <a:pPr/>
                     <a14:m>
                       <m:oMathPara xmlns:m="http://schemas.openxmlformats.org/officeDocument/2006/math">
                         <m:oMathParaPr>
@@ -4145,7 +4146,7 @@
                 </p:txBody>
               </p:sp>
             </mc:Choice>
-            <mc:Fallback>
+            <mc:Fallback xmlns="">
               <p:sp>
                 <p:nvSpPr>
                   <p:cNvPr id="102" name="CuadroTexto 101">
@@ -4190,8 +4191,8 @@
               </p:sp>
             </mc:Fallback>
           </mc:AlternateContent>
-          <mc:AlternateContent xmlns:mc="http://schemas.openxmlformats.org/markup-compatibility/2006">
-            <mc:Choice xmlns:a14="http://schemas.microsoft.com/office/drawing/2010/main" Requires="a14">
+          <mc:AlternateContent xmlns:mc="http://schemas.openxmlformats.org/markup-compatibility/2006" xmlns:a14="http://schemas.microsoft.com/office/drawing/2010/main">
+            <mc:Choice Requires="a14">
               <p:sp>
                 <p:nvSpPr>
                   <p:cNvPr id="105" name="CuadroTexto 104">
@@ -4264,7 +4265,7 @@
                 </p:txBody>
               </p:sp>
             </mc:Choice>
-            <mc:Fallback>
+            <mc:Fallback xmlns="">
               <p:sp>
                 <p:nvSpPr>
                   <p:cNvPr id="105" name="CuadroTexto 104">
@@ -4309,8 +4310,8 @@
               </p:sp>
             </mc:Fallback>
           </mc:AlternateContent>
-          <mc:AlternateContent xmlns:mc="http://schemas.openxmlformats.org/markup-compatibility/2006">
-            <mc:Choice xmlns:a14="http://schemas.microsoft.com/office/drawing/2010/main" Requires="a14">
+          <mc:AlternateContent xmlns:mc="http://schemas.openxmlformats.org/markup-compatibility/2006" xmlns:a14="http://schemas.microsoft.com/office/drawing/2010/main">
+            <mc:Choice Requires="a14">
               <p:sp>
                 <p:nvSpPr>
                   <p:cNvPr id="107" name="CuadroTexto 106">
@@ -4383,7 +4384,7 @@
                 </p:txBody>
               </p:sp>
             </mc:Choice>
-            <mc:Fallback>
+            <mc:Fallback xmlns="">
               <p:sp>
                 <p:nvSpPr>
                   <p:cNvPr id="107" name="CuadroTexto 106">
@@ -4428,8 +4429,8 @@
               </p:sp>
             </mc:Fallback>
           </mc:AlternateContent>
-          <mc:AlternateContent xmlns:mc="http://schemas.openxmlformats.org/markup-compatibility/2006">
-            <mc:Choice xmlns:a14="http://schemas.microsoft.com/office/drawing/2010/main" Requires="a14">
+          <mc:AlternateContent xmlns:mc="http://schemas.openxmlformats.org/markup-compatibility/2006" xmlns:a14="http://schemas.microsoft.com/office/drawing/2010/main">
+            <mc:Choice Requires="a14">
               <p:sp>
                 <p:nvSpPr>
                   <p:cNvPr id="109" name="CuadroTexto 108">
@@ -4502,7 +4503,7 @@
                 </p:txBody>
               </p:sp>
             </mc:Choice>
-            <mc:Fallback>
+            <mc:Fallback xmlns="">
               <p:sp>
                 <p:nvSpPr>
                   <p:cNvPr id="109" name="CuadroTexto 108">
@@ -4547,8 +4548,8 @@
               </p:sp>
             </mc:Fallback>
           </mc:AlternateContent>
-          <mc:AlternateContent xmlns:mc="http://schemas.openxmlformats.org/markup-compatibility/2006">
-            <mc:Choice xmlns:a14="http://schemas.microsoft.com/office/drawing/2010/main" Requires="a14">
+          <mc:AlternateContent xmlns:mc="http://schemas.openxmlformats.org/markup-compatibility/2006" xmlns:a14="http://schemas.microsoft.com/office/drawing/2010/main">
+            <mc:Choice Requires="a14">
               <p:sp>
                 <p:nvSpPr>
                   <p:cNvPr id="111" name="CuadroTexto 110">
@@ -4621,7 +4622,7 @@
                 </p:txBody>
               </p:sp>
             </mc:Choice>
-            <mc:Fallback>
+            <mc:Fallback xmlns="">
               <p:sp>
                 <p:nvSpPr>
                   <p:cNvPr id="111" name="CuadroTexto 110">
@@ -4687,8 +4688,8 @@
               <a:chExt cx="2150713" cy="523917"/>
             </a:xfrm>
           </p:grpSpPr>
-          <mc:AlternateContent xmlns:mc="http://schemas.openxmlformats.org/markup-compatibility/2006">
-            <mc:Choice xmlns:a14="http://schemas.microsoft.com/office/drawing/2010/main" Requires="a14">
+          <mc:AlternateContent xmlns:mc="http://schemas.openxmlformats.org/markup-compatibility/2006" xmlns:a14="http://schemas.microsoft.com/office/drawing/2010/main">
+            <mc:Choice Requires="a14">
               <p:sp>
                 <p:nvSpPr>
                   <p:cNvPr id="128" name="CuadroTexto 127">
@@ -4717,6 +4718,7 @@
                   </a:bodyPr>
                   <a:lstStyle/>
                   <a:p>
+                    <a:pPr/>
                     <a14:m>
                       <m:oMathPara xmlns:m="http://schemas.openxmlformats.org/officeDocument/2006/math">
                         <m:oMathParaPr>
@@ -4760,7 +4762,7 @@
                 </p:txBody>
               </p:sp>
             </mc:Choice>
-            <mc:Fallback>
+            <mc:Fallback xmlns="">
               <p:sp>
                 <p:nvSpPr>
                   <p:cNvPr id="128" name="CuadroTexto 127">
@@ -4805,8 +4807,8 @@
               </p:sp>
             </mc:Fallback>
           </mc:AlternateContent>
-          <mc:AlternateContent xmlns:mc="http://schemas.openxmlformats.org/markup-compatibility/2006">
-            <mc:Choice xmlns:a14="http://schemas.microsoft.com/office/drawing/2010/main" Requires="a14">
+          <mc:AlternateContent xmlns:mc="http://schemas.openxmlformats.org/markup-compatibility/2006" xmlns:a14="http://schemas.microsoft.com/office/drawing/2010/main">
+            <mc:Choice Requires="a14">
               <p:sp>
                 <p:nvSpPr>
                   <p:cNvPr id="129" name="CuadroTexto 128">
@@ -4879,7 +4881,7 @@
                 </p:txBody>
               </p:sp>
             </mc:Choice>
-            <mc:Fallback>
+            <mc:Fallback xmlns="">
               <p:sp>
                 <p:nvSpPr>
                   <p:cNvPr id="129" name="CuadroTexto 128">
@@ -4924,8 +4926,8 @@
               </p:sp>
             </mc:Fallback>
           </mc:AlternateContent>
-          <mc:AlternateContent xmlns:mc="http://schemas.openxmlformats.org/markup-compatibility/2006">
-            <mc:Choice xmlns:a14="http://schemas.microsoft.com/office/drawing/2010/main" Requires="a14">
+          <mc:AlternateContent xmlns:mc="http://schemas.openxmlformats.org/markup-compatibility/2006" xmlns:a14="http://schemas.microsoft.com/office/drawing/2010/main">
+            <mc:Choice Requires="a14">
               <p:sp>
                 <p:nvSpPr>
                   <p:cNvPr id="130" name="CuadroTexto 129">
@@ -4998,7 +5000,7 @@
                 </p:txBody>
               </p:sp>
             </mc:Choice>
-            <mc:Fallback>
+            <mc:Fallback xmlns="">
               <p:sp>
                 <p:nvSpPr>
                   <p:cNvPr id="130" name="CuadroTexto 129">
@@ -5043,8 +5045,8 @@
               </p:sp>
             </mc:Fallback>
           </mc:AlternateContent>
-          <mc:AlternateContent xmlns:mc="http://schemas.openxmlformats.org/markup-compatibility/2006">
-            <mc:Choice xmlns:a14="http://schemas.microsoft.com/office/drawing/2010/main" Requires="a14">
+          <mc:AlternateContent xmlns:mc="http://schemas.openxmlformats.org/markup-compatibility/2006" xmlns:a14="http://schemas.microsoft.com/office/drawing/2010/main">
+            <mc:Choice Requires="a14">
               <p:sp>
                 <p:nvSpPr>
                   <p:cNvPr id="131" name="CuadroTexto 130">
@@ -5117,7 +5119,7 @@
                 </p:txBody>
               </p:sp>
             </mc:Choice>
-            <mc:Fallback>
+            <mc:Fallback xmlns="">
               <p:sp>
                 <p:nvSpPr>
                   <p:cNvPr id="131" name="CuadroTexto 130">
@@ -5162,8 +5164,8 @@
               </p:sp>
             </mc:Fallback>
           </mc:AlternateContent>
-          <mc:AlternateContent xmlns:mc="http://schemas.openxmlformats.org/markup-compatibility/2006">
-            <mc:Choice xmlns:a14="http://schemas.microsoft.com/office/drawing/2010/main" Requires="a14">
+          <mc:AlternateContent xmlns:mc="http://schemas.openxmlformats.org/markup-compatibility/2006" xmlns:a14="http://schemas.microsoft.com/office/drawing/2010/main">
+            <mc:Choice Requires="a14">
               <p:sp>
                 <p:nvSpPr>
                   <p:cNvPr id="132" name="CuadroTexto 131">
@@ -5236,7 +5238,7 @@
                 </p:txBody>
               </p:sp>
             </mc:Choice>
-            <mc:Fallback>
+            <mc:Fallback xmlns="">
               <p:sp>
                 <p:nvSpPr>
                   <p:cNvPr id="132" name="CuadroTexto 131">
@@ -5302,8 +5304,8 @@
               <a:chExt cx="2150713" cy="523917"/>
             </a:xfrm>
           </p:grpSpPr>
-          <mc:AlternateContent xmlns:mc="http://schemas.openxmlformats.org/markup-compatibility/2006">
-            <mc:Choice xmlns:a14="http://schemas.microsoft.com/office/drawing/2010/main" Requires="a14">
+          <mc:AlternateContent xmlns:mc="http://schemas.openxmlformats.org/markup-compatibility/2006" xmlns:a14="http://schemas.microsoft.com/office/drawing/2010/main">
+            <mc:Choice Requires="a14">
               <p:sp>
                 <p:nvSpPr>
                   <p:cNvPr id="134" name="CuadroTexto 133">
@@ -5332,6 +5334,7 @@
                   </a:bodyPr>
                   <a:lstStyle/>
                   <a:p>
+                    <a:pPr/>
                     <a14:m>
                       <m:oMathPara xmlns:m="http://schemas.openxmlformats.org/officeDocument/2006/math">
                         <m:oMathParaPr>
@@ -5375,7 +5378,7 @@
                 </p:txBody>
               </p:sp>
             </mc:Choice>
-            <mc:Fallback>
+            <mc:Fallback xmlns="">
               <p:sp>
                 <p:nvSpPr>
                   <p:cNvPr id="134" name="CuadroTexto 133">
@@ -5420,8 +5423,8 @@
               </p:sp>
             </mc:Fallback>
           </mc:AlternateContent>
-          <mc:AlternateContent xmlns:mc="http://schemas.openxmlformats.org/markup-compatibility/2006">
-            <mc:Choice xmlns:a14="http://schemas.microsoft.com/office/drawing/2010/main" Requires="a14">
+          <mc:AlternateContent xmlns:mc="http://schemas.openxmlformats.org/markup-compatibility/2006" xmlns:a14="http://schemas.microsoft.com/office/drawing/2010/main">
+            <mc:Choice Requires="a14">
               <p:sp>
                 <p:nvSpPr>
                   <p:cNvPr id="135" name="CuadroTexto 134">
@@ -5494,7 +5497,7 @@
                 </p:txBody>
               </p:sp>
             </mc:Choice>
-            <mc:Fallback>
+            <mc:Fallback xmlns="">
               <p:sp>
                 <p:nvSpPr>
                   <p:cNvPr id="135" name="CuadroTexto 134">
@@ -5539,8 +5542,8 @@
               </p:sp>
             </mc:Fallback>
           </mc:AlternateContent>
-          <mc:AlternateContent xmlns:mc="http://schemas.openxmlformats.org/markup-compatibility/2006">
-            <mc:Choice xmlns:a14="http://schemas.microsoft.com/office/drawing/2010/main" Requires="a14">
+          <mc:AlternateContent xmlns:mc="http://schemas.openxmlformats.org/markup-compatibility/2006" xmlns:a14="http://schemas.microsoft.com/office/drawing/2010/main">
+            <mc:Choice Requires="a14">
               <p:sp>
                 <p:nvSpPr>
                   <p:cNvPr id="136" name="CuadroTexto 135">
@@ -5613,7 +5616,7 @@
                 </p:txBody>
               </p:sp>
             </mc:Choice>
-            <mc:Fallback>
+            <mc:Fallback xmlns="">
               <p:sp>
                 <p:nvSpPr>
                   <p:cNvPr id="136" name="CuadroTexto 135">
@@ -5658,8 +5661,8 @@
               </p:sp>
             </mc:Fallback>
           </mc:AlternateContent>
-          <mc:AlternateContent xmlns:mc="http://schemas.openxmlformats.org/markup-compatibility/2006">
-            <mc:Choice xmlns:a14="http://schemas.microsoft.com/office/drawing/2010/main" Requires="a14">
+          <mc:AlternateContent xmlns:mc="http://schemas.openxmlformats.org/markup-compatibility/2006" xmlns:a14="http://schemas.microsoft.com/office/drawing/2010/main">
+            <mc:Choice Requires="a14">
               <p:sp>
                 <p:nvSpPr>
                   <p:cNvPr id="137" name="CuadroTexto 136">
@@ -5732,7 +5735,7 @@
                 </p:txBody>
               </p:sp>
             </mc:Choice>
-            <mc:Fallback>
+            <mc:Fallback xmlns="">
               <p:sp>
                 <p:nvSpPr>
                   <p:cNvPr id="137" name="CuadroTexto 136">
@@ -5777,8 +5780,8 @@
               </p:sp>
             </mc:Fallback>
           </mc:AlternateContent>
-          <mc:AlternateContent xmlns:mc="http://schemas.openxmlformats.org/markup-compatibility/2006">
-            <mc:Choice xmlns:a14="http://schemas.microsoft.com/office/drawing/2010/main" Requires="a14">
+          <mc:AlternateContent xmlns:mc="http://schemas.openxmlformats.org/markup-compatibility/2006" xmlns:a14="http://schemas.microsoft.com/office/drawing/2010/main">
+            <mc:Choice Requires="a14">
               <p:sp>
                 <p:nvSpPr>
                   <p:cNvPr id="138" name="CuadroTexto 137">
@@ -5851,7 +5854,7 @@
                 </p:txBody>
               </p:sp>
             </mc:Choice>
-            <mc:Fallback>
+            <mc:Fallback xmlns="">
               <p:sp>
                 <p:nvSpPr>
                   <p:cNvPr id="138" name="CuadroTexto 137">
@@ -5917,8 +5920,8 @@
               <a:chExt cx="2150713" cy="523917"/>
             </a:xfrm>
           </p:grpSpPr>
-          <mc:AlternateContent xmlns:mc="http://schemas.openxmlformats.org/markup-compatibility/2006">
-            <mc:Choice xmlns:a14="http://schemas.microsoft.com/office/drawing/2010/main" Requires="a14">
+          <mc:AlternateContent xmlns:mc="http://schemas.openxmlformats.org/markup-compatibility/2006" xmlns:a14="http://schemas.microsoft.com/office/drawing/2010/main">
+            <mc:Choice Requires="a14">
               <p:sp>
                 <p:nvSpPr>
                   <p:cNvPr id="140" name="CuadroTexto 139">
@@ -5947,6 +5950,7 @@
                   </a:bodyPr>
                   <a:lstStyle/>
                   <a:p>
+                    <a:pPr/>
                     <a14:m>
                       <m:oMathPara xmlns:m="http://schemas.openxmlformats.org/officeDocument/2006/math">
                         <m:oMathParaPr>
@@ -5990,7 +5994,7 @@
                 </p:txBody>
               </p:sp>
             </mc:Choice>
-            <mc:Fallback>
+            <mc:Fallback xmlns="">
               <p:sp>
                 <p:nvSpPr>
                   <p:cNvPr id="140" name="CuadroTexto 139">
@@ -6035,8 +6039,8 @@
               </p:sp>
             </mc:Fallback>
           </mc:AlternateContent>
-          <mc:AlternateContent xmlns:mc="http://schemas.openxmlformats.org/markup-compatibility/2006">
-            <mc:Choice xmlns:a14="http://schemas.microsoft.com/office/drawing/2010/main" Requires="a14">
+          <mc:AlternateContent xmlns:mc="http://schemas.openxmlformats.org/markup-compatibility/2006" xmlns:a14="http://schemas.microsoft.com/office/drawing/2010/main">
+            <mc:Choice Requires="a14">
               <p:sp>
                 <p:nvSpPr>
                   <p:cNvPr id="141" name="CuadroTexto 140">
@@ -6109,7 +6113,7 @@
                 </p:txBody>
               </p:sp>
             </mc:Choice>
-            <mc:Fallback>
+            <mc:Fallback xmlns="">
               <p:sp>
                 <p:nvSpPr>
                   <p:cNvPr id="141" name="CuadroTexto 140">
@@ -6154,8 +6158,8 @@
               </p:sp>
             </mc:Fallback>
           </mc:AlternateContent>
-          <mc:AlternateContent xmlns:mc="http://schemas.openxmlformats.org/markup-compatibility/2006">
-            <mc:Choice xmlns:a14="http://schemas.microsoft.com/office/drawing/2010/main" Requires="a14">
+          <mc:AlternateContent xmlns:mc="http://schemas.openxmlformats.org/markup-compatibility/2006" xmlns:a14="http://schemas.microsoft.com/office/drawing/2010/main">
+            <mc:Choice Requires="a14">
               <p:sp>
                 <p:nvSpPr>
                   <p:cNvPr id="142" name="CuadroTexto 141">
@@ -6228,7 +6232,7 @@
                 </p:txBody>
               </p:sp>
             </mc:Choice>
-            <mc:Fallback>
+            <mc:Fallback xmlns="">
               <p:sp>
                 <p:nvSpPr>
                   <p:cNvPr id="142" name="CuadroTexto 141">
@@ -6273,8 +6277,8 @@
               </p:sp>
             </mc:Fallback>
           </mc:AlternateContent>
-          <mc:AlternateContent xmlns:mc="http://schemas.openxmlformats.org/markup-compatibility/2006">
-            <mc:Choice xmlns:a14="http://schemas.microsoft.com/office/drawing/2010/main" Requires="a14">
+          <mc:AlternateContent xmlns:mc="http://schemas.openxmlformats.org/markup-compatibility/2006" xmlns:a14="http://schemas.microsoft.com/office/drawing/2010/main">
+            <mc:Choice Requires="a14">
               <p:sp>
                 <p:nvSpPr>
                   <p:cNvPr id="143" name="CuadroTexto 142">
@@ -6347,7 +6351,7 @@
                 </p:txBody>
               </p:sp>
             </mc:Choice>
-            <mc:Fallback>
+            <mc:Fallback xmlns="">
               <p:sp>
                 <p:nvSpPr>
                   <p:cNvPr id="143" name="CuadroTexto 142">
@@ -6392,8 +6396,8 @@
               </p:sp>
             </mc:Fallback>
           </mc:AlternateContent>
-          <mc:AlternateContent xmlns:mc="http://schemas.openxmlformats.org/markup-compatibility/2006">
-            <mc:Choice xmlns:a14="http://schemas.microsoft.com/office/drawing/2010/main" Requires="a14">
+          <mc:AlternateContent xmlns:mc="http://schemas.openxmlformats.org/markup-compatibility/2006" xmlns:a14="http://schemas.microsoft.com/office/drawing/2010/main">
+            <mc:Choice Requires="a14">
               <p:sp>
                 <p:nvSpPr>
                   <p:cNvPr id="144" name="CuadroTexto 143">
@@ -6466,7 +6470,7 @@
                 </p:txBody>
               </p:sp>
             </mc:Choice>
-            <mc:Fallback>
+            <mc:Fallback xmlns="">
               <p:sp>
                 <p:nvSpPr>
                   <p:cNvPr id="144" name="CuadroTexto 143">
@@ -9064,8 +9068,8 @@
         </p:nvSpPr>
         <p:spPr>
           <a:xfrm>
-            <a:off x="6767563" y="711603"/>
-            <a:ext cx="4036978" cy="646331"/>
+            <a:off x="6767562" y="711603"/>
+            <a:ext cx="4424693" cy="646331"/>
           </a:xfrm>
           <a:prstGeom prst="rect">
             <a:avLst/>
@@ -9083,20 +9087,12 @@
           <a:p>
             <a:pPr algn="ctr"/>
             <a:r>
-              <a:rPr lang="es-MX" sz="3600" b="1" dirty="0" err="1">
-                <a:latin typeface="Cause ExtraBold" pitchFamily="2" charset="0"/>
-                <a:ea typeface="Google Sans" pitchFamily="2" charset="0"/>
-                <a:cs typeface="Google Sans" pitchFamily="2" charset="0"/>
-              </a:rPr>
-              <a:t>Uniform</a:t>
-            </a:r>
-            <a:r>
               <a:rPr lang="es-MX" sz="3600" b="1" dirty="0">
                 <a:latin typeface="Cause ExtraBold" pitchFamily="2" charset="0"/>
                 <a:ea typeface="Google Sans" pitchFamily="2" charset="0"/>
                 <a:cs typeface="Google Sans" pitchFamily="2" charset="0"/>
               </a:rPr>
-              <a:t> </a:t>
+              <a:t>Random </a:t>
             </a:r>
             <a:r>
               <a:rPr lang="es-MX" sz="3600" b="1" dirty="0" err="1">
@@ -9104,7 +9100,7 @@
                 <a:ea typeface="Google Sans" pitchFamily="2" charset="0"/>
                 <a:cs typeface="Google Sans" pitchFamily="2" charset="0"/>
               </a:rPr>
-              <a:t>Mutation</a:t>
+              <a:t>Resetting</a:t>
             </a:r>
             <a:endParaRPr lang="es-MX" sz="3600" b="1" dirty="0">
               <a:latin typeface="Cause ExtraBold" pitchFamily="2" charset="0"/>
@@ -9640,7 +9636,7 @@
         </p:blipFill>
         <p:spPr>
           <a:xfrm>
-            <a:off x="6975526" y="4966910"/>
+            <a:off x="7233712" y="5023845"/>
             <a:ext cx="708774" cy="708774"/>
           </a:xfrm>
           <a:prstGeom prst="rect">
@@ -9662,8 +9658,8 @@
         </p:nvSpPr>
         <p:spPr>
           <a:xfrm>
-            <a:off x="7517098" y="5178177"/>
-            <a:ext cx="3083821" cy="400110"/>
+            <a:off x="7933011" y="5205512"/>
+            <a:ext cx="2545055" cy="400110"/>
           </a:xfrm>
           <a:prstGeom prst="rect">
             <a:avLst/>
@@ -10100,8 +10096,8 @@
               <a:chExt cx="306437" cy="4202541"/>
             </a:xfrm>
           </p:grpSpPr>
-          <mc:AlternateContent xmlns:mc="http://schemas.openxmlformats.org/markup-compatibility/2006">
-            <mc:Choice xmlns:a14="http://schemas.microsoft.com/office/drawing/2010/main" Requires="a14">
+          <mc:AlternateContent xmlns:mc="http://schemas.openxmlformats.org/markup-compatibility/2006" xmlns:a14="http://schemas.microsoft.com/office/drawing/2010/main">
+            <mc:Choice Requires="a14">
               <p:sp>
                 <p:nvSpPr>
                   <p:cNvPr id="26" name="CuadroTexto 25">
@@ -10194,7 +10190,7 @@
                 </p:txBody>
               </p:sp>
             </mc:Choice>
-            <mc:Fallback>
+            <mc:Fallback xmlns="">
               <p:sp>
                 <p:nvSpPr>
                   <p:cNvPr id="26" name="CuadroTexto 25">
@@ -10239,8 +10235,8 @@
               </p:sp>
             </mc:Fallback>
           </mc:AlternateContent>
-          <mc:AlternateContent xmlns:mc="http://schemas.openxmlformats.org/markup-compatibility/2006">
-            <mc:Choice xmlns:a14="http://schemas.microsoft.com/office/drawing/2010/main" Requires="a14">
+          <mc:AlternateContent xmlns:mc="http://schemas.openxmlformats.org/markup-compatibility/2006" xmlns:a14="http://schemas.microsoft.com/office/drawing/2010/main">
+            <mc:Choice Requires="a14">
               <p:sp>
                 <p:nvSpPr>
                   <p:cNvPr id="35" name="CuadroTexto 34">
@@ -10333,7 +10329,7 @@
                 </p:txBody>
               </p:sp>
             </mc:Choice>
-            <mc:Fallback>
+            <mc:Fallback xmlns="">
               <p:sp>
                 <p:nvSpPr>
                   <p:cNvPr id="35" name="CuadroTexto 34">
@@ -10378,8 +10374,8 @@
               </p:sp>
             </mc:Fallback>
           </mc:AlternateContent>
-          <mc:AlternateContent xmlns:mc="http://schemas.openxmlformats.org/markup-compatibility/2006">
-            <mc:Choice xmlns:a14="http://schemas.microsoft.com/office/drawing/2010/main" Requires="a14">
+          <mc:AlternateContent xmlns:mc="http://schemas.openxmlformats.org/markup-compatibility/2006" xmlns:a14="http://schemas.microsoft.com/office/drawing/2010/main">
+            <mc:Choice Requires="a14">
               <p:sp>
                 <p:nvSpPr>
                   <p:cNvPr id="38" name="CuadroTexto 37">
@@ -10472,7 +10468,7 @@
                 </p:txBody>
               </p:sp>
             </mc:Choice>
-            <mc:Fallback>
+            <mc:Fallback xmlns="">
               <p:sp>
                 <p:nvSpPr>
                   <p:cNvPr id="38" name="CuadroTexto 37">
@@ -10517,8 +10513,8 @@
               </p:sp>
             </mc:Fallback>
           </mc:AlternateContent>
-          <mc:AlternateContent xmlns:mc="http://schemas.openxmlformats.org/markup-compatibility/2006">
-            <mc:Choice xmlns:a14="http://schemas.microsoft.com/office/drawing/2010/main" Requires="a14">
+          <mc:AlternateContent xmlns:mc="http://schemas.openxmlformats.org/markup-compatibility/2006" xmlns:a14="http://schemas.microsoft.com/office/drawing/2010/main">
+            <mc:Choice Requires="a14">
               <p:sp>
                 <p:nvSpPr>
                   <p:cNvPr id="41" name="CuadroTexto 40">
@@ -10611,7 +10607,7 @@
                 </p:txBody>
               </p:sp>
             </mc:Choice>
-            <mc:Fallback>
+            <mc:Fallback xmlns="">
               <p:sp>
                 <p:nvSpPr>
                   <p:cNvPr id="41" name="CuadroTexto 40">
@@ -10656,8 +10652,8 @@
               </p:sp>
             </mc:Fallback>
           </mc:AlternateContent>
-          <mc:AlternateContent xmlns:mc="http://schemas.openxmlformats.org/markup-compatibility/2006">
-            <mc:Choice xmlns:a14="http://schemas.microsoft.com/office/drawing/2010/main" Requires="a14">
+          <mc:AlternateContent xmlns:mc="http://schemas.openxmlformats.org/markup-compatibility/2006" xmlns:a14="http://schemas.microsoft.com/office/drawing/2010/main">
+            <mc:Choice Requires="a14">
               <p:sp>
                 <p:nvSpPr>
                   <p:cNvPr id="43" name="CuadroTexto 42">
@@ -10750,7 +10746,7 @@
                 </p:txBody>
               </p:sp>
             </mc:Choice>
-            <mc:Fallback>
+            <mc:Fallback xmlns="">
               <p:sp>
                 <p:nvSpPr>
                   <p:cNvPr id="43" name="CuadroTexto 42">
@@ -10795,8 +10791,8 @@
               </p:sp>
             </mc:Fallback>
           </mc:AlternateContent>
-          <mc:AlternateContent xmlns:mc="http://schemas.openxmlformats.org/markup-compatibility/2006">
-            <mc:Choice xmlns:a14="http://schemas.microsoft.com/office/drawing/2010/main" Requires="a14">
+          <mc:AlternateContent xmlns:mc="http://schemas.openxmlformats.org/markup-compatibility/2006" xmlns:a14="http://schemas.microsoft.com/office/drawing/2010/main">
+            <mc:Choice Requires="a14">
               <p:sp>
                 <p:nvSpPr>
                   <p:cNvPr id="45" name="CuadroTexto 44">
@@ -10889,7 +10885,7 @@
                 </p:txBody>
               </p:sp>
             </mc:Choice>
-            <mc:Fallback>
+            <mc:Fallback xmlns="">
               <p:sp>
                 <p:nvSpPr>
                   <p:cNvPr id="45" name="CuadroTexto 44">
@@ -10934,8 +10930,8 @@
               </p:sp>
             </mc:Fallback>
           </mc:AlternateContent>
-          <mc:AlternateContent xmlns:mc="http://schemas.openxmlformats.org/markup-compatibility/2006">
-            <mc:Choice xmlns:a14="http://schemas.microsoft.com/office/drawing/2010/main" Requires="a14">
+          <mc:AlternateContent xmlns:mc="http://schemas.openxmlformats.org/markup-compatibility/2006" xmlns:a14="http://schemas.microsoft.com/office/drawing/2010/main">
+            <mc:Choice Requires="a14">
               <p:sp>
                 <p:nvSpPr>
                   <p:cNvPr id="47" name="CuadroTexto 46">
@@ -11028,7 +11024,7 @@
                 </p:txBody>
               </p:sp>
             </mc:Choice>
-            <mc:Fallback>
+            <mc:Fallback xmlns="">
               <p:sp>
                 <p:nvSpPr>
                   <p:cNvPr id="47" name="CuadroTexto 46">
@@ -11073,8 +11069,8 @@
               </p:sp>
             </mc:Fallback>
           </mc:AlternateContent>
-          <mc:AlternateContent xmlns:mc="http://schemas.openxmlformats.org/markup-compatibility/2006">
-            <mc:Choice xmlns:a14="http://schemas.microsoft.com/office/drawing/2010/main" Requires="a14">
+          <mc:AlternateContent xmlns:mc="http://schemas.openxmlformats.org/markup-compatibility/2006" xmlns:a14="http://schemas.microsoft.com/office/drawing/2010/main">
+            <mc:Choice Requires="a14">
               <p:sp>
                 <p:nvSpPr>
                   <p:cNvPr id="50" name="CuadroTexto 49">
@@ -11167,7 +11163,7 @@
                 </p:txBody>
               </p:sp>
             </mc:Choice>
-            <mc:Fallback>
+            <mc:Fallback xmlns="">
               <p:sp>
                 <p:nvSpPr>
                   <p:cNvPr id="50" name="CuadroTexto 49">
@@ -11233,8 +11229,8 @@
               <a:chExt cx="1477985" cy="461024"/>
             </a:xfrm>
           </p:grpSpPr>
-          <mc:AlternateContent xmlns:mc="http://schemas.openxmlformats.org/markup-compatibility/2006">
-            <mc:Choice xmlns:a14="http://schemas.microsoft.com/office/drawing/2010/main" Requires="a14">
+          <mc:AlternateContent xmlns:mc="http://schemas.openxmlformats.org/markup-compatibility/2006" xmlns:a14="http://schemas.microsoft.com/office/drawing/2010/main">
+            <mc:Choice Requires="a14">
               <p:sp>
                 <p:nvSpPr>
                   <p:cNvPr id="24" name="CuadroTexto 23">
@@ -11307,7 +11303,7 @@
                 </p:txBody>
               </p:sp>
             </mc:Choice>
-            <mc:Fallback>
+            <mc:Fallback xmlns="">
               <p:sp>
                 <p:nvSpPr>
                   <p:cNvPr id="24" name="CuadroTexto 23">
@@ -11957,6 +11953,55 @@
           </p:txBody>
         </p:sp>
       </p:grpSp>
+      <p:sp>
+        <p:nvSpPr>
+          <p:cNvPr id="3" name="CuadroTexto 2">
+            <a:extLst>
+              <a:ext uri="{FF2B5EF4-FFF2-40B4-BE49-F238E27FC236}">
+                <a16:creationId xmlns:a16="http://schemas.microsoft.com/office/drawing/2014/main" id="{0DFA4D88-0A2C-4F7A-307D-DE409762FB89}"/>
+              </a:ext>
+            </a:extLst>
+          </p:cNvPr>
+          <p:cNvSpPr txBox="1"/>
+          <p:nvPr/>
+        </p:nvSpPr>
+        <p:spPr>
+          <a:xfrm>
+            <a:off x="7772400" y="930803"/>
+            <a:ext cx="2036825" cy="619272"/>
+          </a:xfrm>
+          <a:prstGeom prst="rect">
+            <a:avLst/>
+          </a:prstGeom>
+          <a:noFill/>
+        </p:spPr>
+        <p:txBody>
+          <a:bodyPr wrap="square">
+            <a:spAutoFit/>
+          </a:bodyPr>
+          <a:lstStyle/>
+          <a:p>
+            <a:pPr>
+              <a:lnSpc>
+                <a:spcPct val="150000"/>
+              </a:lnSpc>
+            </a:pPr>
+            <a:r>
+              <a:rPr lang="en-US" sz="1200" dirty="0">
+                <a:latin typeface="Google Sans" pitchFamily="2" charset="0"/>
+                <a:ea typeface="Google Sans" pitchFamily="2" charset="0"/>
+                <a:cs typeface="Google Sans" pitchFamily="2" charset="0"/>
+              </a:rPr>
+              <a:t>probability of the best one winning = 0.8</a:t>
+            </a:r>
+            <a:endParaRPr lang="es-MX" sz="1200" dirty="0">
+              <a:latin typeface="Google Sans" pitchFamily="2" charset="0"/>
+              <a:ea typeface="Google Sans" pitchFamily="2" charset="0"/>
+              <a:cs typeface="Google Sans" pitchFamily="2" charset="0"/>
+            </a:endParaRPr>
+          </a:p>
+        </p:txBody>
+      </p:sp>
     </p:spTree>
     <p:extLst>
       <p:ext uri="{BB962C8B-B14F-4D97-AF65-F5344CB8AC3E}">
